--- a/resources/base logo.pptx
+++ b/resources/base logo.pptx
@@ -5,20 +5,21 @@
     <p:sldMasterId id="2147483648" r:id="rId1"/>
   </p:sldMasterIdLst>
   <p:notesMasterIdLst>
-    <p:notesMasterId r:id="rId13"/>
+    <p:notesMasterId r:id="rId14"/>
   </p:notesMasterIdLst>
   <p:sldIdLst>
     <p:sldId id="291" r:id="rId2"/>
-    <p:sldId id="286" r:id="rId3"/>
-    <p:sldId id="288" r:id="rId4"/>
-    <p:sldId id="289" r:id="rId5"/>
-    <p:sldId id="287" r:id="rId6"/>
-    <p:sldId id="278" r:id="rId7"/>
-    <p:sldId id="285" r:id="rId8"/>
-    <p:sldId id="281" r:id="rId9"/>
-    <p:sldId id="283" r:id="rId10"/>
-    <p:sldId id="284" r:id="rId11"/>
-    <p:sldId id="280" r:id="rId12"/>
+    <p:sldId id="292" r:id="rId3"/>
+    <p:sldId id="286" r:id="rId4"/>
+    <p:sldId id="288" r:id="rId5"/>
+    <p:sldId id="289" r:id="rId6"/>
+    <p:sldId id="287" r:id="rId7"/>
+    <p:sldId id="278" r:id="rId8"/>
+    <p:sldId id="285" r:id="rId9"/>
+    <p:sldId id="281" r:id="rId10"/>
+    <p:sldId id="283" r:id="rId11"/>
+    <p:sldId id="284" r:id="rId12"/>
+    <p:sldId id="280" r:id="rId13"/>
   </p:sldIdLst>
   <p:sldSz cx="12192000" cy="6858000"/>
   <p:notesSz cx="6858000" cy="9144000"/>
@@ -120,22 +121,27 @@
   <p:extLst>
     <p:ext uri="{EFAFB233-063F-42B5-8137-9DF3F51BA10A}">
       <p15:sldGuideLst xmlns:p15="http://schemas.microsoft.com/office/powerpoint/2012/main">
-        <p15:guide id="1" orient="horz" pos="2908" userDrawn="1">
+        <p15:guide id="1" orient="horz" pos="2364" userDrawn="1">
           <p15:clr>
             <a:srgbClr val="A4A3A4"/>
           </p15:clr>
         </p15:guide>
-        <p15:guide id="2" pos="2819" userDrawn="1">
+        <p15:guide id="3" pos="6743" userDrawn="1">
           <p15:clr>
             <a:srgbClr val="A4A3A4"/>
           </p15:clr>
         </p15:guide>
-        <p15:guide id="3" pos="5314" userDrawn="1">
+        <p15:guide id="4" pos="4248" userDrawn="1">
           <p15:clr>
             <a:srgbClr val="A4A3A4"/>
           </p15:clr>
         </p15:guide>
-        <p15:guide id="4" pos="4452" userDrawn="1">
+        <p15:guide id="5" pos="2910" userDrawn="1">
+          <p15:clr>
+            <a:srgbClr val="A4A3A4"/>
+          </p15:clr>
+        </p15:guide>
+        <p15:guide id="6" pos="6879" userDrawn="1">
           <p15:clr>
             <a:srgbClr val="A4A3A4"/>
           </p15:clr>
@@ -228,7 +234,7 @@
           <a:p>
             <a:fld id="{DC0890D7-75A3-4AFD-AFCE-7BC66DB681C5}" type="datetimeFigureOut">
               <a:rPr lang="en-150" smtClean="0"/>
-              <a:t>30/08/2024</a:t>
+              <a:t>28/01/2025</a:t>
             </a:fld>
             <a:endParaRPr lang="en-150"/>
           </a:p>
@@ -645,7 +651,7 @@
           <a:p>
             <a:fld id="{97A7BB66-1ADB-47C6-8EE2-F72BFA79F05A}" type="datetimeFigureOut">
               <a:rPr lang="en-150" smtClean="0"/>
-              <a:t>30/08/2024</a:t>
+              <a:t>28/01/2025</a:t>
             </a:fld>
             <a:endParaRPr lang="en-150"/>
           </a:p>
@@ -861,7 +867,7 @@
           <a:p>
             <a:fld id="{97A7BB66-1ADB-47C6-8EE2-F72BFA79F05A}" type="datetimeFigureOut">
               <a:rPr lang="en-150" smtClean="0"/>
-              <a:t>30/08/2024</a:t>
+              <a:t>28/01/2025</a:t>
             </a:fld>
             <a:endParaRPr lang="en-150"/>
           </a:p>
@@ -1071,7 +1077,7 @@
           <a:p>
             <a:fld id="{97A7BB66-1ADB-47C6-8EE2-F72BFA79F05A}" type="datetimeFigureOut">
               <a:rPr lang="en-150" smtClean="0"/>
-              <a:t>30/08/2024</a:t>
+              <a:t>28/01/2025</a:t>
             </a:fld>
             <a:endParaRPr lang="en-150"/>
           </a:p>
@@ -1271,7 +1277,7 @@
           <a:p>
             <a:fld id="{97A7BB66-1ADB-47C6-8EE2-F72BFA79F05A}" type="datetimeFigureOut">
               <a:rPr lang="en-150" smtClean="0"/>
-              <a:t>30/08/2024</a:t>
+              <a:t>28/01/2025</a:t>
             </a:fld>
             <a:endParaRPr lang="en-150"/>
           </a:p>
@@ -1563,7 +1569,7 @@
           <a:p>
             <a:fld id="{97A7BB66-1ADB-47C6-8EE2-F72BFA79F05A}" type="datetimeFigureOut">
               <a:rPr lang="en-150" smtClean="0"/>
-              <a:t>30/08/2024</a:t>
+              <a:t>28/01/2025</a:t>
             </a:fld>
             <a:endParaRPr lang="en-150"/>
           </a:p>
@@ -1831,7 +1837,7 @@
           <a:p>
             <a:fld id="{97A7BB66-1ADB-47C6-8EE2-F72BFA79F05A}" type="datetimeFigureOut">
               <a:rPr lang="en-150" smtClean="0"/>
-              <a:t>30/08/2024</a:t>
+              <a:t>28/01/2025</a:t>
             </a:fld>
             <a:endParaRPr lang="en-150"/>
           </a:p>
@@ -2246,7 +2252,7 @@
           <a:p>
             <a:fld id="{97A7BB66-1ADB-47C6-8EE2-F72BFA79F05A}" type="datetimeFigureOut">
               <a:rPr lang="en-150" smtClean="0"/>
-              <a:t>30/08/2024</a:t>
+              <a:t>28/01/2025</a:t>
             </a:fld>
             <a:endParaRPr lang="en-150"/>
           </a:p>
@@ -2388,7 +2394,7 @@
           <a:p>
             <a:fld id="{97A7BB66-1ADB-47C6-8EE2-F72BFA79F05A}" type="datetimeFigureOut">
               <a:rPr lang="en-150" smtClean="0"/>
-              <a:t>30/08/2024</a:t>
+              <a:t>28/01/2025</a:t>
             </a:fld>
             <a:endParaRPr lang="en-150"/>
           </a:p>
@@ -2501,7 +2507,7 @@
           <a:p>
             <a:fld id="{97A7BB66-1ADB-47C6-8EE2-F72BFA79F05A}" type="datetimeFigureOut">
               <a:rPr lang="en-150" smtClean="0"/>
-              <a:t>30/08/2024</a:t>
+              <a:t>28/01/2025</a:t>
             </a:fld>
             <a:endParaRPr lang="en-150"/>
           </a:p>
@@ -2814,7 +2820,7 @@
           <a:p>
             <a:fld id="{97A7BB66-1ADB-47C6-8EE2-F72BFA79F05A}" type="datetimeFigureOut">
               <a:rPr lang="en-150" smtClean="0"/>
-              <a:t>30/08/2024</a:t>
+              <a:t>28/01/2025</a:t>
             </a:fld>
             <a:endParaRPr lang="en-150"/>
           </a:p>
@@ -3103,7 +3109,7 @@
           <a:p>
             <a:fld id="{97A7BB66-1ADB-47C6-8EE2-F72BFA79F05A}" type="datetimeFigureOut">
               <a:rPr lang="en-150" smtClean="0"/>
-              <a:t>30/08/2024</a:t>
+              <a:t>28/01/2025</a:t>
             </a:fld>
             <a:endParaRPr lang="en-150"/>
           </a:p>
@@ -3345,7 +3351,7 @@
           <a:p>
             <a:fld id="{97A7BB66-1ADB-47C6-8EE2-F72BFA79F05A}" type="datetimeFigureOut">
               <a:rPr lang="en-150" smtClean="0"/>
-              <a:t>30/08/2024</a:t>
+              <a:t>28/01/2025</a:t>
             </a:fld>
             <a:endParaRPr lang="en-150"/>
           </a:p>
@@ -4596,6 +4602,262 @@
               <a:avLst/>
             </a:prstGeom>
             <a:solidFill>
+              <a:srgbClr val="FF6F61"/>
+            </a:solidFill>
+            <a:ln>
+              <a:noFill/>
+            </a:ln>
+          </p:spPr>
+          <p:style>
+            <a:lnRef idx="2">
+              <a:schemeClr val="accent1">
+                <a:shade val="15000"/>
+              </a:schemeClr>
+            </a:lnRef>
+            <a:fillRef idx="1">
+              <a:schemeClr val="accent1"/>
+            </a:fillRef>
+            <a:effectRef idx="0">
+              <a:schemeClr val="accent1"/>
+            </a:effectRef>
+            <a:fontRef idx="minor">
+              <a:schemeClr val="lt1"/>
+            </a:fontRef>
+          </p:style>
+          <p:txBody>
+            <a:bodyPr rtlCol="0" anchor="ctr"/>
+            <a:lstStyle/>
+            <a:p>
+              <a:pPr algn="ctr"/>
+              <a:endParaRPr lang="en-150"/>
+            </a:p>
+          </p:txBody>
+        </p:sp>
+      </p:grpSp>
+      <p:sp>
+        <p:nvSpPr>
+          <p:cNvPr id="2" name="TextBox 1">
+            <a:extLst>
+              <a:ext uri="{FF2B5EF4-FFF2-40B4-BE49-F238E27FC236}">
+                <a16:creationId xmlns:a16="http://schemas.microsoft.com/office/drawing/2014/main" id="{5DF106CF-89D1-049C-3FD4-88578CB84BF1}"/>
+              </a:ext>
+            </a:extLst>
+          </p:cNvPr>
+          <p:cNvSpPr txBox="1"/>
+          <p:nvPr/>
+        </p:nvSpPr>
+        <p:spPr>
+          <a:xfrm>
+            <a:off x="4344360" y="3218689"/>
+            <a:ext cx="4253087" cy="1200329"/>
+          </a:xfrm>
+          <a:prstGeom prst="rect">
+            <a:avLst/>
+          </a:prstGeom>
+          <a:noFill/>
+        </p:spPr>
+        <p:txBody>
+          <a:bodyPr wrap="none" rtlCol="0">
+            <a:spAutoFit/>
+          </a:bodyPr>
+          <a:lstStyle/>
+          <a:p>
+            <a:r>
+              <a:rPr lang="en-US" sz="7200" dirty="0">
+                <a:solidFill>
+                  <a:srgbClr val="1A1F71"/>
+                </a:solidFill>
+                <a:latin typeface="Aafia" pitchFamily="50" charset="0"/>
+              </a:rPr>
+              <a:t>LaDe</a:t>
+            </a:r>
+            <a:r>
+              <a:rPr lang="en-US" sz="7200" dirty="0">
+                <a:solidFill>
+                  <a:srgbClr val="FF6F61"/>
+                </a:solidFill>
+                <a:latin typeface="Aafia" pitchFamily="50" charset="0"/>
+              </a:rPr>
+              <a:t>RR</a:t>
+            </a:r>
+          </a:p>
+        </p:txBody>
+      </p:sp>
+    </p:spTree>
+    <p:extLst>
+      <p:ext uri="{BB962C8B-B14F-4D97-AF65-F5344CB8AC3E}">
+        <p14:creationId xmlns:p14="http://schemas.microsoft.com/office/powerpoint/2010/main" val="2663385008"/>
+      </p:ext>
+    </p:extLst>
+  </p:cSld>
+  <p:clrMapOvr>
+    <a:masterClrMapping/>
+  </p:clrMapOvr>
+</p:sld>
+</file>
+
+<file path=ppt/slides/slide11.xml><?xml version="1.0" encoding="utf-8"?>
+<p:sld xmlns:a="http://schemas.openxmlformats.org/drawingml/2006/main" xmlns:r="http://schemas.openxmlformats.org/officeDocument/2006/relationships" xmlns:p="http://schemas.openxmlformats.org/presentationml/2006/main">
+  <p:cSld>
+    <p:spTree>
+      <p:nvGrpSpPr>
+        <p:cNvPr id="1" name=""/>
+        <p:cNvGrpSpPr/>
+        <p:nvPr/>
+      </p:nvGrpSpPr>
+      <p:grpSpPr>
+        <a:xfrm>
+          <a:off x="0" y="0"/>
+          <a:ext cx="0" cy="0"/>
+          <a:chOff x="0" y="0"/>
+          <a:chExt cx="0" cy="0"/>
+        </a:xfrm>
+      </p:grpSpPr>
+      <p:grpSp>
+        <p:nvGrpSpPr>
+          <p:cNvPr id="9" name="Group 8">
+            <a:extLst>
+              <a:ext uri="{FF2B5EF4-FFF2-40B4-BE49-F238E27FC236}">
+                <a16:creationId xmlns:a16="http://schemas.microsoft.com/office/drawing/2014/main" id="{2590A2DE-16F5-44B0-79F7-D9518568AB64}"/>
+              </a:ext>
+            </a:extLst>
+          </p:cNvPr>
+          <p:cNvGrpSpPr/>
+          <p:nvPr/>
+        </p:nvGrpSpPr>
+        <p:grpSpPr>
+          <a:xfrm>
+            <a:off x="4468368" y="1625169"/>
+            <a:ext cx="3959748" cy="1566088"/>
+            <a:chOff x="4468368" y="1563624"/>
+            <a:chExt cx="4531517" cy="1792224"/>
+          </a:xfrm>
+        </p:grpSpPr>
+        <p:sp>
+          <p:nvSpPr>
+            <p:cNvPr id="6" name="Rectangle 5">
+              <a:extLst>
+                <a:ext uri="{FF2B5EF4-FFF2-40B4-BE49-F238E27FC236}">
+                  <a16:creationId xmlns:a16="http://schemas.microsoft.com/office/drawing/2014/main" id="{011E5DD6-E9CE-0E04-DAAC-92581C64AEF3}"/>
+                </a:ext>
+              </a:extLst>
+            </p:cNvPr>
+            <p:cNvSpPr/>
+            <p:nvPr/>
+          </p:nvSpPr>
+          <p:spPr>
+            <a:xfrm>
+              <a:off x="4468368" y="2990088"/>
+              <a:ext cx="1627632" cy="365760"/>
+            </a:xfrm>
+            <a:prstGeom prst="rect">
+              <a:avLst/>
+            </a:prstGeom>
+            <a:solidFill>
+              <a:srgbClr val="1A1F71"/>
+            </a:solidFill>
+            <a:ln>
+              <a:noFill/>
+            </a:ln>
+          </p:spPr>
+          <p:style>
+            <a:lnRef idx="2">
+              <a:schemeClr val="accent1">
+                <a:shade val="15000"/>
+              </a:schemeClr>
+            </a:lnRef>
+            <a:fillRef idx="1">
+              <a:schemeClr val="accent1"/>
+            </a:fillRef>
+            <a:effectRef idx="0">
+              <a:schemeClr val="accent1"/>
+            </a:effectRef>
+            <a:fontRef idx="minor">
+              <a:schemeClr val="lt1"/>
+            </a:fontRef>
+          </p:style>
+          <p:txBody>
+            <a:bodyPr rtlCol="0" anchor="ctr"/>
+            <a:lstStyle/>
+            <a:p>
+              <a:pPr algn="ctr"/>
+              <a:endParaRPr lang="en-150"/>
+            </a:p>
+          </p:txBody>
+        </p:sp>
+        <p:sp>
+          <p:nvSpPr>
+            <p:cNvPr id="7" name="Rectangle 6">
+              <a:extLst>
+                <a:ext uri="{FF2B5EF4-FFF2-40B4-BE49-F238E27FC236}">
+                  <a16:creationId xmlns:a16="http://schemas.microsoft.com/office/drawing/2014/main" id="{4E011A50-3FA0-A8E8-8DF5-1CBB2DF4C4FE}"/>
+                </a:ext>
+              </a:extLst>
+            </p:cNvPr>
+            <p:cNvSpPr/>
+            <p:nvPr/>
+          </p:nvSpPr>
+          <p:spPr>
+            <a:xfrm>
+              <a:off x="5920312" y="2276856"/>
+              <a:ext cx="1627632" cy="365760"/>
+            </a:xfrm>
+            <a:prstGeom prst="rect">
+              <a:avLst/>
+            </a:prstGeom>
+            <a:solidFill>
+              <a:srgbClr val="1A1F71"/>
+            </a:solidFill>
+            <a:ln>
+              <a:noFill/>
+            </a:ln>
+          </p:spPr>
+          <p:style>
+            <a:lnRef idx="2">
+              <a:schemeClr val="accent1">
+                <a:shade val="15000"/>
+              </a:schemeClr>
+            </a:lnRef>
+            <a:fillRef idx="1">
+              <a:schemeClr val="accent1"/>
+            </a:fillRef>
+            <a:effectRef idx="0">
+              <a:schemeClr val="accent1"/>
+            </a:effectRef>
+            <a:fontRef idx="minor">
+              <a:schemeClr val="lt1"/>
+            </a:fontRef>
+          </p:style>
+          <p:txBody>
+            <a:bodyPr rtlCol="0" anchor="ctr"/>
+            <a:lstStyle/>
+            <a:p>
+              <a:pPr algn="ctr"/>
+              <a:endParaRPr lang="en-150"/>
+            </a:p>
+          </p:txBody>
+        </p:sp>
+        <p:sp>
+          <p:nvSpPr>
+            <p:cNvPr id="8" name="Rectangle 7">
+              <a:extLst>
+                <a:ext uri="{FF2B5EF4-FFF2-40B4-BE49-F238E27FC236}">
+                  <a16:creationId xmlns:a16="http://schemas.microsoft.com/office/drawing/2014/main" id="{78B4BDD1-236D-438B-09EB-97CA895C3300}"/>
+                </a:ext>
+              </a:extLst>
+            </p:cNvPr>
+            <p:cNvSpPr/>
+            <p:nvPr/>
+          </p:nvSpPr>
+          <p:spPr>
+            <a:xfrm>
+              <a:off x="7372256" y="1563624"/>
+              <a:ext cx="1627629" cy="365760"/>
+            </a:xfrm>
+            <a:prstGeom prst="rect">
+              <a:avLst/>
+            </a:prstGeom>
+            <a:solidFill>
               <a:srgbClr val="FFD700"/>
             </a:solidFill>
             <a:ln>
@@ -4690,7 +4952,7 @@
 </p:sld>
 </file>
 
-<file path=ppt/slides/slide11.xml><?xml version="1.0" encoding="utf-8"?>
+<file path=ppt/slides/slide12.xml><?xml version="1.0" encoding="utf-8"?>
 <p:sld xmlns:a="http://schemas.openxmlformats.org/drawingml/2006/main" xmlns:r="http://schemas.openxmlformats.org/officeDocument/2006/relationships" xmlns:p="http://schemas.openxmlformats.org/presentationml/2006/main">
   <p:cSld>
     <p:spTree>
@@ -4952,6 +5214,382 @@
   <p:cSld>
     <p:spTree>
       <p:nvGrpSpPr>
+        <p:cNvPr id="1" name="">
+          <a:extLst>
+            <a:ext uri="{FF2B5EF4-FFF2-40B4-BE49-F238E27FC236}">
+              <a16:creationId xmlns:a16="http://schemas.microsoft.com/office/drawing/2014/main" id="{17A2AECE-803C-C14D-92EA-045167590D42}"/>
+            </a:ext>
+          </a:extLst>
+        </p:cNvPr>
+        <p:cNvGrpSpPr/>
+        <p:nvPr/>
+      </p:nvGrpSpPr>
+      <p:grpSpPr>
+        <a:xfrm>
+          <a:off x="0" y="0"/>
+          <a:ext cx="0" cy="0"/>
+          <a:chOff x="0" y="0"/>
+          <a:chExt cx="0" cy="0"/>
+        </a:xfrm>
+      </p:grpSpPr>
+      <p:sp>
+        <p:nvSpPr>
+          <p:cNvPr id="12" name="Rectangle 11">
+            <a:extLst>
+              <a:ext uri="{FF2B5EF4-FFF2-40B4-BE49-F238E27FC236}">
+                <a16:creationId xmlns:a16="http://schemas.microsoft.com/office/drawing/2014/main" id="{CC1452E2-4D60-D378-BB0A-32DCEAC90159}"/>
+              </a:ext>
+            </a:extLst>
+          </p:cNvPr>
+          <p:cNvSpPr/>
+          <p:nvPr/>
+        </p:nvSpPr>
+        <p:spPr>
+          <a:xfrm>
+            <a:off x="6734175" y="2759041"/>
+            <a:ext cx="1223963" cy="149432"/>
+          </a:xfrm>
+          <a:prstGeom prst="rect">
+            <a:avLst/>
+          </a:prstGeom>
+          <a:solidFill>
+            <a:srgbClr val="1A1F71"/>
+          </a:solidFill>
+          <a:ln w="3175">
+            <a:noFill/>
+          </a:ln>
+          <a:effectLst/>
+          <a:scene3d>
+            <a:camera prst="orthographicFront"/>
+            <a:lightRig rig="threePt" dir="t"/>
+          </a:scene3d>
+          <a:sp3d>
+            <a:bevelT w="38100" h="38100"/>
+          </a:sp3d>
+        </p:spPr>
+        <p:style>
+          <a:lnRef idx="2">
+            <a:schemeClr val="accent1">
+              <a:shade val="15000"/>
+            </a:schemeClr>
+          </a:lnRef>
+          <a:fillRef idx="1">
+            <a:schemeClr val="accent1"/>
+          </a:fillRef>
+          <a:effectRef idx="0">
+            <a:schemeClr val="accent1"/>
+          </a:effectRef>
+          <a:fontRef idx="minor">
+            <a:schemeClr val="lt1"/>
+          </a:fontRef>
+        </p:style>
+        <p:txBody>
+          <a:bodyPr rtlCol="0" anchor="ctr"/>
+          <a:lstStyle/>
+          <a:p>
+            <a:pPr algn="ctr"/>
+            <a:endParaRPr lang="en-150">
+              <a:solidFill>
+                <a:srgbClr val="1A1F71"/>
+              </a:solidFill>
+            </a:endParaRPr>
+          </a:p>
+        </p:txBody>
+      </p:sp>
+      <p:sp>
+        <p:nvSpPr>
+          <p:cNvPr id="13" name="Rectangle 12">
+            <a:extLst>
+              <a:ext uri="{FF2B5EF4-FFF2-40B4-BE49-F238E27FC236}">
+                <a16:creationId xmlns:a16="http://schemas.microsoft.com/office/drawing/2014/main" id="{51D456FA-1BB7-2DC0-1C94-925D5EB7A450}"/>
+              </a:ext>
+            </a:extLst>
+          </p:cNvPr>
+          <p:cNvSpPr/>
+          <p:nvPr/>
+        </p:nvSpPr>
+        <p:spPr>
+          <a:xfrm>
+            <a:off x="7958138" y="2601989"/>
+            <a:ext cx="1368425" cy="149432"/>
+          </a:xfrm>
+          <a:prstGeom prst="rect">
+            <a:avLst/>
+          </a:prstGeom>
+          <a:solidFill>
+            <a:srgbClr val="1A1F71"/>
+          </a:solidFill>
+          <a:ln w="3175">
+            <a:noFill/>
+          </a:ln>
+          <a:effectLst/>
+          <a:scene3d>
+            <a:camera prst="orthographicFront"/>
+            <a:lightRig rig="threePt" dir="t"/>
+          </a:scene3d>
+          <a:sp3d>
+            <a:bevelT w="38100" h="38100"/>
+          </a:sp3d>
+        </p:spPr>
+        <p:style>
+          <a:lnRef idx="2">
+            <a:schemeClr val="accent1">
+              <a:shade val="15000"/>
+            </a:schemeClr>
+          </a:lnRef>
+          <a:fillRef idx="1">
+            <a:schemeClr val="accent1"/>
+          </a:fillRef>
+          <a:effectRef idx="0">
+            <a:schemeClr val="accent1"/>
+          </a:effectRef>
+          <a:fontRef idx="minor">
+            <a:schemeClr val="lt1"/>
+          </a:fontRef>
+        </p:style>
+        <p:txBody>
+          <a:bodyPr rtlCol="0" anchor="ctr"/>
+          <a:lstStyle/>
+          <a:p>
+            <a:pPr algn="ctr"/>
+            <a:endParaRPr lang="en-150">
+              <a:solidFill>
+                <a:srgbClr val="1A1F71"/>
+              </a:solidFill>
+            </a:endParaRPr>
+          </a:p>
+        </p:txBody>
+      </p:sp>
+      <p:sp>
+        <p:nvSpPr>
+          <p:cNvPr id="14" name="Rectangle 13">
+            <a:extLst>
+              <a:ext uri="{FF2B5EF4-FFF2-40B4-BE49-F238E27FC236}">
+                <a16:creationId xmlns:a16="http://schemas.microsoft.com/office/drawing/2014/main" id="{D3BE7271-8349-F22F-6698-DE676C5590AF}"/>
+              </a:ext>
+            </a:extLst>
+          </p:cNvPr>
+          <p:cNvSpPr/>
+          <p:nvPr/>
+        </p:nvSpPr>
+        <p:spPr>
+          <a:xfrm>
+            <a:off x="9326564" y="2444937"/>
+            <a:ext cx="1377950" cy="149432"/>
+          </a:xfrm>
+          <a:prstGeom prst="rect">
+            <a:avLst/>
+          </a:prstGeom>
+          <a:gradFill flip="none" rotWithShape="1">
+            <a:gsLst>
+              <a:gs pos="0">
+                <a:srgbClr val="FFD700"/>
+              </a:gs>
+              <a:gs pos="78000">
+                <a:srgbClr val="FFD700"/>
+              </a:gs>
+              <a:gs pos="100000">
+                <a:schemeClr val="bg1"/>
+              </a:gs>
+            </a:gsLst>
+            <a:lin ang="18900000" scaled="1"/>
+            <a:tileRect/>
+          </a:gradFill>
+          <a:ln w="3175">
+            <a:noFill/>
+          </a:ln>
+          <a:effectLst/>
+          <a:scene3d>
+            <a:camera prst="orthographicFront"/>
+            <a:lightRig rig="threePt" dir="t"/>
+          </a:scene3d>
+          <a:sp3d>
+            <a:bevelT w="38100" h="38100"/>
+          </a:sp3d>
+        </p:spPr>
+        <p:style>
+          <a:lnRef idx="2">
+            <a:schemeClr val="accent1">
+              <a:shade val="15000"/>
+            </a:schemeClr>
+          </a:lnRef>
+          <a:fillRef idx="1">
+            <a:schemeClr val="accent1"/>
+          </a:fillRef>
+          <a:effectRef idx="0">
+            <a:schemeClr val="accent1"/>
+          </a:effectRef>
+          <a:fontRef idx="minor">
+            <a:schemeClr val="lt1"/>
+          </a:fontRef>
+        </p:style>
+        <p:txBody>
+          <a:bodyPr rtlCol="0" anchor="ctr"/>
+          <a:lstStyle/>
+          <a:p>
+            <a:pPr algn="ctr"/>
+            <a:endParaRPr lang="en-150"/>
+          </a:p>
+        </p:txBody>
+      </p:sp>
+      <p:sp>
+        <p:nvSpPr>
+          <p:cNvPr id="15" name="TextBox 14">
+            <a:extLst>
+              <a:ext uri="{FF2B5EF4-FFF2-40B4-BE49-F238E27FC236}">
+                <a16:creationId xmlns:a16="http://schemas.microsoft.com/office/drawing/2014/main" id="{3505A1EF-63A0-4328-4BA7-163C3DDE54F0}"/>
+              </a:ext>
+            </a:extLst>
+          </p:cNvPr>
+          <p:cNvSpPr txBox="1"/>
+          <p:nvPr/>
+        </p:nvSpPr>
+        <p:spPr>
+          <a:xfrm>
+            <a:off x="6606889" y="2855133"/>
+            <a:ext cx="4253087" cy="1200329"/>
+          </a:xfrm>
+          <a:prstGeom prst="rect">
+            <a:avLst/>
+          </a:prstGeom>
+          <a:noFill/>
+          <a:ln>
+            <a:noFill/>
+          </a:ln>
+          <a:effectLst/>
+        </p:spPr>
+        <p:txBody>
+          <a:bodyPr wrap="none" rtlCol="0">
+            <a:spAutoFit/>
+            <a:scene3d>
+              <a:camera prst="orthographicFront"/>
+              <a:lightRig rig="threePt" dir="t"/>
+            </a:scene3d>
+            <a:sp3d extrusionH="38100">
+              <a:bevelT w="38100" h="38100"/>
+            </a:sp3d>
+          </a:bodyPr>
+          <a:lstStyle/>
+          <a:p>
+            <a:r>
+              <a:rPr lang="en-US" sz="7200" dirty="0">
+                <a:ln w="3175">
+                  <a:noFill/>
+                </a:ln>
+                <a:solidFill>
+                  <a:srgbClr val="1A1F71"/>
+                </a:solidFill>
+                <a:latin typeface="Aafia" pitchFamily="50" charset="0"/>
+              </a:rPr>
+              <a:t>LaDe</a:t>
+            </a:r>
+            <a:r>
+              <a:rPr lang="en-US" sz="7200" dirty="0">
+                <a:ln w="3175">
+                  <a:noFill/>
+                </a:ln>
+                <a:gradFill flip="none" rotWithShape="1">
+                  <a:gsLst>
+                    <a:gs pos="80000">
+                      <a:srgbClr val="FFD700"/>
+                    </a:gs>
+                    <a:gs pos="0">
+                      <a:srgbClr val="FFD700"/>
+                    </a:gs>
+                    <a:gs pos="100000">
+                      <a:schemeClr val="bg1"/>
+                    </a:gs>
+                  </a:gsLst>
+                  <a:lin ang="18900000" scaled="1"/>
+                  <a:tileRect/>
+                </a:gradFill>
+                <a:latin typeface="Aafia" pitchFamily="50" charset="0"/>
+              </a:rPr>
+              <a:t>RR</a:t>
+            </a:r>
+          </a:p>
+        </p:txBody>
+      </p:sp>
+      <p:sp>
+        <p:nvSpPr>
+          <p:cNvPr id="19" name="TextBox 18">
+            <a:extLst>
+              <a:ext uri="{FF2B5EF4-FFF2-40B4-BE49-F238E27FC236}">
+                <a16:creationId xmlns:a16="http://schemas.microsoft.com/office/drawing/2014/main" id="{DC54A8A1-F903-CEBA-6CFE-33F719E328FD}"/>
+              </a:ext>
+            </a:extLst>
+          </p:cNvPr>
+          <p:cNvSpPr txBox="1"/>
+          <p:nvPr/>
+        </p:nvSpPr>
+        <p:spPr>
+          <a:xfrm>
+            <a:off x="6713538" y="3578479"/>
+            <a:ext cx="4411662" cy="830997"/>
+          </a:xfrm>
+          <a:prstGeom prst="rect">
+            <a:avLst/>
+          </a:prstGeom>
+          <a:noFill/>
+          <a:ln>
+            <a:noFill/>
+          </a:ln>
+          <a:effectLst>
+            <a:outerShdw blurRad="44450" dist="27940" dir="5400000" algn="ctr">
+              <a:srgbClr val="000000">
+                <a:alpha val="32000"/>
+              </a:srgbClr>
+            </a:outerShdw>
+          </a:effectLst>
+          <a:scene3d>
+            <a:camera prst="orthographicFront">
+              <a:rot lat="0" lon="0" rev="0"/>
+            </a:camera>
+            <a:lightRig rig="balanced" dir="t">
+              <a:rot lat="0" lon="0" rev="8700000"/>
+            </a:lightRig>
+          </a:scene3d>
+          <a:sp3d>
+            <a:bevelT w="190500" h="38100"/>
+          </a:sp3d>
+        </p:spPr>
+        <p:txBody>
+          <a:bodyPr wrap="square" lIns="0" tIns="0" rIns="0" bIns="0" rtlCol="0">
+            <a:spAutoFit/>
+          </a:bodyPr>
+          <a:lstStyle/>
+          <a:p>
+            <a:pPr algn="just"/>
+            <a:r>
+              <a:rPr lang="en-US" sz="5400" b="1" spc="780" dirty="0">
+                <a:solidFill>
+                  <a:srgbClr val="97258F"/>
+                </a:solidFill>
+                <a:latin typeface="Engravers MT" panose="02090707080505020304" pitchFamily="18" charset="0"/>
+              </a:rPr>
+              <a:t>Engine</a:t>
+            </a:r>
+          </a:p>
+        </p:txBody>
+      </p:sp>
+    </p:spTree>
+    <p:extLst>
+      <p:ext uri="{BB962C8B-B14F-4D97-AF65-F5344CB8AC3E}">
+        <p14:creationId xmlns:p14="http://schemas.microsoft.com/office/powerpoint/2010/main" val="1047741798"/>
+      </p:ext>
+    </p:extLst>
+  </p:cSld>
+  <p:clrMapOvr>
+    <a:masterClrMapping/>
+  </p:clrMapOvr>
+</p:sld>
+</file>
+
+<file path=ppt/slides/slide3.xml><?xml version="1.0" encoding="utf-8"?>
+<p:sld xmlns:a="http://schemas.openxmlformats.org/drawingml/2006/main" xmlns:r="http://schemas.openxmlformats.org/officeDocument/2006/relationships" xmlns:p="http://schemas.openxmlformats.org/presentationml/2006/main">
+  <p:cSld>
+    <p:spTree>
+      <p:nvGrpSpPr>
         <p:cNvPr id="1" name=""/>
         <p:cNvGrpSpPr/>
         <p:nvPr/>
@@ -5283,7 +5921,7 @@
 </p:sld>
 </file>
 
-<file path=ppt/slides/slide3.xml><?xml version="1.0" encoding="utf-8"?>
+<file path=ppt/slides/slide4.xml><?xml version="1.0" encoding="utf-8"?>
 <p:sld xmlns:a="http://schemas.openxmlformats.org/drawingml/2006/main" xmlns:r="http://schemas.openxmlformats.org/officeDocument/2006/relationships" xmlns:p="http://schemas.openxmlformats.org/presentationml/2006/main">
   <p:cSld>
     <p:spTree>
@@ -5621,7 +6259,7 @@
 </p:sld>
 </file>
 
-<file path=ppt/slides/slide4.xml><?xml version="1.0" encoding="utf-8"?>
+<file path=ppt/slides/slide5.xml><?xml version="1.0" encoding="utf-8"?>
 <p:sld xmlns:a="http://schemas.openxmlformats.org/drawingml/2006/main" xmlns:r="http://schemas.openxmlformats.org/officeDocument/2006/relationships" xmlns:p="http://schemas.openxmlformats.org/presentationml/2006/main">
   <p:cSld>
     <p:spTree>
@@ -5901,7 +6539,7 @@
 </p:sld>
 </file>
 
-<file path=ppt/slides/slide5.xml><?xml version="1.0" encoding="utf-8"?>
+<file path=ppt/slides/slide6.xml><?xml version="1.0" encoding="utf-8"?>
 <p:sld xmlns:a="http://schemas.openxmlformats.org/drawingml/2006/main" xmlns:r="http://schemas.openxmlformats.org/officeDocument/2006/relationships" xmlns:p="http://schemas.openxmlformats.org/presentationml/2006/main">
   <p:cSld>
     <p:spTree>
@@ -6173,7 +6811,7 @@
 </p:sld>
 </file>
 
-<file path=ppt/slides/slide6.xml><?xml version="1.0" encoding="utf-8"?>
+<file path=ppt/slides/slide7.xml><?xml version="1.0" encoding="utf-8"?>
 <p:sld xmlns:a="http://schemas.openxmlformats.org/drawingml/2006/main" xmlns:r="http://schemas.openxmlformats.org/officeDocument/2006/relationships" xmlns:p="http://schemas.openxmlformats.org/presentationml/2006/main">
   <p:cSld>
     <p:spTree>
@@ -6423,7 +7061,7 @@
 </p:sld>
 </file>
 
-<file path=ppt/slides/slide7.xml><?xml version="1.0" encoding="utf-8"?>
+<file path=ppt/slides/slide8.xml><?xml version="1.0" encoding="utf-8"?>
 <p:sld xmlns:a="http://schemas.openxmlformats.org/drawingml/2006/main" xmlns:r="http://schemas.openxmlformats.org/officeDocument/2006/relationships" xmlns:p="http://schemas.openxmlformats.org/presentationml/2006/main">
   <p:cSld>
     <p:spTree>
@@ -6857,7 +7495,7 @@
 </p:sld>
 </file>
 
-<file path=ppt/slides/slide8.xml><?xml version="1.0" encoding="utf-8"?>
+<file path=ppt/slides/slide9.xml><?xml version="1.0" encoding="utf-8"?>
 <p:sld xmlns:a="http://schemas.openxmlformats.org/drawingml/2006/main" xmlns:r="http://schemas.openxmlformats.org/officeDocument/2006/relationships" xmlns:p="http://schemas.openxmlformats.org/presentationml/2006/main">
   <p:cSld>
     <p:spTree>
@@ -7104,262 +7742,6 @@
     <p:extLst>
       <p:ext uri="{BB962C8B-B14F-4D97-AF65-F5344CB8AC3E}">
         <p14:creationId xmlns:p14="http://schemas.microsoft.com/office/powerpoint/2010/main" val="3677000309"/>
-      </p:ext>
-    </p:extLst>
-  </p:cSld>
-  <p:clrMapOvr>
-    <a:masterClrMapping/>
-  </p:clrMapOvr>
-</p:sld>
-</file>
-
-<file path=ppt/slides/slide9.xml><?xml version="1.0" encoding="utf-8"?>
-<p:sld xmlns:a="http://schemas.openxmlformats.org/drawingml/2006/main" xmlns:r="http://schemas.openxmlformats.org/officeDocument/2006/relationships" xmlns:p="http://schemas.openxmlformats.org/presentationml/2006/main">
-  <p:cSld>
-    <p:spTree>
-      <p:nvGrpSpPr>
-        <p:cNvPr id="1" name=""/>
-        <p:cNvGrpSpPr/>
-        <p:nvPr/>
-      </p:nvGrpSpPr>
-      <p:grpSpPr>
-        <a:xfrm>
-          <a:off x="0" y="0"/>
-          <a:ext cx="0" cy="0"/>
-          <a:chOff x="0" y="0"/>
-          <a:chExt cx="0" cy="0"/>
-        </a:xfrm>
-      </p:grpSpPr>
-      <p:grpSp>
-        <p:nvGrpSpPr>
-          <p:cNvPr id="9" name="Group 8">
-            <a:extLst>
-              <a:ext uri="{FF2B5EF4-FFF2-40B4-BE49-F238E27FC236}">
-                <a16:creationId xmlns:a16="http://schemas.microsoft.com/office/drawing/2014/main" id="{2590A2DE-16F5-44B0-79F7-D9518568AB64}"/>
-              </a:ext>
-            </a:extLst>
-          </p:cNvPr>
-          <p:cNvGrpSpPr/>
-          <p:nvPr/>
-        </p:nvGrpSpPr>
-        <p:grpSpPr>
-          <a:xfrm>
-            <a:off x="4468368" y="1625169"/>
-            <a:ext cx="3959748" cy="1566088"/>
-            <a:chOff x="4468368" y="1563624"/>
-            <a:chExt cx="4531517" cy="1792224"/>
-          </a:xfrm>
-        </p:grpSpPr>
-        <p:sp>
-          <p:nvSpPr>
-            <p:cNvPr id="6" name="Rectangle 5">
-              <a:extLst>
-                <a:ext uri="{FF2B5EF4-FFF2-40B4-BE49-F238E27FC236}">
-                  <a16:creationId xmlns:a16="http://schemas.microsoft.com/office/drawing/2014/main" id="{011E5DD6-E9CE-0E04-DAAC-92581C64AEF3}"/>
-                </a:ext>
-              </a:extLst>
-            </p:cNvPr>
-            <p:cNvSpPr/>
-            <p:nvPr/>
-          </p:nvSpPr>
-          <p:spPr>
-            <a:xfrm>
-              <a:off x="4468368" y="2990088"/>
-              <a:ext cx="1627632" cy="365760"/>
-            </a:xfrm>
-            <a:prstGeom prst="rect">
-              <a:avLst/>
-            </a:prstGeom>
-            <a:solidFill>
-              <a:srgbClr val="1A1F71"/>
-            </a:solidFill>
-            <a:ln>
-              <a:noFill/>
-            </a:ln>
-          </p:spPr>
-          <p:style>
-            <a:lnRef idx="2">
-              <a:schemeClr val="accent1">
-                <a:shade val="15000"/>
-              </a:schemeClr>
-            </a:lnRef>
-            <a:fillRef idx="1">
-              <a:schemeClr val="accent1"/>
-            </a:fillRef>
-            <a:effectRef idx="0">
-              <a:schemeClr val="accent1"/>
-            </a:effectRef>
-            <a:fontRef idx="minor">
-              <a:schemeClr val="lt1"/>
-            </a:fontRef>
-          </p:style>
-          <p:txBody>
-            <a:bodyPr rtlCol="0" anchor="ctr"/>
-            <a:lstStyle/>
-            <a:p>
-              <a:pPr algn="ctr"/>
-              <a:endParaRPr lang="en-150"/>
-            </a:p>
-          </p:txBody>
-        </p:sp>
-        <p:sp>
-          <p:nvSpPr>
-            <p:cNvPr id="7" name="Rectangle 6">
-              <a:extLst>
-                <a:ext uri="{FF2B5EF4-FFF2-40B4-BE49-F238E27FC236}">
-                  <a16:creationId xmlns:a16="http://schemas.microsoft.com/office/drawing/2014/main" id="{4E011A50-3FA0-A8E8-8DF5-1CBB2DF4C4FE}"/>
-                </a:ext>
-              </a:extLst>
-            </p:cNvPr>
-            <p:cNvSpPr/>
-            <p:nvPr/>
-          </p:nvSpPr>
-          <p:spPr>
-            <a:xfrm>
-              <a:off x="5920312" y="2276856"/>
-              <a:ext cx="1627632" cy="365760"/>
-            </a:xfrm>
-            <a:prstGeom prst="rect">
-              <a:avLst/>
-            </a:prstGeom>
-            <a:solidFill>
-              <a:srgbClr val="1A1F71"/>
-            </a:solidFill>
-            <a:ln>
-              <a:noFill/>
-            </a:ln>
-          </p:spPr>
-          <p:style>
-            <a:lnRef idx="2">
-              <a:schemeClr val="accent1">
-                <a:shade val="15000"/>
-              </a:schemeClr>
-            </a:lnRef>
-            <a:fillRef idx="1">
-              <a:schemeClr val="accent1"/>
-            </a:fillRef>
-            <a:effectRef idx="0">
-              <a:schemeClr val="accent1"/>
-            </a:effectRef>
-            <a:fontRef idx="minor">
-              <a:schemeClr val="lt1"/>
-            </a:fontRef>
-          </p:style>
-          <p:txBody>
-            <a:bodyPr rtlCol="0" anchor="ctr"/>
-            <a:lstStyle/>
-            <a:p>
-              <a:pPr algn="ctr"/>
-              <a:endParaRPr lang="en-150"/>
-            </a:p>
-          </p:txBody>
-        </p:sp>
-        <p:sp>
-          <p:nvSpPr>
-            <p:cNvPr id="8" name="Rectangle 7">
-              <a:extLst>
-                <a:ext uri="{FF2B5EF4-FFF2-40B4-BE49-F238E27FC236}">
-                  <a16:creationId xmlns:a16="http://schemas.microsoft.com/office/drawing/2014/main" id="{78B4BDD1-236D-438B-09EB-97CA895C3300}"/>
-                </a:ext>
-              </a:extLst>
-            </p:cNvPr>
-            <p:cNvSpPr/>
-            <p:nvPr/>
-          </p:nvSpPr>
-          <p:spPr>
-            <a:xfrm>
-              <a:off x="7372256" y="1563624"/>
-              <a:ext cx="1627629" cy="365760"/>
-            </a:xfrm>
-            <a:prstGeom prst="rect">
-              <a:avLst/>
-            </a:prstGeom>
-            <a:solidFill>
-              <a:srgbClr val="FF6F61"/>
-            </a:solidFill>
-            <a:ln>
-              <a:noFill/>
-            </a:ln>
-          </p:spPr>
-          <p:style>
-            <a:lnRef idx="2">
-              <a:schemeClr val="accent1">
-                <a:shade val="15000"/>
-              </a:schemeClr>
-            </a:lnRef>
-            <a:fillRef idx="1">
-              <a:schemeClr val="accent1"/>
-            </a:fillRef>
-            <a:effectRef idx="0">
-              <a:schemeClr val="accent1"/>
-            </a:effectRef>
-            <a:fontRef idx="minor">
-              <a:schemeClr val="lt1"/>
-            </a:fontRef>
-          </p:style>
-          <p:txBody>
-            <a:bodyPr rtlCol="0" anchor="ctr"/>
-            <a:lstStyle/>
-            <a:p>
-              <a:pPr algn="ctr"/>
-              <a:endParaRPr lang="en-150"/>
-            </a:p>
-          </p:txBody>
-        </p:sp>
-      </p:grpSp>
-      <p:sp>
-        <p:nvSpPr>
-          <p:cNvPr id="2" name="TextBox 1">
-            <a:extLst>
-              <a:ext uri="{FF2B5EF4-FFF2-40B4-BE49-F238E27FC236}">
-                <a16:creationId xmlns:a16="http://schemas.microsoft.com/office/drawing/2014/main" id="{5DF106CF-89D1-049C-3FD4-88578CB84BF1}"/>
-              </a:ext>
-            </a:extLst>
-          </p:cNvPr>
-          <p:cNvSpPr txBox="1"/>
-          <p:nvPr/>
-        </p:nvSpPr>
-        <p:spPr>
-          <a:xfrm>
-            <a:off x="4344360" y="3218689"/>
-            <a:ext cx="4253087" cy="1200329"/>
-          </a:xfrm>
-          <a:prstGeom prst="rect">
-            <a:avLst/>
-          </a:prstGeom>
-          <a:noFill/>
-        </p:spPr>
-        <p:txBody>
-          <a:bodyPr wrap="none" rtlCol="0">
-            <a:spAutoFit/>
-          </a:bodyPr>
-          <a:lstStyle/>
-          <a:p>
-            <a:r>
-              <a:rPr lang="en-US" sz="7200" dirty="0">
-                <a:solidFill>
-                  <a:srgbClr val="1A1F71"/>
-                </a:solidFill>
-                <a:latin typeface="Aafia" pitchFamily="50" charset="0"/>
-              </a:rPr>
-              <a:t>LaDe</a:t>
-            </a:r>
-            <a:r>
-              <a:rPr lang="en-US" sz="7200" dirty="0">
-                <a:solidFill>
-                  <a:srgbClr val="FF6F61"/>
-                </a:solidFill>
-                <a:latin typeface="Aafia" pitchFamily="50" charset="0"/>
-              </a:rPr>
-              <a:t>RR</a:t>
-            </a:r>
-          </a:p>
-        </p:txBody>
-      </p:sp>
-    </p:spTree>
-    <p:extLst>
-      <p:ext uri="{BB962C8B-B14F-4D97-AF65-F5344CB8AC3E}">
-        <p14:creationId xmlns:p14="http://schemas.microsoft.com/office/powerpoint/2010/main" val="2663385008"/>
       </p:ext>
     </p:extLst>
   </p:cSld>

--- a/resources/base logo.pptx
+++ b/resources/base logo.pptx
@@ -9,7 +9,7 @@
   </p:notesMasterIdLst>
   <p:sldIdLst>
     <p:sldId id="291" r:id="rId2"/>
-    <p:sldId id="292" r:id="rId3"/>
+    <p:sldId id="293" r:id="rId3"/>
     <p:sldId id="286" r:id="rId4"/>
     <p:sldId id="288" r:id="rId5"/>
     <p:sldId id="289" r:id="rId6"/>
@@ -121,7 +121,7 @@
   <p:extLst>
     <p:ext uri="{EFAFB233-063F-42B5-8137-9DF3F51BA10A}">
       <p15:sldGuideLst xmlns:p15="http://schemas.microsoft.com/office/powerpoint/2012/main">
-        <p15:guide id="1" orient="horz" pos="2364" userDrawn="1">
+        <p15:guide id="1" orient="horz" pos="1865" userDrawn="1">
           <p15:clr>
             <a:srgbClr val="A4A3A4"/>
           </p15:clr>
@@ -142,6 +142,21 @@
           </p15:clr>
         </p15:guide>
         <p15:guide id="6" pos="6879" userDrawn="1">
+          <p15:clr>
+            <a:srgbClr val="A4A3A4"/>
+          </p15:clr>
+        </p15:guide>
+        <p15:guide id="7" orient="horz" pos="1911" userDrawn="1">
+          <p15:clr>
+            <a:srgbClr val="A4A3A4"/>
+          </p15:clr>
+        </p15:guide>
+        <p15:guide id="8" orient="horz" pos="2296" userDrawn="1">
+          <p15:clr>
+            <a:srgbClr val="A4A3A4"/>
+          </p15:clr>
+        </p15:guide>
+        <p15:guide id="9" orient="horz" pos="2341" userDrawn="1">
           <p15:clr>
             <a:srgbClr val="A4A3A4"/>
           </p15:clr>
@@ -234,7 +249,7 @@
           <a:p>
             <a:fld id="{DC0890D7-75A3-4AFD-AFCE-7BC66DB681C5}" type="datetimeFigureOut">
               <a:rPr lang="en-150" smtClean="0"/>
-              <a:t>28/01/2025</a:t>
+              <a:t>10/02/2025</a:t>
             </a:fld>
             <a:endParaRPr lang="en-150"/>
           </a:p>
@@ -651,7 +666,7 @@
           <a:p>
             <a:fld id="{97A7BB66-1ADB-47C6-8EE2-F72BFA79F05A}" type="datetimeFigureOut">
               <a:rPr lang="en-150" smtClean="0"/>
-              <a:t>28/01/2025</a:t>
+              <a:t>10/02/2025</a:t>
             </a:fld>
             <a:endParaRPr lang="en-150"/>
           </a:p>
@@ -867,7 +882,7 @@
           <a:p>
             <a:fld id="{97A7BB66-1ADB-47C6-8EE2-F72BFA79F05A}" type="datetimeFigureOut">
               <a:rPr lang="en-150" smtClean="0"/>
-              <a:t>28/01/2025</a:t>
+              <a:t>10/02/2025</a:t>
             </a:fld>
             <a:endParaRPr lang="en-150"/>
           </a:p>
@@ -1077,7 +1092,7 @@
           <a:p>
             <a:fld id="{97A7BB66-1ADB-47C6-8EE2-F72BFA79F05A}" type="datetimeFigureOut">
               <a:rPr lang="en-150" smtClean="0"/>
-              <a:t>28/01/2025</a:t>
+              <a:t>10/02/2025</a:t>
             </a:fld>
             <a:endParaRPr lang="en-150"/>
           </a:p>
@@ -1277,7 +1292,7 @@
           <a:p>
             <a:fld id="{97A7BB66-1ADB-47C6-8EE2-F72BFA79F05A}" type="datetimeFigureOut">
               <a:rPr lang="en-150" smtClean="0"/>
-              <a:t>28/01/2025</a:t>
+              <a:t>10/02/2025</a:t>
             </a:fld>
             <a:endParaRPr lang="en-150"/>
           </a:p>
@@ -1569,7 +1584,7 @@
           <a:p>
             <a:fld id="{97A7BB66-1ADB-47C6-8EE2-F72BFA79F05A}" type="datetimeFigureOut">
               <a:rPr lang="en-150" smtClean="0"/>
-              <a:t>28/01/2025</a:t>
+              <a:t>10/02/2025</a:t>
             </a:fld>
             <a:endParaRPr lang="en-150"/>
           </a:p>
@@ -1837,7 +1852,7 @@
           <a:p>
             <a:fld id="{97A7BB66-1ADB-47C6-8EE2-F72BFA79F05A}" type="datetimeFigureOut">
               <a:rPr lang="en-150" smtClean="0"/>
-              <a:t>28/01/2025</a:t>
+              <a:t>10/02/2025</a:t>
             </a:fld>
             <a:endParaRPr lang="en-150"/>
           </a:p>
@@ -2252,7 +2267,7 @@
           <a:p>
             <a:fld id="{97A7BB66-1ADB-47C6-8EE2-F72BFA79F05A}" type="datetimeFigureOut">
               <a:rPr lang="en-150" smtClean="0"/>
-              <a:t>28/01/2025</a:t>
+              <a:t>10/02/2025</a:t>
             </a:fld>
             <a:endParaRPr lang="en-150"/>
           </a:p>
@@ -2394,7 +2409,7 @@
           <a:p>
             <a:fld id="{97A7BB66-1ADB-47C6-8EE2-F72BFA79F05A}" type="datetimeFigureOut">
               <a:rPr lang="en-150" smtClean="0"/>
-              <a:t>28/01/2025</a:t>
+              <a:t>10/02/2025</a:t>
             </a:fld>
             <a:endParaRPr lang="en-150"/>
           </a:p>
@@ -2507,7 +2522,7 @@
           <a:p>
             <a:fld id="{97A7BB66-1ADB-47C6-8EE2-F72BFA79F05A}" type="datetimeFigureOut">
               <a:rPr lang="en-150" smtClean="0"/>
-              <a:t>28/01/2025</a:t>
+              <a:t>10/02/2025</a:t>
             </a:fld>
             <a:endParaRPr lang="en-150"/>
           </a:p>
@@ -2820,7 +2835,7 @@
           <a:p>
             <a:fld id="{97A7BB66-1ADB-47C6-8EE2-F72BFA79F05A}" type="datetimeFigureOut">
               <a:rPr lang="en-150" smtClean="0"/>
-              <a:t>28/01/2025</a:t>
+              <a:t>10/02/2025</a:t>
             </a:fld>
             <a:endParaRPr lang="en-150"/>
           </a:p>
@@ -3109,7 +3124,7 @@
           <a:p>
             <a:fld id="{97A7BB66-1ADB-47C6-8EE2-F72BFA79F05A}" type="datetimeFigureOut">
               <a:rPr lang="en-150" smtClean="0"/>
-              <a:t>28/01/2025</a:t>
+              <a:t>10/02/2025</a:t>
             </a:fld>
             <a:endParaRPr lang="en-150"/>
           </a:p>
@@ -3351,7 +3366,7 @@
           <a:p>
             <a:fld id="{97A7BB66-1ADB-47C6-8EE2-F72BFA79F05A}" type="datetimeFigureOut">
               <a:rPr lang="en-150" smtClean="0"/>
-              <a:t>28/01/2025</a:t>
+              <a:t>10/02/2025</a:t>
             </a:fld>
             <a:endParaRPr lang="en-150"/>
           </a:p>
@@ -5217,7 +5232,7 @@
         <p:cNvPr id="1" name="">
           <a:extLst>
             <a:ext uri="{FF2B5EF4-FFF2-40B4-BE49-F238E27FC236}">
-              <a16:creationId xmlns:a16="http://schemas.microsoft.com/office/drawing/2014/main" id="{17A2AECE-803C-C14D-92EA-045167590D42}"/>
+              <a16:creationId xmlns:a16="http://schemas.microsoft.com/office/drawing/2014/main" id="{6D904611-22B7-C897-FE07-3BC9A8278594}"/>
             </a:ext>
           </a:extLst>
         </p:cNvPr>
@@ -5237,7 +5252,7 @@
           <p:cNvPr id="12" name="Rectangle 11">
             <a:extLst>
               <a:ext uri="{FF2B5EF4-FFF2-40B4-BE49-F238E27FC236}">
-                <a16:creationId xmlns:a16="http://schemas.microsoft.com/office/drawing/2014/main" id="{CC1452E2-4D60-D378-BB0A-32DCEAC90159}"/>
+                <a16:creationId xmlns:a16="http://schemas.microsoft.com/office/drawing/2014/main" id="{1E841810-4848-ED1E-1246-A0F736CB5297}"/>
               </a:ext>
             </a:extLst>
           </p:cNvPr>
@@ -5246,7 +5261,7 @@
         </p:nvSpPr>
         <p:spPr>
           <a:xfrm>
-            <a:off x="6734175" y="2759041"/>
+            <a:off x="6734175" y="2816191"/>
             <a:ext cx="1223963" cy="149432"/>
           </a:xfrm>
           <a:prstGeom prst="rect">
@@ -5301,7 +5316,7 @@
           <p:cNvPr id="13" name="Rectangle 12">
             <a:extLst>
               <a:ext uri="{FF2B5EF4-FFF2-40B4-BE49-F238E27FC236}">
-                <a16:creationId xmlns:a16="http://schemas.microsoft.com/office/drawing/2014/main" id="{51D456FA-1BB7-2DC0-1C94-925D5EB7A450}"/>
+                <a16:creationId xmlns:a16="http://schemas.microsoft.com/office/drawing/2014/main" id="{297E3C51-792E-71C4-3609-9989C2BF0F77}"/>
               </a:ext>
             </a:extLst>
           </p:cNvPr>
@@ -5310,7 +5325,7 @@
         </p:nvSpPr>
         <p:spPr>
           <a:xfrm>
-            <a:off x="7958138" y="2601989"/>
+            <a:off x="7958138" y="2659139"/>
             <a:ext cx="1368425" cy="149432"/>
           </a:xfrm>
           <a:prstGeom prst="rect">
@@ -5365,7 +5380,7 @@
           <p:cNvPr id="14" name="Rectangle 13">
             <a:extLst>
               <a:ext uri="{FF2B5EF4-FFF2-40B4-BE49-F238E27FC236}">
-                <a16:creationId xmlns:a16="http://schemas.microsoft.com/office/drawing/2014/main" id="{D3BE7271-8349-F22F-6698-DE676C5590AF}"/>
+                <a16:creationId xmlns:a16="http://schemas.microsoft.com/office/drawing/2014/main" id="{DA72054A-4C5B-7E2D-91D3-4A22A50AFE79}"/>
               </a:ext>
             </a:extLst>
           </p:cNvPr>
@@ -5374,7 +5389,7 @@
         </p:nvSpPr>
         <p:spPr>
           <a:xfrm>
-            <a:off x="9326564" y="2444937"/>
+            <a:off x="9326564" y="2502087"/>
             <a:ext cx="1377950" cy="149432"/>
           </a:xfrm>
           <a:prstGeom prst="rect">
@@ -5437,7 +5452,7 @@
           <p:cNvPr id="15" name="TextBox 14">
             <a:extLst>
               <a:ext uri="{FF2B5EF4-FFF2-40B4-BE49-F238E27FC236}">
-                <a16:creationId xmlns:a16="http://schemas.microsoft.com/office/drawing/2014/main" id="{3505A1EF-63A0-4328-4BA7-163C3DDE54F0}"/>
+                <a16:creationId xmlns:a16="http://schemas.microsoft.com/office/drawing/2014/main" id="{83D28326-DFEC-DA4A-7F24-5593A0F2707D}"/>
               </a:ext>
             </a:extLst>
           </p:cNvPr>
@@ -5515,7 +5530,7 @@
           <p:cNvPr id="19" name="TextBox 18">
             <a:extLst>
               <a:ext uri="{FF2B5EF4-FFF2-40B4-BE49-F238E27FC236}">
-                <a16:creationId xmlns:a16="http://schemas.microsoft.com/office/drawing/2014/main" id="{DC54A8A1-F903-CEBA-6CFE-33F719E328FD}"/>
+                <a16:creationId xmlns:a16="http://schemas.microsoft.com/office/drawing/2014/main" id="{E5ECF1B9-269C-2F29-E619-FC104AAEEE14}"/>
               </a:ext>
             </a:extLst>
           </p:cNvPr>
@@ -5572,10 +5587,338 @@
           </a:p>
         </p:txBody>
       </p:sp>
+      <p:grpSp>
+        <p:nvGrpSpPr>
+          <p:cNvPr id="7" name="Group 6">
+            <a:extLst>
+              <a:ext uri="{FF2B5EF4-FFF2-40B4-BE49-F238E27FC236}">
+                <a16:creationId xmlns:a16="http://schemas.microsoft.com/office/drawing/2014/main" id="{5CA38074-ED14-FB0B-081A-0AEAA26EC8BE}"/>
+              </a:ext>
+            </a:extLst>
+          </p:cNvPr>
+          <p:cNvGrpSpPr/>
+          <p:nvPr/>
+        </p:nvGrpSpPr>
+        <p:grpSpPr>
+          <a:xfrm>
+            <a:off x="769938" y="583285"/>
+            <a:ext cx="4253087" cy="1553375"/>
+            <a:chOff x="587089" y="854262"/>
+            <a:chExt cx="4253087" cy="1553375"/>
+          </a:xfrm>
+        </p:grpSpPr>
+        <p:sp>
+          <p:nvSpPr>
+            <p:cNvPr id="8" name="Rectangle 7">
+              <a:extLst>
+                <a:ext uri="{FF2B5EF4-FFF2-40B4-BE49-F238E27FC236}">
+                  <a16:creationId xmlns:a16="http://schemas.microsoft.com/office/drawing/2014/main" id="{583C051B-A39B-AC04-76B0-DC200FAC2D8B}"/>
+                </a:ext>
+              </a:extLst>
+            </p:cNvPr>
+            <p:cNvSpPr/>
+            <p:nvPr/>
+          </p:nvSpPr>
+          <p:spPr>
+            <a:xfrm>
+              <a:off x="714375" y="1168366"/>
+              <a:ext cx="1223963" cy="149432"/>
+            </a:xfrm>
+            <a:prstGeom prst="rect">
+              <a:avLst/>
+            </a:prstGeom>
+            <a:solidFill>
+              <a:srgbClr val="1A1F71"/>
+            </a:solidFill>
+            <a:ln w="3175">
+              <a:noFill/>
+            </a:ln>
+            <a:effectLst>
+              <a:outerShdw blurRad="57785" dist="33020" dir="3180000" algn="ctr">
+                <a:srgbClr val="000000">
+                  <a:alpha val="30000"/>
+                </a:srgbClr>
+              </a:outerShdw>
+            </a:effectLst>
+          </p:spPr>
+          <p:style>
+            <a:lnRef idx="2">
+              <a:schemeClr val="accent1">
+                <a:shade val="15000"/>
+              </a:schemeClr>
+            </a:lnRef>
+            <a:fillRef idx="1">
+              <a:schemeClr val="accent1"/>
+            </a:fillRef>
+            <a:effectRef idx="0">
+              <a:schemeClr val="accent1"/>
+            </a:effectRef>
+            <a:fontRef idx="minor">
+              <a:schemeClr val="lt1"/>
+            </a:fontRef>
+          </p:style>
+          <p:txBody>
+            <a:bodyPr rtlCol="0" anchor="ctr"/>
+            <a:lstStyle/>
+            <a:p>
+              <a:pPr algn="ctr"/>
+              <a:endParaRPr lang="en-150">
+                <a:ln w="3175">
+                  <a:solidFill>
+                    <a:schemeClr val="bg1">
+                      <a:lumMod val="95000"/>
+                    </a:schemeClr>
+                  </a:solidFill>
+                </a:ln>
+                <a:solidFill>
+                  <a:srgbClr val="1A1F71"/>
+                </a:solidFill>
+              </a:endParaRPr>
+            </a:p>
+          </p:txBody>
+        </p:sp>
+        <p:sp>
+          <p:nvSpPr>
+            <p:cNvPr id="9" name="Rectangle 8">
+              <a:extLst>
+                <a:ext uri="{FF2B5EF4-FFF2-40B4-BE49-F238E27FC236}">
+                  <a16:creationId xmlns:a16="http://schemas.microsoft.com/office/drawing/2014/main" id="{4A100315-569F-0257-8A1C-6DABADA772E4}"/>
+                </a:ext>
+              </a:extLst>
+            </p:cNvPr>
+            <p:cNvSpPr/>
+            <p:nvPr/>
+          </p:nvSpPr>
+          <p:spPr>
+            <a:xfrm>
+              <a:off x="1938338" y="1011314"/>
+              <a:ext cx="1368425" cy="149432"/>
+            </a:xfrm>
+            <a:prstGeom prst="rect">
+              <a:avLst/>
+            </a:prstGeom>
+            <a:solidFill>
+              <a:srgbClr val="1A1F71"/>
+            </a:solidFill>
+            <a:ln w="3175">
+              <a:noFill/>
+            </a:ln>
+            <a:effectLst>
+              <a:outerShdw blurRad="57785" dist="33020" dir="3180000" algn="ctr">
+                <a:srgbClr val="000000">
+                  <a:alpha val="30000"/>
+                </a:srgbClr>
+              </a:outerShdw>
+            </a:effectLst>
+          </p:spPr>
+          <p:style>
+            <a:lnRef idx="2">
+              <a:schemeClr val="accent1">
+                <a:shade val="15000"/>
+              </a:schemeClr>
+            </a:lnRef>
+            <a:fillRef idx="1">
+              <a:schemeClr val="accent1"/>
+            </a:fillRef>
+            <a:effectRef idx="0">
+              <a:schemeClr val="accent1"/>
+            </a:effectRef>
+            <a:fontRef idx="minor">
+              <a:schemeClr val="lt1"/>
+            </a:fontRef>
+          </p:style>
+          <p:txBody>
+            <a:bodyPr rtlCol="0" anchor="ctr"/>
+            <a:lstStyle/>
+            <a:p>
+              <a:pPr algn="ctr"/>
+              <a:endParaRPr lang="en-150">
+                <a:ln w="3175">
+                  <a:solidFill>
+                    <a:schemeClr val="bg1">
+                      <a:lumMod val="95000"/>
+                    </a:schemeClr>
+                  </a:solidFill>
+                </a:ln>
+                <a:solidFill>
+                  <a:srgbClr val="1A1F71"/>
+                </a:solidFill>
+              </a:endParaRPr>
+            </a:p>
+          </p:txBody>
+        </p:sp>
+        <p:sp>
+          <p:nvSpPr>
+            <p:cNvPr id="10" name="Rectangle 9">
+              <a:extLst>
+                <a:ext uri="{FF2B5EF4-FFF2-40B4-BE49-F238E27FC236}">
+                  <a16:creationId xmlns:a16="http://schemas.microsoft.com/office/drawing/2014/main" id="{FB32A31A-FE84-27AE-9FA5-BD93B1A599A0}"/>
+                </a:ext>
+              </a:extLst>
+            </p:cNvPr>
+            <p:cNvSpPr/>
+            <p:nvPr/>
+          </p:nvSpPr>
+          <p:spPr>
+            <a:xfrm>
+              <a:off x="3306764" y="854262"/>
+              <a:ext cx="1377950" cy="149432"/>
+            </a:xfrm>
+            <a:prstGeom prst="rect">
+              <a:avLst/>
+            </a:prstGeom>
+            <a:gradFill flip="none" rotWithShape="1">
+              <a:gsLst>
+                <a:gs pos="0">
+                  <a:srgbClr val="FFD700"/>
+                </a:gs>
+                <a:gs pos="78000">
+                  <a:srgbClr val="FFD700"/>
+                </a:gs>
+                <a:gs pos="100000">
+                  <a:schemeClr val="bg1"/>
+                </a:gs>
+              </a:gsLst>
+              <a:lin ang="18900000" scaled="1"/>
+              <a:tileRect/>
+            </a:gradFill>
+            <a:ln w="3175">
+              <a:noFill/>
+            </a:ln>
+            <a:effectLst>
+              <a:outerShdw blurRad="57785" dist="33020" dir="3180000" algn="ctr">
+                <a:srgbClr val="000000">
+                  <a:alpha val="30000"/>
+                </a:srgbClr>
+              </a:outerShdw>
+            </a:effectLst>
+          </p:spPr>
+          <p:style>
+            <a:lnRef idx="2">
+              <a:schemeClr val="accent1">
+                <a:shade val="15000"/>
+              </a:schemeClr>
+            </a:lnRef>
+            <a:fillRef idx="1">
+              <a:schemeClr val="accent1"/>
+            </a:fillRef>
+            <a:effectRef idx="0">
+              <a:schemeClr val="accent1"/>
+            </a:effectRef>
+            <a:fontRef idx="minor">
+              <a:schemeClr val="lt1"/>
+            </a:fontRef>
+          </p:style>
+          <p:txBody>
+            <a:bodyPr rtlCol="0" anchor="ctr"/>
+            <a:lstStyle/>
+            <a:p>
+              <a:pPr algn="ctr"/>
+              <a:endParaRPr lang="en-150">
+                <a:ln w="3175">
+                  <a:solidFill>
+                    <a:schemeClr val="bg1">
+                      <a:lumMod val="95000"/>
+                    </a:schemeClr>
+                  </a:solidFill>
+                </a:ln>
+              </a:endParaRPr>
+            </a:p>
+          </p:txBody>
+        </p:sp>
+        <p:sp>
+          <p:nvSpPr>
+            <p:cNvPr id="11" name="TextBox 10">
+              <a:extLst>
+                <a:ext uri="{FF2B5EF4-FFF2-40B4-BE49-F238E27FC236}">
+                  <a16:creationId xmlns:a16="http://schemas.microsoft.com/office/drawing/2014/main" id="{32F225EA-5826-AB82-F3AE-714C3CD68F5D}"/>
+                </a:ext>
+              </a:extLst>
+            </p:cNvPr>
+            <p:cNvSpPr txBox="1"/>
+            <p:nvPr/>
+          </p:nvSpPr>
+          <p:spPr>
+            <a:xfrm>
+              <a:off x="587089" y="1207308"/>
+              <a:ext cx="4253087" cy="1200329"/>
+            </a:xfrm>
+            <a:prstGeom prst="rect">
+              <a:avLst/>
+            </a:prstGeom>
+            <a:noFill/>
+            <a:ln>
+              <a:noFill/>
+            </a:ln>
+            <a:effectLst>
+              <a:outerShdw blurRad="57785" dist="33020" dir="3180000" algn="ctr">
+                <a:srgbClr val="000000">
+                  <a:alpha val="30000"/>
+                </a:srgbClr>
+              </a:outerShdw>
+            </a:effectLst>
+          </p:spPr>
+          <p:txBody>
+            <a:bodyPr wrap="none" rtlCol="0">
+              <a:spAutoFit/>
+              <a:sp3d extrusionH="38100">
+                <a:bevelT w="38100" h="38100"/>
+              </a:sp3d>
+            </a:bodyPr>
+            <a:lstStyle/>
+            <a:p>
+              <a:r>
+                <a:rPr lang="en-US" sz="7200" dirty="0">
+                  <a:ln w="3175">
+                    <a:solidFill>
+                      <a:schemeClr val="bg1">
+                        <a:lumMod val="95000"/>
+                      </a:schemeClr>
+                    </a:solidFill>
+                  </a:ln>
+                  <a:solidFill>
+                    <a:srgbClr val="1A1F71"/>
+                  </a:solidFill>
+                  <a:latin typeface="Aafia" pitchFamily="50" charset="0"/>
+                </a:rPr>
+                <a:t>LaDe</a:t>
+              </a:r>
+              <a:r>
+                <a:rPr lang="en-US" sz="7200" dirty="0">
+                  <a:ln w="3175">
+                    <a:solidFill>
+                      <a:schemeClr val="bg1">
+                        <a:lumMod val="95000"/>
+                      </a:schemeClr>
+                    </a:solidFill>
+                  </a:ln>
+                  <a:gradFill flip="none" rotWithShape="1">
+                    <a:gsLst>
+                      <a:gs pos="80000">
+                        <a:srgbClr val="FFD700"/>
+                      </a:gs>
+                      <a:gs pos="0">
+                        <a:srgbClr val="FFD700"/>
+                      </a:gs>
+                      <a:gs pos="100000">
+                        <a:schemeClr val="bg1"/>
+                      </a:gs>
+                    </a:gsLst>
+                    <a:lin ang="18900000" scaled="1"/>
+                    <a:tileRect/>
+                  </a:gradFill>
+                  <a:latin typeface="Aafia" pitchFamily="50" charset="0"/>
+                </a:rPr>
+                <a:t>RR</a:t>
+              </a:r>
+            </a:p>
+          </p:txBody>
+        </p:sp>
+      </p:grpSp>
     </p:spTree>
     <p:extLst>
       <p:ext uri="{BB962C8B-B14F-4D97-AF65-F5344CB8AC3E}">
-        <p14:creationId xmlns:p14="http://schemas.microsoft.com/office/powerpoint/2010/main" val="1047741798"/>
+        <p14:creationId xmlns:p14="http://schemas.microsoft.com/office/powerpoint/2010/main" val="1312158596"/>
       </p:ext>
     </p:extLst>
   </p:cSld>

--- a/resources/base logo.pptx
+++ b/resources/base logo.pptx
@@ -5,7 +5,7 @@
     <p:sldMasterId id="2147483648" r:id="rId1"/>
   </p:sldMasterIdLst>
   <p:notesMasterIdLst>
-    <p:notesMasterId r:id="rId14"/>
+    <p:notesMasterId r:id="rId15"/>
   </p:notesMasterIdLst>
   <p:sldIdLst>
     <p:sldId id="291" r:id="rId2"/>
@@ -20,6 +20,7 @@
     <p:sldId id="283" r:id="rId11"/>
     <p:sldId id="284" r:id="rId12"/>
     <p:sldId id="280" r:id="rId13"/>
+    <p:sldId id="294" r:id="rId14"/>
   </p:sldIdLst>
   <p:sldSz cx="12192000" cy="6858000"/>
   <p:notesSz cx="6858000" cy="9144000"/>
@@ -121,42 +122,17 @@
   <p:extLst>
     <p:ext uri="{EFAFB233-063F-42B5-8137-9DF3F51BA10A}">
       <p15:sldGuideLst xmlns:p15="http://schemas.microsoft.com/office/powerpoint/2012/main">
-        <p15:guide id="1" orient="horz" pos="1865" userDrawn="1">
-          <p15:clr>
-            <a:srgbClr val="A4A3A4"/>
-          </p15:clr>
-        </p15:guide>
         <p15:guide id="3" pos="6743" userDrawn="1">
           <p15:clr>
             <a:srgbClr val="A4A3A4"/>
           </p15:clr>
         </p15:guide>
-        <p15:guide id="4" pos="4248" userDrawn="1">
-          <p15:clr>
-            <a:srgbClr val="A4A3A4"/>
-          </p15:clr>
-        </p15:guide>
-        <p15:guide id="5" pos="2910" userDrawn="1">
+        <p15:guide id="4" pos="3840" userDrawn="1">
           <p15:clr>
             <a:srgbClr val="A4A3A4"/>
           </p15:clr>
         </p15:guide>
         <p15:guide id="6" pos="6879" userDrawn="1">
-          <p15:clr>
-            <a:srgbClr val="A4A3A4"/>
-          </p15:clr>
-        </p15:guide>
-        <p15:guide id="7" orient="horz" pos="1911" userDrawn="1">
-          <p15:clr>
-            <a:srgbClr val="A4A3A4"/>
-          </p15:clr>
-        </p15:guide>
-        <p15:guide id="8" orient="horz" pos="2296" userDrawn="1">
-          <p15:clr>
-            <a:srgbClr val="A4A3A4"/>
-          </p15:clr>
-        </p15:guide>
-        <p15:guide id="9" orient="horz" pos="2341" userDrawn="1">
           <p15:clr>
             <a:srgbClr val="A4A3A4"/>
           </p15:clr>
@@ -249,7 +225,7 @@
           <a:p>
             <a:fld id="{DC0890D7-75A3-4AFD-AFCE-7BC66DB681C5}" type="datetimeFigureOut">
               <a:rPr lang="en-150" smtClean="0"/>
-              <a:t>10/02/2025</a:t>
+              <a:t>12/03/2025</a:t>
             </a:fld>
             <a:endParaRPr lang="en-150"/>
           </a:p>
@@ -666,7 +642,7 @@
           <a:p>
             <a:fld id="{97A7BB66-1ADB-47C6-8EE2-F72BFA79F05A}" type="datetimeFigureOut">
               <a:rPr lang="en-150" smtClean="0"/>
-              <a:t>10/02/2025</a:t>
+              <a:t>12/03/2025</a:t>
             </a:fld>
             <a:endParaRPr lang="en-150"/>
           </a:p>
@@ -882,7 +858,7 @@
           <a:p>
             <a:fld id="{97A7BB66-1ADB-47C6-8EE2-F72BFA79F05A}" type="datetimeFigureOut">
               <a:rPr lang="en-150" smtClean="0"/>
-              <a:t>10/02/2025</a:t>
+              <a:t>12/03/2025</a:t>
             </a:fld>
             <a:endParaRPr lang="en-150"/>
           </a:p>
@@ -1092,7 +1068,7 @@
           <a:p>
             <a:fld id="{97A7BB66-1ADB-47C6-8EE2-F72BFA79F05A}" type="datetimeFigureOut">
               <a:rPr lang="en-150" smtClean="0"/>
-              <a:t>10/02/2025</a:t>
+              <a:t>12/03/2025</a:t>
             </a:fld>
             <a:endParaRPr lang="en-150"/>
           </a:p>
@@ -1292,7 +1268,7 @@
           <a:p>
             <a:fld id="{97A7BB66-1ADB-47C6-8EE2-F72BFA79F05A}" type="datetimeFigureOut">
               <a:rPr lang="en-150" smtClean="0"/>
-              <a:t>10/02/2025</a:t>
+              <a:t>12/03/2025</a:t>
             </a:fld>
             <a:endParaRPr lang="en-150"/>
           </a:p>
@@ -1584,7 +1560,7 @@
           <a:p>
             <a:fld id="{97A7BB66-1ADB-47C6-8EE2-F72BFA79F05A}" type="datetimeFigureOut">
               <a:rPr lang="en-150" smtClean="0"/>
-              <a:t>10/02/2025</a:t>
+              <a:t>12/03/2025</a:t>
             </a:fld>
             <a:endParaRPr lang="en-150"/>
           </a:p>
@@ -1852,7 +1828,7 @@
           <a:p>
             <a:fld id="{97A7BB66-1ADB-47C6-8EE2-F72BFA79F05A}" type="datetimeFigureOut">
               <a:rPr lang="en-150" smtClean="0"/>
-              <a:t>10/02/2025</a:t>
+              <a:t>12/03/2025</a:t>
             </a:fld>
             <a:endParaRPr lang="en-150"/>
           </a:p>
@@ -2267,7 +2243,7 @@
           <a:p>
             <a:fld id="{97A7BB66-1ADB-47C6-8EE2-F72BFA79F05A}" type="datetimeFigureOut">
               <a:rPr lang="en-150" smtClean="0"/>
-              <a:t>10/02/2025</a:t>
+              <a:t>12/03/2025</a:t>
             </a:fld>
             <a:endParaRPr lang="en-150"/>
           </a:p>
@@ -2409,7 +2385,7 @@
           <a:p>
             <a:fld id="{97A7BB66-1ADB-47C6-8EE2-F72BFA79F05A}" type="datetimeFigureOut">
               <a:rPr lang="en-150" smtClean="0"/>
-              <a:t>10/02/2025</a:t>
+              <a:t>12/03/2025</a:t>
             </a:fld>
             <a:endParaRPr lang="en-150"/>
           </a:p>
@@ -2522,7 +2498,7 @@
           <a:p>
             <a:fld id="{97A7BB66-1ADB-47C6-8EE2-F72BFA79F05A}" type="datetimeFigureOut">
               <a:rPr lang="en-150" smtClean="0"/>
-              <a:t>10/02/2025</a:t>
+              <a:t>12/03/2025</a:t>
             </a:fld>
             <a:endParaRPr lang="en-150"/>
           </a:p>
@@ -2835,7 +2811,7 @@
           <a:p>
             <a:fld id="{97A7BB66-1ADB-47C6-8EE2-F72BFA79F05A}" type="datetimeFigureOut">
               <a:rPr lang="en-150" smtClean="0"/>
-              <a:t>10/02/2025</a:t>
+              <a:t>12/03/2025</a:t>
             </a:fld>
             <a:endParaRPr lang="en-150"/>
           </a:p>
@@ -3124,7 +3100,7 @@
           <a:p>
             <a:fld id="{97A7BB66-1ADB-47C6-8EE2-F72BFA79F05A}" type="datetimeFigureOut">
               <a:rPr lang="en-150" smtClean="0"/>
-              <a:t>10/02/2025</a:t>
+              <a:t>12/03/2025</a:t>
             </a:fld>
             <a:endParaRPr lang="en-150"/>
           </a:p>
@@ -3366,7 +3342,7 @@
           <a:p>
             <a:fld id="{97A7BB66-1ADB-47C6-8EE2-F72BFA79F05A}" type="datetimeFigureOut">
               <a:rPr lang="en-150" smtClean="0"/>
-              <a:t>10/02/2025</a:t>
+              <a:t>12/03/2025</a:t>
             </a:fld>
             <a:endParaRPr lang="en-150"/>
           </a:p>
@@ -5215,6 +5191,173 @@
     <p:extLst>
       <p:ext uri="{BB962C8B-B14F-4D97-AF65-F5344CB8AC3E}">
         <p14:creationId xmlns:p14="http://schemas.microsoft.com/office/powerpoint/2010/main" val="1298690516"/>
+      </p:ext>
+    </p:extLst>
+  </p:cSld>
+  <p:clrMapOvr>
+    <a:masterClrMapping/>
+  </p:clrMapOvr>
+</p:sld>
+</file>
+
+<file path=ppt/slides/slide13.xml><?xml version="1.0" encoding="utf-8"?>
+<p:sld xmlns:a="http://schemas.openxmlformats.org/drawingml/2006/main" xmlns:r="http://schemas.openxmlformats.org/officeDocument/2006/relationships" xmlns:p="http://schemas.openxmlformats.org/presentationml/2006/main">
+  <p:cSld>
+    <p:spTree>
+      <p:nvGrpSpPr>
+        <p:cNvPr id="1" name=""/>
+        <p:cNvGrpSpPr/>
+        <p:nvPr/>
+      </p:nvGrpSpPr>
+      <p:grpSpPr>
+        <a:xfrm>
+          <a:off x="0" y="0"/>
+          <a:ext cx="0" cy="0"/>
+          <a:chOff x="0" y="0"/>
+          <a:chExt cx="0" cy="0"/>
+        </a:xfrm>
+      </p:grpSpPr>
+      <p:pic>
+        <p:nvPicPr>
+          <p:cNvPr id="5" name="Picture 4" descr="A white card with black text and black text&#10;&#10;AI-generated content may be incorrect.">
+            <a:extLst>
+              <a:ext uri="{FF2B5EF4-FFF2-40B4-BE49-F238E27FC236}">
+                <a16:creationId xmlns:a16="http://schemas.microsoft.com/office/drawing/2014/main" id="{1E7BEED1-CF56-A13F-35EB-36FFC9A54899}"/>
+              </a:ext>
+            </a:extLst>
+          </p:cNvPr>
+          <p:cNvPicPr>
+            <a:picLocks noChangeAspect="1"/>
+          </p:cNvPicPr>
+          <p:nvPr/>
+        </p:nvPicPr>
+        <p:blipFill>
+          <a:blip r:embed="rId2">
+            <a:duotone>
+              <a:schemeClr val="bg2">
+                <a:shade val="45000"/>
+                <a:satMod val="135000"/>
+              </a:schemeClr>
+              <a:prstClr val="white"/>
+            </a:duotone>
+            <a:extLst>
+              <a:ext uri="{BEBA8EAE-BF5A-486C-A8C5-ECC9F3942E4B}">
+                <a14:imgProps xmlns:a14="http://schemas.microsoft.com/office/drawing/2010/main">
+                  <a14:imgLayer r:embed="rId3">
+                    <a14:imgEffect>
+                      <a14:artisticCutout/>
+                    </a14:imgEffect>
+                    <a14:imgEffect>
+                      <a14:saturation sat="0"/>
+                    </a14:imgEffect>
+                    <a14:imgEffect>
+                      <a14:brightnessContrast bright="40000" contrast="40000"/>
+                    </a14:imgEffect>
+                  </a14:imgLayer>
+                </a14:imgProps>
+              </a:ext>
+              <a:ext uri="{28A0092B-C50C-407E-A947-70E740481C1C}">
+                <a14:useLocalDpi xmlns:a14="http://schemas.microsoft.com/office/drawing/2010/main" val="0"/>
+              </a:ext>
+            </a:extLst>
+          </a:blip>
+          <a:stretch>
+            <a:fillRect/>
+          </a:stretch>
+        </p:blipFill>
+        <p:spPr>
+          <a:xfrm>
+            <a:off x="0" y="381000"/>
+            <a:ext cx="12192000" cy="6096000"/>
+          </a:xfrm>
+          <a:prstGeom prst="rect">
+            <a:avLst/>
+          </a:prstGeom>
+        </p:spPr>
+      </p:pic>
+      <p:sp>
+        <p:nvSpPr>
+          <p:cNvPr id="6" name="Rectangle 5">
+            <a:extLst>
+              <a:ext uri="{FF2B5EF4-FFF2-40B4-BE49-F238E27FC236}">
+                <a16:creationId xmlns:a16="http://schemas.microsoft.com/office/drawing/2014/main" id="{DD03AB48-C6E9-BD43-4EEA-B2FD96D544E2}"/>
+              </a:ext>
+            </a:extLst>
+          </p:cNvPr>
+          <p:cNvSpPr/>
+          <p:nvPr/>
+        </p:nvSpPr>
+        <p:spPr>
+          <a:xfrm>
+            <a:off x="914401" y="1333500"/>
+            <a:ext cx="10191750" cy="4219575"/>
+          </a:xfrm>
+          <a:prstGeom prst="rect">
+            <a:avLst/>
+          </a:prstGeom>
+          <a:ln>
+            <a:solidFill>
+              <a:schemeClr val="bg1"/>
+            </a:solidFill>
+          </a:ln>
+        </p:spPr>
+        <p:style>
+          <a:lnRef idx="2">
+            <a:schemeClr val="dk1"/>
+          </a:lnRef>
+          <a:fillRef idx="1">
+            <a:schemeClr val="lt1"/>
+          </a:fillRef>
+          <a:effectRef idx="0">
+            <a:schemeClr val="dk1"/>
+          </a:effectRef>
+          <a:fontRef idx="minor">
+            <a:schemeClr val="dk1"/>
+          </a:fontRef>
+        </p:style>
+        <p:txBody>
+          <a:bodyPr rtlCol="0" anchor="ctr"/>
+          <a:lstStyle/>
+          <a:p>
+            <a:pPr algn="ctr"/>
+            <a:endParaRPr lang="en-US"/>
+          </a:p>
+        </p:txBody>
+      </p:sp>
+      <p:pic>
+        <p:nvPicPr>
+          <p:cNvPr id="12" name="Picture 11">
+            <a:extLst>
+              <a:ext uri="{FF2B5EF4-FFF2-40B4-BE49-F238E27FC236}">
+                <a16:creationId xmlns:a16="http://schemas.microsoft.com/office/drawing/2014/main" id="{F343F6AC-52EB-0E48-63DD-45C09D8F2C49}"/>
+              </a:ext>
+            </a:extLst>
+          </p:cNvPr>
+          <p:cNvPicPr>
+            <a:picLocks noChangeAspect="1"/>
+          </p:cNvPicPr>
+          <p:nvPr/>
+        </p:nvPicPr>
+        <p:blipFill>
+          <a:blip r:embed="rId4"/>
+          <a:stretch>
+            <a:fillRect/>
+          </a:stretch>
+        </p:blipFill>
+        <p:spPr>
+          <a:xfrm>
+            <a:off x="1501967" y="1743075"/>
+            <a:ext cx="9202546" cy="3371850"/>
+          </a:xfrm>
+          <a:prstGeom prst="rect">
+            <a:avLst/>
+          </a:prstGeom>
+        </p:spPr>
+      </p:pic>
+    </p:spTree>
+    <p:extLst>
+      <p:ext uri="{BB962C8B-B14F-4D97-AF65-F5344CB8AC3E}">
+        <p14:creationId xmlns:p14="http://schemas.microsoft.com/office/powerpoint/2010/main" val="2690937209"/>
       </p:ext>
     </p:extLst>
   </p:cSld>

--- a/resources/base logo.pptx
+++ b/resources/base logo.pptx
@@ -5,22 +5,23 @@
     <p:sldMasterId id="2147483648" r:id="rId1"/>
   </p:sldMasterIdLst>
   <p:notesMasterIdLst>
-    <p:notesMasterId r:id="rId15"/>
+    <p:notesMasterId r:id="rId16"/>
   </p:notesMasterIdLst>
   <p:sldIdLst>
-    <p:sldId id="291" r:id="rId2"/>
-    <p:sldId id="293" r:id="rId3"/>
-    <p:sldId id="286" r:id="rId4"/>
-    <p:sldId id="288" r:id="rId5"/>
-    <p:sldId id="289" r:id="rId6"/>
-    <p:sldId id="287" r:id="rId7"/>
-    <p:sldId id="278" r:id="rId8"/>
-    <p:sldId id="285" r:id="rId9"/>
-    <p:sldId id="281" r:id="rId10"/>
-    <p:sldId id="283" r:id="rId11"/>
-    <p:sldId id="284" r:id="rId12"/>
-    <p:sldId id="280" r:id="rId13"/>
-    <p:sldId id="294" r:id="rId14"/>
+    <p:sldId id="293" r:id="rId2"/>
+    <p:sldId id="294" r:id="rId3"/>
+    <p:sldId id="295" r:id="rId4"/>
+    <p:sldId id="291" r:id="rId5"/>
+    <p:sldId id="286" r:id="rId6"/>
+    <p:sldId id="288" r:id="rId7"/>
+    <p:sldId id="289" r:id="rId8"/>
+    <p:sldId id="287" r:id="rId9"/>
+    <p:sldId id="278" r:id="rId10"/>
+    <p:sldId id="285" r:id="rId11"/>
+    <p:sldId id="281" r:id="rId12"/>
+    <p:sldId id="283" r:id="rId13"/>
+    <p:sldId id="284" r:id="rId14"/>
+    <p:sldId id="280" r:id="rId15"/>
   </p:sldIdLst>
   <p:sldSz cx="12192000" cy="6858000"/>
   <p:notesSz cx="6858000" cy="9144000"/>
@@ -133,6 +134,11 @@
           </p15:clr>
         </p15:guide>
         <p15:guide id="6" pos="6879" userDrawn="1">
+          <p15:clr>
+            <a:srgbClr val="A4A3A4"/>
+          </p15:clr>
+        </p15:guide>
+        <p15:guide id="7" orient="horz" pos="2160">
           <p15:clr>
             <a:srgbClr val="A4A3A4"/>
           </p15:clr>
@@ -3778,7 +3784,13 @@
   <p:cSld>
     <p:spTree>
       <p:nvGrpSpPr>
-        <p:cNvPr id="1" name=""/>
+        <p:cNvPr id="1" name="">
+          <a:extLst>
+            <a:ext uri="{FF2B5EF4-FFF2-40B4-BE49-F238E27FC236}">
+              <a16:creationId xmlns:a16="http://schemas.microsoft.com/office/drawing/2014/main" id="{6D904611-22B7-C897-FE07-3BC9A8278594}"/>
+            </a:ext>
+          </a:extLst>
+        </p:cNvPr>
         <p:cNvGrpSpPr/>
         <p:nvPr/>
       </p:nvGrpSpPr>
@@ -3792,10 +3804,10 @@
       </p:grpSpPr>
       <p:sp>
         <p:nvSpPr>
-          <p:cNvPr id="2" name="Rectangle 1">
-            <a:extLst>
-              <a:ext uri="{FF2B5EF4-FFF2-40B4-BE49-F238E27FC236}">
-                <a16:creationId xmlns:a16="http://schemas.microsoft.com/office/drawing/2014/main" id="{0790007B-A357-4B57-78A4-232E36564773}"/>
+          <p:cNvPr id="16" name="Rectangle 15">
+            <a:extLst>
+              <a:ext uri="{FF2B5EF4-FFF2-40B4-BE49-F238E27FC236}">
+                <a16:creationId xmlns:a16="http://schemas.microsoft.com/office/drawing/2014/main" id="{C11CCDEF-8E46-CFF4-8380-6002CA5684C8}"/>
               </a:ext>
             </a:extLst>
           </p:cNvPr>
@@ -3804,8 +3816,54 @@
         </p:nvSpPr>
         <p:spPr>
           <a:xfrm>
-            <a:off x="360772" y="1092500"/>
-            <a:ext cx="1369714" cy="344274"/>
+            <a:off x="281781" y="2505544"/>
+            <a:ext cx="5457825" cy="4124325"/>
+          </a:xfrm>
+          <a:prstGeom prst="rect">
+            <a:avLst/>
+          </a:prstGeom>
+        </p:spPr>
+        <p:style>
+          <a:lnRef idx="2">
+            <a:schemeClr val="dk1">
+              <a:shade val="15000"/>
+            </a:schemeClr>
+          </a:lnRef>
+          <a:fillRef idx="1">
+            <a:schemeClr val="dk1"/>
+          </a:fillRef>
+          <a:effectRef idx="0">
+            <a:schemeClr val="dk1"/>
+          </a:effectRef>
+          <a:fontRef idx="minor">
+            <a:schemeClr val="lt1"/>
+          </a:fontRef>
+        </p:style>
+        <p:txBody>
+          <a:bodyPr rtlCol="0" anchor="ctr"/>
+          <a:lstStyle/>
+          <a:p>
+            <a:pPr algn="ctr"/>
+            <a:endParaRPr lang="en-US"/>
+          </a:p>
+        </p:txBody>
+      </p:sp>
+      <p:sp>
+        <p:nvSpPr>
+          <p:cNvPr id="12" name="Rectangle 11">
+            <a:extLst>
+              <a:ext uri="{FF2B5EF4-FFF2-40B4-BE49-F238E27FC236}">
+                <a16:creationId xmlns:a16="http://schemas.microsoft.com/office/drawing/2014/main" id="{1E841810-4848-ED1E-1246-A0F736CB5297}"/>
+              </a:ext>
+            </a:extLst>
+          </p:cNvPr>
+          <p:cNvSpPr/>
+          <p:nvPr/>
+        </p:nvSpPr>
+        <p:spPr>
+          <a:xfrm>
+            <a:off x="6734175" y="2816191"/>
+            <a:ext cx="1223963" cy="149432"/>
           </a:xfrm>
           <a:prstGeom prst="rect">
             <a:avLst/>
@@ -3817,13 +3875,6 @@
             <a:noFill/>
           </a:ln>
           <a:effectLst/>
-          <a:scene3d>
-            <a:camera prst="orthographicFront"/>
-            <a:lightRig rig="threePt" dir="t"/>
-          </a:scene3d>
-          <a:sp3d>
-            <a:bevelT w="38100" h="38100"/>
-          </a:sp3d>
         </p:spPr>
         <p:style>
           <a:lnRef idx="2">
@@ -3856,10 +3907,10 @@
       </p:sp>
       <p:sp>
         <p:nvSpPr>
-          <p:cNvPr id="7" name="Rectangle 6">
-            <a:extLst>
-              <a:ext uri="{FF2B5EF4-FFF2-40B4-BE49-F238E27FC236}">
-                <a16:creationId xmlns:a16="http://schemas.microsoft.com/office/drawing/2014/main" id="{FCCA1E21-6188-91EC-55DD-AFA17BF25096}"/>
+          <p:cNvPr id="13" name="Rectangle 12">
+            <a:extLst>
+              <a:ext uri="{FF2B5EF4-FFF2-40B4-BE49-F238E27FC236}">
+                <a16:creationId xmlns:a16="http://schemas.microsoft.com/office/drawing/2014/main" id="{297E3C51-792E-71C4-3609-9989C2BF0F77}"/>
               </a:ext>
             </a:extLst>
           </p:cNvPr>
@@ -3868,8 +3919,8 @@
         </p:nvSpPr>
         <p:spPr>
           <a:xfrm>
-            <a:off x="1653019" y="651605"/>
-            <a:ext cx="1369714" cy="344274"/>
+            <a:off x="7958138" y="2659139"/>
+            <a:ext cx="1368425" cy="149432"/>
           </a:xfrm>
           <a:prstGeom prst="rect">
             <a:avLst/>
@@ -3881,13 +3932,6 @@
             <a:noFill/>
           </a:ln>
           <a:effectLst/>
-          <a:scene3d>
-            <a:camera prst="orthographicFront"/>
-            <a:lightRig rig="threePt" dir="t"/>
-          </a:scene3d>
-          <a:sp3d>
-            <a:bevelT w="38100" h="38100"/>
-          </a:sp3d>
         </p:spPr>
         <p:style>
           <a:lnRef idx="2">
@@ -3920,10 +3964,10 @@
       </p:sp>
       <p:sp>
         <p:nvSpPr>
-          <p:cNvPr id="8" name="Rectangle 7">
-            <a:extLst>
-              <a:ext uri="{FF2B5EF4-FFF2-40B4-BE49-F238E27FC236}">
-                <a16:creationId xmlns:a16="http://schemas.microsoft.com/office/drawing/2014/main" id="{CCA5CC92-0E8C-3A05-9D13-FC9809C34F46}"/>
+          <p:cNvPr id="14" name="Rectangle 13">
+            <a:extLst>
+              <a:ext uri="{FF2B5EF4-FFF2-40B4-BE49-F238E27FC236}">
+                <a16:creationId xmlns:a16="http://schemas.microsoft.com/office/drawing/2014/main" id="{DA72054A-4C5B-7E2D-91D3-4A22A50AFE79}"/>
               </a:ext>
             </a:extLst>
           </p:cNvPr>
@@ -3932,8 +3976,8 @@
         </p:nvSpPr>
         <p:spPr>
           <a:xfrm>
-            <a:off x="2945266" y="210710"/>
-            <a:ext cx="1369711" cy="344274"/>
+            <a:off x="9326564" y="2502087"/>
+            <a:ext cx="1377950" cy="149432"/>
           </a:xfrm>
           <a:prstGeom prst="rect">
             <a:avLst/>
@@ -3957,13 +4001,6 @@
             <a:noFill/>
           </a:ln>
           <a:effectLst/>
-          <a:scene3d>
-            <a:camera prst="orthographicFront"/>
-            <a:lightRig rig="threePt" dir="t"/>
-          </a:scene3d>
-          <a:sp3d>
-            <a:bevelT w="38100" h="38100"/>
-          </a:sp3d>
         </p:spPr>
         <p:style>
           <a:lnRef idx="2">
@@ -3992,10 +4029,10 @@
       </p:sp>
       <p:sp>
         <p:nvSpPr>
-          <p:cNvPr id="10" name="TextBox 9">
-            <a:extLst>
-              <a:ext uri="{FF2B5EF4-FFF2-40B4-BE49-F238E27FC236}">
-                <a16:creationId xmlns:a16="http://schemas.microsoft.com/office/drawing/2014/main" id="{16215508-3A0A-1CE0-992D-C9436CF87A12}"/>
+          <p:cNvPr id="15" name="TextBox 14">
+            <a:extLst>
+              <a:ext uri="{FF2B5EF4-FFF2-40B4-BE49-F238E27FC236}">
+                <a16:creationId xmlns:a16="http://schemas.microsoft.com/office/drawing/2014/main" id="{83D28326-DFEC-DA4A-7F24-5593A0F2707D}"/>
               </a:ext>
             </a:extLst>
           </p:cNvPr>
@@ -4004,7 +4041,7 @@
         </p:nvSpPr>
         <p:spPr>
           <a:xfrm>
-            <a:off x="222076" y="1436774"/>
+            <a:off x="6606889" y="2855133"/>
             <a:ext cx="4253087" cy="1200329"/>
           </a:xfrm>
           <a:prstGeom prst="rect">
@@ -4023,9 +4060,7 @@
               <a:camera prst="orthographicFront"/>
               <a:lightRig rig="threePt" dir="t"/>
             </a:scene3d>
-            <a:sp3d extrusionH="38100">
-              <a:bevelT w="38100" h="38100"/>
-            </a:sp3d>
+            <a:sp3d extrusionH="38100"/>
           </a:bodyPr>
           <a:lstStyle/>
           <a:p>
@@ -4070,10 +4105,380 @@
       </p:sp>
       <p:sp>
         <p:nvSpPr>
-          <p:cNvPr id="12" name="Rectangle 11">
-            <a:extLst>
-              <a:ext uri="{FF2B5EF4-FFF2-40B4-BE49-F238E27FC236}">
-                <a16:creationId xmlns:a16="http://schemas.microsoft.com/office/drawing/2014/main" id="{9CAC2087-984E-8361-8AA7-5069B4A7EBA9}"/>
+          <p:cNvPr id="19" name="TextBox 18">
+            <a:extLst>
+              <a:ext uri="{FF2B5EF4-FFF2-40B4-BE49-F238E27FC236}">
+                <a16:creationId xmlns:a16="http://schemas.microsoft.com/office/drawing/2014/main" id="{E5ECF1B9-269C-2F29-E619-FC104AAEEE14}"/>
+              </a:ext>
+            </a:extLst>
+          </p:cNvPr>
+          <p:cNvSpPr txBox="1"/>
+          <p:nvPr/>
+        </p:nvSpPr>
+        <p:spPr>
+          <a:xfrm>
+            <a:off x="6713538" y="3578479"/>
+            <a:ext cx="4411662" cy="830997"/>
+          </a:xfrm>
+          <a:prstGeom prst="rect">
+            <a:avLst/>
+          </a:prstGeom>
+          <a:noFill/>
+          <a:ln>
+            <a:noFill/>
+          </a:ln>
+          <a:effectLst>
+            <a:outerShdw blurRad="44450" dist="27940" dir="5400000" algn="ctr">
+              <a:srgbClr val="000000">
+                <a:alpha val="32000"/>
+              </a:srgbClr>
+            </a:outerShdw>
+          </a:effectLst>
+          <a:scene3d>
+            <a:camera prst="orthographicFront">
+              <a:rot lat="0" lon="0" rev="0"/>
+            </a:camera>
+            <a:lightRig rig="balanced" dir="t">
+              <a:rot lat="0" lon="0" rev="8700000"/>
+            </a:lightRig>
+          </a:scene3d>
+          <a:sp3d>
+            <a:bevelT w="190500" h="38100"/>
+          </a:sp3d>
+        </p:spPr>
+        <p:txBody>
+          <a:bodyPr wrap="square" lIns="0" tIns="0" rIns="0" bIns="0" rtlCol="0">
+            <a:spAutoFit/>
+          </a:bodyPr>
+          <a:lstStyle/>
+          <a:p>
+            <a:pPr algn="just"/>
+            <a:r>
+              <a:rPr lang="en-US" sz="5400" b="1" spc="780" dirty="0">
+                <a:solidFill>
+                  <a:srgbClr val="97258F"/>
+                </a:solidFill>
+                <a:latin typeface="Engravers MT" panose="02090707080505020304" pitchFamily="18" charset="0"/>
+              </a:rPr>
+              <a:t>Engine</a:t>
+            </a:r>
+          </a:p>
+        </p:txBody>
+      </p:sp>
+      <p:grpSp>
+        <p:nvGrpSpPr>
+          <p:cNvPr id="22" name="Group 21">
+            <a:extLst>
+              <a:ext uri="{FF2B5EF4-FFF2-40B4-BE49-F238E27FC236}">
+                <a16:creationId xmlns:a16="http://schemas.microsoft.com/office/drawing/2014/main" id="{BD416BCF-2AB3-DE6D-7506-2400C457EE20}"/>
+              </a:ext>
+            </a:extLst>
+          </p:cNvPr>
+          <p:cNvGrpSpPr/>
+          <p:nvPr/>
+        </p:nvGrpSpPr>
+        <p:grpSpPr>
+          <a:xfrm>
+            <a:off x="769938" y="598525"/>
+            <a:ext cx="4253087" cy="1538135"/>
+            <a:chOff x="769938" y="598525"/>
+            <a:chExt cx="4253087" cy="1538135"/>
+          </a:xfrm>
+        </p:grpSpPr>
+        <p:sp>
+          <p:nvSpPr>
+            <p:cNvPr id="8" name="Rectangle 7">
+              <a:extLst>
+                <a:ext uri="{FF2B5EF4-FFF2-40B4-BE49-F238E27FC236}">
+                  <a16:creationId xmlns:a16="http://schemas.microsoft.com/office/drawing/2014/main" id="{583C051B-A39B-AC04-76B0-DC200FAC2D8B}"/>
+                </a:ext>
+              </a:extLst>
+            </p:cNvPr>
+            <p:cNvSpPr/>
+            <p:nvPr/>
+          </p:nvSpPr>
+          <p:spPr>
+            <a:xfrm>
+              <a:off x="897224" y="897389"/>
+              <a:ext cx="1223963" cy="149432"/>
+            </a:xfrm>
+            <a:prstGeom prst="rect">
+              <a:avLst/>
+            </a:prstGeom>
+            <a:solidFill>
+              <a:schemeClr val="tx2">
+                <a:lumMod val="50000"/>
+                <a:lumOff val="50000"/>
+              </a:schemeClr>
+            </a:solidFill>
+            <a:ln w="3175">
+              <a:noFill/>
+            </a:ln>
+            <a:effectLst>
+              <a:outerShdw blurRad="57785" dist="33020" dir="3180000" algn="ctr">
+                <a:srgbClr val="000000">
+                  <a:alpha val="30000"/>
+                </a:srgbClr>
+              </a:outerShdw>
+            </a:effectLst>
+          </p:spPr>
+          <p:style>
+            <a:lnRef idx="2">
+              <a:schemeClr val="accent1">
+                <a:shade val="15000"/>
+              </a:schemeClr>
+            </a:lnRef>
+            <a:fillRef idx="1">
+              <a:schemeClr val="accent1"/>
+            </a:fillRef>
+            <a:effectRef idx="0">
+              <a:schemeClr val="accent1"/>
+            </a:effectRef>
+            <a:fontRef idx="minor">
+              <a:schemeClr val="lt1"/>
+            </a:fontRef>
+          </p:style>
+          <p:txBody>
+            <a:bodyPr rtlCol="0" anchor="ctr"/>
+            <a:lstStyle/>
+            <a:p>
+              <a:pPr algn="ctr"/>
+              <a:endParaRPr lang="en-150">
+                <a:ln w="3175">
+                  <a:solidFill>
+                    <a:schemeClr val="bg1">
+                      <a:lumMod val="95000"/>
+                    </a:schemeClr>
+                  </a:solidFill>
+                </a:ln>
+                <a:solidFill>
+                  <a:srgbClr val="1A1F71"/>
+                </a:solidFill>
+              </a:endParaRPr>
+            </a:p>
+          </p:txBody>
+        </p:sp>
+        <p:sp>
+          <p:nvSpPr>
+            <p:cNvPr id="9" name="Rectangle 8">
+              <a:extLst>
+                <a:ext uri="{FF2B5EF4-FFF2-40B4-BE49-F238E27FC236}">
+                  <a16:creationId xmlns:a16="http://schemas.microsoft.com/office/drawing/2014/main" id="{4A100315-569F-0257-8A1C-6DABADA772E4}"/>
+                </a:ext>
+              </a:extLst>
+            </p:cNvPr>
+            <p:cNvSpPr/>
+            <p:nvPr/>
+          </p:nvSpPr>
+          <p:spPr>
+            <a:xfrm>
+              <a:off x="2121187" y="747957"/>
+              <a:ext cx="1368425" cy="149432"/>
+            </a:xfrm>
+            <a:prstGeom prst="rect">
+              <a:avLst/>
+            </a:prstGeom>
+            <a:solidFill>
+              <a:schemeClr val="tx2">
+                <a:lumMod val="50000"/>
+                <a:lumOff val="50000"/>
+              </a:schemeClr>
+            </a:solidFill>
+            <a:ln w="3175">
+              <a:noFill/>
+            </a:ln>
+            <a:effectLst>
+              <a:outerShdw blurRad="57785" dist="33020" dir="3180000" algn="ctr">
+                <a:srgbClr val="000000">
+                  <a:alpha val="30000"/>
+                </a:srgbClr>
+              </a:outerShdw>
+            </a:effectLst>
+          </p:spPr>
+          <p:style>
+            <a:lnRef idx="2">
+              <a:schemeClr val="accent1">
+                <a:shade val="15000"/>
+              </a:schemeClr>
+            </a:lnRef>
+            <a:fillRef idx="1">
+              <a:schemeClr val="accent1"/>
+            </a:fillRef>
+            <a:effectRef idx="0">
+              <a:schemeClr val="accent1"/>
+            </a:effectRef>
+            <a:fontRef idx="minor">
+              <a:schemeClr val="lt1"/>
+            </a:fontRef>
+          </p:style>
+          <p:txBody>
+            <a:bodyPr rtlCol="0" anchor="ctr"/>
+            <a:lstStyle/>
+            <a:p>
+              <a:pPr algn="ctr"/>
+              <a:endParaRPr lang="en-150">
+                <a:ln w="3175">
+                  <a:solidFill>
+                    <a:schemeClr val="bg1">
+                      <a:lumMod val="95000"/>
+                    </a:schemeClr>
+                  </a:solidFill>
+                </a:ln>
+                <a:solidFill>
+                  <a:srgbClr val="1A1F71"/>
+                </a:solidFill>
+              </a:endParaRPr>
+            </a:p>
+          </p:txBody>
+        </p:sp>
+        <p:sp>
+          <p:nvSpPr>
+            <p:cNvPr id="11" name="TextBox 10">
+              <a:extLst>
+                <a:ext uri="{FF2B5EF4-FFF2-40B4-BE49-F238E27FC236}">
+                  <a16:creationId xmlns:a16="http://schemas.microsoft.com/office/drawing/2014/main" id="{32F225EA-5826-AB82-F3AE-714C3CD68F5D}"/>
+                </a:ext>
+              </a:extLst>
+            </p:cNvPr>
+            <p:cNvSpPr txBox="1"/>
+            <p:nvPr/>
+          </p:nvSpPr>
+          <p:spPr>
+            <a:xfrm>
+              <a:off x="769938" y="936331"/>
+              <a:ext cx="4253087" cy="1200329"/>
+            </a:xfrm>
+            <a:prstGeom prst="rect">
+              <a:avLst/>
+            </a:prstGeom>
+            <a:noFill/>
+            <a:ln>
+              <a:noFill/>
+            </a:ln>
+            <a:effectLst>
+              <a:outerShdw blurRad="57785" dist="33020" dir="3180000" algn="ctr">
+                <a:srgbClr val="000000">
+                  <a:alpha val="30000"/>
+                </a:srgbClr>
+              </a:outerShdw>
+            </a:effectLst>
+          </p:spPr>
+          <p:txBody>
+            <a:bodyPr wrap="none" rtlCol="0">
+              <a:spAutoFit/>
+              <a:sp3d extrusionH="38100">
+                <a:bevelT w="38100" h="38100"/>
+              </a:sp3d>
+            </a:bodyPr>
+            <a:lstStyle/>
+            <a:p>
+              <a:r>
+                <a:rPr lang="en-US" sz="7200" dirty="0">
+                  <a:ln w="3175">
+                    <a:noFill/>
+                  </a:ln>
+                  <a:solidFill>
+                    <a:schemeClr val="tx2">
+                      <a:lumMod val="50000"/>
+                      <a:lumOff val="50000"/>
+                    </a:schemeClr>
+                  </a:solidFill>
+                  <a:latin typeface="Aafia" pitchFamily="50" charset="0"/>
+                </a:rPr>
+                <a:t>LaDe</a:t>
+              </a:r>
+              <a:r>
+                <a:rPr lang="en-US" sz="7200" dirty="0">
+                  <a:ln w="3175">
+                    <a:noFill/>
+                  </a:ln>
+                  <a:solidFill>
+                    <a:srgbClr val="FFD700"/>
+                  </a:solidFill>
+                  <a:latin typeface="Aafia" pitchFamily="50" charset="0"/>
+                </a:rPr>
+                <a:t>RR</a:t>
+              </a:r>
+            </a:p>
+          </p:txBody>
+        </p:sp>
+        <p:sp>
+          <p:nvSpPr>
+            <p:cNvPr id="2" name="Rectangle 1">
+              <a:extLst>
+                <a:ext uri="{FF2B5EF4-FFF2-40B4-BE49-F238E27FC236}">
+                  <a16:creationId xmlns:a16="http://schemas.microsoft.com/office/drawing/2014/main" id="{CC599F07-BDC7-721F-E751-2A5581B06BF2}"/>
+                </a:ext>
+              </a:extLst>
+            </p:cNvPr>
+            <p:cNvSpPr/>
+            <p:nvPr/>
+          </p:nvSpPr>
+          <p:spPr>
+            <a:xfrm>
+              <a:off x="3489612" y="598525"/>
+              <a:ext cx="1377950" cy="149432"/>
+            </a:xfrm>
+            <a:prstGeom prst="rect">
+              <a:avLst/>
+            </a:prstGeom>
+            <a:solidFill>
+              <a:srgbClr val="FFD700"/>
+            </a:solidFill>
+            <a:ln w="3175">
+              <a:noFill/>
+            </a:ln>
+            <a:effectLst>
+              <a:outerShdw blurRad="57785" dist="33020" dir="3180000" algn="ctr">
+                <a:srgbClr val="000000">
+                  <a:alpha val="30000"/>
+                </a:srgbClr>
+              </a:outerShdw>
+            </a:effectLst>
+          </p:spPr>
+          <p:style>
+            <a:lnRef idx="2">
+              <a:schemeClr val="accent1">
+                <a:shade val="15000"/>
+              </a:schemeClr>
+            </a:lnRef>
+            <a:fillRef idx="1">
+              <a:schemeClr val="accent1"/>
+            </a:fillRef>
+            <a:effectRef idx="0">
+              <a:schemeClr val="accent1"/>
+            </a:effectRef>
+            <a:fontRef idx="minor">
+              <a:schemeClr val="lt1"/>
+            </a:fontRef>
+          </p:style>
+          <p:txBody>
+            <a:bodyPr rtlCol="0" anchor="ctr"/>
+            <a:lstStyle/>
+            <a:p>
+              <a:pPr algn="ctr"/>
+              <a:endParaRPr lang="en-150">
+                <a:ln w="3175">
+                  <a:solidFill>
+                    <a:schemeClr val="bg1">
+                      <a:lumMod val="95000"/>
+                    </a:schemeClr>
+                  </a:solidFill>
+                </a:ln>
+                <a:solidFill>
+                  <a:srgbClr val="1A1F71"/>
+                </a:solidFill>
+              </a:endParaRPr>
+            </a:p>
+          </p:txBody>
+        </p:sp>
+      </p:grpSp>
+      <p:sp>
+        <p:nvSpPr>
+          <p:cNvPr id="3" name="Rectangle 2">
+            <a:extLst>
+              <a:ext uri="{FF2B5EF4-FFF2-40B4-BE49-F238E27FC236}">
+                <a16:creationId xmlns:a16="http://schemas.microsoft.com/office/drawing/2014/main" id="{A11DAC5B-9CC5-FEE0-8E9D-184ED91E9D7A}"/>
               </a:ext>
             </a:extLst>
           </p:cNvPr>
@@ -4082,26 +4487,25 @@
         </p:nvSpPr>
         <p:spPr>
           <a:xfrm>
-            <a:off x="4631035" y="3406209"/>
-            <a:ext cx="1369714" cy="344274"/>
+            <a:off x="6840824" y="5390598"/>
+            <a:ext cx="1223963" cy="149432"/>
           </a:xfrm>
           <a:prstGeom prst="rect">
             <a:avLst/>
           </a:prstGeom>
           <a:solidFill>
-            <a:srgbClr val="1A1F71"/>
+            <a:srgbClr val="20257A"/>
           </a:solidFill>
           <a:ln w="3175">
             <a:noFill/>
           </a:ln>
-          <a:effectLst/>
-          <a:scene3d>
-            <a:camera prst="orthographicFront"/>
-            <a:lightRig rig="threePt" dir="t"/>
-          </a:scene3d>
-          <a:sp3d>
-            <a:bevelT w="38100" h="38100"/>
-          </a:sp3d>
+          <a:effectLst>
+            <a:outerShdw blurRad="57785" dist="33020" dir="3180000" algn="ctr">
+              <a:srgbClr val="000000">
+                <a:alpha val="30000"/>
+              </a:srgbClr>
+            </a:outerShdw>
+          </a:effectLst>
         </p:spPr>
         <p:style>
           <a:lnRef idx="2">
@@ -4125,6 +4529,13 @@
           <a:p>
             <a:pPr algn="ctr"/>
             <a:endParaRPr lang="en-150">
+              <a:ln w="3175">
+                <a:solidFill>
+                  <a:schemeClr val="bg1">
+                    <a:lumMod val="95000"/>
+                  </a:schemeClr>
+                </a:solidFill>
+              </a:ln>
               <a:solidFill>
                 <a:srgbClr val="1A1F71"/>
               </a:solidFill>
@@ -4134,10 +4545,10 @@
       </p:sp>
       <p:sp>
         <p:nvSpPr>
-          <p:cNvPr id="13" name="Rectangle 12">
-            <a:extLst>
-              <a:ext uri="{FF2B5EF4-FFF2-40B4-BE49-F238E27FC236}">
-                <a16:creationId xmlns:a16="http://schemas.microsoft.com/office/drawing/2014/main" id="{4F59E804-2126-BFC0-656D-64639999D240}"/>
+          <p:cNvPr id="4" name="Rectangle 3">
+            <a:extLst>
+              <a:ext uri="{FF2B5EF4-FFF2-40B4-BE49-F238E27FC236}">
+                <a16:creationId xmlns:a16="http://schemas.microsoft.com/office/drawing/2014/main" id="{598393B8-00F4-88EF-3020-6856033B1898}"/>
               </a:ext>
             </a:extLst>
           </p:cNvPr>
@@ -4146,26 +4557,25 @@
         </p:nvSpPr>
         <p:spPr>
           <a:xfrm>
-            <a:off x="5923282" y="2965314"/>
-            <a:ext cx="1369714" cy="344274"/>
+            <a:off x="8064787" y="5241166"/>
+            <a:ext cx="1368425" cy="149432"/>
           </a:xfrm>
           <a:prstGeom prst="rect">
             <a:avLst/>
           </a:prstGeom>
           <a:solidFill>
-            <a:srgbClr val="1A1F71"/>
+            <a:srgbClr val="20257A"/>
           </a:solidFill>
           <a:ln w="3175">
             <a:noFill/>
           </a:ln>
-          <a:effectLst/>
-          <a:scene3d>
-            <a:camera prst="orthographicFront"/>
-            <a:lightRig rig="threePt" dir="t"/>
-          </a:scene3d>
-          <a:sp3d>
-            <a:bevelT w="38100" h="38100"/>
-          </a:sp3d>
+          <a:effectLst>
+            <a:outerShdw blurRad="57785" dist="33020" dir="3180000" algn="ctr">
+              <a:srgbClr val="000000">
+                <a:alpha val="30000"/>
+              </a:srgbClr>
+            </a:outerShdw>
+          </a:effectLst>
         </p:spPr>
         <p:style>
           <a:lnRef idx="2">
@@ -4189,6 +4599,13 @@
           <a:p>
             <a:pPr algn="ctr"/>
             <a:endParaRPr lang="en-150">
+              <a:ln w="3175">
+                <a:solidFill>
+                  <a:schemeClr val="bg1">
+                    <a:lumMod val="95000"/>
+                  </a:schemeClr>
+                </a:solidFill>
+              </a:ln>
               <a:solidFill>
                 <a:srgbClr val="1A1F71"/>
               </a:solidFill>
@@ -4198,50 +4615,105 @@
       </p:sp>
       <p:sp>
         <p:nvSpPr>
-          <p:cNvPr id="14" name="Rectangle 13">
-            <a:extLst>
-              <a:ext uri="{FF2B5EF4-FFF2-40B4-BE49-F238E27FC236}">
-                <a16:creationId xmlns:a16="http://schemas.microsoft.com/office/drawing/2014/main" id="{938D17EA-7F47-76FE-D657-BC3E63D2D725}"/>
-              </a:ext>
-            </a:extLst>
-          </p:cNvPr>
-          <p:cNvSpPr/>
+          <p:cNvPr id="5" name="TextBox 4">
+            <a:extLst>
+              <a:ext uri="{FF2B5EF4-FFF2-40B4-BE49-F238E27FC236}">
+                <a16:creationId xmlns:a16="http://schemas.microsoft.com/office/drawing/2014/main" id="{C582EF64-327A-5D40-5CCA-0FB407145FE3}"/>
+              </a:ext>
+            </a:extLst>
+          </p:cNvPr>
+          <p:cNvSpPr txBox="1"/>
           <p:nvPr/>
         </p:nvSpPr>
         <p:spPr>
           <a:xfrm>
-            <a:off x="7215529" y="2524419"/>
-            <a:ext cx="1369711" cy="344274"/>
+            <a:off x="6713538" y="5429540"/>
+            <a:ext cx="4253087" cy="1200329"/>
           </a:xfrm>
           <a:prstGeom prst="rect">
             <a:avLst/>
           </a:prstGeom>
-          <a:gradFill flip="none" rotWithShape="1">
-            <a:gsLst>
-              <a:gs pos="0">
-                <a:srgbClr val="FFD700"/>
-              </a:gs>
-              <a:gs pos="78000">
-                <a:srgbClr val="FFD700"/>
-              </a:gs>
-              <a:gs pos="100000">
-                <a:schemeClr val="bg1"/>
-              </a:gs>
-            </a:gsLst>
-            <a:lin ang="18900000" scaled="1"/>
-            <a:tileRect/>
-          </a:gradFill>
+          <a:noFill/>
+          <a:ln>
+            <a:noFill/>
+          </a:ln>
+          <a:effectLst>
+            <a:outerShdw blurRad="57785" dist="33020" dir="3180000" algn="ctr">
+              <a:srgbClr val="000000">
+                <a:alpha val="30000"/>
+              </a:srgbClr>
+            </a:outerShdw>
+          </a:effectLst>
+        </p:spPr>
+        <p:txBody>
+          <a:bodyPr wrap="none" rtlCol="0">
+            <a:spAutoFit/>
+            <a:sp3d extrusionH="38100">
+              <a:bevelT w="38100" h="38100"/>
+            </a:sp3d>
+          </a:bodyPr>
+          <a:lstStyle/>
+          <a:p>
+            <a:r>
+              <a:rPr lang="en-US" sz="7200" dirty="0">
+                <a:ln w="3175">
+                  <a:noFill/>
+                </a:ln>
+                <a:solidFill>
+                  <a:srgbClr val="20257A"/>
+                </a:solidFill>
+                <a:latin typeface="Aafia" pitchFamily="50" charset="0"/>
+              </a:rPr>
+              <a:t>LaDe</a:t>
+            </a:r>
+            <a:r>
+              <a:rPr lang="en-US" sz="7200" dirty="0">
+                <a:ln w="3175">
+                  <a:noFill/>
+                </a:ln>
+                <a:solidFill>
+                  <a:srgbClr val="FFD700"/>
+                </a:solidFill>
+                <a:latin typeface="Aafia" pitchFamily="50" charset="0"/>
+              </a:rPr>
+              <a:t>RR</a:t>
+            </a:r>
+          </a:p>
+        </p:txBody>
+      </p:sp>
+      <p:sp>
+        <p:nvSpPr>
+          <p:cNvPr id="6" name="Rectangle 5">
+            <a:extLst>
+              <a:ext uri="{FF2B5EF4-FFF2-40B4-BE49-F238E27FC236}">
+                <a16:creationId xmlns:a16="http://schemas.microsoft.com/office/drawing/2014/main" id="{12008EE8-3E47-C031-AE6D-B07E0626F8DC}"/>
+              </a:ext>
+            </a:extLst>
+          </p:cNvPr>
+          <p:cNvSpPr/>
+          <p:nvPr/>
+        </p:nvSpPr>
+        <p:spPr>
+          <a:xfrm>
+            <a:off x="9433212" y="5091734"/>
+            <a:ext cx="1377950" cy="149432"/>
+          </a:xfrm>
+          <a:prstGeom prst="rect">
+            <a:avLst/>
+          </a:prstGeom>
+          <a:solidFill>
+            <a:srgbClr val="FFD700"/>
+          </a:solidFill>
           <a:ln w="3175">
             <a:noFill/>
           </a:ln>
-          <a:effectLst/>
-          <a:scene3d>
-            <a:camera prst="orthographicFront"/>
-            <a:lightRig rig="threePt" dir="t"/>
-          </a:scene3d>
-          <a:sp3d>
-            <a:bevelT w="38100" h="38100"/>
-          </a:sp3d>
+          <a:effectLst>
+            <a:outerShdw blurRad="57785" dist="33020" dir="3180000" algn="ctr">
+              <a:srgbClr val="000000">
+                <a:alpha val="30000"/>
+              </a:srgbClr>
+            </a:outerShdw>
+          </a:effectLst>
         </p:spPr>
         <p:style>
           <a:lnRef idx="2">
@@ -4264,156 +4736,17 @@
           <a:lstStyle/>
           <a:p>
             <a:pPr algn="ctr"/>
-            <a:endParaRPr lang="en-150"/>
-          </a:p>
-        </p:txBody>
-      </p:sp>
-      <p:sp>
-        <p:nvSpPr>
-          <p:cNvPr id="15" name="TextBox 14">
-            <a:extLst>
-              <a:ext uri="{FF2B5EF4-FFF2-40B4-BE49-F238E27FC236}">
-                <a16:creationId xmlns:a16="http://schemas.microsoft.com/office/drawing/2014/main" id="{CCF7D246-09BA-86BB-511B-13F366C83E28}"/>
-              </a:ext>
-            </a:extLst>
-          </p:cNvPr>
-          <p:cNvSpPr txBox="1"/>
-          <p:nvPr/>
-        </p:nvSpPr>
-        <p:spPr>
-          <a:xfrm>
-            <a:off x="4492339" y="3750483"/>
-            <a:ext cx="4253087" cy="1200329"/>
-          </a:xfrm>
-          <a:prstGeom prst="rect">
-            <a:avLst/>
-          </a:prstGeom>
-          <a:noFill/>
-          <a:ln>
-            <a:noFill/>
-          </a:ln>
-          <a:effectLst/>
-        </p:spPr>
-        <p:txBody>
-          <a:bodyPr wrap="none" rtlCol="0">
-            <a:spAutoFit/>
-            <a:scene3d>
-              <a:camera prst="orthographicFront"/>
-              <a:lightRig rig="threePt" dir="t"/>
-            </a:scene3d>
-            <a:sp3d extrusionH="38100">
-              <a:bevelT w="38100" h="38100"/>
-            </a:sp3d>
-          </a:bodyPr>
-          <a:lstStyle/>
-          <a:p>
-            <a:r>
-              <a:rPr lang="en-US" sz="7200" dirty="0">
-                <a:ln w="3175">
-                  <a:noFill/>
-                </a:ln>
+            <a:endParaRPr lang="en-150">
+              <a:ln w="3175">
                 <a:solidFill>
-                  <a:srgbClr val="1A1F71"/>
+                  <a:schemeClr val="bg1">
+                    <a:lumMod val="95000"/>
+                  </a:schemeClr>
                 </a:solidFill>
-                <a:latin typeface="Aafia" pitchFamily="50" charset="0"/>
-              </a:rPr>
-              <a:t>LaDe</a:t>
-            </a:r>
-            <a:r>
-              <a:rPr lang="en-US" sz="7200" dirty="0">
-                <a:ln w="3175">
-                  <a:noFill/>
-                </a:ln>
-                <a:gradFill flip="none" rotWithShape="1">
-                  <a:gsLst>
-                    <a:gs pos="80000">
-                      <a:srgbClr val="FFD700"/>
-                    </a:gs>
-                    <a:gs pos="0">
-                      <a:srgbClr val="FFD700"/>
-                    </a:gs>
-                    <a:gs pos="100000">
-                      <a:schemeClr val="bg1"/>
-                    </a:gs>
-                  </a:gsLst>
-                  <a:lin ang="18900000" scaled="1"/>
-                  <a:tileRect/>
-                </a:gradFill>
-                <a:latin typeface="Aafia" pitchFamily="50" charset="0"/>
-              </a:rPr>
-              <a:t>RR</a:t>
-            </a:r>
-          </a:p>
-        </p:txBody>
-      </p:sp>
-      <p:sp>
-        <p:nvSpPr>
-          <p:cNvPr id="3" name="TextBox 2">
-            <a:extLst>
-              <a:ext uri="{FF2B5EF4-FFF2-40B4-BE49-F238E27FC236}">
-                <a16:creationId xmlns:a16="http://schemas.microsoft.com/office/drawing/2014/main" id="{61F49C8A-697E-66B4-489E-AA7D4C7F18F2}"/>
-              </a:ext>
-            </a:extLst>
-          </p:cNvPr>
-          <p:cNvSpPr txBox="1"/>
-          <p:nvPr/>
-        </p:nvSpPr>
-        <p:spPr>
-          <a:xfrm>
-            <a:off x="7215529" y="4024736"/>
-            <a:ext cx="2812272" cy="1323439"/>
-          </a:xfrm>
-          <a:prstGeom prst="rect">
-            <a:avLst/>
-          </a:prstGeom>
-          <a:noFill/>
-        </p:spPr>
-        <p:txBody>
-          <a:bodyPr wrap="square" rtlCol="0">
-            <a:spAutoFit/>
-            <a:scene3d>
-              <a:camera prst="isometricRightUp"/>
-              <a:lightRig rig="threePt" dir="t"/>
-            </a:scene3d>
-          </a:bodyPr>
-          <a:lstStyle/>
-          <a:p>
-            <a:r>
-              <a:rPr lang="en-US" sz="8000" b="1" dirty="0">
-                <a:ln w="19050">
-                  <a:noFill/>
-                </a:ln>
-                <a:solidFill>
-                  <a:srgbClr val="FE02EC"/>
-                </a:solidFill>
-                <a:effectLst>
-                  <a:outerShdw blurRad="50800" dist="38100" algn="l" rotWithShape="0">
-                    <a:prstClr val="black">
-                      <a:alpha val="40000"/>
-                    </a:prstClr>
-                  </a:outerShdw>
-                </a:effectLst>
-                <a:latin typeface="always  forever" pitchFamily="2" charset="0"/>
-                <a:cs typeface="Libertinus Keyboard" pitchFamily="50" charset="-79"/>
-              </a:rPr>
-              <a:t>Python Lib</a:t>
-            </a:r>
-            <a:endParaRPr lang="en-150" sz="8000" b="1" dirty="0">
-              <a:ln w="19050">
-                <a:noFill/>
               </a:ln>
               <a:solidFill>
-                <a:srgbClr val="FE02EC"/>
+                <a:srgbClr val="1A1F71"/>
               </a:solidFill>
-              <a:effectLst>
-                <a:outerShdw blurRad="50800" dist="38100" algn="l" rotWithShape="0">
-                  <a:prstClr val="black">
-                    <a:alpha val="40000"/>
-                  </a:prstClr>
-                </a:outerShdw>
-              </a:effectLst>
-              <a:latin typeface="always  forever" pitchFamily="2" charset="0"/>
-              <a:cs typeface="Libertinus Keyboard" pitchFamily="50" charset="-79"/>
             </a:endParaRPr>
           </a:p>
         </p:txBody>
@@ -4421,7 +4754,7 @@
     </p:spTree>
     <p:extLst>
       <p:ext uri="{BB962C8B-B14F-4D97-AF65-F5344CB8AC3E}">
-        <p14:creationId xmlns:p14="http://schemas.microsoft.com/office/powerpoint/2010/main" val="2648620447"/>
+        <p14:creationId xmlns:p14="http://schemas.microsoft.com/office/powerpoint/2010/main" val="1312158596"/>
       </p:ext>
     </p:extLst>
   </p:cSld>
@@ -4432,7 +4765,697 @@
 </file>
 
 <file path=ppt/slides/slide10.xml><?xml version="1.0" encoding="utf-8"?>
-<p:sld xmlns:a="http://schemas.openxmlformats.org/drawingml/2006/main" xmlns:r="http://schemas.openxmlformats.org/officeDocument/2006/relationships" xmlns:p="http://schemas.openxmlformats.org/presentationml/2006/main">
+<p:sld xmlns:a="http://schemas.openxmlformats.org/drawingml/2006/main" xmlns:r="http://schemas.openxmlformats.org/officeDocument/2006/relationships" xmlns:p="http://schemas.openxmlformats.org/presentationml/2006/main" show="0">
+  <p:cSld>
+    <p:spTree>
+      <p:nvGrpSpPr>
+        <p:cNvPr id="1" name=""/>
+        <p:cNvGrpSpPr/>
+        <p:nvPr/>
+      </p:nvGrpSpPr>
+      <p:grpSpPr>
+        <a:xfrm>
+          <a:off x="0" y="0"/>
+          <a:ext cx="0" cy="0"/>
+          <a:chOff x="0" y="0"/>
+          <a:chExt cx="0" cy="0"/>
+        </a:xfrm>
+      </p:grpSpPr>
+      <p:sp>
+        <p:nvSpPr>
+          <p:cNvPr id="6" name="Rectangle 5">
+            <a:extLst>
+              <a:ext uri="{FF2B5EF4-FFF2-40B4-BE49-F238E27FC236}">
+                <a16:creationId xmlns:a16="http://schemas.microsoft.com/office/drawing/2014/main" id="{011E5DD6-E9CE-0E04-DAAC-92581C64AEF3}"/>
+              </a:ext>
+            </a:extLst>
+          </p:cNvPr>
+          <p:cNvSpPr/>
+          <p:nvPr/>
+        </p:nvSpPr>
+        <p:spPr>
+          <a:xfrm>
+            <a:off x="4483056" y="2869235"/>
+            <a:ext cx="1369714" cy="344274"/>
+          </a:xfrm>
+          <a:prstGeom prst="rect">
+            <a:avLst/>
+          </a:prstGeom>
+          <a:ln>
+            <a:noFill/>
+          </a:ln>
+        </p:spPr>
+        <p:style>
+          <a:lnRef idx="2">
+            <a:schemeClr val="accent1">
+              <a:shade val="15000"/>
+            </a:schemeClr>
+          </a:lnRef>
+          <a:fillRef idx="1">
+            <a:schemeClr val="accent1"/>
+          </a:fillRef>
+          <a:effectRef idx="0">
+            <a:schemeClr val="accent1"/>
+          </a:effectRef>
+          <a:fontRef idx="minor">
+            <a:schemeClr val="lt1"/>
+          </a:fontRef>
+        </p:style>
+        <p:txBody>
+          <a:bodyPr rtlCol="0" anchor="ctr"/>
+          <a:lstStyle/>
+          <a:p>
+            <a:pPr algn="ctr"/>
+            <a:endParaRPr lang="en-150"/>
+          </a:p>
+        </p:txBody>
+      </p:sp>
+      <p:sp>
+        <p:nvSpPr>
+          <p:cNvPr id="7" name="Rectangle 6">
+            <a:extLst>
+              <a:ext uri="{FF2B5EF4-FFF2-40B4-BE49-F238E27FC236}">
+                <a16:creationId xmlns:a16="http://schemas.microsoft.com/office/drawing/2014/main" id="{4E011A50-3FA0-A8E8-8DF5-1CBB2DF4C4FE}"/>
+              </a:ext>
+            </a:extLst>
+          </p:cNvPr>
+          <p:cNvSpPr/>
+          <p:nvPr/>
+        </p:nvSpPr>
+        <p:spPr>
+          <a:xfrm>
+            <a:off x="5775303" y="2428340"/>
+            <a:ext cx="1369714" cy="344274"/>
+          </a:xfrm>
+          <a:prstGeom prst="rect">
+            <a:avLst/>
+          </a:prstGeom>
+          <a:ln>
+            <a:noFill/>
+          </a:ln>
+        </p:spPr>
+        <p:style>
+          <a:lnRef idx="2">
+            <a:schemeClr val="accent1">
+              <a:shade val="15000"/>
+            </a:schemeClr>
+          </a:lnRef>
+          <a:fillRef idx="1">
+            <a:schemeClr val="accent1"/>
+          </a:fillRef>
+          <a:effectRef idx="0">
+            <a:schemeClr val="accent1"/>
+          </a:effectRef>
+          <a:fontRef idx="minor">
+            <a:schemeClr val="lt1"/>
+          </a:fontRef>
+        </p:style>
+        <p:txBody>
+          <a:bodyPr rtlCol="0" anchor="ctr"/>
+          <a:lstStyle/>
+          <a:p>
+            <a:pPr algn="ctr"/>
+            <a:endParaRPr lang="en-150"/>
+          </a:p>
+        </p:txBody>
+      </p:sp>
+      <p:sp>
+        <p:nvSpPr>
+          <p:cNvPr id="8" name="Rectangle 7">
+            <a:extLst>
+              <a:ext uri="{FF2B5EF4-FFF2-40B4-BE49-F238E27FC236}">
+                <a16:creationId xmlns:a16="http://schemas.microsoft.com/office/drawing/2014/main" id="{78B4BDD1-236D-438B-09EB-97CA895C3300}"/>
+              </a:ext>
+            </a:extLst>
+          </p:cNvPr>
+          <p:cNvSpPr/>
+          <p:nvPr/>
+        </p:nvSpPr>
+        <p:spPr>
+          <a:xfrm>
+            <a:off x="7067550" y="1987445"/>
+            <a:ext cx="1369711" cy="344274"/>
+          </a:xfrm>
+          <a:prstGeom prst="rect">
+            <a:avLst/>
+          </a:prstGeom>
+          <a:solidFill>
+            <a:schemeClr val="accent2"/>
+          </a:solidFill>
+          <a:ln>
+            <a:noFill/>
+          </a:ln>
+        </p:spPr>
+        <p:style>
+          <a:lnRef idx="2">
+            <a:schemeClr val="accent1">
+              <a:shade val="15000"/>
+            </a:schemeClr>
+          </a:lnRef>
+          <a:fillRef idx="1">
+            <a:schemeClr val="accent1"/>
+          </a:fillRef>
+          <a:effectRef idx="0">
+            <a:schemeClr val="accent1"/>
+          </a:effectRef>
+          <a:fontRef idx="minor">
+            <a:schemeClr val="lt1"/>
+          </a:fontRef>
+        </p:style>
+        <p:txBody>
+          <a:bodyPr rtlCol="0" anchor="ctr"/>
+          <a:lstStyle/>
+          <a:p>
+            <a:pPr algn="ctr"/>
+            <a:endParaRPr lang="en-150"/>
+          </a:p>
+        </p:txBody>
+      </p:sp>
+      <p:sp>
+        <p:nvSpPr>
+          <p:cNvPr id="2" name="TextBox 1">
+            <a:extLst>
+              <a:ext uri="{FF2B5EF4-FFF2-40B4-BE49-F238E27FC236}">
+                <a16:creationId xmlns:a16="http://schemas.microsoft.com/office/drawing/2014/main" id="{5DF106CF-89D1-049C-3FD4-88578CB84BF1}"/>
+              </a:ext>
+            </a:extLst>
+          </p:cNvPr>
+          <p:cNvSpPr txBox="1"/>
+          <p:nvPr/>
+        </p:nvSpPr>
+        <p:spPr>
+          <a:xfrm>
+            <a:off x="4344360" y="3213509"/>
+            <a:ext cx="4253087" cy="1200329"/>
+          </a:xfrm>
+          <a:prstGeom prst="rect">
+            <a:avLst/>
+          </a:prstGeom>
+          <a:noFill/>
+        </p:spPr>
+        <p:txBody>
+          <a:bodyPr wrap="none" rtlCol="0">
+            <a:spAutoFit/>
+          </a:bodyPr>
+          <a:lstStyle/>
+          <a:p>
+            <a:r>
+              <a:rPr lang="en-US" sz="7200" dirty="0">
+                <a:solidFill>
+                  <a:srgbClr val="156082"/>
+                </a:solidFill>
+                <a:latin typeface="Aafia" pitchFamily="50" charset="0"/>
+              </a:rPr>
+              <a:t>LaDe</a:t>
+            </a:r>
+            <a:r>
+              <a:rPr lang="en-US" sz="7200" dirty="0">
+                <a:solidFill>
+                  <a:schemeClr val="accent2"/>
+                </a:solidFill>
+                <a:latin typeface="Aafia" pitchFamily="50" charset="0"/>
+              </a:rPr>
+              <a:t>RR</a:t>
+            </a:r>
+          </a:p>
+        </p:txBody>
+      </p:sp>
+      <p:sp>
+        <p:nvSpPr>
+          <p:cNvPr id="11" name="Rectangle 10">
+            <a:extLst>
+              <a:ext uri="{FF2B5EF4-FFF2-40B4-BE49-F238E27FC236}">
+                <a16:creationId xmlns:a16="http://schemas.microsoft.com/office/drawing/2014/main" id="{2DECFECA-DA2A-9536-415C-4E43406CD3BB}"/>
+              </a:ext>
+            </a:extLst>
+          </p:cNvPr>
+          <p:cNvSpPr/>
+          <p:nvPr/>
+        </p:nvSpPr>
+        <p:spPr>
+          <a:xfrm>
+            <a:off x="621240" y="1215144"/>
+            <a:ext cx="1369714" cy="344274"/>
+          </a:xfrm>
+          <a:prstGeom prst="rect">
+            <a:avLst/>
+          </a:prstGeom>
+          <a:solidFill>
+            <a:srgbClr val="1A1F71"/>
+          </a:solidFill>
+          <a:ln>
+            <a:noFill/>
+          </a:ln>
+        </p:spPr>
+        <p:style>
+          <a:lnRef idx="2">
+            <a:schemeClr val="accent1">
+              <a:shade val="15000"/>
+            </a:schemeClr>
+          </a:lnRef>
+          <a:fillRef idx="1">
+            <a:schemeClr val="accent1"/>
+          </a:fillRef>
+          <a:effectRef idx="0">
+            <a:schemeClr val="accent1"/>
+          </a:effectRef>
+          <a:fontRef idx="minor">
+            <a:schemeClr val="lt1"/>
+          </a:fontRef>
+        </p:style>
+        <p:txBody>
+          <a:bodyPr rtlCol="0" anchor="ctr"/>
+          <a:lstStyle/>
+          <a:p>
+            <a:pPr algn="ctr"/>
+            <a:endParaRPr lang="en-150"/>
+          </a:p>
+        </p:txBody>
+      </p:sp>
+      <p:sp>
+        <p:nvSpPr>
+          <p:cNvPr id="12" name="Rectangle 11">
+            <a:extLst>
+              <a:ext uri="{FF2B5EF4-FFF2-40B4-BE49-F238E27FC236}">
+                <a16:creationId xmlns:a16="http://schemas.microsoft.com/office/drawing/2014/main" id="{51254E2D-F790-3860-F5B3-F21908C0E908}"/>
+              </a:ext>
+            </a:extLst>
+          </p:cNvPr>
+          <p:cNvSpPr/>
+          <p:nvPr/>
+        </p:nvSpPr>
+        <p:spPr>
+          <a:xfrm>
+            <a:off x="1913487" y="774249"/>
+            <a:ext cx="1369714" cy="344274"/>
+          </a:xfrm>
+          <a:prstGeom prst="rect">
+            <a:avLst/>
+          </a:prstGeom>
+          <a:solidFill>
+            <a:srgbClr val="1A1F71"/>
+          </a:solidFill>
+          <a:ln>
+            <a:noFill/>
+          </a:ln>
+        </p:spPr>
+        <p:style>
+          <a:lnRef idx="2">
+            <a:schemeClr val="accent1">
+              <a:shade val="15000"/>
+            </a:schemeClr>
+          </a:lnRef>
+          <a:fillRef idx="1">
+            <a:schemeClr val="accent1"/>
+          </a:fillRef>
+          <a:effectRef idx="0">
+            <a:schemeClr val="accent1"/>
+          </a:effectRef>
+          <a:fontRef idx="minor">
+            <a:schemeClr val="lt1"/>
+          </a:fontRef>
+        </p:style>
+        <p:txBody>
+          <a:bodyPr rtlCol="0" anchor="ctr"/>
+          <a:lstStyle/>
+          <a:p>
+            <a:pPr algn="ctr"/>
+            <a:endParaRPr lang="en-150"/>
+          </a:p>
+        </p:txBody>
+      </p:sp>
+      <p:sp>
+        <p:nvSpPr>
+          <p:cNvPr id="13" name="Rectangle 12">
+            <a:extLst>
+              <a:ext uri="{FF2B5EF4-FFF2-40B4-BE49-F238E27FC236}">
+                <a16:creationId xmlns:a16="http://schemas.microsoft.com/office/drawing/2014/main" id="{83552A5B-6ADE-7AAD-840D-E725D6080ED5}"/>
+              </a:ext>
+            </a:extLst>
+          </p:cNvPr>
+          <p:cNvSpPr/>
+          <p:nvPr/>
+        </p:nvSpPr>
+        <p:spPr>
+          <a:xfrm>
+            <a:off x="3205734" y="333354"/>
+            <a:ext cx="1369711" cy="344274"/>
+          </a:xfrm>
+          <a:prstGeom prst="rect">
+            <a:avLst/>
+          </a:prstGeom>
+          <a:solidFill>
+            <a:srgbClr val="E101D1"/>
+          </a:solidFill>
+          <a:ln>
+            <a:noFill/>
+          </a:ln>
+        </p:spPr>
+        <p:style>
+          <a:lnRef idx="2">
+            <a:schemeClr val="accent1">
+              <a:shade val="15000"/>
+            </a:schemeClr>
+          </a:lnRef>
+          <a:fillRef idx="1">
+            <a:schemeClr val="accent1"/>
+          </a:fillRef>
+          <a:effectRef idx="0">
+            <a:schemeClr val="accent1"/>
+          </a:effectRef>
+          <a:fontRef idx="minor">
+            <a:schemeClr val="lt1"/>
+          </a:fontRef>
+        </p:style>
+        <p:txBody>
+          <a:bodyPr rtlCol="0" anchor="ctr"/>
+          <a:lstStyle/>
+          <a:p>
+            <a:pPr algn="ctr"/>
+            <a:endParaRPr lang="en-150"/>
+          </a:p>
+        </p:txBody>
+      </p:sp>
+      <p:sp>
+        <p:nvSpPr>
+          <p:cNvPr id="14" name="TextBox 13">
+            <a:extLst>
+              <a:ext uri="{FF2B5EF4-FFF2-40B4-BE49-F238E27FC236}">
+                <a16:creationId xmlns:a16="http://schemas.microsoft.com/office/drawing/2014/main" id="{6D42D222-7ABF-6406-3CFF-BCDB43D0E6A2}"/>
+              </a:ext>
+            </a:extLst>
+          </p:cNvPr>
+          <p:cNvSpPr txBox="1"/>
+          <p:nvPr/>
+        </p:nvSpPr>
+        <p:spPr>
+          <a:xfrm>
+            <a:off x="482544" y="1559418"/>
+            <a:ext cx="4253087" cy="1200329"/>
+          </a:xfrm>
+          <a:prstGeom prst="rect">
+            <a:avLst/>
+          </a:prstGeom>
+          <a:noFill/>
+        </p:spPr>
+        <p:txBody>
+          <a:bodyPr wrap="none" rtlCol="0">
+            <a:spAutoFit/>
+          </a:bodyPr>
+          <a:lstStyle/>
+          <a:p>
+            <a:r>
+              <a:rPr lang="en-US" sz="7200" dirty="0">
+                <a:solidFill>
+                  <a:srgbClr val="1A1F71"/>
+                </a:solidFill>
+                <a:latin typeface="Aafia" pitchFamily="50" charset="0"/>
+              </a:rPr>
+              <a:t>LaDe</a:t>
+            </a:r>
+            <a:r>
+              <a:rPr lang="en-US" sz="7200" dirty="0">
+                <a:solidFill>
+                  <a:srgbClr val="E101D1"/>
+                </a:solidFill>
+                <a:latin typeface="Aafia" pitchFamily="50" charset="0"/>
+              </a:rPr>
+              <a:t>RR</a:t>
+            </a:r>
+          </a:p>
+        </p:txBody>
+      </p:sp>
+    </p:spTree>
+    <p:extLst>
+      <p:ext uri="{BB962C8B-B14F-4D97-AF65-F5344CB8AC3E}">
+        <p14:creationId xmlns:p14="http://schemas.microsoft.com/office/powerpoint/2010/main" val="2125070766"/>
+      </p:ext>
+    </p:extLst>
+  </p:cSld>
+  <p:clrMapOvr>
+    <a:masterClrMapping/>
+  </p:clrMapOvr>
+</p:sld>
+</file>
+
+<file path=ppt/slides/slide11.xml><?xml version="1.0" encoding="utf-8"?>
+<p:sld xmlns:a="http://schemas.openxmlformats.org/drawingml/2006/main" xmlns:r="http://schemas.openxmlformats.org/officeDocument/2006/relationships" xmlns:p="http://schemas.openxmlformats.org/presentationml/2006/main" show="0">
+  <p:cSld>
+    <p:spTree>
+      <p:nvGrpSpPr>
+        <p:cNvPr id="1" name=""/>
+        <p:cNvGrpSpPr/>
+        <p:nvPr/>
+      </p:nvGrpSpPr>
+      <p:grpSpPr>
+        <a:xfrm>
+          <a:off x="0" y="0"/>
+          <a:ext cx="0" cy="0"/>
+          <a:chOff x="0" y="0"/>
+          <a:chExt cx="0" cy="0"/>
+        </a:xfrm>
+      </p:grpSpPr>
+      <p:grpSp>
+        <p:nvGrpSpPr>
+          <p:cNvPr id="9" name="Group 8">
+            <a:extLst>
+              <a:ext uri="{FF2B5EF4-FFF2-40B4-BE49-F238E27FC236}">
+                <a16:creationId xmlns:a16="http://schemas.microsoft.com/office/drawing/2014/main" id="{2590A2DE-16F5-44B0-79F7-D9518568AB64}"/>
+              </a:ext>
+            </a:extLst>
+          </p:cNvPr>
+          <p:cNvGrpSpPr/>
+          <p:nvPr/>
+        </p:nvGrpSpPr>
+        <p:grpSpPr>
+          <a:xfrm>
+            <a:off x="4468368" y="1625169"/>
+            <a:ext cx="3959748" cy="1566088"/>
+            <a:chOff x="4468368" y="1563624"/>
+            <a:chExt cx="4531517" cy="1792224"/>
+          </a:xfrm>
+        </p:grpSpPr>
+        <p:sp>
+          <p:nvSpPr>
+            <p:cNvPr id="6" name="Rectangle 5">
+              <a:extLst>
+                <a:ext uri="{FF2B5EF4-FFF2-40B4-BE49-F238E27FC236}">
+                  <a16:creationId xmlns:a16="http://schemas.microsoft.com/office/drawing/2014/main" id="{011E5DD6-E9CE-0E04-DAAC-92581C64AEF3}"/>
+                </a:ext>
+              </a:extLst>
+            </p:cNvPr>
+            <p:cNvSpPr/>
+            <p:nvPr/>
+          </p:nvSpPr>
+          <p:spPr>
+            <a:xfrm>
+              <a:off x="4468368" y="2990088"/>
+              <a:ext cx="1627632" cy="365760"/>
+            </a:xfrm>
+            <a:prstGeom prst="rect">
+              <a:avLst/>
+            </a:prstGeom>
+            <a:solidFill>
+              <a:srgbClr val="1A1F71"/>
+            </a:solidFill>
+            <a:ln>
+              <a:noFill/>
+            </a:ln>
+          </p:spPr>
+          <p:style>
+            <a:lnRef idx="2">
+              <a:schemeClr val="accent1">
+                <a:shade val="15000"/>
+              </a:schemeClr>
+            </a:lnRef>
+            <a:fillRef idx="1">
+              <a:schemeClr val="accent1"/>
+            </a:fillRef>
+            <a:effectRef idx="0">
+              <a:schemeClr val="accent1"/>
+            </a:effectRef>
+            <a:fontRef idx="minor">
+              <a:schemeClr val="lt1"/>
+            </a:fontRef>
+          </p:style>
+          <p:txBody>
+            <a:bodyPr rtlCol="0" anchor="ctr"/>
+            <a:lstStyle/>
+            <a:p>
+              <a:pPr algn="ctr"/>
+              <a:endParaRPr lang="en-150"/>
+            </a:p>
+          </p:txBody>
+        </p:sp>
+        <p:sp>
+          <p:nvSpPr>
+            <p:cNvPr id="7" name="Rectangle 6">
+              <a:extLst>
+                <a:ext uri="{FF2B5EF4-FFF2-40B4-BE49-F238E27FC236}">
+                  <a16:creationId xmlns:a16="http://schemas.microsoft.com/office/drawing/2014/main" id="{4E011A50-3FA0-A8E8-8DF5-1CBB2DF4C4FE}"/>
+                </a:ext>
+              </a:extLst>
+            </p:cNvPr>
+            <p:cNvSpPr/>
+            <p:nvPr/>
+          </p:nvSpPr>
+          <p:spPr>
+            <a:xfrm>
+              <a:off x="5920312" y="2276856"/>
+              <a:ext cx="1627632" cy="365760"/>
+            </a:xfrm>
+            <a:prstGeom prst="rect">
+              <a:avLst/>
+            </a:prstGeom>
+            <a:solidFill>
+              <a:srgbClr val="1A1F71"/>
+            </a:solidFill>
+            <a:ln>
+              <a:noFill/>
+            </a:ln>
+          </p:spPr>
+          <p:style>
+            <a:lnRef idx="2">
+              <a:schemeClr val="accent1">
+                <a:shade val="15000"/>
+              </a:schemeClr>
+            </a:lnRef>
+            <a:fillRef idx="1">
+              <a:schemeClr val="accent1"/>
+            </a:fillRef>
+            <a:effectRef idx="0">
+              <a:schemeClr val="accent1"/>
+            </a:effectRef>
+            <a:fontRef idx="minor">
+              <a:schemeClr val="lt1"/>
+            </a:fontRef>
+          </p:style>
+          <p:txBody>
+            <a:bodyPr rtlCol="0" anchor="ctr"/>
+            <a:lstStyle/>
+            <a:p>
+              <a:pPr algn="ctr"/>
+              <a:endParaRPr lang="en-150"/>
+            </a:p>
+          </p:txBody>
+        </p:sp>
+        <p:sp>
+          <p:nvSpPr>
+            <p:cNvPr id="8" name="Rectangle 7">
+              <a:extLst>
+                <a:ext uri="{FF2B5EF4-FFF2-40B4-BE49-F238E27FC236}">
+                  <a16:creationId xmlns:a16="http://schemas.microsoft.com/office/drawing/2014/main" id="{78B4BDD1-236D-438B-09EB-97CA895C3300}"/>
+                </a:ext>
+              </a:extLst>
+            </p:cNvPr>
+            <p:cNvSpPr/>
+            <p:nvPr/>
+          </p:nvSpPr>
+          <p:spPr>
+            <a:xfrm>
+              <a:off x="7372256" y="1563624"/>
+              <a:ext cx="1627629" cy="365760"/>
+            </a:xfrm>
+            <a:prstGeom prst="rect">
+              <a:avLst/>
+            </a:prstGeom>
+            <a:solidFill>
+              <a:srgbClr val="FF6F00"/>
+            </a:solidFill>
+            <a:ln>
+              <a:noFill/>
+            </a:ln>
+          </p:spPr>
+          <p:style>
+            <a:lnRef idx="2">
+              <a:schemeClr val="accent1">
+                <a:shade val="15000"/>
+              </a:schemeClr>
+            </a:lnRef>
+            <a:fillRef idx="1">
+              <a:schemeClr val="accent1"/>
+            </a:fillRef>
+            <a:effectRef idx="0">
+              <a:schemeClr val="accent1"/>
+            </a:effectRef>
+            <a:fontRef idx="minor">
+              <a:schemeClr val="lt1"/>
+            </a:fontRef>
+          </p:style>
+          <p:txBody>
+            <a:bodyPr rtlCol="0" anchor="ctr"/>
+            <a:lstStyle/>
+            <a:p>
+              <a:pPr algn="ctr"/>
+              <a:endParaRPr lang="en-150"/>
+            </a:p>
+          </p:txBody>
+        </p:sp>
+      </p:grpSp>
+      <p:sp>
+        <p:nvSpPr>
+          <p:cNvPr id="2" name="TextBox 1">
+            <a:extLst>
+              <a:ext uri="{FF2B5EF4-FFF2-40B4-BE49-F238E27FC236}">
+                <a16:creationId xmlns:a16="http://schemas.microsoft.com/office/drawing/2014/main" id="{5DF106CF-89D1-049C-3FD4-88578CB84BF1}"/>
+              </a:ext>
+            </a:extLst>
+          </p:cNvPr>
+          <p:cNvSpPr txBox="1"/>
+          <p:nvPr/>
+        </p:nvSpPr>
+        <p:spPr>
+          <a:xfrm>
+            <a:off x="4344360" y="3218689"/>
+            <a:ext cx="4253087" cy="1200329"/>
+          </a:xfrm>
+          <a:prstGeom prst="rect">
+            <a:avLst/>
+          </a:prstGeom>
+          <a:noFill/>
+        </p:spPr>
+        <p:txBody>
+          <a:bodyPr wrap="none" rtlCol="0">
+            <a:spAutoFit/>
+          </a:bodyPr>
+          <a:lstStyle/>
+          <a:p>
+            <a:r>
+              <a:rPr lang="en-US" sz="7200" dirty="0">
+                <a:solidFill>
+                  <a:srgbClr val="1A1F71"/>
+                </a:solidFill>
+                <a:latin typeface="Aafia" pitchFamily="50" charset="0"/>
+              </a:rPr>
+              <a:t>LaDe</a:t>
+            </a:r>
+            <a:r>
+              <a:rPr lang="en-US" sz="7200" dirty="0">
+                <a:solidFill>
+                  <a:srgbClr val="FF6F00"/>
+                </a:solidFill>
+                <a:latin typeface="Aafia" pitchFamily="50" charset="0"/>
+              </a:rPr>
+              <a:t>RR</a:t>
+            </a:r>
+          </a:p>
+        </p:txBody>
+      </p:sp>
+    </p:spTree>
+    <p:extLst>
+      <p:ext uri="{BB962C8B-B14F-4D97-AF65-F5344CB8AC3E}">
+        <p14:creationId xmlns:p14="http://schemas.microsoft.com/office/powerpoint/2010/main" val="3677000309"/>
+      </p:ext>
+    </p:extLst>
+  </p:cSld>
+  <p:clrMapOvr>
+    <a:masterClrMapping/>
+  </p:clrMapOvr>
+</p:sld>
+</file>
+
+<file path=ppt/slides/slide12.xml><?xml version="1.0" encoding="utf-8"?>
+<p:sld xmlns:a="http://schemas.openxmlformats.org/drawingml/2006/main" xmlns:r="http://schemas.openxmlformats.org/officeDocument/2006/relationships" xmlns:p="http://schemas.openxmlformats.org/presentationml/2006/main" show="0">
   <p:cSld>
     <p:spTree>
       <p:nvGrpSpPr>
@@ -4687,8 +5710,8 @@
 </p:sld>
 </file>
 
-<file path=ppt/slides/slide11.xml><?xml version="1.0" encoding="utf-8"?>
-<p:sld xmlns:a="http://schemas.openxmlformats.org/drawingml/2006/main" xmlns:r="http://schemas.openxmlformats.org/officeDocument/2006/relationships" xmlns:p="http://schemas.openxmlformats.org/presentationml/2006/main">
+<file path=ppt/slides/slide13.xml><?xml version="1.0" encoding="utf-8"?>
+<p:sld xmlns:a="http://schemas.openxmlformats.org/drawingml/2006/main" xmlns:r="http://schemas.openxmlformats.org/officeDocument/2006/relationships" xmlns:p="http://schemas.openxmlformats.org/presentationml/2006/main" show="0">
   <p:cSld>
     <p:spTree>
       <p:nvGrpSpPr>
@@ -4943,8 +5966,8 @@
 </p:sld>
 </file>
 
-<file path=ppt/slides/slide12.xml><?xml version="1.0" encoding="utf-8"?>
-<p:sld xmlns:a="http://schemas.openxmlformats.org/drawingml/2006/main" xmlns:r="http://schemas.openxmlformats.org/officeDocument/2006/relationships" xmlns:p="http://schemas.openxmlformats.org/presentationml/2006/main">
+<file path=ppt/slides/slide14.xml><?xml version="1.0" encoding="utf-8"?>
+<p:sld xmlns:a="http://schemas.openxmlformats.org/drawingml/2006/main" xmlns:r="http://schemas.openxmlformats.org/officeDocument/2006/relationships" xmlns:p="http://schemas.openxmlformats.org/presentationml/2006/main" show="0">
   <p:cSld>
     <p:spTree>
       <p:nvGrpSpPr>
@@ -5200,7 +6223,7 @@
 </p:sld>
 </file>
 
-<file path=ppt/slides/slide13.xml><?xml version="1.0" encoding="utf-8"?>
+<file path=ppt/slides/slide2.xml><?xml version="1.0" encoding="utf-8"?>
 <p:sld xmlns:a="http://schemas.openxmlformats.org/drawingml/2006/main" xmlns:r="http://schemas.openxmlformats.org/officeDocument/2006/relationships" xmlns:p="http://schemas.openxmlformats.org/presentationml/2006/main">
   <p:cSld>
     <p:spTree>
@@ -5326,10 +6349,182 @@
       </p:sp>
       <p:pic>
         <p:nvPicPr>
+          <p:cNvPr id="9" name="Picture 8">
+            <a:extLst>
+              <a:ext uri="{FF2B5EF4-FFF2-40B4-BE49-F238E27FC236}">
+                <a16:creationId xmlns:a16="http://schemas.microsoft.com/office/drawing/2014/main" id="{8B571E79-CA3F-5BC9-E30D-F0218A06C6F2}"/>
+              </a:ext>
+            </a:extLst>
+          </p:cNvPr>
+          <p:cNvPicPr>
+            <a:picLocks noChangeAspect="1"/>
+          </p:cNvPicPr>
+          <p:nvPr/>
+        </p:nvPicPr>
+        <p:blipFill>
+          <a:blip r:embed="rId4"/>
+          <a:srcRect b="25244"/>
+          <a:stretch/>
+        </p:blipFill>
+        <p:spPr>
+          <a:xfrm>
+            <a:off x="748798" y="1912568"/>
+            <a:ext cx="10694403" cy="3032864"/>
+          </a:xfrm>
+          <a:prstGeom prst="rect">
+            <a:avLst/>
+          </a:prstGeom>
+        </p:spPr>
+      </p:pic>
+    </p:spTree>
+    <p:extLst>
+      <p:ext uri="{BB962C8B-B14F-4D97-AF65-F5344CB8AC3E}">
+        <p14:creationId xmlns:p14="http://schemas.microsoft.com/office/powerpoint/2010/main" val="2690937209"/>
+      </p:ext>
+    </p:extLst>
+  </p:cSld>
+  <p:clrMapOvr>
+    <a:masterClrMapping/>
+  </p:clrMapOvr>
+</p:sld>
+</file>
+
+<file path=ppt/slides/slide3.xml><?xml version="1.0" encoding="utf-8"?>
+<p:sld xmlns:a="http://schemas.openxmlformats.org/drawingml/2006/main" xmlns:r="http://schemas.openxmlformats.org/officeDocument/2006/relationships" xmlns:p="http://schemas.openxmlformats.org/presentationml/2006/main" show="0">
+  <p:cSld>
+    <p:spTree>
+      <p:nvGrpSpPr>
+        <p:cNvPr id="1" name="">
+          <a:extLst>
+            <a:ext uri="{FF2B5EF4-FFF2-40B4-BE49-F238E27FC236}">
+              <a16:creationId xmlns:a16="http://schemas.microsoft.com/office/drawing/2014/main" id="{D158346A-097A-3811-260B-F46ECE281276}"/>
+            </a:ext>
+          </a:extLst>
+        </p:cNvPr>
+        <p:cNvGrpSpPr/>
+        <p:nvPr/>
+      </p:nvGrpSpPr>
+      <p:grpSpPr>
+        <a:xfrm>
+          <a:off x="0" y="0"/>
+          <a:ext cx="0" cy="0"/>
+          <a:chOff x="0" y="0"/>
+          <a:chExt cx="0" cy="0"/>
+        </a:xfrm>
+      </p:grpSpPr>
+      <p:pic>
+        <p:nvPicPr>
+          <p:cNvPr id="5" name="Picture 4" descr="A white card with black text and black text&#10;&#10;AI-generated content may be incorrect.">
+            <a:extLst>
+              <a:ext uri="{FF2B5EF4-FFF2-40B4-BE49-F238E27FC236}">
+                <a16:creationId xmlns:a16="http://schemas.microsoft.com/office/drawing/2014/main" id="{8F018551-5F8D-73FC-F27F-28B0817F3F40}"/>
+              </a:ext>
+            </a:extLst>
+          </p:cNvPr>
+          <p:cNvPicPr>
+            <a:picLocks noChangeAspect="1"/>
+          </p:cNvPicPr>
+          <p:nvPr/>
+        </p:nvPicPr>
+        <p:blipFill>
+          <a:blip r:embed="rId2">
+            <a:duotone>
+              <a:schemeClr val="bg2">
+                <a:shade val="45000"/>
+                <a:satMod val="135000"/>
+              </a:schemeClr>
+              <a:prstClr val="white"/>
+            </a:duotone>
+            <a:extLst>
+              <a:ext uri="{BEBA8EAE-BF5A-486C-A8C5-ECC9F3942E4B}">
+                <a14:imgProps xmlns:a14="http://schemas.microsoft.com/office/drawing/2010/main">
+                  <a14:imgLayer r:embed="rId3">
+                    <a14:imgEffect>
+                      <a14:artisticCutout/>
+                    </a14:imgEffect>
+                    <a14:imgEffect>
+                      <a14:saturation sat="0"/>
+                    </a14:imgEffect>
+                    <a14:imgEffect>
+                      <a14:brightnessContrast bright="40000" contrast="40000"/>
+                    </a14:imgEffect>
+                  </a14:imgLayer>
+                </a14:imgProps>
+              </a:ext>
+              <a:ext uri="{28A0092B-C50C-407E-A947-70E740481C1C}">
+                <a14:useLocalDpi xmlns:a14="http://schemas.microsoft.com/office/drawing/2010/main" val="0"/>
+              </a:ext>
+            </a:extLst>
+          </a:blip>
+          <a:stretch>
+            <a:fillRect/>
+          </a:stretch>
+        </p:blipFill>
+        <p:spPr>
+          <a:xfrm>
+            <a:off x="0" y="381000"/>
+            <a:ext cx="12192000" cy="6096000"/>
+          </a:xfrm>
+          <a:prstGeom prst="rect">
+            <a:avLst/>
+          </a:prstGeom>
+        </p:spPr>
+      </p:pic>
+      <p:sp>
+        <p:nvSpPr>
+          <p:cNvPr id="6" name="Rectangle 5">
+            <a:extLst>
+              <a:ext uri="{FF2B5EF4-FFF2-40B4-BE49-F238E27FC236}">
+                <a16:creationId xmlns:a16="http://schemas.microsoft.com/office/drawing/2014/main" id="{AB4AFA8E-ACE5-0003-F80C-C6993B59B565}"/>
+              </a:ext>
+            </a:extLst>
+          </p:cNvPr>
+          <p:cNvSpPr/>
+          <p:nvPr/>
+        </p:nvSpPr>
+        <p:spPr>
+          <a:xfrm>
+            <a:off x="914401" y="1333500"/>
+            <a:ext cx="10191750" cy="4219575"/>
+          </a:xfrm>
+          <a:prstGeom prst="rect">
+            <a:avLst/>
+          </a:prstGeom>
+          <a:ln>
+            <a:solidFill>
+              <a:schemeClr val="bg1"/>
+            </a:solidFill>
+          </a:ln>
+        </p:spPr>
+        <p:style>
+          <a:lnRef idx="2">
+            <a:schemeClr val="dk1"/>
+          </a:lnRef>
+          <a:fillRef idx="1">
+            <a:schemeClr val="lt1"/>
+          </a:fillRef>
+          <a:effectRef idx="0">
+            <a:schemeClr val="dk1"/>
+          </a:effectRef>
+          <a:fontRef idx="minor">
+            <a:schemeClr val="dk1"/>
+          </a:fontRef>
+        </p:style>
+        <p:txBody>
+          <a:bodyPr rtlCol="0" anchor="ctr"/>
+          <a:lstStyle/>
+          <a:p>
+            <a:pPr algn="ctr"/>
+            <a:endParaRPr lang="en-US"/>
+          </a:p>
+        </p:txBody>
+      </p:sp>
+      <p:pic>
+        <p:nvPicPr>
           <p:cNvPr id="12" name="Picture 11">
             <a:extLst>
               <a:ext uri="{FF2B5EF4-FFF2-40B4-BE49-F238E27FC236}">
-                <a16:creationId xmlns:a16="http://schemas.microsoft.com/office/drawing/2014/main" id="{F343F6AC-52EB-0E48-63DD-45C09D8F2C49}"/>
+                <a16:creationId xmlns:a16="http://schemas.microsoft.com/office/drawing/2014/main" id="{E8E63CD9-D5EC-34BD-7B62-1C74E9F2C70C}"/>
               </a:ext>
             </a:extLst>
           </p:cNvPr>
@@ -5357,7 +6552,7 @@
     </p:spTree>
     <p:extLst>
       <p:ext uri="{BB962C8B-B14F-4D97-AF65-F5344CB8AC3E}">
-        <p14:creationId xmlns:p14="http://schemas.microsoft.com/office/powerpoint/2010/main" val="2690937209"/>
+        <p14:creationId xmlns:p14="http://schemas.microsoft.com/office/powerpoint/2010/main" val="2465490933"/>
       </p:ext>
     </p:extLst>
   </p:cSld>
@@ -5367,18 +6562,12 @@
 </p:sld>
 </file>
 
-<file path=ppt/slides/slide2.xml><?xml version="1.0" encoding="utf-8"?>
-<p:sld xmlns:a="http://schemas.openxmlformats.org/drawingml/2006/main" xmlns:r="http://schemas.openxmlformats.org/officeDocument/2006/relationships" xmlns:p="http://schemas.openxmlformats.org/presentationml/2006/main">
+<file path=ppt/slides/slide4.xml><?xml version="1.0" encoding="utf-8"?>
+<p:sld xmlns:a="http://schemas.openxmlformats.org/drawingml/2006/main" xmlns:r="http://schemas.openxmlformats.org/officeDocument/2006/relationships" xmlns:p="http://schemas.openxmlformats.org/presentationml/2006/main" show="0">
   <p:cSld>
     <p:spTree>
       <p:nvGrpSpPr>
-        <p:cNvPr id="1" name="">
-          <a:extLst>
-            <a:ext uri="{FF2B5EF4-FFF2-40B4-BE49-F238E27FC236}">
-              <a16:creationId xmlns:a16="http://schemas.microsoft.com/office/drawing/2014/main" id="{6D904611-22B7-C897-FE07-3BC9A8278594}"/>
-            </a:ext>
-          </a:extLst>
-        </p:cNvPr>
+        <p:cNvPr id="1" name=""/>
         <p:cNvGrpSpPr/>
         <p:nvPr/>
       </p:nvGrpSpPr>
@@ -5392,10 +6581,10 @@
       </p:grpSpPr>
       <p:sp>
         <p:nvSpPr>
-          <p:cNvPr id="12" name="Rectangle 11">
-            <a:extLst>
-              <a:ext uri="{FF2B5EF4-FFF2-40B4-BE49-F238E27FC236}">
-                <a16:creationId xmlns:a16="http://schemas.microsoft.com/office/drawing/2014/main" id="{1E841810-4848-ED1E-1246-A0F736CB5297}"/>
+          <p:cNvPr id="2" name="Rectangle 1">
+            <a:extLst>
+              <a:ext uri="{FF2B5EF4-FFF2-40B4-BE49-F238E27FC236}">
+                <a16:creationId xmlns:a16="http://schemas.microsoft.com/office/drawing/2014/main" id="{0790007B-A357-4B57-78A4-232E36564773}"/>
               </a:ext>
             </a:extLst>
           </p:cNvPr>
@@ -5404,8 +6593,8 @@
         </p:nvSpPr>
         <p:spPr>
           <a:xfrm>
-            <a:off x="6734175" y="2816191"/>
-            <a:ext cx="1223963" cy="149432"/>
+            <a:off x="360772" y="1092500"/>
+            <a:ext cx="1369714" cy="344274"/>
           </a:xfrm>
           <a:prstGeom prst="rect">
             <a:avLst/>
@@ -5456,10 +6645,10 @@
       </p:sp>
       <p:sp>
         <p:nvSpPr>
-          <p:cNvPr id="13" name="Rectangle 12">
-            <a:extLst>
-              <a:ext uri="{FF2B5EF4-FFF2-40B4-BE49-F238E27FC236}">
-                <a16:creationId xmlns:a16="http://schemas.microsoft.com/office/drawing/2014/main" id="{297E3C51-792E-71C4-3609-9989C2BF0F77}"/>
+          <p:cNvPr id="7" name="Rectangle 6">
+            <a:extLst>
+              <a:ext uri="{FF2B5EF4-FFF2-40B4-BE49-F238E27FC236}">
+                <a16:creationId xmlns:a16="http://schemas.microsoft.com/office/drawing/2014/main" id="{FCCA1E21-6188-91EC-55DD-AFA17BF25096}"/>
               </a:ext>
             </a:extLst>
           </p:cNvPr>
@@ -5468,8 +6657,8 @@
         </p:nvSpPr>
         <p:spPr>
           <a:xfrm>
-            <a:off x="7958138" y="2659139"/>
-            <a:ext cx="1368425" cy="149432"/>
+            <a:off x="1653019" y="651605"/>
+            <a:ext cx="1369714" cy="344274"/>
           </a:xfrm>
           <a:prstGeom prst="rect">
             <a:avLst/>
@@ -5520,10 +6709,10 @@
       </p:sp>
       <p:sp>
         <p:nvSpPr>
-          <p:cNvPr id="14" name="Rectangle 13">
-            <a:extLst>
-              <a:ext uri="{FF2B5EF4-FFF2-40B4-BE49-F238E27FC236}">
-                <a16:creationId xmlns:a16="http://schemas.microsoft.com/office/drawing/2014/main" id="{DA72054A-4C5B-7E2D-91D3-4A22A50AFE79}"/>
+          <p:cNvPr id="8" name="Rectangle 7">
+            <a:extLst>
+              <a:ext uri="{FF2B5EF4-FFF2-40B4-BE49-F238E27FC236}">
+                <a16:creationId xmlns:a16="http://schemas.microsoft.com/office/drawing/2014/main" id="{CCA5CC92-0E8C-3A05-9D13-FC9809C34F46}"/>
               </a:ext>
             </a:extLst>
           </p:cNvPr>
@@ -5532,8 +6721,8 @@
         </p:nvSpPr>
         <p:spPr>
           <a:xfrm>
-            <a:off x="9326564" y="2502087"/>
-            <a:ext cx="1377950" cy="149432"/>
+            <a:off x="2945266" y="210710"/>
+            <a:ext cx="1369711" cy="344274"/>
           </a:xfrm>
           <a:prstGeom prst="rect">
             <a:avLst/>
@@ -5592,10 +6781,10 @@
       </p:sp>
       <p:sp>
         <p:nvSpPr>
-          <p:cNvPr id="15" name="TextBox 14">
-            <a:extLst>
-              <a:ext uri="{FF2B5EF4-FFF2-40B4-BE49-F238E27FC236}">
-                <a16:creationId xmlns:a16="http://schemas.microsoft.com/office/drawing/2014/main" id="{83D28326-DFEC-DA4A-7F24-5593A0F2707D}"/>
+          <p:cNvPr id="10" name="TextBox 9">
+            <a:extLst>
+              <a:ext uri="{FF2B5EF4-FFF2-40B4-BE49-F238E27FC236}">
+                <a16:creationId xmlns:a16="http://schemas.microsoft.com/office/drawing/2014/main" id="{16215508-3A0A-1CE0-992D-C9436CF87A12}"/>
               </a:ext>
             </a:extLst>
           </p:cNvPr>
@@ -5604,7 +6793,7 @@
         </p:nvSpPr>
         <p:spPr>
           <a:xfrm>
-            <a:off x="6606889" y="2855133"/>
+            <a:off x="222076" y="1436774"/>
             <a:ext cx="4253087" cy="1200329"/>
           </a:xfrm>
           <a:prstGeom prst="rect">
@@ -5670,10 +6859,210 @@
       </p:sp>
       <p:sp>
         <p:nvSpPr>
-          <p:cNvPr id="19" name="TextBox 18">
-            <a:extLst>
-              <a:ext uri="{FF2B5EF4-FFF2-40B4-BE49-F238E27FC236}">
-                <a16:creationId xmlns:a16="http://schemas.microsoft.com/office/drawing/2014/main" id="{E5ECF1B9-269C-2F29-E619-FC104AAEEE14}"/>
+          <p:cNvPr id="12" name="Rectangle 11">
+            <a:extLst>
+              <a:ext uri="{FF2B5EF4-FFF2-40B4-BE49-F238E27FC236}">
+                <a16:creationId xmlns:a16="http://schemas.microsoft.com/office/drawing/2014/main" id="{9CAC2087-984E-8361-8AA7-5069B4A7EBA9}"/>
+              </a:ext>
+            </a:extLst>
+          </p:cNvPr>
+          <p:cNvSpPr/>
+          <p:nvPr/>
+        </p:nvSpPr>
+        <p:spPr>
+          <a:xfrm>
+            <a:off x="4623891" y="3353120"/>
+            <a:ext cx="1369714" cy="344274"/>
+          </a:xfrm>
+          <a:prstGeom prst="rect">
+            <a:avLst/>
+          </a:prstGeom>
+          <a:solidFill>
+            <a:srgbClr val="1A1F71"/>
+          </a:solidFill>
+          <a:ln w="3175">
+            <a:noFill/>
+          </a:ln>
+          <a:effectLst/>
+          <a:scene3d>
+            <a:camera prst="orthographicFront"/>
+            <a:lightRig rig="threePt" dir="t"/>
+          </a:scene3d>
+          <a:sp3d>
+            <a:bevelT w="38100" h="38100"/>
+          </a:sp3d>
+        </p:spPr>
+        <p:style>
+          <a:lnRef idx="2">
+            <a:schemeClr val="accent1">
+              <a:shade val="15000"/>
+            </a:schemeClr>
+          </a:lnRef>
+          <a:fillRef idx="1">
+            <a:schemeClr val="accent1"/>
+          </a:fillRef>
+          <a:effectRef idx="0">
+            <a:schemeClr val="accent1"/>
+          </a:effectRef>
+          <a:fontRef idx="minor">
+            <a:schemeClr val="lt1"/>
+          </a:fontRef>
+        </p:style>
+        <p:txBody>
+          <a:bodyPr rtlCol="0" anchor="ctr"/>
+          <a:lstStyle/>
+          <a:p>
+            <a:pPr algn="ctr"/>
+            <a:endParaRPr lang="en-150">
+              <a:solidFill>
+                <a:srgbClr val="1A1F71"/>
+              </a:solidFill>
+            </a:endParaRPr>
+          </a:p>
+        </p:txBody>
+      </p:sp>
+      <p:sp>
+        <p:nvSpPr>
+          <p:cNvPr id="13" name="Rectangle 12">
+            <a:extLst>
+              <a:ext uri="{FF2B5EF4-FFF2-40B4-BE49-F238E27FC236}">
+                <a16:creationId xmlns:a16="http://schemas.microsoft.com/office/drawing/2014/main" id="{4F59E804-2126-BFC0-656D-64639999D240}"/>
+              </a:ext>
+            </a:extLst>
+          </p:cNvPr>
+          <p:cNvSpPr/>
+          <p:nvPr/>
+        </p:nvSpPr>
+        <p:spPr>
+          <a:xfrm>
+            <a:off x="5923282" y="2969726"/>
+            <a:ext cx="1369714" cy="344274"/>
+          </a:xfrm>
+          <a:prstGeom prst="rect">
+            <a:avLst/>
+          </a:prstGeom>
+          <a:solidFill>
+            <a:srgbClr val="1A1F71"/>
+          </a:solidFill>
+          <a:ln w="3175">
+            <a:noFill/>
+          </a:ln>
+          <a:effectLst/>
+          <a:scene3d>
+            <a:camera prst="orthographicFront"/>
+            <a:lightRig rig="threePt" dir="t"/>
+          </a:scene3d>
+          <a:sp3d>
+            <a:bevelT w="38100" h="38100"/>
+          </a:sp3d>
+        </p:spPr>
+        <p:style>
+          <a:lnRef idx="2">
+            <a:schemeClr val="accent1">
+              <a:shade val="15000"/>
+            </a:schemeClr>
+          </a:lnRef>
+          <a:fillRef idx="1">
+            <a:schemeClr val="accent1"/>
+          </a:fillRef>
+          <a:effectRef idx="0">
+            <a:schemeClr val="accent1"/>
+          </a:effectRef>
+          <a:fontRef idx="minor">
+            <a:schemeClr val="lt1"/>
+          </a:fontRef>
+        </p:style>
+        <p:txBody>
+          <a:bodyPr rtlCol="0" anchor="ctr"/>
+          <a:lstStyle/>
+          <a:p>
+            <a:pPr algn="ctr"/>
+            <a:endParaRPr lang="en-150">
+              <a:solidFill>
+                <a:srgbClr val="1A1F71"/>
+              </a:solidFill>
+            </a:endParaRPr>
+          </a:p>
+        </p:txBody>
+      </p:sp>
+      <p:sp>
+        <p:nvSpPr>
+          <p:cNvPr id="14" name="Rectangle 13">
+            <a:extLst>
+              <a:ext uri="{FF2B5EF4-FFF2-40B4-BE49-F238E27FC236}">
+                <a16:creationId xmlns:a16="http://schemas.microsoft.com/office/drawing/2014/main" id="{938D17EA-7F47-76FE-D657-BC3E63D2D725}"/>
+              </a:ext>
+            </a:extLst>
+          </p:cNvPr>
+          <p:cNvSpPr/>
+          <p:nvPr/>
+        </p:nvSpPr>
+        <p:spPr>
+          <a:xfrm>
+            <a:off x="7215529" y="2586332"/>
+            <a:ext cx="1369711" cy="344274"/>
+          </a:xfrm>
+          <a:prstGeom prst="rect">
+            <a:avLst/>
+          </a:prstGeom>
+          <a:gradFill flip="none" rotWithShape="1">
+            <a:gsLst>
+              <a:gs pos="0">
+                <a:srgbClr val="FFD700"/>
+              </a:gs>
+              <a:gs pos="78000">
+                <a:srgbClr val="FFD700"/>
+              </a:gs>
+              <a:gs pos="100000">
+                <a:schemeClr val="bg1"/>
+              </a:gs>
+            </a:gsLst>
+            <a:lin ang="18900000" scaled="1"/>
+            <a:tileRect/>
+          </a:gradFill>
+          <a:ln w="3175">
+            <a:noFill/>
+          </a:ln>
+          <a:effectLst/>
+          <a:scene3d>
+            <a:camera prst="orthographicFront"/>
+            <a:lightRig rig="threePt" dir="t"/>
+          </a:scene3d>
+          <a:sp3d>
+            <a:bevelT w="38100" h="38100"/>
+          </a:sp3d>
+        </p:spPr>
+        <p:style>
+          <a:lnRef idx="2">
+            <a:schemeClr val="accent1">
+              <a:shade val="15000"/>
+            </a:schemeClr>
+          </a:lnRef>
+          <a:fillRef idx="1">
+            <a:schemeClr val="accent1"/>
+          </a:fillRef>
+          <a:effectRef idx="0">
+            <a:schemeClr val="accent1"/>
+          </a:effectRef>
+          <a:fontRef idx="minor">
+            <a:schemeClr val="lt1"/>
+          </a:fontRef>
+        </p:style>
+        <p:txBody>
+          <a:bodyPr rtlCol="0" anchor="ctr"/>
+          <a:lstStyle/>
+          <a:p>
+            <a:pPr algn="ctr"/>
+            <a:endParaRPr lang="en-150"/>
+          </a:p>
+        </p:txBody>
+      </p:sp>
+      <p:sp>
+        <p:nvSpPr>
+          <p:cNvPr id="15" name="TextBox 14">
+            <a:extLst>
+              <a:ext uri="{FF2B5EF4-FFF2-40B4-BE49-F238E27FC236}">
+                <a16:creationId xmlns:a16="http://schemas.microsoft.com/office/drawing/2014/main" id="{CCF7D246-09BA-86BB-511B-13F366C83E28}"/>
               </a:ext>
             </a:extLst>
           </p:cNvPr>
@@ -5682,8 +7071,8 @@
         </p:nvSpPr>
         <p:spPr>
           <a:xfrm>
-            <a:off x="6713538" y="3578479"/>
-            <a:ext cx="4411662" cy="830997"/>
+            <a:off x="4492339" y="3750483"/>
+            <a:ext cx="4253087" cy="1200329"/>
           </a:xfrm>
           <a:prstGeom prst="rect">
             <a:avLst/>
@@ -5692,376 +7081,136 @@
           <a:ln>
             <a:noFill/>
           </a:ln>
-          <a:effectLst>
-            <a:outerShdw blurRad="44450" dist="27940" dir="5400000" algn="ctr">
-              <a:srgbClr val="000000">
-                <a:alpha val="32000"/>
-              </a:srgbClr>
-            </a:outerShdw>
-          </a:effectLst>
-          <a:scene3d>
-            <a:camera prst="orthographicFront">
-              <a:rot lat="0" lon="0" rev="0"/>
-            </a:camera>
-            <a:lightRig rig="balanced" dir="t">
-              <a:rot lat="0" lon="0" rev="8700000"/>
-            </a:lightRig>
-          </a:scene3d>
-          <a:sp3d>
-            <a:bevelT w="190500" h="38100"/>
-          </a:sp3d>
+          <a:effectLst/>
         </p:spPr>
         <p:txBody>
-          <a:bodyPr wrap="square" lIns="0" tIns="0" rIns="0" bIns="0" rtlCol="0">
+          <a:bodyPr wrap="none" rtlCol="0">
             <a:spAutoFit/>
+            <a:scene3d>
+              <a:camera prst="orthographicFront"/>
+              <a:lightRig rig="threePt" dir="t"/>
+            </a:scene3d>
+            <a:sp3d extrusionH="38100">
+              <a:bevelT w="38100" h="38100"/>
+            </a:sp3d>
           </a:bodyPr>
           <a:lstStyle/>
           <a:p>
-            <a:pPr algn="just"/>
-            <a:r>
-              <a:rPr lang="en-US" sz="5400" b="1" spc="780" dirty="0">
-                <a:solidFill>
-                  <a:srgbClr val="97258F"/>
-                </a:solidFill>
-                <a:latin typeface="Engravers MT" panose="02090707080505020304" pitchFamily="18" charset="0"/>
-              </a:rPr>
-              <a:t>Engine</a:t>
-            </a:r>
-          </a:p>
-        </p:txBody>
-      </p:sp>
-      <p:grpSp>
-        <p:nvGrpSpPr>
-          <p:cNvPr id="7" name="Group 6">
-            <a:extLst>
-              <a:ext uri="{FF2B5EF4-FFF2-40B4-BE49-F238E27FC236}">
-                <a16:creationId xmlns:a16="http://schemas.microsoft.com/office/drawing/2014/main" id="{5CA38074-ED14-FB0B-081A-0AEAA26EC8BE}"/>
-              </a:ext>
-            </a:extLst>
-          </p:cNvPr>
-          <p:cNvGrpSpPr/>
-          <p:nvPr/>
-        </p:nvGrpSpPr>
-        <p:grpSpPr>
-          <a:xfrm>
-            <a:off x="769938" y="583285"/>
-            <a:ext cx="4253087" cy="1553375"/>
-            <a:chOff x="587089" y="854262"/>
-            <a:chExt cx="4253087" cy="1553375"/>
-          </a:xfrm>
-        </p:grpSpPr>
-        <p:sp>
-          <p:nvSpPr>
-            <p:cNvPr id="8" name="Rectangle 7">
-              <a:extLst>
-                <a:ext uri="{FF2B5EF4-FFF2-40B4-BE49-F238E27FC236}">
-                  <a16:creationId xmlns:a16="http://schemas.microsoft.com/office/drawing/2014/main" id="{583C051B-A39B-AC04-76B0-DC200FAC2D8B}"/>
-                </a:ext>
-              </a:extLst>
-            </p:cNvPr>
-            <p:cNvSpPr/>
-            <p:nvPr/>
-          </p:nvSpPr>
-          <p:spPr>
-            <a:xfrm>
-              <a:off x="714375" y="1168366"/>
-              <a:ext cx="1223963" cy="149432"/>
-            </a:xfrm>
-            <a:prstGeom prst="rect">
-              <a:avLst/>
-            </a:prstGeom>
-            <a:solidFill>
-              <a:srgbClr val="1A1F71"/>
-            </a:solidFill>
-            <a:ln w="3175">
-              <a:noFill/>
-            </a:ln>
-            <a:effectLst>
-              <a:outerShdw blurRad="57785" dist="33020" dir="3180000" algn="ctr">
-                <a:srgbClr val="000000">
-                  <a:alpha val="30000"/>
-                </a:srgbClr>
-              </a:outerShdw>
-            </a:effectLst>
-          </p:spPr>
-          <p:style>
-            <a:lnRef idx="2">
-              <a:schemeClr val="accent1">
-                <a:shade val="15000"/>
-              </a:schemeClr>
-            </a:lnRef>
-            <a:fillRef idx="1">
-              <a:schemeClr val="accent1"/>
-            </a:fillRef>
-            <a:effectRef idx="0">
-              <a:schemeClr val="accent1"/>
-            </a:effectRef>
-            <a:fontRef idx="minor">
-              <a:schemeClr val="lt1"/>
-            </a:fontRef>
-          </p:style>
-          <p:txBody>
-            <a:bodyPr rtlCol="0" anchor="ctr"/>
-            <a:lstStyle/>
-            <a:p>
-              <a:pPr algn="ctr"/>
-              <a:endParaRPr lang="en-150">
+            <a:r>
+              <a:rPr lang="en-US" sz="7200" dirty="0">
                 <a:ln w="3175">
-                  <a:solidFill>
-                    <a:schemeClr val="bg1">
-                      <a:lumMod val="95000"/>
-                    </a:schemeClr>
-                  </a:solidFill>
+                  <a:noFill/>
                 </a:ln>
                 <a:solidFill>
                   <a:srgbClr val="1A1F71"/>
                 </a:solidFill>
-              </a:endParaRPr>
-            </a:p>
-          </p:txBody>
-        </p:sp>
-        <p:sp>
-          <p:nvSpPr>
-            <p:cNvPr id="9" name="Rectangle 8">
-              <a:extLst>
-                <a:ext uri="{FF2B5EF4-FFF2-40B4-BE49-F238E27FC236}">
-                  <a16:creationId xmlns:a16="http://schemas.microsoft.com/office/drawing/2014/main" id="{4A100315-569F-0257-8A1C-6DABADA772E4}"/>
-                </a:ext>
-              </a:extLst>
-            </p:cNvPr>
-            <p:cNvSpPr/>
-            <p:nvPr/>
-          </p:nvSpPr>
-          <p:spPr>
-            <a:xfrm>
-              <a:off x="1938338" y="1011314"/>
-              <a:ext cx="1368425" cy="149432"/>
-            </a:xfrm>
-            <a:prstGeom prst="rect">
-              <a:avLst/>
-            </a:prstGeom>
-            <a:solidFill>
-              <a:srgbClr val="1A1F71"/>
-            </a:solidFill>
-            <a:ln w="3175">
-              <a:noFill/>
-            </a:ln>
-            <a:effectLst>
-              <a:outerShdw blurRad="57785" dist="33020" dir="3180000" algn="ctr">
-                <a:srgbClr val="000000">
-                  <a:alpha val="30000"/>
-                </a:srgbClr>
-              </a:outerShdw>
-            </a:effectLst>
-          </p:spPr>
-          <p:style>
-            <a:lnRef idx="2">
-              <a:schemeClr val="accent1">
-                <a:shade val="15000"/>
-              </a:schemeClr>
-            </a:lnRef>
-            <a:fillRef idx="1">
-              <a:schemeClr val="accent1"/>
-            </a:fillRef>
-            <a:effectRef idx="0">
-              <a:schemeClr val="accent1"/>
-            </a:effectRef>
-            <a:fontRef idx="minor">
-              <a:schemeClr val="lt1"/>
-            </a:fontRef>
-          </p:style>
-          <p:txBody>
-            <a:bodyPr rtlCol="0" anchor="ctr"/>
-            <a:lstStyle/>
-            <a:p>
-              <a:pPr algn="ctr"/>
-              <a:endParaRPr lang="en-150">
+                <a:latin typeface="Aafia" pitchFamily="50" charset="0"/>
+              </a:rPr>
+              <a:t>LaDe</a:t>
+            </a:r>
+            <a:r>
+              <a:rPr lang="en-US" sz="7200" dirty="0">
                 <a:ln w="3175">
-                  <a:solidFill>
-                    <a:schemeClr val="bg1">
-                      <a:lumMod val="95000"/>
-                    </a:schemeClr>
-                  </a:solidFill>
+                  <a:noFill/>
+                </a:ln>
+                <a:gradFill flip="none" rotWithShape="1">
+                  <a:gsLst>
+                    <a:gs pos="80000">
+                      <a:srgbClr val="FFD700"/>
+                    </a:gs>
+                    <a:gs pos="0">
+                      <a:srgbClr val="FFD700"/>
+                    </a:gs>
+                    <a:gs pos="100000">
+                      <a:schemeClr val="bg1"/>
+                    </a:gs>
+                  </a:gsLst>
+                  <a:lin ang="18900000" scaled="1"/>
+                  <a:tileRect/>
+                </a:gradFill>
+                <a:latin typeface="Aafia" pitchFamily="50" charset="0"/>
+              </a:rPr>
+              <a:t>RR</a:t>
+            </a:r>
+          </a:p>
+        </p:txBody>
+      </p:sp>
+      <p:sp>
+        <p:nvSpPr>
+          <p:cNvPr id="3" name="TextBox 2">
+            <a:extLst>
+              <a:ext uri="{FF2B5EF4-FFF2-40B4-BE49-F238E27FC236}">
+                <a16:creationId xmlns:a16="http://schemas.microsoft.com/office/drawing/2014/main" id="{61F49C8A-697E-66B4-489E-AA7D4C7F18F2}"/>
+              </a:ext>
+            </a:extLst>
+          </p:cNvPr>
+          <p:cNvSpPr txBox="1"/>
+          <p:nvPr/>
+        </p:nvSpPr>
+        <p:spPr>
+          <a:xfrm>
+            <a:off x="7215529" y="4024736"/>
+            <a:ext cx="2812272" cy="1323439"/>
+          </a:xfrm>
+          <a:prstGeom prst="rect">
+            <a:avLst/>
+          </a:prstGeom>
+          <a:noFill/>
+        </p:spPr>
+        <p:txBody>
+          <a:bodyPr wrap="square" rtlCol="0">
+            <a:spAutoFit/>
+            <a:scene3d>
+              <a:camera prst="isometricRightUp"/>
+              <a:lightRig rig="threePt" dir="t"/>
+            </a:scene3d>
+          </a:bodyPr>
+          <a:lstStyle/>
+          <a:p>
+            <a:r>
+              <a:rPr lang="en-US" sz="8000" b="1" dirty="0">
+                <a:ln w="19050">
+                  <a:noFill/>
                 </a:ln>
                 <a:solidFill>
-                  <a:srgbClr val="1A1F71"/>
+                  <a:srgbClr val="FE02EC"/>
                 </a:solidFill>
-              </a:endParaRPr>
-            </a:p>
-          </p:txBody>
-        </p:sp>
-        <p:sp>
-          <p:nvSpPr>
-            <p:cNvPr id="10" name="Rectangle 9">
-              <a:extLst>
-                <a:ext uri="{FF2B5EF4-FFF2-40B4-BE49-F238E27FC236}">
-                  <a16:creationId xmlns:a16="http://schemas.microsoft.com/office/drawing/2014/main" id="{FB32A31A-FE84-27AE-9FA5-BD93B1A599A0}"/>
-                </a:ext>
-              </a:extLst>
-            </p:cNvPr>
-            <p:cNvSpPr/>
-            <p:nvPr/>
-          </p:nvSpPr>
-          <p:spPr>
-            <a:xfrm>
-              <a:off x="3306764" y="854262"/>
-              <a:ext cx="1377950" cy="149432"/>
-            </a:xfrm>
-            <a:prstGeom prst="rect">
-              <a:avLst/>
-            </a:prstGeom>
-            <a:gradFill flip="none" rotWithShape="1">
-              <a:gsLst>
-                <a:gs pos="0">
-                  <a:srgbClr val="FFD700"/>
-                </a:gs>
-                <a:gs pos="78000">
-                  <a:srgbClr val="FFD700"/>
-                </a:gs>
-                <a:gs pos="100000">
-                  <a:schemeClr val="bg1"/>
-                </a:gs>
-              </a:gsLst>
-              <a:lin ang="18900000" scaled="1"/>
-              <a:tileRect/>
-            </a:gradFill>
-            <a:ln w="3175">
-              <a:noFill/>
-            </a:ln>
-            <a:effectLst>
-              <a:outerShdw blurRad="57785" dist="33020" dir="3180000" algn="ctr">
-                <a:srgbClr val="000000">
-                  <a:alpha val="30000"/>
-                </a:srgbClr>
-              </a:outerShdw>
-            </a:effectLst>
-          </p:spPr>
-          <p:style>
-            <a:lnRef idx="2">
-              <a:schemeClr val="accent1">
-                <a:shade val="15000"/>
-              </a:schemeClr>
-            </a:lnRef>
-            <a:fillRef idx="1">
-              <a:schemeClr val="accent1"/>
-            </a:fillRef>
-            <a:effectRef idx="0">
-              <a:schemeClr val="accent1"/>
-            </a:effectRef>
-            <a:fontRef idx="minor">
-              <a:schemeClr val="lt1"/>
-            </a:fontRef>
-          </p:style>
-          <p:txBody>
-            <a:bodyPr rtlCol="0" anchor="ctr"/>
-            <a:lstStyle/>
-            <a:p>
-              <a:pPr algn="ctr"/>
-              <a:endParaRPr lang="en-150">
-                <a:ln w="3175">
-                  <a:solidFill>
-                    <a:schemeClr val="bg1">
-                      <a:lumMod val="95000"/>
-                    </a:schemeClr>
-                  </a:solidFill>
-                </a:ln>
-              </a:endParaRPr>
-            </a:p>
-          </p:txBody>
-        </p:sp>
-        <p:sp>
-          <p:nvSpPr>
-            <p:cNvPr id="11" name="TextBox 10">
-              <a:extLst>
-                <a:ext uri="{FF2B5EF4-FFF2-40B4-BE49-F238E27FC236}">
-                  <a16:creationId xmlns:a16="http://schemas.microsoft.com/office/drawing/2014/main" id="{32F225EA-5826-AB82-F3AE-714C3CD68F5D}"/>
-                </a:ext>
-              </a:extLst>
-            </p:cNvPr>
-            <p:cNvSpPr txBox="1"/>
-            <p:nvPr/>
-          </p:nvSpPr>
-          <p:spPr>
-            <a:xfrm>
-              <a:off x="587089" y="1207308"/>
-              <a:ext cx="4253087" cy="1200329"/>
-            </a:xfrm>
-            <a:prstGeom prst="rect">
-              <a:avLst/>
-            </a:prstGeom>
-            <a:noFill/>
-            <a:ln>
-              <a:noFill/>
-            </a:ln>
-            <a:effectLst>
-              <a:outerShdw blurRad="57785" dist="33020" dir="3180000" algn="ctr">
-                <a:srgbClr val="000000">
-                  <a:alpha val="30000"/>
-                </a:srgbClr>
-              </a:outerShdw>
-            </a:effectLst>
-          </p:spPr>
-          <p:txBody>
-            <a:bodyPr wrap="none" rtlCol="0">
-              <a:spAutoFit/>
-              <a:sp3d extrusionH="38100">
-                <a:bevelT w="38100" h="38100"/>
-              </a:sp3d>
-            </a:bodyPr>
-            <a:lstStyle/>
-            <a:p>
-              <a:r>
-                <a:rPr lang="en-US" sz="7200" dirty="0">
-                  <a:ln w="3175">
-                    <a:solidFill>
-                      <a:schemeClr val="bg1">
-                        <a:lumMod val="95000"/>
-                      </a:schemeClr>
-                    </a:solidFill>
-                  </a:ln>
-                  <a:solidFill>
-                    <a:srgbClr val="1A1F71"/>
-                  </a:solidFill>
-                  <a:latin typeface="Aafia" pitchFamily="50" charset="0"/>
-                </a:rPr>
-                <a:t>LaDe</a:t>
-              </a:r>
-              <a:r>
-                <a:rPr lang="en-US" sz="7200" dirty="0">
-                  <a:ln w="3175">
-                    <a:solidFill>
-                      <a:schemeClr val="bg1">
-                        <a:lumMod val="95000"/>
-                      </a:schemeClr>
-                    </a:solidFill>
-                  </a:ln>
-                  <a:gradFill flip="none" rotWithShape="1">
-                    <a:gsLst>
-                      <a:gs pos="80000">
-                        <a:srgbClr val="FFD700"/>
-                      </a:gs>
-                      <a:gs pos="0">
-                        <a:srgbClr val="FFD700"/>
-                      </a:gs>
-                      <a:gs pos="100000">
-                        <a:schemeClr val="bg1"/>
-                      </a:gs>
-                    </a:gsLst>
-                    <a:lin ang="18900000" scaled="1"/>
-                    <a:tileRect/>
-                  </a:gradFill>
-                  <a:latin typeface="Aafia" pitchFamily="50" charset="0"/>
-                </a:rPr>
-                <a:t>RR</a:t>
-              </a:r>
-            </a:p>
-          </p:txBody>
-        </p:sp>
-      </p:grpSp>
+                <a:effectLst>
+                  <a:outerShdw blurRad="50800" dist="38100" algn="l" rotWithShape="0">
+                    <a:prstClr val="black">
+                      <a:alpha val="40000"/>
+                    </a:prstClr>
+                  </a:outerShdw>
+                </a:effectLst>
+                <a:latin typeface="always  forever" pitchFamily="2" charset="0"/>
+                <a:cs typeface="Libertinus Keyboard" pitchFamily="50" charset="-79"/>
+              </a:rPr>
+              <a:t>Python Lib</a:t>
+            </a:r>
+            <a:endParaRPr lang="en-150" sz="8000" b="1" dirty="0">
+              <a:ln w="19050">
+                <a:noFill/>
+              </a:ln>
+              <a:solidFill>
+                <a:srgbClr val="FE02EC"/>
+              </a:solidFill>
+              <a:effectLst>
+                <a:outerShdw blurRad="50800" dist="38100" algn="l" rotWithShape="0">
+                  <a:prstClr val="black">
+                    <a:alpha val="40000"/>
+                  </a:prstClr>
+                </a:outerShdw>
+              </a:effectLst>
+              <a:latin typeface="always  forever" pitchFamily="2" charset="0"/>
+              <a:cs typeface="Libertinus Keyboard" pitchFamily="50" charset="-79"/>
+            </a:endParaRPr>
+          </a:p>
+        </p:txBody>
+      </p:sp>
     </p:spTree>
     <p:extLst>
       <p:ext uri="{BB962C8B-B14F-4D97-AF65-F5344CB8AC3E}">
-        <p14:creationId xmlns:p14="http://schemas.microsoft.com/office/powerpoint/2010/main" val="1312158596"/>
+        <p14:creationId xmlns:p14="http://schemas.microsoft.com/office/powerpoint/2010/main" val="2648620447"/>
       </p:ext>
     </p:extLst>
   </p:cSld>
@@ -6071,8 +7220,8 @@
 </p:sld>
 </file>
 
-<file path=ppt/slides/slide3.xml><?xml version="1.0" encoding="utf-8"?>
-<p:sld xmlns:a="http://schemas.openxmlformats.org/drawingml/2006/main" xmlns:r="http://schemas.openxmlformats.org/officeDocument/2006/relationships" xmlns:p="http://schemas.openxmlformats.org/presentationml/2006/main">
+<file path=ppt/slides/slide5.xml><?xml version="1.0" encoding="utf-8"?>
+<p:sld xmlns:a="http://schemas.openxmlformats.org/drawingml/2006/main" xmlns:r="http://schemas.openxmlformats.org/officeDocument/2006/relationships" xmlns:p="http://schemas.openxmlformats.org/presentationml/2006/main" show="0">
   <p:cSld>
     <p:spTree>
       <p:nvGrpSpPr>
@@ -6407,8 +7556,8 @@
 </p:sld>
 </file>
 
-<file path=ppt/slides/slide4.xml><?xml version="1.0" encoding="utf-8"?>
-<p:sld xmlns:a="http://schemas.openxmlformats.org/drawingml/2006/main" xmlns:r="http://schemas.openxmlformats.org/officeDocument/2006/relationships" xmlns:p="http://schemas.openxmlformats.org/presentationml/2006/main">
+<file path=ppt/slides/slide6.xml><?xml version="1.0" encoding="utf-8"?>
+<p:sld xmlns:a="http://schemas.openxmlformats.org/drawingml/2006/main" xmlns:r="http://schemas.openxmlformats.org/officeDocument/2006/relationships" xmlns:p="http://schemas.openxmlformats.org/presentationml/2006/main" show="0">
   <p:cSld>
     <p:spTree>
       <p:nvGrpSpPr>
@@ -6745,8 +7894,8 @@
 </p:sld>
 </file>
 
-<file path=ppt/slides/slide5.xml><?xml version="1.0" encoding="utf-8"?>
-<p:sld xmlns:a="http://schemas.openxmlformats.org/drawingml/2006/main" xmlns:r="http://schemas.openxmlformats.org/officeDocument/2006/relationships" xmlns:p="http://schemas.openxmlformats.org/presentationml/2006/main">
+<file path=ppt/slides/slide7.xml><?xml version="1.0" encoding="utf-8"?>
+<p:sld xmlns:a="http://schemas.openxmlformats.org/drawingml/2006/main" xmlns:r="http://schemas.openxmlformats.org/officeDocument/2006/relationships" xmlns:p="http://schemas.openxmlformats.org/presentationml/2006/main" show="0">
   <p:cSld>
     <p:spTree>
       <p:nvGrpSpPr>
@@ -7025,8 +8174,8 @@
 </p:sld>
 </file>
 
-<file path=ppt/slides/slide6.xml><?xml version="1.0" encoding="utf-8"?>
-<p:sld xmlns:a="http://schemas.openxmlformats.org/drawingml/2006/main" xmlns:r="http://schemas.openxmlformats.org/officeDocument/2006/relationships" xmlns:p="http://schemas.openxmlformats.org/presentationml/2006/main">
+<file path=ppt/slides/slide8.xml><?xml version="1.0" encoding="utf-8"?>
+<p:sld xmlns:a="http://schemas.openxmlformats.org/drawingml/2006/main" xmlns:r="http://schemas.openxmlformats.org/officeDocument/2006/relationships" xmlns:p="http://schemas.openxmlformats.org/presentationml/2006/main" show="0">
   <p:cSld>
     <p:spTree>
       <p:nvGrpSpPr>
@@ -7297,8 +8446,8 @@
 </p:sld>
 </file>
 
-<file path=ppt/slides/slide7.xml><?xml version="1.0" encoding="utf-8"?>
-<p:sld xmlns:a="http://schemas.openxmlformats.org/drawingml/2006/main" xmlns:r="http://schemas.openxmlformats.org/officeDocument/2006/relationships" xmlns:p="http://schemas.openxmlformats.org/presentationml/2006/main">
+<file path=ppt/slides/slide9.xml><?xml version="1.0" encoding="utf-8"?>
+<p:sld xmlns:a="http://schemas.openxmlformats.org/drawingml/2006/main" xmlns:r="http://schemas.openxmlformats.org/officeDocument/2006/relationships" xmlns:p="http://schemas.openxmlformats.org/presentationml/2006/main" show="0">
   <p:cSld>
     <p:spTree>
       <p:nvGrpSpPr>
@@ -7538,696 +8687,6 @@
     <p:extLst>
       <p:ext uri="{BB962C8B-B14F-4D97-AF65-F5344CB8AC3E}">
         <p14:creationId xmlns:p14="http://schemas.microsoft.com/office/powerpoint/2010/main" val="829168614"/>
-      </p:ext>
-    </p:extLst>
-  </p:cSld>
-  <p:clrMapOvr>
-    <a:masterClrMapping/>
-  </p:clrMapOvr>
-</p:sld>
-</file>
-
-<file path=ppt/slides/slide8.xml><?xml version="1.0" encoding="utf-8"?>
-<p:sld xmlns:a="http://schemas.openxmlformats.org/drawingml/2006/main" xmlns:r="http://schemas.openxmlformats.org/officeDocument/2006/relationships" xmlns:p="http://schemas.openxmlformats.org/presentationml/2006/main">
-  <p:cSld>
-    <p:spTree>
-      <p:nvGrpSpPr>
-        <p:cNvPr id="1" name=""/>
-        <p:cNvGrpSpPr/>
-        <p:nvPr/>
-      </p:nvGrpSpPr>
-      <p:grpSpPr>
-        <a:xfrm>
-          <a:off x="0" y="0"/>
-          <a:ext cx="0" cy="0"/>
-          <a:chOff x="0" y="0"/>
-          <a:chExt cx="0" cy="0"/>
-        </a:xfrm>
-      </p:grpSpPr>
-      <p:sp>
-        <p:nvSpPr>
-          <p:cNvPr id="6" name="Rectangle 5">
-            <a:extLst>
-              <a:ext uri="{FF2B5EF4-FFF2-40B4-BE49-F238E27FC236}">
-                <a16:creationId xmlns:a16="http://schemas.microsoft.com/office/drawing/2014/main" id="{011E5DD6-E9CE-0E04-DAAC-92581C64AEF3}"/>
-              </a:ext>
-            </a:extLst>
-          </p:cNvPr>
-          <p:cNvSpPr/>
-          <p:nvPr/>
-        </p:nvSpPr>
-        <p:spPr>
-          <a:xfrm>
-            <a:off x="4483056" y="2869235"/>
-            <a:ext cx="1369714" cy="344274"/>
-          </a:xfrm>
-          <a:prstGeom prst="rect">
-            <a:avLst/>
-          </a:prstGeom>
-          <a:ln>
-            <a:noFill/>
-          </a:ln>
-        </p:spPr>
-        <p:style>
-          <a:lnRef idx="2">
-            <a:schemeClr val="accent1">
-              <a:shade val="15000"/>
-            </a:schemeClr>
-          </a:lnRef>
-          <a:fillRef idx="1">
-            <a:schemeClr val="accent1"/>
-          </a:fillRef>
-          <a:effectRef idx="0">
-            <a:schemeClr val="accent1"/>
-          </a:effectRef>
-          <a:fontRef idx="minor">
-            <a:schemeClr val="lt1"/>
-          </a:fontRef>
-        </p:style>
-        <p:txBody>
-          <a:bodyPr rtlCol="0" anchor="ctr"/>
-          <a:lstStyle/>
-          <a:p>
-            <a:pPr algn="ctr"/>
-            <a:endParaRPr lang="en-150"/>
-          </a:p>
-        </p:txBody>
-      </p:sp>
-      <p:sp>
-        <p:nvSpPr>
-          <p:cNvPr id="7" name="Rectangle 6">
-            <a:extLst>
-              <a:ext uri="{FF2B5EF4-FFF2-40B4-BE49-F238E27FC236}">
-                <a16:creationId xmlns:a16="http://schemas.microsoft.com/office/drawing/2014/main" id="{4E011A50-3FA0-A8E8-8DF5-1CBB2DF4C4FE}"/>
-              </a:ext>
-            </a:extLst>
-          </p:cNvPr>
-          <p:cNvSpPr/>
-          <p:nvPr/>
-        </p:nvSpPr>
-        <p:spPr>
-          <a:xfrm>
-            <a:off x="5775303" y="2428340"/>
-            <a:ext cx="1369714" cy="344274"/>
-          </a:xfrm>
-          <a:prstGeom prst="rect">
-            <a:avLst/>
-          </a:prstGeom>
-          <a:ln>
-            <a:noFill/>
-          </a:ln>
-        </p:spPr>
-        <p:style>
-          <a:lnRef idx="2">
-            <a:schemeClr val="accent1">
-              <a:shade val="15000"/>
-            </a:schemeClr>
-          </a:lnRef>
-          <a:fillRef idx="1">
-            <a:schemeClr val="accent1"/>
-          </a:fillRef>
-          <a:effectRef idx="0">
-            <a:schemeClr val="accent1"/>
-          </a:effectRef>
-          <a:fontRef idx="minor">
-            <a:schemeClr val="lt1"/>
-          </a:fontRef>
-        </p:style>
-        <p:txBody>
-          <a:bodyPr rtlCol="0" anchor="ctr"/>
-          <a:lstStyle/>
-          <a:p>
-            <a:pPr algn="ctr"/>
-            <a:endParaRPr lang="en-150"/>
-          </a:p>
-        </p:txBody>
-      </p:sp>
-      <p:sp>
-        <p:nvSpPr>
-          <p:cNvPr id="8" name="Rectangle 7">
-            <a:extLst>
-              <a:ext uri="{FF2B5EF4-FFF2-40B4-BE49-F238E27FC236}">
-                <a16:creationId xmlns:a16="http://schemas.microsoft.com/office/drawing/2014/main" id="{78B4BDD1-236D-438B-09EB-97CA895C3300}"/>
-              </a:ext>
-            </a:extLst>
-          </p:cNvPr>
-          <p:cNvSpPr/>
-          <p:nvPr/>
-        </p:nvSpPr>
-        <p:spPr>
-          <a:xfrm>
-            <a:off x="7067550" y="1987445"/>
-            <a:ext cx="1369711" cy="344274"/>
-          </a:xfrm>
-          <a:prstGeom prst="rect">
-            <a:avLst/>
-          </a:prstGeom>
-          <a:solidFill>
-            <a:schemeClr val="accent2"/>
-          </a:solidFill>
-          <a:ln>
-            <a:noFill/>
-          </a:ln>
-        </p:spPr>
-        <p:style>
-          <a:lnRef idx="2">
-            <a:schemeClr val="accent1">
-              <a:shade val="15000"/>
-            </a:schemeClr>
-          </a:lnRef>
-          <a:fillRef idx="1">
-            <a:schemeClr val="accent1"/>
-          </a:fillRef>
-          <a:effectRef idx="0">
-            <a:schemeClr val="accent1"/>
-          </a:effectRef>
-          <a:fontRef idx="minor">
-            <a:schemeClr val="lt1"/>
-          </a:fontRef>
-        </p:style>
-        <p:txBody>
-          <a:bodyPr rtlCol="0" anchor="ctr"/>
-          <a:lstStyle/>
-          <a:p>
-            <a:pPr algn="ctr"/>
-            <a:endParaRPr lang="en-150"/>
-          </a:p>
-        </p:txBody>
-      </p:sp>
-      <p:sp>
-        <p:nvSpPr>
-          <p:cNvPr id="2" name="TextBox 1">
-            <a:extLst>
-              <a:ext uri="{FF2B5EF4-FFF2-40B4-BE49-F238E27FC236}">
-                <a16:creationId xmlns:a16="http://schemas.microsoft.com/office/drawing/2014/main" id="{5DF106CF-89D1-049C-3FD4-88578CB84BF1}"/>
-              </a:ext>
-            </a:extLst>
-          </p:cNvPr>
-          <p:cNvSpPr txBox="1"/>
-          <p:nvPr/>
-        </p:nvSpPr>
-        <p:spPr>
-          <a:xfrm>
-            <a:off x="4344360" y="3213509"/>
-            <a:ext cx="4253087" cy="1200329"/>
-          </a:xfrm>
-          <a:prstGeom prst="rect">
-            <a:avLst/>
-          </a:prstGeom>
-          <a:noFill/>
-        </p:spPr>
-        <p:txBody>
-          <a:bodyPr wrap="none" rtlCol="0">
-            <a:spAutoFit/>
-          </a:bodyPr>
-          <a:lstStyle/>
-          <a:p>
-            <a:r>
-              <a:rPr lang="en-US" sz="7200" dirty="0">
-                <a:solidFill>
-                  <a:srgbClr val="156082"/>
-                </a:solidFill>
-                <a:latin typeface="Aafia" pitchFamily="50" charset="0"/>
-              </a:rPr>
-              <a:t>LaDe</a:t>
-            </a:r>
-            <a:r>
-              <a:rPr lang="en-US" sz="7200" dirty="0">
-                <a:solidFill>
-                  <a:schemeClr val="accent2"/>
-                </a:solidFill>
-                <a:latin typeface="Aafia" pitchFamily="50" charset="0"/>
-              </a:rPr>
-              <a:t>RR</a:t>
-            </a:r>
-          </a:p>
-        </p:txBody>
-      </p:sp>
-      <p:sp>
-        <p:nvSpPr>
-          <p:cNvPr id="11" name="Rectangle 10">
-            <a:extLst>
-              <a:ext uri="{FF2B5EF4-FFF2-40B4-BE49-F238E27FC236}">
-                <a16:creationId xmlns:a16="http://schemas.microsoft.com/office/drawing/2014/main" id="{2DECFECA-DA2A-9536-415C-4E43406CD3BB}"/>
-              </a:ext>
-            </a:extLst>
-          </p:cNvPr>
-          <p:cNvSpPr/>
-          <p:nvPr/>
-        </p:nvSpPr>
-        <p:spPr>
-          <a:xfrm>
-            <a:off x="621240" y="1215144"/>
-            <a:ext cx="1369714" cy="344274"/>
-          </a:xfrm>
-          <a:prstGeom prst="rect">
-            <a:avLst/>
-          </a:prstGeom>
-          <a:solidFill>
-            <a:srgbClr val="1A1F71"/>
-          </a:solidFill>
-          <a:ln>
-            <a:noFill/>
-          </a:ln>
-        </p:spPr>
-        <p:style>
-          <a:lnRef idx="2">
-            <a:schemeClr val="accent1">
-              <a:shade val="15000"/>
-            </a:schemeClr>
-          </a:lnRef>
-          <a:fillRef idx="1">
-            <a:schemeClr val="accent1"/>
-          </a:fillRef>
-          <a:effectRef idx="0">
-            <a:schemeClr val="accent1"/>
-          </a:effectRef>
-          <a:fontRef idx="minor">
-            <a:schemeClr val="lt1"/>
-          </a:fontRef>
-        </p:style>
-        <p:txBody>
-          <a:bodyPr rtlCol="0" anchor="ctr"/>
-          <a:lstStyle/>
-          <a:p>
-            <a:pPr algn="ctr"/>
-            <a:endParaRPr lang="en-150"/>
-          </a:p>
-        </p:txBody>
-      </p:sp>
-      <p:sp>
-        <p:nvSpPr>
-          <p:cNvPr id="12" name="Rectangle 11">
-            <a:extLst>
-              <a:ext uri="{FF2B5EF4-FFF2-40B4-BE49-F238E27FC236}">
-                <a16:creationId xmlns:a16="http://schemas.microsoft.com/office/drawing/2014/main" id="{51254E2D-F790-3860-F5B3-F21908C0E908}"/>
-              </a:ext>
-            </a:extLst>
-          </p:cNvPr>
-          <p:cNvSpPr/>
-          <p:nvPr/>
-        </p:nvSpPr>
-        <p:spPr>
-          <a:xfrm>
-            <a:off x="1913487" y="774249"/>
-            <a:ext cx="1369714" cy="344274"/>
-          </a:xfrm>
-          <a:prstGeom prst="rect">
-            <a:avLst/>
-          </a:prstGeom>
-          <a:solidFill>
-            <a:srgbClr val="1A1F71"/>
-          </a:solidFill>
-          <a:ln>
-            <a:noFill/>
-          </a:ln>
-        </p:spPr>
-        <p:style>
-          <a:lnRef idx="2">
-            <a:schemeClr val="accent1">
-              <a:shade val="15000"/>
-            </a:schemeClr>
-          </a:lnRef>
-          <a:fillRef idx="1">
-            <a:schemeClr val="accent1"/>
-          </a:fillRef>
-          <a:effectRef idx="0">
-            <a:schemeClr val="accent1"/>
-          </a:effectRef>
-          <a:fontRef idx="minor">
-            <a:schemeClr val="lt1"/>
-          </a:fontRef>
-        </p:style>
-        <p:txBody>
-          <a:bodyPr rtlCol="0" anchor="ctr"/>
-          <a:lstStyle/>
-          <a:p>
-            <a:pPr algn="ctr"/>
-            <a:endParaRPr lang="en-150"/>
-          </a:p>
-        </p:txBody>
-      </p:sp>
-      <p:sp>
-        <p:nvSpPr>
-          <p:cNvPr id="13" name="Rectangle 12">
-            <a:extLst>
-              <a:ext uri="{FF2B5EF4-FFF2-40B4-BE49-F238E27FC236}">
-                <a16:creationId xmlns:a16="http://schemas.microsoft.com/office/drawing/2014/main" id="{83552A5B-6ADE-7AAD-840D-E725D6080ED5}"/>
-              </a:ext>
-            </a:extLst>
-          </p:cNvPr>
-          <p:cNvSpPr/>
-          <p:nvPr/>
-        </p:nvSpPr>
-        <p:spPr>
-          <a:xfrm>
-            <a:off x="3205734" y="333354"/>
-            <a:ext cx="1369711" cy="344274"/>
-          </a:xfrm>
-          <a:prstGeom prst="rect">
-            <a:avLst/>
-          </a:prstGeom>
-          <a:solidFill>
-            <a:srgbClr val="E101D1"/>
-          </a:solidFill>
-          <a:ln>
-            <a:noFill/>
-          </a:ln>
-        </p:spPr>
-        <p:style>
-          <a:lnRef idx="2">
-            <a:schemeClr val="accent1">
-              <a:shade val="15000"/>
-            </a:schemeClr>
-          </a:lnRef>
-          <a:fillRef idx="1">
-            <a:schemeClr val="accent1"/>
-          </a:fillRef>
-          <a:effectRef idx="0">
-            <a:schemeClr val="accent1"/>
-          </a:effectRef>
-          <a:fontRef idx="minor">
-            <a:schemeClr val="lt1"/>
-          </a:fontRef>
-        </p:style>
-        <p:txBody>
-          <a:bodyPr rtlCol="0" anchor="ctr"/>
-          <a:lstStyle/>
-          <a:p>
-            <a:pPr algn="ctr"/>
-            <a:endParaRPr lang="en-150"/>
-          </a:p>
-        </p:txBody>
-      </p:sp>
-      <p:sp>
-        <p:nvSpPr>
-          <p:cNvPr id="14" name="TextBox 13">
-            <a:extLst>
-              <a:ext uri="{FF2B5EF4-FFF2-40B4-BE49-F238E27FC236}">
-                <a16:creationId xmlns:a16="http://schemas.microsoft.com/office/drawing/2014/main" id="{6D42D222-7ABF-6406-3CFF-BCDB43D0E6A2}"/>
-              </a:ext>
-            </a:extLst>
-          </p:cNvPr>
-          <p:cNvSpPr txBox="1"/>
-          <p:nvPr/>
-        </p:nvSpPr>
-        <p:spPr>
-          <a:xfrm>
-            <a:off x="482544" y="1559418"/>
-            <a:ext cx="4253087" cy="1200329"/>
-          </a:xfrm>
-          <a:prstGeom prst="rect">
-            <a:avLst/>
-          </a:prstGeom>
-          <a:noFill/>
-        </p:spPr>
-        <p:txBody>
-          <a:bodyPr wrap="none" rtlCol="0">
-            <a:spAutoFit/>
-          </a:bodyPr>
-          <a:lstStyle/>
-          <a:p>
-            <a:r>
-              <a:rPr lang="en-US" sz="7200" dirty="0">
-                <a:solidFill>
-                  <a:srgbClr val="1A1F71"/>
-                </a:solidFill>
-                <a:latin typeface="Aafia" pitchFamily="50" charset="0"/>
-              </a:rPr>
-              <a:t>LaDe</a:t>
-            </a:r>
-            <a:r>
-              <a:rPr lang="en-US" sz="7200" dirty="0">
-                <a:solidFill>
-                  <a:srgbClr val="E101D1"/>
-                </a:solidFill>
-                <a:latin typeface="Aafia" pitchFamily="50" charset="0"/>
-              </a:rPr>
-              <a:t>RR</a:t>
-            </a:r>
-          </a:p>
-        </p:txBody>
-      </p:sp>
-    </p:spTree>
-    <p:extLst>
-      <p:ext uri="{BB962C8B-B14F-4D97-AF65-F5344CB8AC3E}">
-        <p14:creationId xmlns:p14="http://schemas.microsoft.com/office/powerpoint/2010/main" val="2125070766"/>
-      </p:ext>
-    </p:extLst>
-  </p:cSld>
-  <p:clrMapOvr>
-    <a:masterClrMapping/>
-  </p:clrMapOvr>
-</p:sld>
-</file>
-
-<file path=ppt/slides/slide9.xml><?xml version="1.0" encoding="utf-8"?>
-<p:sld xmlns:a="http://schemas.openxmlformats.org/drawingml/2006/main" xmlns:r="http://schemas.openxmlformats.org/officeDocument/2006/relationships" xmlns:p="http://schemas.openxmlformats.org/presentationml/2006/main">
-  <p:cSld>
-    <p:spTree>
-      <p:nvGrpSpPr>
-        <p:cNvPr id="1" name=""/>
-        <p:cNvGrpSpPr/>
-        <p:nvPr/>
-      </p:nvGrpSpPr>
-      <p:grpSpPr>
-        <a:xfrm>
-          <a:off x="0" y="0"/>
-          <a:ext cx="0" cy="0"/>
-          <a:chOff x="0" y="0"/>
-          <a:chExt cx="0" cy="0"/>
-        </a:xfrm>
-      </p:grpSpPr>
-      <p:grpSp>
-        <p:nvGrpSpPr>
-          <p:cNvPr id="9" name="Group 8">
-            <a:extLst>
-              <a:ext uri="{FF2B5EF4-FFF2-40B4-BE49-F238E27FC236}">
-                <a16:creationId xmlns:a16="http://schemas.microsoft.com/office/drawing/2014/main" id="{2590A2DE-16F5-44B0-79F7-D9518568AB64}"/>
-              </a:ext>
-            </a:extLst>
-          </p:cNvPr>
-          <p:cNvGrpSpPr/>
-          <p:nvPr/>
-        </p:nvGrpSpPr>
-        <p:grpSpPr>
-          <a:xfrm>
-            <a:off x="4468368" y="1625169"/>
-            <a:ext cx="3959748" cy="1566088"/>
-            <a:chOff x="4468368" y="1563624"/>
-            <a:chExt cx="4531517" cy="1792224"/>
-          </a:xfrm>
-        </p:grpSpPr>
-        <p:sp>
-          <p:nvSpPr>
-            <p:cNvPr id="6" name="Rectangle 5">
-              <a:extLst>
-                <a:ext uri="{FF2B5EF4-FFF2-40B4-BE49-F238E27FC236}">
-                  <a16:creationId xmlns:a16="http://schemas.microsoft.com/office/drawing/2014/main" id="{011E5DD6-E9CE-0E04-DAAC-92581C64AEF3}"/>
-                </a:ext>
-              </a:extLst>
-            </p:cNvPr>
-            <p:cNvSpPr/>
-            <p:nvPr/>
-          </p:nvSpPr>
-          <p:spPr>
-            <a:xfrm>
-              <a:off x="4468368" y="2990088"/>
-              <a:ext cx="1627632" cy="365760"/>
-            </a:xfrm>
-            <a:prstGeom prst="rect">
-              <a:avLst/>
-            </a:prstGeom>
-            <a:solidFill>
-              <a:srgbClr val="1A1F71"/>
-            </a:solidFill>
-            <a:ln>
-              <a:noFill/>
-            </a:ln>
-          </p:spPr>
-          <p:style>
-            <a:lnRef idx="2">
-              <a:schemeClr val="accent1">
-                <a:shade val="15000"/>
-              </a:schemeClr>
-            </a:lnRef>
-            <a:fillRef idx="1">
-              <a:schemeClr val="accent1"/>
-            </a:fillRef>
-            <a:effectRef idx="0">
-              <a:schemeClr val="accent1"/>
-            </a:effectRef>
-            <a:fontRef idx="minor">
-              <a:schemeClr val="lt1"/>
-            </a:fontRef>
-          </p:style>
-          <p:txBody>
-            <a:bodyPr rtlCol="0" anchor="ctr"/>
-            <a:lstStyle/>
-            <a:p>
-              <a:pPr algn="ctr"/>
-              <a:endParaRPr lang="en-150"/>
-            </a:p>
-          </p:txBody>
-        </p:sp>
-        <p:sp>
-          <p:nvSpPr>
-            <p:cNvPr id="7" name="Rectangle 6">
-              <a:extLst>
-                <a:ext uri="{FF2B5EF4-FFF2-40B4-BE49-F238E27FC236}">
-                  <a16:creationId xmlns:a16="http://schemas.microsoft.com/office/drawing/2014/main" id="{4E011A50-3FA0-A8E8-8DF5-1CBB2DF4C4FE}"/>
-                </a:ext>
-              </a:extLst>
-            </p:cNvPr>
-            <p:cNvSpPr/>
-            <p:nvPr/>
-          </p:nvSpPr>
-          <p:spPr>
-            <a:xfrm>
-              <a:off x="5920312" y="2276856"/>
-              <a:ext cx="1627632" cy="365760"/>
-            </a:xfrm>
-            <a:prstGeom prst="rect">
-              <a:avLst/>
-            </a:prstGeom>
-            <a:solidFill>
-              <a:srgbClr val="1A1F71"/>
-            </a:solidFill>
-            <a:ln>
-              <a:noFill/>
-            </a:ln>
-          </p:spPr>
-          <p:style>
-            <a:lnRef idx="2">
-              <a:schemeClr val="accent1">
-                <a:shade val="15000"/>
-              </a:schemeClr>
-            </a:lnRef>
-            <a:fillRef idx="1">
-              <a:schemeClr val="accent1"/>
-            </a:fillRef>
-            <a:effectRef idx="0">
-              <a:schemeClr val="accent1"/>
-            </a:effectRef>
-            <a:fontRef idx="minor">
-              <a:schemeClr val="lt1"/>
-            </a:fontRef>
-          </p:style>
-          <p:txBody>
-            <a:bodyPr rtlCol="0" anchor="ctr"/>
-            <a:lstStyle/>
-            <a:p>
-              <a:pPr algn="ctr"/>
-              <a:endParaRPr lang="en-150"/>
-            </a:p>
-          </p:txBody>
-        </p:sp>
-        <p:sp>
-          <p:nvSpPr>
-            <p:cNvPr id="8" name="Rectangle 7">
-              <a:extLst>
-                <a:ext uri="{FF2B5EF4-FFF2-40B4-BE49-F238E27FC236}">
-                  <a16:creationId xmlns:a16="http://schemas.microsoft.com/office/drawing/2014/main" id="{78B4BDD1-236D-438B-09EB-97CA895C3300}"/>
-                </a:ext>
-              </a:extLst>
-            </p:cNvPr>
-            <p:cNvSpPr/>
-            <p:nvPr/>
-          </p:nvSpPr>
-          <p:spPr>
-            <a:xfrm>
-              <a:off x="7372256" y="1563624"/>
-              <a:ext cx="1627629" cy="365760"/>
-            </a:xfrm>
-            <a:prstGeom prst="rect">
-              <a:avLst/>
-            </a:prstGeom>
-            <a:solidFill>
-              <a:srgbClr val="FF6F00"/>
-            </a:solidFill>
-            <a:ln>
-              <a:noFill/>
-            </a:ln>
-          </p:spPr>
-          <p:style>
-            <a:lnRef idx="2">
-              <a:schemeClr val="accent1">
-                <a:shade val="15000"/>
-              </a:schemeClr>
-            </a:lnRef>
-            <a:fillRef idx="1">
-              <a:schemeClr val="accent1"/>
-            </a:fillRef>
-            <a:effectRef idx="0">
-              <a:schemeClr val="accent1"/>
-            </a:effectRef>
-            <a:fontRef idx="minor">
-              <a:schemeClr val="lt1"/>
-            </a:fontRef>
-          </p:style>
-          <p:txBody>
-            <a:bodyPr rtlCol="0" anchor="ctr"/>
-            <a:lstStyle/>
-            <a:p>
-              <a:pPr algn="ctr"/>
-              <a:endParaRPr lang="en-150"/>
-            </a:p>
-          </p:txBody>
-        </p:sp>
-      </p:grpSp>
-      <p:sp>
-        <p:nvSpPr>
-          <p:cNvPr id="2" name="TextBox 1">
-            <a:extLst>
-              <a:ext uri="{FF2B5EF4-FFF2-40B4-BE49-F238E27FC236}">
-                <a16:creationId xmlns:a16="http://schemas.microsoft.com/office/drawing/2014/main" id="{5DF106CF-89D1-049C-3FD4-88578CB84BF1}"/>
-              </a:ext>
-            </a:extLst>
-          </p:cNvPr>
-          <p:cNvSpPr txBox="1"/>
-          <p:nvPr/>
-        </p:nvSpPr>
-        <p:spPr>
-          <a:xfrm>
-            <a:off x="4344360" y="3218689"/>
-            <a:ext cx="4253087" cy="1200329"/>
-          </a:xfrm>
-          <a:prstGeom prst="rect">
-            <a:avLst/>
-          </a:prstGeom>
-          <a:noFill/>
-        </p:spPr>
-        <p:txBody>
-          <a:bodyPr wrap="none" rtlCol="0">
-            <a:spAutoFit/>
-          </a:bodyPr>
-          <a:lstStyle/>
-          <a:p>
-            <a:r>
-              <a:rPr lang="en-US" sz="7200" dirty="0">
-                <a:solidFill>
-                  <a:srgbClr val="1A1F71"/>
-                </a:solidFill>
-                <a:latin typeface="Aafia" pitchFamily="50" charset="0"/>
-              </a:rPr>
-              <a:t>LaDe</a:t>
-            </a:r>
-            <a:r>
-              <a:rPr lang="en-US" sz="7200" dirty="0">
-                <a:solidFill>
-                  <a:srgbClr val="FF6F00"/>
-                </a:solidFill>
-                <a:latin typeface="Aafia" pitchFamily="50" charset="0"/>
-              </a:rPr>
-              <a:t>RR</a:t>
-            </a:r>
-          </a:p>
-        </p:txBody>
-      </p:sp>
-    </p:spTree>
-    <p:extLst>
-      <p:ext uri="{BB962C8B-B14F-4D97-AF65-F5344CB8AC3E}">
-        <p14:creationId xmlns:p14="http://schemas.microsoft.com/office/powerpoint/2010/main" val="3677000309"/>
       </p:ext>
     </p:extLst>
   </p:cSld>

--- a/resources/base logo.pptx
+++ b/resources/base logo.pptx
@@ -5,23 +5,26 @@
     <p:sldMasterId id="2147483648" r:id="rId1"/>
   </p:sldMasterIdLst>
   <p:notesMasterIdLst>
-    <p:notesMasterId r:id="rId16"/>
+    <p:notesMasterId r:id="rId19"/>
   </p:notesMasterIdLst>
   <p:sldIdLst>
     <p:sldId id="293" r:id="rId2"/>
-    <p:sldId id="294" r:id="rId3"/>
-    <p:sldId id="295" r:id="rId4"/>
-    <p:sldId id="291" r:id="rId5"/>
-    <p:sldId id="286" r:id="rId6"/>
-    <p:sldId id="288" r:id="rId7"/>
-    <p:sldId id="289" r:id="rId8"/>
-    <p:sldId id="287" r:id="rId9"/>
-    <p:sldId id="278" r:id="rId10"/>
-    <p:sldId id="285" r:id="rId11"/>
-    <p:sldId id="281" r:id="rId12"/>
-    <p:sldId id="283" r:id="rId13"/>
-    <p:sldId id="284" r:id="rId14"/>
-    <p:sldId id="280" r:id="rId15"/>
+    <p:sldId id="298" r:id="rId3"/>
+    <p:sldId id="297" r:id="rId4"/>
+    <p:sldId id="294" r:id="rId5"/>
+    <p:sldId id="296" r:id="rId6"/>
+    <p:sldId id="295" r:id="rId7"/>
+    <p:sldId id="291" r:id="rId8"/>
+    <p:sldId id="286" r:id="rId9"/>
+    <p:sldId id="288" r:id="rId10"/>
+    <p:sldId id="289" r:id="rId11"/>
+    <p:sldId id="287" r:id="rId12"/>
+    <p:sldId id="278" r:id="rId13"/>
+    <p:sldId id="285" r:id="rId14"/>
+    <p:sldId id="281" r:id="rId15"/>
+    <p:sldId id="283" r:id="rId16"/>
+    <p:sldId id="284" r:id="rId17"/>
+    <p:sldId id="280" r:id="rId18"/>
   </p:sldIdLst>
   <p:sldSz cx="12192000" cy="6858000"/>
   <p:notesSz cx="6858000" cy="9144000"/>
@@ -123,17 +126,7 @@
   <p:extLst>
     <p:ext uri="{EFAFB233-063F-42B5-8137-9DF3F51BA10A}">
       <p15:sldGuideLst xmlns:p15="http://schemas.microsoft.com/office/powerpoint/2012/main">
-        <p15:guide id="3" pos="6743" userDrawn="1">
-          <p15:clr>
-            <a:srgbClr val="A4A3A4"/>
-          </p15:clr>
-        </p15:guide>
         <p15:guide id="4" pos="3840" userDrawn="1">
-          <p15:clr>
-            <a:srgbClr val="A4A3A4"/>
-          </p15:clr>
-        </p15:guide>
-        <p15:guide id="6" pos="6879" userDrawn="1">
           <p15:clr>
             <a:srgbClr val="A4A3A4"/>
           </p15:clr>
@@ -231,7 +224,7 @@
           <a:p>
             <a:fld id="{DC0890D7-75A3-4AFD-AFCE-7BC66DB681C5}" type="datetimeFigureOut">
               <a:rPr lang="en-150" smtClean="0"/>
-              <a:t>12/03/2025</a:t>
+              <a:t>13/03/2025</a:t>
             </a:fld>
             <a:endParaRPr lang="en-150"/>
           </a:p>
@@ -648,7 +641,7 @@
           <a:p>
             <a:fld id="{97A7BB66-1ADB-47C6-8EE2-F72BFA79F05A}" type="datetimeFigureOut">
               <a:rPr lang="en-150" smtClean="0"/>
-              <a:t>12/03/2025</a:t>
+              <a:t>13/03/2025</a:t>
             </a:fld>
             <a:endParaRPr lang="en-150"/>
           </a:p>
@@ -864,7 +857,7 @@
           <a:p>
             <a:fld id="{97A7BB66-1ADB-47C6-8EE2-F72BFA79F05A}" type="datetimeFigureOut">
               <a:rPr lang="en-150" smtClean="0"/>
-              <a:t>12/03/2025</a:t>
+              <a:t>13/03/2025</a:t>
             </a:fld>
             <a:endParaRPr lang="en-150"/>
           </a:p>
@@ -1074,7 +1067,7 @@
           <a:p>
             <a:fld id="{97A7BB66-1ADB-47C6-8EE2-F72BFA79F05A}" type="datetimeFigureOut">
               <a:rPr lang="en-150" smtClean="0"/>
-              <a:t>12/03/2025</a:t>
+              <a:t>13/03/2025</a:t>
             </a:fld>
             <a:endParaRPr lang="en-150"/>
           </a:p>
@@ -1274,7 +1267,7 @@
           <a:p>
             <a:fld id="{97A7BB66-1ADB-47C6-8EE2-F72BFA79F05A}" type="datetimeFigureOut">
               <a:rPr lang="en-150" smtClean="0"/>
-              <a:t>12/03/2025</a:t>
+              <a:t>13/03/2025</a:t>
             </a:fld>
             <a:endParaRPr lang="en-150"/>
           </a:p>
@@ -1566,7 +1559,7 @@
           <a:p>
             <a:fld id="{97A7BB66-1ADB-47C6-8EE2-F72BFA79F05A}" type="datetimeFigureOut">
               <a:rPr lang="en-150" smtClean="0"/>
-              <a:t>12/03/2025</a:t>
+              <a:t>13/03/2025</a:t>
             </a:fld>
             <a:endParaRPr lang="en-150"/>
           </a:p>
@@ -1834,7 +1827,7 @@
           <a:p>
             <a:fld id="{97A7BB66-1ADB-47C6-8EE2-F72BFA79F05A}" type="datetimeFigureOut">
               <a:rPr lang="en-150" smtClean="0"/>
-              <a:t>12/03/2025</a:t>
+              <a:t>13/03/2025</a:t>
             </a:fld>
             <a:endParaRPr lang="en-150"/>
           </a:p>
@@ -2249,7 +2242,7 @@
           <a:p>
             <a:fld id="{97A7BB66-1ADB-47C6-8EE2-F72BFA79F05A}" type="datetimeFigureOut">
               <a:rPr lang="en-150" smtClean="0"/>
-              <a:t>12/03/2025</a:t>
+              <a:t>13/03/2025</a:t>
             </a:fld>
             <a:endParaRPr lang="en-150"/>
           </a:p>
@@ -2391,7 +2384,7 @@
           <a:p>
             <a:fld id="{97A7BB66-1ADB-47C6-8EE2-F72BFA79F05A}" type="datetimeFigureOut">
               <a:rPr lang="en-150" smtClean="0"/>
-              <a:t>12/03/2025</a:t>
+              <a:t>13/03/2025</a:t>
             </a:fld>
             <a:endParaRPr lang="en-150"/>
           </a:p>
@@ -2504,7 +2497,7 @@
           <a:p>
             <a:fld id="{97A7BB66-1ADB-47C6-8EE2-F72BFA79F05A}" type="datetimeFigureOut">
               <a:rPr lang="en-150" smtClean="0"/>
-              <a:t>12/03/2025</a:t>
+              <a:t>13/03/2025</a:t>
             </a:fld>
             <a:endParaRPr lang="en-150"/>
           </a:p>
@@ -2817,7 +2810,7 @@
           <a:p>
             <a:fld id="{97A7BB66-1ADB-47C6-8EE2-F72BFA79F05A}" type="datetimeFigureOut">
               <a:rPr lang="en-150" smtClean="0"/>
-              <a:t>12/03/2025</a:t>
+              <a:t>13/03/2025</a:t>
             </a:fld>
             <a:endParaRPr lang="en-150"/>
           </a:p>
@@ -3106,7 +3099,7 @@
           <a:p>
             <a:fld id="{97A7BB66-1ADB-47C6-8EE2-F72BFA79F05A}" type="datetimeFigureOut">
               <a:rPr lang="en-150" smtClean="0"/>
-              <a:t>12/03/2025</a:t>
+              <a:t>13/03/2025</a:t>
             </a:fld>
             <a:endParaRPr lang="en-150"/>
           </a:p>
@@ -3348,7 +3341,7 @@
           <a:p>
             <a:fld id="{97A7BB66-1ADB-47C6-8EE2-F72BFA79F05A}" type="datetimeFigureOut">
               <a:rPr lang="en-150" smtClean="0"/>
-              <a:t>12/03/2025</a:t>
+              <a:t>13/03/2025</a:t>
             </a:fld>
             <a:endParaRPr lang="en-150"/>
           </a:p>
@@ -3816,8 +3809,8 @@
         </p:nvSpPr>
         <p:spPr>
           <a:xfrm>
-            <a:off x="281781" y="2505544"/>
-            <a:ext cx="5457825" cy="4124325"/>
+            <a:off x="0" y="0"/>
+            <a:ext cx="6095999" cy="6858000"/>
           </a:xfrm>
           <a:prstGeom prst="rect">
             <a:avLst/>
@@ -3848,323 +3841,6 @@
           </a:p>
         </p:txBody>
       </p:sp>
-      <p:sp>
-        <p:nvSpPr>
-          <p:cNvPr id="12" name="Rectangle 11">
-            <a:extLst>
-              <a:ext uri="{FF2B5EF4-FFF2-40B4-BE49-F238E27FC236}">
-                <a16:creationId xmlns:a16="http://schemas.microsoft.com/office/drawing/2014/main" id="{1E841810-4848-ED1E-1246-A0F736CB5297}"/>
-              </a:ext>
-            </a:extLst>
-          </p:cNvPr>
-          <p:cNvSpPr/>
-          <p:nvPr/>
-        </p:nvSpPr>
-        <p:spPr>
-          <a:xfrm>
-            <a:off x="6734175" y="2816191"/>
-            <a:ext cx="1223963" cy="149432"/>
-          </a:xfrm>
-          <a:prstGeom prst="rect">
-            <a:avLst/>
-          </a:prstGeom>
-          <a:solidFill>
-            <a:srgbClr val="1A1F71"/>
-          </a:solidFill>
-          <a:ln w="3175">
-            <a:noFill/>
-          </a:ln>
-          <a:effectLst/>
-        </p:spPr>
-        <p:style>
-          <a:lnRef idx="2">
-            <a:schemeClr val="accent1">
-              <a:shade val="15000"/>
-            </a:schemeClr>
-          </a:lnRef>
-          <a:fillRef idx="1">
-            <a:schemeClr val="accent1"/>
-          </a:fillRef>
-          <a:effectRef idx="0">
-            <a:schemeClr val="accent1"/>
-          </a:effectRef>
-          <a:fontRef idx="minor">
-            <a:schemeClr val="lt1"/>
-          </a:fontRef>
-        </p:style>
-        <p:txBody>
-          <a:bodyPr rtlCol="0" anchor="ctr"/>
-          <a:lstStyle/>
-          <a:p>
-            <a:pPr algn="ctr"/>
-            <a:endParaRPr lang="en-150">
-              <a:solidFill>
-                <a:srgbClr val="1A1F71"/>
-              </a:solidFill>
-            </a:endParaRPr>
-          </a:p>
-        </p:txBody>
-      </p:sp>
-      <p:sp>
-        <p:nvSpPr>
-          <p:cNvPr id="13" name="Rectangle 12">
-            <a:extLst>
-              <a:ext uri="{FF2B5EF4-FFF2-40B4-BE49-F238E27FC236}">
-                <a16:creationId xmlns:a16="http://schemas.microsoft.com/office/drawing/2014/main" id="{297E3C51-792E-71C4-3609-9989C2BF0F77}"/>
-              </a:ext>
-            </a:extLst>
-          </p:cNvPr>
-          <p:cNvSpPr/>
-          <p:nvPr/>
-        </p:nvSpPr>
-        <p:spPr>
-          <a:xfrm>
-            <a:off x="7958138" y="2659139"/>
-            <a:ext cx="1368425" cy="149432"/>
-          </a:xfrm>
-          <a:prstGeom prst="rect">
-            <a:avLst/>
-          </a:prstGeom>
-          <a:solidFill>
-            <a:srgbClr val="1A1F71"/>
-          </a:solidFill>
-          <a:ln w="3175">
-            <a:noFill/>
-          </a:ln>
-          <a:effectLst/>
-        </p:spPr>
-        <p:style>
-          <a:lnRef idx="2">
-            <a:schemeClr val="accent1">
-              <a:shade val="15000"/>
-            </a:schemeClr>
-          </a:lnRef>
-          <a:fillRef idx="1">
-            <a:schemeClr val="accent1"/>
-          </a:fillRef>
-          <a:effectRef idx="0">
-            <a:schemeClr val="accent1"/>
-          </a:effectRef>
-          <a:fontRef idx="minor">
-            <a:schemeClr val="lt1"/>
-          </a:fontRef>
-        </p:style>
-        <p:txBody>
-          <a:bodyPr rtlCol="0" anchor="ctr"/>
-          <a:lstStyle/>
-          <a:p>
-            <a:pPr algn="ctr"/>
-            <a:endParaRPr lang="en-150">
-              <a:solidFill>
-                <a:srgbClr val="1A1F71"/>
-              </a:solidFill>
-            </a:endParaRPr>
-          </a:p>
-        </p:txBody>
-      </p:sp>
-      <p:sp>
-        <p:nvSpPr>
-          <p:cNvPr id="14" name="Rectangle 13">
-            <a:extLst>
-              <a:ext uri="{FF2B5EF4-FFF2-40B4-BE49-F238E27FC236}">
-                <a16:creationId xmlns:a16="http://schemas.microsoft.com/office/drawing/2014/main" id="{DA72054A-4C5B-7E2D-91D3-4A22A50AFE79}"/>
-              </a:ext>
-            </a:extLst>
-          </p:cNvPr>
-          <p:cNvSpPr/>
-          <p:nvPr/>
-        </p:nvSpPr>
-        <p:spPr>
-          <a:xfrm>
-            <a:off x="9326564" y="2502087"/>
-            <a:ext cx="1377950" cy="149432"/>
-          </a:xfrm>
-          <a:prstGeom prst="rect">
-            <a:avLst/>
-          </a:prstGeom>
-          <a:gradFill flip="none" rotWithShape="1">
-            <a:gsLst>
-              <a:gs pos="0">
-                <a:srgbClr val="FFD700"/>
-              </a:gs>
-              <a:gs pos="78000">
-                <a:srgbClr val="FFD700"/>
-              </a:gs>
-              <a:gs pos="100000">
-                <a:schemeClr val="bg1"/>
-              </a:gs>
-            </a:gsLst>
-            <a:lin ang="18900000" scaled="1"/>
-            <a:tileRect/>
-          </a:gradFill>
-          <a:ln w="3175">
-            <a:noFill/>
-          </a:ln>
-          <a:effectLst/>
-        </p:spPr>
-        <p:style>
-          <a:lnRef idx="2">
-            <a:schemeClr val="accent1">
-              <a:shade val="15000"/>
-            </a:schemeClr>
-          </a:lnRef>
-          <a:fillRef idx="1">
-            <a:schemeClr val="accent1"/>
-          </a:fillRef>
-          <a:effectRef idx="0">
-            <a:schemeClr val="accent1"/>
-          </a:effectRef>
-          <a:fontRef idx="minor">
-            <a:schemeClr val="lt1"/>
-          </a:fontRef>
-        </p:style>
-        <p:txBody>
-          <a:bodyPr rtlCol="0" anchor="ctr"/>
-          <a:lstStyle/>
-          <a:p>
-            <a:pPr algn="ctr"/>
-            <a:endParaRPr lang="en-150"/>
-          </a:p>
-        </p:txBody>
-      </p:sp>
-      <p:sp>
-        <p:nvSpPr>
-          <p:cNvPr id="15" name="TextBox 14">
-            <a:extLst>
-              <a:ext uri="{FF2B5EF4-FFF2-40B4-BE49-F238E27FC236}">
-                <a16:creationId xmlns:a16="http://schemas.microsoft.com/office/drawing/2014/main" id="{83D28326-DFEC-DA4A-7F24-5593A0F2707D}"/>
-              </a:ext>
-            </a:extLst>
-          </p:cNvPr>
-          <p:cNvSpPr txBox="1"/>
-          <p:nvPr/>
-        </p:nvSpPr>
-        <p:spPr>
-          <a:xfrm>
-            <a:off x="6606889" y="2855133"/>
-            <a:ext cx="4253087" cy="1200329"/>
-          </a:xfrm>
-          <a:prstGeom prst="rect">
-            <a:avLst/>
-          </a:prstGeom>
-          <a:noFill/>
-          <a:ln>
-            <a:noFill/>
-          </a:ln>
-          <a:effectLst/>
-        </p:spPr>
-        <p:txBody>
-          <a:bodyPr wrap="none" rtlCol="0">
-            <a:spAutoFit/>
-            <a:scene3d>
-              <a:camera prst="orthographicFront"/>
-              <a:lightRig rig="threePt" dir="t"/>
-            </a:scene3d>
-            <a:sp3d extrusionH="38100"/>
-          </a:bodyPr>
-          <a:lstStyle/>
-          <a:p>
-            <a:r>
-              <a:rPr lang="en-US" sz="7200" dirty="0">
-                <a:ln w="3175">
-                  <a:noFill/>
-                </a:ln>
-                <a:solidFill>
-                  <a:srgbClr val="1A1F71"/>
-                </a:solidFill>
-                <a:latin typeface="Aafia" pitchFamily="50" charset="0"/>
-              </a:rPr>
-              <a:t>LaDe</a:t>
-            </a:r>
-            <a:r>
-              <a:rPr lang="en-US" sz="7200" dirty="0">
-                <a:ln w="3175">
-                  <a:noFill/>
-                </a:ln>
-                <a:gradFill flip="none" rotWithShape="1">
-                  <a:gsLst>
-                    <a:gs pos="80000">
-                      <a:srgbClr val="FFD700"/>
-                    </a:gs>
-                    <a:gs pos="0">
-                      <a:srgbClr val="FFD700"/>
-                    </a:gs>
-                    <a:gs pos="100000">
-                      <a:schemeClr val="bg1"/>
-                    </a:gs>
-                  </a:gsLst>
-                  <a:lin ang="18900000" scaled="1"/>
-                  <a:tileRect/>
-                </a:gradFill>
-                <a:latin typeface="Aafia" pitchFamily="50" charset="0"/>
-              </a:rPr>
-              <a:t>RR</a:t>
-            </a:r>
-          </a:p>
-        </p:txBody>
-      </p:sp>
-      <p:sp>
-        <p:nvSpPr>
-          <p:cNvPr id="19" name="TextBox 18">
-            <a:extLst>
-              <a:ext uri="{FF2B5EF4-FFF2-40B4-BE49-F238E27FC236}">
-                <a16:creationId xmlns:a16="http://schemas.microsoft.com/office/drawing/2014/main" id="{E5ECF1B9-269C-2F29-E619-FC104AAEEE14}"/>
-              </a:ext>
-            </a:extLst>
-          </p:cNvPr>
-          <p:cNvSpPr txBox="1"/>
-          <p:nvPr/>
-        </p:nvSpPr>
-        <p:spPr>
-          <a:xfrm>
-            <a:off x="6713538" y="3578479"/>
-            <a:ext cx="4411662" cy="830997"/>
-          </a:xfrm>
-          <a:prstGeom prst="rect">
-            <a:avLst/>
-          </a:prstGeom>
-          <a:noFill/>
-          <a:ln>
-            <a:noFill/>
-          </a:ln>
-          <a:effectLst>
-            <a:outerShdw blurRad="44450" dist="27940" dir="5400000" algn="ctr">
-              <a:srgbClr val="000000">
-                <a:alpha val="32000"/>
-              </a:srgbClr>
-            </a:outerShdw>
-          </a:effectLst>
-          <a:scene3d>
-            <a:camera prst="orthographicFront">
-              <a:rot lat="0" lon="0" rev="0"/>
-            </a:camera>
-            <a:lightRig rig="balanced" dir="t">
-              <a:rot lat="0" lon="0" rev="8700000"/>
-            </a:lightRig>
-          </a:scene3d>
-          <a:sp3d>
-            <a:bevelT w="190500" h="38100"/>
-          </a:sp3d>
-        </p:spPr>
-        <p:txBody>
-          <a:bodyPr wrap="square" lIns="0" tIns="0" rIns="0" bIns="0" rtlCol="0">
-            <a:spAutoFit/>
-          </a:bodyPr>
-          <a:lstStyle/>
-          <a:p>
-            <a:pPr algn="just"/>
-            <a:r>
-              <a:rPr lang="en-US" sz="5400" b="1" spc="780" dirty="0">
-                <a:solidFill>
-                  <a:srgbClr val="97258F"/>
-                </a:solidFill>
-                <a:latin typeface="Engravers MT" panose="02090707080505020304" pitchFamily="18" charset="0"/>
-              </a:rPr>
-              <a:t>Engine</a:t>
-            </a:r>
-          </a:p>
-        </p:txBody>
-      </p:sp>
       <p:grpSp>
         <p:nvGrpSpPr>
           <p:cNvPr id="22" name="Group 21">
@@ -4179,7 +3855,7 @@
         </p:nvGrpSpPr>
         <p:grpSpPr>
           <a:xfrm>
-            <a:off x="769938" y="598525"/>
+            <a:off x="7180660" y="979840"/>
             <a:ext cx="4253087" cy="1538135"/>
             <a:chOff x="769938" y="598525"/>
             <a:chExt cx="4253087" cy="1538135"/>
@@ -4473,12 +4149,1132 @@
           </p:txBody>
         </p:sp>
       </p:grpSp>
+      <p:grpSp>
+        <p:nvGrpSpPr>
+          <p:cNvPr id="21" name="Group 20">
+            <a:extLst>
+              <a:ext uri="{FF2B5EF4-FFF2-40B4-BE49-F238E27FC236}">
+                <a16:creationId xmlns:a16="http://schemas.microsoft.com/office/drawing/2014/main" id="{1C8A048A-48E8-D6D9-F8A8-BEE09754E15D}"/>
+              </a:ext>
+            </a:extLst>
+          </p:cNvPr>
+          <p:cNvGrpSpPr/>
+          <p:nvPr/>
+        </p:nvGrpSpPr>
+        <p:grpSpPr>
+          <a:xfrm>
+            <a:off x="7050429" y="3979137"/>
+            <a:ext cx="4513548" cy="1899023"/>
+            <a:chOff x="6986985" y="4577378"/>
+            <a:chExt cx="4513548" cy="1899023"/>
+          </a:xfrm>
+        </p:grpSpPr>
+        <p:sp>
+          <p:nvSpPr>
+            <p:cNvPr id="23" name="TextBox 22">
+              <a:extLst>
+                <a:ext uri="{FF2B5EF4-FFF2-40B4-BE49-F238E27FC236}">
+                  <a16:creationId xmlns:a16="http://schemas.microsoft.com/office/drawing/2014/main" id="{7C9BEBB0-38CE-D87B-EC11-A7D4C97117A0}"/>
+                </a:ext>
+              </a:extLst>
+            </p:cNvPr>
+            <p:cNvSpPr txBox="1"/>
+            <p:nvPr/>
+          </p:nvSpPr>
+          <p:spPr>
+            <a:xfrm>
+              <a:off x="7088871" y="5645404"/>
+              <a:ext cx="4411662" cy="830997"/>
+            </a:xfrm>
+            <a:prstGeom prst="rect">
+              <a:avLst/>
+            </a:prstGeom>
+            <a:noFill/>
+            <a:ln>
+              <a:noFill/>
+            </a:ln>
+            <a:effectLst>
+              <a:outerShdw blurRad="44450" dist="27940" dir="5400000" algn="ctr">
+                <a:srgbClr val="000000">
+                  <a:alpha val="32000"/>
+                </a:srgbClr>
+              </a:outerShdw>
+            </a:effectLst>
+            <a:scene3d>
+              <a:camera prst="orthographicFront">
+                <a:rot lat="0" lon="0" rev="0"/>
+              </a:camera>
+              <a:lightRig rig="balanced" dir="t">
+                <a:rot lat="0" lon="0" rev="8700000"/>
+              </a:lightRig>
+            </a:scene3d>
+            <a:sp3d>
+              <a:bevelT w="190500" h="38100"/>
+            </a:sp3d>
+          </p:spPr>
+          <p:txBody>
+            <a:bodyPr wrap="square" lIns="0" tIns="0" rIns="0" bIns="0" rtlCol="0">
+              <a:spAutoFit/>
+            </a:bodyPr>
+            <a:lstStyle/>
+            <a:p>
+              <a:pPr algn="just"/>
+              <a:r>
+                <a:rPr lang="en-US" sz="5400" b="1" spc="780" dirty="0">
+                  <a:solidFill>
+                    <a:srgbClr val="E04F39"/>
+                  </a:solidFill>
+                  <a:latin typeface="Engravers MT" panose="02090707080505020304" pitchFamily="18" charset="0"/>
+                </a:rPr>
+                <a:t>Engine</a:t>
+              </a:r>
+            </a:p>
+          </p:txBody>
+        </p:sp>
+        <p:grpSp>
+          <p:nvGrpSpPr>
+            <p:cNvPr id="24" name="Group 23">
+              <a:extLst>
+                <a:ext uri="{FF2B5EF4-FFF2-40B4-BE49-F238E27FC236}">
+                  <a16:creationId xmlns:a16="http://schemas.microsoft.com/office/drawing/2014/main" id="{FF6C70F4-6488-7838-A8CA-00C64A096D76}"/>
+                </a:ext>
+              </a:extLst>
+            </p:cNvPr>
+            <p:cNvGrpSpPr/>
+            <p:nvPr/>
+          </p:nvGrpSpPr>
+          <p:grpSpPr>
+            <a:xfrm>
+              <a:off x="6986985" y="4577378"/>
+              <a:ext cx="4253087" cy="1538135"/>
+              <a:chOff x="6986985" y="4577378"/>
+              <a:chExt cx="4253087" cy="1538135"/>
+            </a:xfrm>
+          </p:grpSpPr>
+          <p:sp>
+            <p:nvSpPr>
+              <p:cNvPr id="25" name="Rectangle 24">
+                <a:extLst>
+                  <a:ext uri="{FF2B5EF4-FFF2-40B4-BE49-F238E27FC236}">
+                    <a16:creationId xmlns:a16="http://schemas.microsoft.com/office/drawing/2014/main" id="{4580EE8F-8E34-B509-218E-D2E41E28F073}"/>
+                  </a:ext>
+                </a:extLst>
+              </p:cNvPr>
+              <p:cNvSpPr/>
+              <p:nvPr/>
+            </p:nvSpPr>
+            <p:spPr>
+              <a:xfrm>
+                <a:off x="7114271" y="4876242"/>
+                <a:ext cx="1223963" cy="149432"/>
+              </a:xfrm>
+              <a:prstGeom prst="rect">
+                <a:avLst/>
+              </a:prstGeom>
+              <a:solidFill>
+                <a:schemeClr val="tx2">
+                  <a:lumMod val="50000"/>
+                  <a:lumOff val="50000"/>
+                </a:schemeClr>
+              </a:solidFill>
+              <a:ln w="3175">
+                <a:noFill/>
+              </a:ln>
+              <a:effectLst>
+                <a:outerShdw blurRad="57785" dist="33020" dir="3180000" algn="ctr">
+                  <a:srgbClr val="000000">
+                    <a:alpha val="30000"/>
+                  </a:srgbClr>
+                </a:outerShdw>
+              </a:effectLst>
+            </p:spPr>
+            <p:style>
+              <a:lnRef idx="2">
+                <a:schemeClr val="accent1">
+                  <a:shade val="15000"/>
+                </a:schemeClr>
+              </a:lnRef>
+              <a:fillRef idx="1">
+                <a:schemeClr val="accent1"/>
+              </a:fillRef>
+              <a:effectRef idx="0">
+                <a:schemeClr val="accent1"/>
+              </a:effectRef>
+              <a:fontRef idx="minor">
+                <a:schemeClr val="lt1"/>
+              </a:fontRef>
+            </p:style>
+            <p:txBody>
+              <a:bodyPr rtlCol="0" anchor="ctr"/>
+              <a:lstStyle/>
+              <a:p>
+                <a:pPr algn="ctr"/>
+                <a:endParaRPr lang="en-150">
+                  <a:ln w="3175">
+                    <a:solidFill>
+                      <a:schemeClr val="bg1">
+                        <a:lumMod val="95000"/>
+                      </a:schemeClr>
+                    </a:solidFill>
+                  </a:ln>
+                  <a:solidFill>
+                    <a:srgbClr val="1A1F71"/>
+                  </a:solidFill>
+                </a:endParaRPr>
+              </a:p>
+            </p:txBody>
+          </p:sp>
+          <p:sp>
+            <p:nvSpPr>
+              <p:cNvPr id="26" name="Rectangle 25">
+                <a:extLst>
+                  <a:ext uri="{FF2B5EF4-FFF2-40B4-BE49-F238E27FC236}">
+                    <a16:creationId xmlns:a16="http://schemas.microsoft.com/office/drawing/2014/main" id="{FAE613A8-B5F5-9A7F-21C2-2890613567F2}"/>
+                  </a:ext>
+                </a:extLst>
+              </p:cNvPr>
+              <p:cNvSpPr/>
+              <p:nvPr/>
+            </p:nvSpPr>
+            <p:spPr>
+              <a:xfrm>
+                <a:off x="8338234" y="4726810"/>
+                <a:ext cx="1368425" cy="149432"/>
+              </a:xfrm>
+              <a:prstGeom prst="rect">
+                <a:avLst/>
+              </a:prstGeom>
+              <a:solidFill>
+                <a:schemeClr val="tx2">
+                  <a:lumMod val="50000"/>
+                  <a:lumOff val="50000"/>
+                </a:schemeClr>
+              </a:solidFill>
+              <a:ln w="3175">
+                <a:noFill/>
+              </a:ln>
+              <a:effectLst>
+                <a:outerShdw blurRad="57785" dist="33020" dir="3180000" algn="ctr">
+                  <a:srgbClr val="000000">
+                    <a:alpha val="30000"/>
+                  </a:srgbClr>
+                </a:outerShdw>
+              </a:effectLst>
+            </p:spPr>
+            <p:style>
+              <a:lnRef idx="2">
+                <a:schemeClr val="accent1">
+                  <a:shade val="15000"/>
+                </a:schemeClr>
+              </a:lnRef>
+              <a:fillRef idx="1">
+                <a:schemeClr val="accent1"/>
+              </a:fillRef>
+              <a:effectRef idx="0">
+                <a:schemeClr val="accent1"/>
+              </a:effectRef>
+              <a:fontRef idx="minor">
+                <a:schemeClr val="lt1"/>
+              </a:fontRef>
+            </p:style>
+            <p:txBody>
+              <a:bodyPr rtlCol="0" anchor="ctr"/>
+              <a:lstStyle/>
+              <a:p>
+                <a:pPr algn="ctr"/>
+                <a:endParaRPr lang="en-150">
+                  <a:ln w="3175">
+                    <a:solidFill>
+                      <a:schemeClr val="bg1">
+                        <a:lumMod val="95000"/>
+                      </a:schemeClr>
+                    </a:solidFill>
+                  </a:ln>
+                  <a:solidFill>
+                    <a:srgbClr val="1A1F71"/>
+                  </a:solidFill>
+                </a:endParaRPr>
+              </a:p>
+            </p:txBody>
+          </p:sp>
+          <p:sp>
+            <p:nvSpPr>
+              <p:cNvPr id="27" name="TextBox 26">
+                <a:extLst>
+                  <a:ext uri="{FF2B5EF4-FFF2-40B4-BE49-F238E27FC236}">
+                    <a16:creationId xmlns:a16="http://schemas.microsoft.com/office/drawing/2014/main" id="{F7CE115B-F27A-0CE4-ADE7-4562985FF4EF}"/>
+                  </a:ext>
+                </a:extLst>
+              </p:cNvPr>
+              <p:cNvSpPr txBox="1"/>
+              <p:nvPr/>
+            </p:nvSpPr>
+            <p:spPr>
+              <a:xfrm>
+                <a:off x="6986985" y="4915184"/>
+                <a:ext cx="4253087" cy="1200329"/>
+              </a:xfrm>
+              <a:prstGeom prst="rect">
+                <a:avLst/>
+              </a:prstGeom>
+              <a:noFill/>
+              <a:ln>
+                <a:noFill/>
+              </a:ln>
+              <a:effectLst>
+                <a:outerShdw blurRad="57785" dist="33020" dir="3180000" algn="ctr">
+                  <a:srgbClr val="000000">
+                    <a:alpha val="30000"/>
+                  </a:srgbClr>
+                </a:outerShdw>
+              </a:effectLst>
+            </p:spPr>
+            <p:txBody>
+              <a:bodyPr wrap="none" rtlCol="0">
+                <a:spAutoFit/>
+                <a:sp3d extrusionH="38100">
+                  <a:bevelT w="38100" h="38100"/>
+                </a:sp3d>
+              </a:bodyPr>
+              <a:lstStyle/>
+              <a:p>
+                <a:r>
+                  <a:rPr lang="en-US" sz="7200" dirty="0">
+                    <a:ln w="3175">
+                      <a:noFill/>
+                    </a:ln>
+                    <a:solidFill>
+                      <a:schemeClr val="tx2">
+                        <a:lumMod val="50000"/>
+                        <a:lumOff val="50000"/>
+                      </a:schemeClr>
+                    </a:solidFill>
+                    <a:latin typeface="Aafia" pitchFamily="50" charset="0"/>
+                  </a:rPr>
+                  <a:t>LaDe</a:t>
+                </a:r>
+                <a:r>
+                  <a:rPr lang="en-US" sz="7200" dirty="0">
+                    <a:ln w="3175">
+                      <a:noFill/>
+                    </a:ln>
+                    <a:solidFill>
+                      <a:srgbClr val="FFD700"/>
+                    </a:solidFill>
+                    <a:latin typeface="Aafia" pitchFamily="50" charset="0"/>
+                  </a:rPr>
+                  <a:t>RR</a:t>
+                </a:r>
+              </a:p>
+            </p:txBody>
+          </p:sp>
+          <p:sp>
+            <p:nvSpPr>
+              <p:cNvPr id="28" name="Rectangle 27">
+                <a:extLst>
+                  <a:ext uri="{FF2B5EF4-FFF2-40B4-BE49-F238E27FC236}">
+                    <a16:creationId xmlns:a16="http://schemas.microsoft.com/office/drawing/2014/main" id="{806479D9-3859-8217-E411-E782A13B3169}"/>
+                  </a:ext>
+                </a:extLst>
+              </p:cNvPr>
+              <p:cNvSpPr/>
+              <p:nvPr/>
+            </p:nvSpPr>
+            <p:spPr>
+              <a:xfrm>
+                <a:off x="9706659" y="4577378"/>
+                <a:ext cx="1377950" cy="149432"/>
+              </a:xfrm>
+              <a:prstGeom prst="rect">
+                <a:avLst/>
+              </a:prstGeom>
+              <a:solidFill>
+                <a:srgbClr val="FFD700"/>
+              </a:solidFill>
+              <a:ln w="3175">
+                <a:noFill/>
+              </a:ln>
+              <a:effectLst>
+                <a:outerShdw blurRad="57785" dist="33020" dir="3180000" algn="ctr">
+                  <a:srgbClr val="000000">
+                    <a:alpha val="30000"/>
+                  </a:srgbClr>
+                </a:outerShdw>
+              </a:effectLst>
+            </p:spPr>
+            <p:style>
+              <a:lnRef idx="2">
+                <a:schemeClr val="accent1">
+                  <a:shade val="15000"/>
+                </a:schemeClr>
+              </a:lnRef>
+              <a:fillRef idx="1">
+                <a:schemeClr val="accent1"/>
+              </a:fillRef>
+              <a:effectRef idx="0">
+                <a:schemeClr val="accent1"/>
+              </a:effectRef>
+              <a:fontRef idx="minor">
+                <a:schemeClr val="lt1"/>
+              </a:fontRef>
+            </p:style>
+            <p:txBody>
+              <a:bodyPr rtlCol="0" anchor="ctr"/>
+              <a:lstStyle/>
+              <a:p>
+                <a:pPr algn="ctr"/>
+                <a:endParaRPr lang="en-150">
+                  <a:ln w="3175">
+                    <a:solidFill>
+                      <a:schemeClr val="bg1">
+                        <a:lumMod val="95000"/>
+                      </a:schemeClr>
+                    </a:solidFill>
+                  </a:ln>
+                  <a:solidFill>
+                    <a:srgbClr val="1A1F71"/>
+                  </a:solidFill>
+                </a:endParaRPr>
+              </a:p>
+            </p:txBody>
+          </p:sp>
+        </p:grpSp>
+      </p:grpSp>
+      <p:grpSp>
+        <p:nvGrpSpPr>
+          <p:cNvPr id="29" name="Group 28">
+            <a:extLst>
+              <a:ext uri="{FF2B5EF4-FFF2-40B4-BE49-F238E27FC236}">
+                <a16:creationId xmlns:a16="http://schemas.microsoft.com/office/drawing/2014/main" id="{14DD1C12-B83A-2B2A-725E-B57AEBCEC555}"/>
+              </a:ext>
+            </a:extLst>
+          </p:cNvPr>
+          <p:cNvGrpSpPr/>
+          <p:nvPr/>
+        </p:nvGrpSpPr>
+        <p:grpSpPr>
+          <a:xfrm>
+            <a:off x="1022461" y="979840"/>
+            <a:ext cx="4253087" cy="1538135"/>
+            <a:chOff x="769938" y="598525"/>
+            <a:chExt cx="4253087" cy="1538135"/>
+          </a:xfrm>
+        </p:grpSpPr>
+        <p:sp>
+          <p:nvSpPr>
+            <p:cNvPr id="30" name="Rectangle 29">
+              <a:extLst>
+                <a:ext uri="{FF2B5EF4-FFF2-40B4-BE49-F238E27FC236}">
+                  <a16:creationId xmlns:a16="http://schemas.microsoft.com/office/drawing/2014/main" id="{39A0481C-BAB5-2A23-2F49-0F7093C6ABAB}"/>
+                </a:ext>
+              </a:extLst>
+            </p:cNvPr>
+            <p:cNvSpPr/>
+            <p:nvPr/>
+          </p:nvSpPr>
+          <p:spPr>
+            <a:xfrm>
+              <a:off x="897224" y="897389"/>
+              <a:ext cx="1223963" cy="149432"/>
+            </a:xfrm>
+            <a:prstGeom prst="rect">
+              <a:avLst/>
+            </a:prstGeom>
+            <a:solidFill>
+              <a:schemeClr val="tx2">
+                <a:lumMod val="50000"/>
+                <a:lumOff val="50000"/>
+              </a:schemeClr>
+            </a:solidFill>
+            <a:ln w="3175">
+              <a:noFill/>
+            </a:ln>
+            <a:effectLst>
+              <a:outerShdw blurRad="57785" dist="33020" dir="3180000" algn="ctr">
+                <a:srgbClr val="000000">
+                  <a:alpha val="30000"/>
+                </a:srgbClr>
+              </a:outerShdw>
+            </a:effectLst>
+          </p:spPr>
+          <p:style>
+            <a:lnRef idx="2">
+              <a:schemeClr val="accent1">
+                <a:shade val="15000"/>
+              </a:schemeClr>
+            </a:lnRef>
+            <a:fillRef idx="1">
+              <a:schemeClr val="accent1"/>
+            </a:fillRef>
+            <a:effectRef idx="0">
+              <a:schemeClr val="accent1"/>
+            </a:effectRef>
+            <a:fontRef idx="minor">
+              <a:schemeClr val="lt1"/>
+            </a:fontRef>
+          </p:style>
+          <p:txBody>
+            <a:bodyPr rtlCol="0" anchor="ctr"/>
+            <a:lstStyle/>
+            <a:p>
+              <a:pPr algn="ctr"/>
+              <a:endParaRPr lang="en-150">
+                <a:ln w="3175">
+                  <a:solidFill>
+                    <a:schemeClr val="bg1">
+                      <a:lumMod val="95000"/>
+                    </a:schemeClr>
+                  </a:solidFill>
+                </a:ln>
+                <a:solidFill>
+                  <a:srgbClr val="1A1F71"/>
+                </a:solidFill>
+              </a:endParaRPr>
+            </a:p>
+          </p:txBody>
+        </p:sp>
+        <p:sp>
+          <p:nvSpPr>
+            <p:cNvPr id="31" name="Rectangle 30">
+              <a:extLst>
+                <a:ext uri="{FF2B5EF4-FFF2-40B4-BE49-F238E27FC236}">
+                  <a16:creationId xmlns:a16="http://schemas.microsoft.com/office/drawing/2014/main" id="{C058F16E-1FFF-FD70-BCC2-3DFE5879AC64}"/>
+                </a:ext>
+              </a:extLst>
+            </p:cNvPr>
+            <p:cNvSpPr/>
+            <p:nvPr/>
+          </p:nvSpPr>
+          <p:spPr>
+            <a:xfrm>
+              <a:off x="2121187" y="747957"/>
+              <a:ext cx="1368425" cy="149432"/>
+            </a:xfrm>
+            <a:prstGeom prst="rect">
+              <a:avLst/>
+            </a:prstGeom>
+            <a:solidFill>
+              <a:schemeClr val="tx2">
+                <a:lumMod val="50000"/>
+                <a:lumOff val="50000"/>
+              </a:schemeClr>
+            </a:solidFill>
+            <a:ln w="3175">
+              <a:noFill/>
+            </a:ln>
+            <a:effectLst>
+              <a:outerShdw blurRad="57785" dist="33020" dir="3180000" algn="ctr">
+                <a:srgbClr val="000000">
+                  <a:alpha val="30000"/>
+                </a:srgbClr>
+              </a:outerShdw>
+            </a:effectLst>
+          </p:spPr>
+          <p:style>
+            <a:lnRef idx="2">
+              <a:schemeClr val="accent1">
+                <a:shade val="15000"/>
+              </a:schemeClr>
+            </a:lnRef>
+            <a:fillRef idx="1">
+              <a:schemeClr val="accent1"/>
+            </a:fillRef>
+            <a:effectRef idx="0">
+              <a:schemeClr val="accent1"/>
+            </a:effectRef>
+            <a:fontRef idx="minor">
+              <a:schemeClr val="lt1"/>
+            </a:fontRef>
+          </p:style>
+          <p:txBody>
+            <a:bodyPr rtlCol="0" anchor="ctr"/>
+            <a:lstStyle/>
+            <a:p>
+              <a:pPr algn="ctr"/>
+              <a:endParaRPr lang="en-150">
+                <a:ln w="3175">
+                  <a:solidFill>
+                    <a:schemeClr val="bg1">
+                      <a:lumMod val="95000"/>
+                    </a:schemeClr>
+                  </a:solidFill>
+                </a:ln>
+                <a:solidFill>
+                  <a:srgbClr val="1A1F71"/>
+                </a:solidFill>
+              </a:endParaRPr>
+            </a:p>
+          </p:txBody>
+        </p:sp>
+        <p:sp>
+          <p:nvSpPr>
+            <p:cNvPr id="32" name="TextBox 31">
+              <a:extLst>
+                <a:ext uri="{FF2B5EF4-FFF2-40B4-BE49-F238E27FC236}">
+                  <a16:creationId xmlns:a16="http://schemas.microsoft.com/office/drawing/2014/main" id="{C876EE8A-2B87-C511-D1D6-A90175891D0B}"/>
+                </a:ext>
+              </a:extLst>
+            </p:cNvPr>
+            <p:cNvSpPr txBox="1"/>
+            <p:nvPr/>
+          </p:nvSpPr>
+          <p:spPr>
+            <a:xfrm>
+              <a:off x="769938" y="936331"/>
+              <a:ext cx="4253087" cy="1200329"/>
+            </a:xfrm>
+            <a:prstGeom prst="rect">
+              <a:avLst/>
+            </a:prstGeom>
+            <a:noFill/>
+            <a:ln>
+              <a:noFill/>
+            </a:ln>
+            <a:effectLst>
+              <a:outerShdw blurRad="57785" dist="33020" dir="3180000" algn="ctr">
+                <a:srgbClr val="000000">
+                  <a:alpha val="30000"/>
+                </a:srgbClr>
+              </a:outerShdw>
+            </a:effectLst>
+          </p:spPr>
+          <p:txBody>
+            <a:bodyPr wrap="none" rtlCol="0">
+              <a:spAutoFit/>
+              <a:sp3d extrusionH="38100">
+                <a:bevelT w="38100" h="38100"/>
+              </a:sp3d>
+            </a:bodyPr>
+            <a:lstStyle/>
+            <a:p>
+              <a:r>
+                <a:rPr lang="en-US" sz="7200" dirty="0">
+                  <a:ln w="3175">
+                    <a:noFill/>
+                  </a:ln>
+                  <a:solidFill>
+                    <a:schemeClr val="tx2">
+                      <a:lumMod val="50000"/>
+                      <a:lumOff val="50000"/>
+                    </a:schemeClr>
+                  </a:solidFill>
+                  <a:latin typeface="Aafia" pitchFamily="50" charset="0"/>
+                </a:rPr>
+                <a:t>LaDe</a:t>
+              </a:r>
+              <a:r>
+                <a:rPr lang="en-US" sz="7200" dirty="0">
+                  <a:ln w="3175">
+                    <a:noFill/>
+                  </a:ln>
+                  <a:solidFill>
+                    <a:srgbClr val="FFD700"/>
+                  </a:solidFill>
+                  <a:latin typeface="Aafia" pitchFamily="50" charset="0"/>
+                </a:rPr>
+                <a:t>RR</a:t>
+              </a:r>
+            </a:p>
+          </p:txBody>
+        </p:sp>
+        <p:sp>
+          <p:nvSpPr>
+            <p:cNvPr id="33" name="Rectangle 32">
+              <a:extLst>
+                <a:ext uri="{FF2B5EF4-FFF2-40B4-BE49-F238E27FC236}">
+                  <a16:creationId xmlns:a16="http://schemas.microsoft.com/office/drawing/2014/main" id="{24A4A341-8A54-CFE9-9D75-F81B6EBE6276}"/>
+                </a:ext>
+              </a:extLst>
+            </p:cNvPr>
+            <p:cNvSpPr/>
+            <p:nvPr/>
+          </p:nvSpPr>
+          <p:spPr>
+            <a:xfrm>
+              <a:off x="3489612" y="598525"/>
+              <a:ext cx="1377950" cy="149432"/>
+            </a:xfrm>
+            <a:prstGeom prst="rect">
+              <a:avLst/>
+            </a:prstGeom>
+            <a:solidFill>
+              <a:srgbClr val="FFD700"/>
+            </a:solidFill>
+            <a:ln w="3175">
+              <a:noFill/>
+            </a:ln>
+            <a:effectLst>
+              <a:outerShdw blurRad="57785" dist="33020" dir="3180000" algn="ctr">
+                <a:srgbClr val="000000">
+                  <a:alpha val="30000"/>
+                </a:srgbClr>
+              </a:outerShdw>
+            </a:effectLst>
+          </p:spPr>
+          <p:style>
+            <a:lnRef idx="2">
+              <a:schemeClr val="accent1">
+                <a:shade val="15000"/>
+              </a:schemeClr>
+            </a:lnRef>
+            <a:fillRef idx="1">
+              <a:schemeClr val="accent1"/>
+            </a:fillRef>
+            <a:effectRef idx="0">
+              <a:schemeClr val="accent1"/>
+            </a:effectRef>
+            <a:fontRef idx="minor">
+              <a:schemeClr val="lt1"/>
+            </a:fontRef>
+          </p:style>
+          <p:txBody>
+            <a:bodyPr rtlCol="0" anchor="ctr"/>
+            <a:lstStyle/>
+            <a:p>
+              <a:pPr algn="ctr"/>
+              <a:endParaRPr lang="en-150">
+                <a:ln w="3175">
+                  <a:solidFill>
+                    <a:schemeClr val="bg1">
+                      <a:lumMod val="95000"/>
+                    </a:schemeClr>
+                  </a:solidFill>
+                </a:ln>
+                <a:solidFill>
+                  <a:srgbClr val="1A1F71"/>
+                </a:solidFill>
+              </a:endParaRPr>
+            </a:p>
+          </p:txBody>
+        </p:sp>
+      </p:grpSp>
+      <p:grpSp>
+        <p:nvGrpSpPr>
+          <p:cNvPr id="34" name="Group 33">
+            <a:extLst>
+              <a:ext uri="{FF2B5EF4-FFF2-40B4-BE49-F238E27FC236}">
+                <a16:creationId xmlns:a16="http://schemas.microsoft.com/office/drawing/2014/main" id="{BED6DBD1-C1A8-9426-CA02-A9D83D535A23}"/>
+              </a:ext>
+            </a:extLst>
+          </p:cNvPr>
+          <p:cNvGrpSpPr/>
+          <p:nvPr/>
+        </p:nvGrpSpPr>
+        <p:grpSpPr>
+          <a:xfrm>
+            <a:off x="892230" y="3979137"/>
+            <a:ext cx="4513548" cy="1899023"/>
+            <a:chOff x="6986985" y="4577378"/>
+            <a:chExt cx="4513548" cy="1899023"/>
+          </a:xfrm>
+        </p:grpSpPr>
+        <p:sp>
+          <p:nvSpPr>
+            <p:cNvPr id="35" name="TextBox 34">
+              <a:extLst>
+                <a:ext uri="{FF2B5EF4-FFF2-40B4-BE49-F238E27FC236}">
+                  <a16:creationId xmlns:a16="http://schemas.microsoft.com/office/drawing/2014/main" id="{BC56E3EE-8C19-9614-9B23-6257D21C876A}"/>
+                </a:ext>
+              </a:extLst>
+            </p:cNvPr>
+            <p:cNvSpPr txBox="1"/>
+            <p:nvPr/>
+          </p:nvSpPr>
+          <p:spPr>
+            <a:xfrm>
+              <a:off x="7088871" y="5645404"/>
+              <a:ext cx="4411662" cy="830997"/>
+            </a:xfrm>
+            <a:prstGeom prst="rect">
+              <a:avLst/>
+            </a:prstGeom>
+            <a:noFill/>
+            <a:ln>
+              <a:noFill/>
+            </a:ln>
+            <a:effectLst>
+              <a:outerShdw blurRad="44450" dist="27940" dir="5400000" algn="ctr">
+                <a:srgbClr val="000000">
+                  <a:alpha val="32000"/>
+                </a:srgbClr>
+              </a:outerShdw>
+            </a:effectLst>
+            <a:scene3d>
+              <a:camera prst="orthographicFront">
+                <a:rot lat="0" lon="0" rev="0"/>
+              </a:camera>
+              <a:lightRig rig="balanced" dir="t">
+                <a:rot lat="0" lon="0" rev="8700000"/>
+              </a:lightRig>
+            </a:scene3d>
+            <a:sp3d>
+              <a:bevelT w="190500" h="38100"/>
+            </a:sp3d>
+          </p:spPr>
+          <p:txBody>
+            <a:bodyPr wrap="square" lIns="0" tIns="0" rIns="0" bIns="0" rtlCol="0">
+              <a:spAutoFit/>
+            </a:bodyPr>
+            <a:lstStyle/>
+            <a:p>
+              <a:pPr algn="just"/>
+              <a:r>
+                <a:rPr lang="en-US" sz="5400" b="1" spc="780" dirty="0">
+                  <a:solidFill>
+                    <a:srgbClr val="E04F39"/>
+                  </a:solidFill>
+                  <a:latin typeface="Engravers MT" panose="02090707080505020304" pitchFamily="18" charset="0"/>
+                </a:rPr>
+                <a:t>Engine</a:t>
+              </a:r>
+            </a:p>
+          </p:txBody>
+        </p:sp>
+        <p:grpSp>
+          <p:nvGrpSpPr>
+            <p:cNvPr id="36" name="Group 35">
+              <a:extLst>
+                <a:ext uri="{FF2B5EF4-FFF2-40B4-BE49-F238E27FC236}">
+                  <a16:creationId xmlns:a16="http://schemas.microsoft.com/office/drawing/2014/main" id="{18642102-AF4A-CD9D-73F3-F48DB794B67F}"/>
+                </a:ext>
+              </a:extLst>
+            </p:cNvPr>
+            <p:cNvGrpSpPr/>
+            <p:nvPr/>
+          </p:nvGrpSpPr>
+          <p:grpSpPr>
+            <a:xfrm>
+              <a:off x="6986985" y="4577378"/>
+              <a:ext cx="4253087" cy="1538135"/>
+              <a:chOff x="6986985" y="4577378"/>
+              <a:chExt cx="4253087" cy="1538135"/>
+            </a:xfrm>
+          </p:grpSpPr>
+          <p:sp>
+            <p:nvSpPr>
+              <p:cNvPr id="37" name="Rectangle 36">
+                <a:extLst>
+                  <a:ext uri="{FF2B5EF4-FFF2-40B4-BE49-F238E27FC236}">
+                    <a16:creationId xmlns:a16="http://schemas.microsoft.com/office/drawing/2014/main" id="{76157CCB-D29F-F329-EFB5-7C488FE0632E}"/>
+                  </a:ext>
+                </a:extLst>
+              </p:cNvPr>
+              <p:cNvSpPr/>
+              <p:nvPr/>
+            </p:nvSpPr>
+            <p:spPr>
+              <a:xfrm>
+                <a:off x="7114271" y="4876242"/>
+                <a:ext cx="1223963" cy="149432"/>
+              </a:xfrm>
+              <a:prstGeom prst="rect">
+                <a:avLst/>
+              </a:prstGeom>
+              <a:solidFill>
+                <a:schemeClr val="tx2">
+                  <a:lumMod val="50000"/>
+                  <a:lumOff val="50000"/>
+                </a:schemeClr>
+              </a:solidFill>
+              <a:ln w="3175">
+                <a:noFill/>
+              </a:ln>
+              <a:effectLst>
+                <a:outerShdw blurRad="57785" dist="33020" dir="3180000" algn="ctr">
+                  <a:srgbClr val="000000">
+                    <a:alpha val="30000"/>
+                  </a:srgbClr>
+                </a:outerShdw>
+              </a:effectLst>
+            </p:spPr>
+            <p:style>
+              <a:lnRef idx="2">
+                <a:schemeClr val="accent1">
+                  <a:shade val="15000"/>
+                </a:schemeClr>
+              </a:lnRef>
+              <a:fillRef idx="1">
+                <a:schemeClr val="accent1"/>
+              </a:fillRef>
+              <a:effectRef idx="0">
+                <a:schemeClr val="accent1"/>
+              </a:effectRef>
+              <a:fontRef idx="minor">
+                <a:schemeClr val="lt1"/>
+              </a:fontRef>
+            </p:style>
+            <p:txBody>
+              <a:bodyPr rtlCol="0" anchor="ctr"/>
+              <a:lstStyle/>
+              <a:p>
+                <a:pPr algn="ctr"/>
+                <a:endParaRPr lang="en-150">
+                  <a:ln w="3175">
+                    <a:solidFill>
+                      <a:schemeClr val="bg1">
+                        <a:lumMod val="95000"/>
+                      </a:schemeClr>
+                    </a:solidFill>
+                  </a:ln>
+                  <a:solidFill>
+                    <a:srgbClr val="1A1F71"/>
+                  </a:solidFill>
+                </a:endParaRPr>
+              </a:p>
+            </p:txBody>
+          </p:sp>
+          <p:sp>
+            <p:nvSpPr>
+              <p:cNvPr id="38" name="Rectangle 37">
+                <a:extLst>
+                  <a:ext uri="{FF2B5EF4-FFF2-40B4-BE49-F238E27FC236}">
+                    <a16:creationId xmlns:a16="http://schemas.microsoft.com/office/drawing/2014/main" id="{E15FD01F-7BA8-7928-9F97-239B0371F102}"/>
+                  </a:ext>
+                </a:extLst>
+              </p:cNvPr>
+              <p:cNvSpPr/>
+              <p:nvPr/>
+            </p:nvSpPr>
+            <p:spPr>
+              <a:xfrm>
+                <a:off x="8338234" y="4726810"/>
+                <a:ext cx="1368425" cy="149432"/>
+              </a:xfrm>
+              <a:prstGeom prst="rect">
+                <a:avLst/>
+              </a:prstGeom>
+              <a:solidFill>
+                <a:schemeClr val="tx2">
+                  <a:lumMod val="50000"/>
+                  <a:lumOff val="50000"/>
+                </a:schemeClr>
+              </a:solidFill>
+              <a:ln w="3175">
+                <a:noFill/>
+              </a:ln>
+              <a:effectLst>
+                <a:outerShdw blurRad="57785" dist="33020" dir="3180000" algn="ctr">
+                  <a:srgbClr val="000000">
+                    <a:alpha val="30000"/>
+                  </a:srgbClr>
+                </a:outerShdw>
+              </a:effectLst>
+            </p:spPr>
+            <p:style>
+              <a:lnRef idx="2">
+                <a:schemeClr val="accent1">
+                  <a:shade val="15000"/>
+                </a:schemeClr>
+              </a:lnRef>
+              <a:fillRef idx="1">
+                <a:schemeClr val="accent1"/>
+              </a:fillRef>
+              <a:effectRef idx="0">
+                <a:schemeClr val="accent1"/>
+              </a:effectRef>
+              <a:fontRef idx="minor">
+                <a:schemeClr val="lt1"/>
+              </a:fontRef>
+            </p:style>
+            <p:txBody>
+              <a:bodyPr rtlCol="0" anchor="ctr"/>
+              <a:lstStyle/>
+              <a:p>
+                <a:pPr algn="ctr"/>
+                <a:endParaRPr lang="en-150">
+                  <a:ln w="3175">
+                    <a:solidFill>
+                      <a:schemeClr val="bg1">
+                        <a:lumMod val="95000"/>
+                      </a:schemeClr>
+                    </a:solidFill>
+                  </a:ln>
+                  <a:solidFill>
+                    <a:srgbClr val="1A1F71"/>
+                  </a:solidFill>
+                </a:endParaRPr>
+              </a:p>
+            </p:txBody>
+          </p:sp>
+          <p:sp>
+            <p:nvSpPr>
+              <p:cNvPr id="39" name="TextBox 38">
+                <a:extLst>
+                  <a:ext uri="{FF2B5EF4-FFF2-40B4-BE49-F238E27FC236}">
+                    <a16:creationId xmlns:a16="http://schemas.microsoft.com/office/drawing/2014/main" id="{CB0CAC89-9728-EB2C-7B68-45F727F23864}"/>
+                  </a:ext>
+                </a:extLst>
+              </p:cNvPr>
+              <p:cNvSpPr txBox="1"/>
+              <p:nvPr/>
+            </p:nvSpPr>
+            <p:spPr>
+              <a:xfrm>
+                <a:off x="6986985" y="4915184"/>
+                <a:ext cx="4253087" cy="1200329"/>
+              </a:xfrm>
+              <a:prstGeom prst="rect">
+                <a:avLst/>
+              </a:prstGeom>
+              <a:noFill/>
+              <a:ln>
+                <a:noFill/>
+              </a:ln>
+              <a:effectLst>
+                <a:outerShdw blurRad="57785" dist="33020" dir="3180000" algn="ctr">
+                  <a:srgbClr val="000000">
+                    <a:alpha val="30000"/>
+                  </a:srgbClr>
+                </a:outerShdw>
+              </a:effectLst>
+            </p:spPr>
+            <p:txBody>
+              <a:bodyPr wrap="none" rtlCol="0">
+                <a:spAutoFit/>
+                <a:sp3d extrusionH="38100">
+                  <a:bevelT w="38100" h="38100"/>
+                </a:sp3d>
+              </a:bodyPr>
+              <a:lstStyle/>
+              <a:p>
+                <a:r>
+                  <a:rPr lang="en-US" sz="7200" dirty="0">
+                    <a:ln w="3175">
+                      <a:noFill/>
+                    </a:ln>
+                    <a:solidFill>
+                      <a:schemeClr val="tx2">
+                        <a:lumMod val="50000"/>
+                        <a:lumOff val="50000"/>
+                      </a:schemeClr>
+                    </a:solidFill>
+                    <a:latin typeface="Aafia" pitchFamily="50" charset="0"/>
+                  </a:rPr>
+                  <a:t>LaDe</a:t>
+                </a:r>
+                <a:r>
+                  <a:rPr lang="en-US" sz="7200" dirty="0">
+                    <a:ln w="3175">
+                      <a:noFill/>
+                    </a:ln>
+                    <a:solidFill>
+                      <a:srgbClr val="FFD700"/>
+                    </a:solidFill>
+                    <a:latin typeface="Aafia" pitchFamily="50" charset="0"/>
+                  </a:rPr>
+                  <a:t>RR</a:t>
+                </a:r>
+              </a:p>
+            </p:txBody>
+          </p:sp>
+          <p:sp>
+            <p:nvSpPr>
+              <p:cNvPr id="40" name="Rectangle 39">
+                <a:extLst>
+                  <a:ext uri="{FF2B5EF4-FFF2-40B4-BE49-F238E27FC236}">
+                    <a16:creationId xmlns:a16="http://schemas.microsoft.com/office/drawing/2014/main" id="{9E8D6D9D-8D31-975E-4432-1BCBEA8CDDAE}"/>
+                  </a:ext>
+                </a:extLst>
+              </p:cNvPr>
+              <p:cNvSpPr/>
+              <p:nvPr/>
+            </p:nvSpPr>
+            <p:spPr>
+              <a:xfrm>
+                <a:off x="9706659" y="4577378"/>
+                <a:ext cx="1377950" cy="149432"/>
+              </a:xfrm>
+              <a:prstGeom prst="rect">
+                <a:avLst/>
+              </a:prstGeom>
+              <a:solidFill>
+                <a:srgbClr val="FFD700"/>
+              </a:solidFill>
+              <a:ln w="3175">
+                <a:noFill/>
+              </a:ln>
+              <a:effectLst>
+                <a:outerShdw blurRad="57785" dist="33020" dir="3180000" algn="ctr">
+                  <a:srgbClr val="000000">
+                    <a:alpha val="30000"/>
+                  </a:srgbClr>
+                </a:outerShdw>
+              </a:effectLst>
+            </p:spPr>
+            <p:style>
+              <a:lnRef idx="2">
+                <a:schemeClr val="accent1">
+                  <a:shade val="15000"/>
+                </a:schemeClr>
+              </a:lnRef>
+              <a:fillRef idx="1">
+                <a:schemeClr val="accent1"/>
+              </a:fillRef>
+              <a:effectRef idx="0">
+                <a:schemeClr val="accent1"/>
+              </a:effectRef>
+              <a:fontRef idx="minor">
+                <a:schemeClr val="lt1"/>
+              </a:fontRef>
+            </p:style>
+            <p:txBody>
+              <a:bodyPr rtlCol="0" anchor="ctr"/>
+              <a:lstStyle/>
+              <a:p>
+                <a:pPr algn="ctr"/>
+                <a:endParaRPr lang="en-150">
+                  <a:ln w="3175">
+                    <a:solidFill>
+                      <a:schemeClr val="bg1">
+                        <a:lumMod val="95000"/>
+                      </a:schemeClr>
+                    </a:solidFill>
+                  </a:ln>
+                  <a:solidFill>
+                    <a:srgbClr val="1A1F71"/>
+                  </a:solidFill>
+                </a:endParaRPr>
+              </a:p>
+            </p:txBody>
+          </p:sp>
+        </p:grpSp>
+      </p:grpSp>
+    </p:spTree>
+    <p:extLst>
+      <p:ext uri="{BB962C8B-B14F-4D97-AF65-F5344CB8AC3E}">
+        <p14:creationId xmlns:p14="http://schemas.microsoft.com/office/powerpoint/2010/main" val="1312158596"/>
+      </p:ext>
+    </p:extLst>
+  </p:cSld>
+  <p:clrMapOvr>
+    <a:masterClrMapping/>
+  </p:clrMapOvr>
+</p:sld>
+</file>
+
+<file path=ppt/slides/slide10.xml><?xml version="1.0" encoding="utf-8"?>
+<p:sld xmlns:a="http://schemas.openxmlformats.org/drawingml/2006/main" xmlns:r="http://schemas.openxmlformats.org/officeDocument/2006/relationships" xmlns:p="http://schemas.openxmlformats.org/presentationml/2006/main" show="0">
+  <p:cSld>
+    <p:spTree>
+      <p:nvGrpSpPr>
+        <p:cNvPr id="1" name=""/>
+        <p:cNvGrpSpPr/>
+        <p:nvPr/>
+      </p:nvGrpSpPr>
+      <p:grpSpPr>
+        <a:xfrm>
+          <a:off x="0" y="0"/>
+          <a:ext cx="0" cy="0"/>
+          <a:chOff x="0" y="0"/>
+          <a:chExt cx="0" cy="0"/>
+        </a:xfrm>
+      </p:grpSpPr>
       <p:sp>
         <p:nvSpPr>
-          <p:cNvPr id="3" name="Rectangle 2">
+          <p:cNvPr id="4" name="Rectangle 3">
             <a:extLst>
               <a:ext uri="{FF2B5EF4-FFF2-40B4-BE49-F238E27FC236}">
-                <a16:creationId xmlns:a16="http://schemas.microsoft.com/office/drawing/2014/main" id="{A11DAC5B-9CC5-FEE0-8E9D-184ED91E9D7A}"/>
+                <a16:creationId xmlns:a16="http://schemas.microsoft.com/office/drawing/2014/main" id="{0EA7F422-11B4-801C-3967-BC77A3C5E938}"/>
               </a:ext>
             </a:extLst>
           </p:cNvPr>
@@ -4487,25 +5283,25 @@
         </p:nvSpPr>
         <p:spPr>
           <a:xfrm>
-            <a:off x="6840824" y="5390598"/>
-            <a:ext cx="1223963" cy="149432"/>
+            <a:off x="4148185" y="3422272"/>
+            <a:ext cx="1369714" cy="344274"/>
           </a:xfrm>
           <a:prstGeom prst="rect">
             <a:avLst/>
           </a:prstGeom>
           <a:solidFill>
-            <a:srgbClr val="20257A"/>
+            <a:srgbClr val="1A1F71"/>
           </a:solidFill>
           <a:ln w="3175">
             <a:noFill/>
           </a:ln>
-          <a:effectLst>
-            <a:outerShdw blurRad="57785" dist="33020" dir="3180000" algn="ctr">
-              <a:srgbClr val="000000">
-                <a:alpha val="30000"/>
-              </a:srgbClr>
-            </a:outerShdw>
-          </a:effectLst>
+          <a:scene3d>
+            <a:camera prst="orthographicFront"/>
+            <a:lightRig rig="threePt" dir="t"/>
+          </a:scene3d>
+          <a:sp3d>
+            <a:bevelT w="38100" h="38100"/>
+          </a:sp3d>
         </p:spPr>
         <p:style>
           <a:lnRef idx="2">
@@ -4529,13 +5325,6 @@
           <a:p>
             <a:pPr algn="ctr"/>
             <a:endParaRPr lang="en-150">
-              <a:ln w="3175">
-                <a:solidFill>
-                  <a:schemeClr val="bg1">
-                    <a:lumMod val="95000"/>
-                  </a:schemeClr>
-                </a:solidFill>
-              </a:ln>
               <a:solidFill>
                 <a:srgbClr val="1A1F71"/>
               </a:solidFill>
@@ -4545,10 +5334,10 @@
       </p:sp>
       <p:sp>
         <p:nvSpPr>
-          <p:cNvPr id="4" name="Rectangle 3">
+          <p:cNvPr id="5" name="Rectangle 4">
             <a:extLst>
               <a:ext uri="{FF2B5EF4-FFF2-40B4-BE49-F238E27FC236}">
-                <a16:creationId xmlns:a16="http://schemas.microsoft.com/office/drawing/2014/main" id="{598393B8-00F4-88EF-3020-6856033B1898}"/>
+                <a16:creationId xmlns:a16="http://schemas.microsoft.com/office/drawing/2014/main" id="{C77BE717-C333-AA2E-AE01-211F68893DDE}"/>
               </a:ext>
             </a:extLst>
           </p:cNvPr>
@@ -4557,25 +5346,25 @@
         </p:nvSpPr>
         <p:spPr>
           <a:xfrm>
-            <a:off x="8064787" y="5241166"/>
-            <a:ext cx="1368425" cy="149432"/>
+            <a:off x="5440432" y="2981377"/>
+            <a:ext cx="1369714" cy="344274"/>
           </a:xfrm>
           <a:prstGeom prst="rect">
             <a:avLst/>
           </a:prstGeom>
           <a:solidFill>
-            <a:srgbClr val="20257A"/>
+            <a:srgbClr val="1A1F71"/>
           </a:solidFill>
           <a:ln w="3175">
             <a:noFill/>
           </a:ln>
-          <a:effectLst>
-            <a:outerShdw blurRad="57785" dist="33020" dir="3180000" algn="ctr">
-              <a:srgbClr val="000000">
-                <a:alpha val="30000"/>
-              </a:srgbClr>
-            </a:outerShdw>
-          </a:effectLst>
+          <a:scene3d>
+            <a:camera prst="orthographicFront"/>
+            <a:lightRig rig="threePt" dir="t"/>
+          </a:scene3d>
+          <a:sp3d>
+            <a:bevelT w="38100" h="38100"/>
+          </a:sp3d>
         </p:spPr>
         <p:style>
           <a:lnRef idx="2">
@@ -4599,85 +5388,10 @@
           <a:p>
             <a:pPr algn="ctr"/>
             <a:endParaRPr lang="en-150">
-              <a:ln w="3175">
-                <a:solidFill>
-                  <a:schemeClr val="bg1">
-                    <a:lumMod val="95000"/>
-                  </a:schemeClr>
-                </a:solidFill>
-              </a:ln>
               <a:solidFill>
                 <a:srgbClr val="1A1F71"/>
               </a:solidFill>
             </a:endParaRPr>
-          </a:p>
-        </p:txBody>
-      </p:sp>
-      <p:sp>
-        <p:nvSpPr>
-          <p:cNvPr id="5" name="TextBox 4">
-            <a:extLst>
-              <a:ext uri="{FF2B5EF4-FFF2-40B4-BE49-F238E27FC236}">
-                <a16:creationId xmlns:a16="http://schemas.microsoft.com/office/drawing/2014/main" id="{C582EF64-327A-5D40-5CCA-0FB407145FE3}"/>
-              </a:ext>
-            </a:extLst>
-          </p:cNvPr>
-          <p:cNvSpPr txBox="1"/>
-          <p:nvPr/>
-        </p:nvSpPr>
-        <p:spPr>
-          <a:xfrm>
-            <a:off x="6713538" y="5429540"/>
-            <a:ext cx="4253087" cy="1200329"/>
-          </a:xfrm>
-          <a:prstGeom prst="rect">
-            <a:avLst/>
-          </a:prstGeom>
-          <a:noFill/>
-          <a:ln>
-            <a:noFill/>
-          </a:ln>
-          <a:effectLst>
-            <a:outerShdw blurRad="57785" dist="33020" dir="3180000" algn="ctr">
-              <a:srgbClr val="000000">
-                <a:alpha val="30000"/>
-              </a:srgbClr>
-            </a:outerShdw>
-          </a:effectLst>
-        </p:spPr>
-        <p:txBody>
-          <a:bodyPr wrap="none" rtlCol="0">
-            <a:spAutoFit/>
-            <a:sp3d extrusionH="38100">
-              <a:bevelT w="38100" h="38100"/>
-            </a:sp3d>
-          </a:bodyPr>
-          <a:lstStyle/>
-          <a:p>
-            <a:r>
-              <a:rPr lang="en-US" sz="7200" dirty="0">
-                <a:ln w="3175">
-                  <a:noFill/>
-                </a:ln>
-                <a:solidFill>
-                  <a:srgbClr val="20257A"/>
-                </a:solidFill>
-                <a:latin typeface="Aafia" pitchFamily="50" charset="0"/>
-              </a:rPr>
-              <a:t>LaDe</a:t>
-            </a:r>
-            <a:r>
-              <a:rPr lang="en-US" sz="7200" dirty="0">
-                <a:ln w="3175">
-                  <a:noFill/>
-                </a:ln>
-                <a:solidFill>
-                  <a:srgbClr val="FFD700"/>
-                </a:solidFill>
-                <a:latin typeface="Aafia" pitchFamily="50" charset="0"/>
-              </a:rPr>
-              <a:t>RR</a:t>
-            </a:r>
           </a:p>
         </p:txBody>
       </p:sp>
@@ -4686,7 +5400,7 @@
           <p:cNvPr id="6" name="Rectangle 5">
             <a:extLst>
               <a:ext uri="{FF2B5EF4-FFF2-40B4-BE49-F238E27FC236}">
-                <a16:creationId xmlns:a16="http://schemas.microsoft.com/office/drawing/2014/main" id="{12008EE8-3E47-C031-AE6D-B07E0626F8DC}"/>
+                <a16:creationId xmlns:a16="http://schemas.microsoft.com/office/drawing/2014/main" id="{0F3EA294-0FAE-D6B7-F4F6-0E3492015699}"/>
               </a:ext>
             </a:extLst>
           </p:cNvPr>
@@ -4695,8 +5409,8 @@
         </p:nvSpPr>
         <p:spPr>
           <a:xfrm>
-            <a:off x="9433212" y="5091734"/>
-            <a:ext cx="1377950" cy="149432"/>
+            <a:off x="6732679" y="2540482"/>
+            <a:ext cx="1369711" cy="344274"/>
           </a:xfrm>
           <a:prstGeom prst="rect">
             <a:avLst/>
@@ -4707,13 +5421,13 @@
           <a:ln w="3175">
             <a:noFill/>
           </a:ln>
-          <a:effectLst>
-            <a:outerShdw blurRad="57785" dist="33020" dir="3180000" algn="ctr">
-              <a:srgbClr val="000000">
-                <a:alpha val="30000"/>
-              </a:srgbClr>
-            </a:outerShdw>
-          </a:effectLst>
+          <a:scene3d>
+            <a:camera prst="orthographicFront"/>
+            <a:lightRig rig="threePt" dir="t"/>
+          </a:scene3d>
+          <a:sp3d>
+            <a:bevelT w="38100" h="38100"/>
+          </a:sp3d>
         </p:spPr>
         <p:style>
           <a:lnRef idx="2">
@@ -4736,25 +5450,79 @@
           <a:lstStyle/>
           <a:p>
             <a:pPr algn="ctr"/>
-            <a:endParaRPr lang="en-150">
-              <a:ln w="3175">
+            <a:endParaRPr lang="en-150"/>
+          </a:p>
+        </p:txBody>
+      </p:sp>
+      <p:sp>
+        <p:nvSpPr>
+          <p:cNvPr id="9" name="TextBox 8">
+            <a:extLst>
+              <a:ext uri="{FF2B5EF4-FFF2-40B4-BE49-F238E27FC236}">
+                <a16:creationId xmlns:a16="http://schemas.microsoft.com/office/drawing/2014/main" id="{C4A505D0-0167-DE42-F11E-1D8999064CCB}"/>
+              </a:ext>
+            </a:extLst>
+          </p:cNvPr>
+          <p:cNvSpPr txBox="1"/>
+          <p:nvPr/>
+        </p:nvSpPr>
+        <p:spPr>
+          <a:xfrm>
+            <a:off x="4009489" y="3766546"/>
+            <a:ext cx="4253087" cy="1200329"/>
+          </a:xfrm>
+          <a:prstGeom prst="rect">
+            <a:avLst/>
+          </a:prstGeom>
+          <a:noFill/>
+          <a:ln>
+            <a:noFill/>
+          </a:ln>
+        </p:spPr>
+        <p:txBody>
+          <a:bodyPr wrap="none" rtlCol="0">
+            <a:spAutoFit/>
+            <a:scene3d>
+              <a:camera prst="orthographicFront"/>
+              <a:lightRig rig="threePt" dir="t"/>
+            </a:scene3d>
+            <a:sp3d extrusionH="38100">
+              <a:bevelT w="38100" h="38100"/>
+            </a:sp3d>
+          </a:bodyPr>
+          <a:lstStyle/>
+          <a:p>
+            <a:r>
+              <a:rPr lang="en-US" sz="7200" dirty="0">
+                <a:ln w="3175">
+                  <a:noFill/>
+                </a:ln>
                 <a:solidFill>
-                  <a:schemeClr val="bg1">
-                    <a:lumMod val="95000"/>
-                  </a:schemeClr>
+                  <a:srgbClr val="1A1F71"/>
                 </a:solidFill>
-              </a:ln>
-              <a:solidFill>
-                <a:srgbClr val="1A1F71"/>
-              </a:solidFill>
-            </a:endParaRPr>
+                <a:latin typeface="Aafia" pitchFamily="50" charset="0"/>
+              </a:rPr>
+              <a:t>LaDe</a:t>
+            </a:r>
+            <a:r>
+              <a:rPr lang="en-US" sz="7200" dirty="0">
+                <a:ln w="3175">
+                  <a:noFill/>
+                </a:ln>
+                <a:solidFill>
+                  <a:srgbClr val="FFD700"/>
+                </a:solidFill>
+                <a:latin typeface="Aafia" pitchFamily="50" charset="0"/>
+              </a:rPr>
+              <a:t>RR</a:t>
+            </a:r>
           </a:p>
         </p:txBody>
       </p:sp>
     </p:spTree>
     <p:extLst>
       <p:ext uri="{BB962C8B-B14F-4D97-AF65-F5344CB8AC3E}">
-        <p14:creationId xmlns:p14="http://schemas.microsoft.com/office/powerpoint/2010/main" val="1312158596"/>
+        <p14:creationId xmlns:p14="http://schemas.microsoft.com/office/powerpoint/2010/main" val="1245543223"/>
       </p:ext>
     </p:extLst>
   </p:cSld>
@@ -4764,7 +5532,529 @@
 </p:sld>
 </file>
 
-<file path=ppt/slides/slide10.xml><?xml version="1.0" encoding="utf-8"?>
+<file path=ppt/slides/slide11.xml><?xml version="1.0" encoding="utf-8"?>
+<p:sld xmlns:a="http://schemas.openxmlformats.org/drawingml/2006/main" xmlns:r="http://schemas.openxmlformats.org/officeDocument/2006/relationships" xmlns:p="http://schemas.openxmlformats.org/presentationml/2006/main" show="0">
+  <p:cSld>
+    <p:spTree>
+      <p:nvGrpSpPr>
+        <p:cNvPr id="1" name=""/>
+        <p:cNvGrpSpPr/>
+        <p:nvPr/>
+      </p:nvGrpSpPr>
+      <p:grpSpPr>
+        <a:xfrm>
+          <a:off x="0" y="0"/>
+          <a:ext cx="0" cy="0"/>
+          <a:chOff x="0" y="0"/>
+          <a:chExt cx="0" cy="0"/>
+        </a:xfrm>
+      </p:grpSpPr>
+      <p:sp>
+        <p:nvSpPr>
+          <p:cNvPr id="4" name="Rectangle 3">
+            <a:extLst>
+              <a:ext uri="{FF2B5EF4-FFF2-40B4-BE49-F238E27FC236}">
+                <a16:creationId xmlns:a16="http://schemas.microsoft.com/office/drawing/2014/main" id="{0EA7F422-11B4-801C-3967-BC77A3C5E938}"/>
+              </a:ext>
+            </a:extLst>
+          </p:cNvPr>
+          <p:cNvSpPr/>
+          <p:nvPr/>
+        </p:nvSpPr>
+        <p:spPr>
+          <a:xfrm>
+            <a:off x="4148185" y="3422272"/>
+            <a:ext cx="1369714" cy="344274"/>
+          </a:xfrm>
+          <a:prstGeom prst="rect">
+            <a:avLst/>
+          </a:prstGeom>
+          <a:solidFill>
+            <a:srgbClr val="242A9C"/>
+          </a:solidFill>
+          <a:ln w="3175">
+            <a:noFill/>
+          </a:ln>
+          <a:scene3d>
+            <a:camera prst="orthographicFront"/>
+            <a:lightRig rig="threePt" dir="t"/>
+          </a:scene3d>
+          <a:sp3d>
+            <a:bevelT w="38100" h="38100"/>
+          </a:sp3d>
+        </p:spPr>
+        <p:style>
+          <a:lnRef idx="2">
+            <a:schemeClr val="accent1">
+              <a:shade val="15000"/>
+            </a:schemeClr>
+          </a:lnRef>
+          <a:fillRef idx="1">
+            <a:schemeClr val="accent1"/>
+          </a:fillRef>
+          <a:effectRef idx="0">
+            <a:schemeClr val="accent1"/>
+          </a:effectRef>
+          <a:fontRef idx="minor">
+            <a:schemeClr val="lt1"/>
+          </a:fontRef>
+        </p:style>
+        <p:txBody>
+          <a:bodyPr rtlCol="0" anchor="ctr"/>
+          <a:lstStyle/>
+          <a:p>
+            <a:pPr algn="ctr"/>
+            <a:endParaRPr lang="en-150"/>
+          </a:p>
+        </p:txBody>
+      </p:sp>
+      <p:sp>
+        <p:nvSpPr>
+          <p:cNvPr id="5" name="Rectangle 4">
+            <a:extLst>
+              <a:ext uri="{FF2B5EF4-FFF2-40B4-BE49-F238E27FC236}">
+                <a16:creationId xmlns:a16="http://schemas.microsoft.com/office/drawing/2014/main" id="{C77BE717-C333-AA2E-AE01-211F68893DDE}"/>
+              </a:ext>
+            </a:extLst>
+          </p:cNvPr>
+          <p:cNvSpPr/>
+          <p:nvPr/>
+        </p:nvSpPr>
+        <p:spPr>
+          <a:xfrm>
+            <a:off x="5440432" y="2981377"/>
+            <a:ext cx="1369714" cy="344274"/>
+          </a:xfrm>
+          <a:prstGeom prst="rect">
+            <a:avLst/>
+          </a:prstGeom>
+          <a:solidFill>
+            <a:srgbClr val="242A9C"/>
+          </a:solidFill>
+          <a:ln w="3175">
+            <a:noFill/>
+          </a:ln>
+          <a:scene3d>
+            <a:camera prst="orthographicFront"/>
+            <a:lightRig rig="threePt" dir="t"/>
+          </a:scene3d>
+          <a:sp3d>
+            <a:bevelT w="38100" h="38100"/>
+          </a:sp3d>
+        </p:spPr>
+        <p:style>
+          <a:lnRef idx="2">
+            <a:schemeClr val="accent1">
+              <a:shade val="15000"/>
+            </a:schemeClr>
+          </a:lnRef>
+          <a:fillRef idx="1">
+            <a:schemeClr val="accent1"/>
+          </a:fillRef>
+          <a:effectRef idx="0">
+            <a:schemeClr val="accent1"/>
+          </a:effectRef>
+          <a:fontRef idx="minor">
+            <a:schemeClr val="lt1"/>
+          </a:fontRef>
+        </p:style>
+        <p:txBody>
+          <a:bodyPr rtlCol="0" anchor="ctr"/>
+          <a:lstStyle/>
+          <a:p>
+            <a:pPr algn="ctr"/>
+            <a:endParaRPr lang="en-150"/>
+          </a:p>
+        </p:txBody>
+      </p:sp>
+      <p:sp>
+        <p:nvSpPr>
+          <p:cNvPr id="6" name="Rectangle 5">
+            <a:extLst>
+              <a:ext uri="{FF2B5EF4-FFF2-40B4-BE49-F238E27FC236}">
+                <a16:creationId xmlns:a16="http://schemas.microsoft.com/office/drawing/2014/main" id="{0F3EA294-0FAE-D6B7-F4F6-0E3492015699}"/>
+              </a:ext>
+            </a:extLst>
+          </p:cNvPr>
+          <p:cNvSpPr/>
+          <p:nvPr/>
+        </p:nvSpPr>
+        <p:spPr>
+          <a:xfrm>
+            <a:off x="6732679" y="2540482"/>
+            <a:ext cx="1369711" cy="344274"/>
+          </a:xfrm>
+          <a:prstGeom prst="rect">
+            <a:avLst/>
+          </a:prstGeom>
+          <a:solidFill>
+            <a:srgbClr val="E101D1"/>
+          </a:solidFill>
+          <a:ln w="3175">
+            <a:noFill/>
+          </a:ln>
+          <a:scene3d>
+            <a:camera prst="orthographicFront"/>
+            <a:lightRig rig="threePt" dir="t"/>
+          </a:scene3d>
+          <a:sp3d>
+            <a:bevelT w="38100" h="38100"/>
+          </a:sp3d>
+        </p:spPr>
+        <p:style>
+          <a:lnRef idx="2">
+            <a:schemeClr val="accent1">
+              <a:shade val="15000"/>
+            </a:schemeClr>
+          </a:lnRef>
+          <a:fillRef idx="1">
+            <a:schemeClr val="accent1"/>
+          </a:fillRef>
+          <a:effectRef idx="0">
+            <a:schemeClr val="accent1"/>
+          </a:effectRef>
+          <a:fontRef idx="minor">
+            <a:schemeClr val="lt1"/>
+          </a:fontRef>
+        </p:style>
+        <p:txBody>
+          <a:bodyPr rtlCol="0" anchor="ctr"/>
+          <a:lstStyle/>
+          <a:p>
+            <a:pPr algn="ctr"/>
+            <a:endParaRPr lang="en-150"/>
+          </a:p>
+        </p:txBody>
+      </p:sp>
+      <p:sp>
+        <p:nvSpPr>
+          <p:cNvPr id="9" name="TextBox 8">
+            <a:extLst>
+              <a:ext uri="{FF2B5EF4-FFF2-40B4-BE49-F238E27FC236}">
+                <a16:creationId xmlns:a16="http://schemas.microsoft.com/office/drawing/2014/main" id="{C4A505D0-0167-DE42-F11E-1D8999064CCB}"/>
+              </a:ext>
+            </a:extLst>
+          </p:cNvPr>
+          <p:cNvSpPr txBox="1"/>
+          <p:nvPr/>
+        </p:nvSpPr>
+        <p:spPr>
+          <a:xfrm>
+            <a:off x="4009489" y="3766546"/>
+            <a:ext cx="4253087" cy="1200329"/>
+          </a:xfrm>
+          <a:prstGeom prst="rect">
+            <a:avLst/>
+          </a:prstGeom>
+          <a:noFill/>
+          <a:ln>
+            <a:noFill/>
+          </a:ln>
+        </p:spPr>
+        <p:txBody>
+          <a:bodyPr wrap="none" rtlCol="0">
+            <a:spAutoFit/>
+            <a:scene3d>
+              <a:camera prst="orthographicFront"/>
+              <a:lightRig rig="threePt" dir="t"/>
+            </a:scene3d>
+            <a:sp3d extrusionH="38100">
+              <a:bevelT w="38100" h="38100"/>
+            </a:sp3d>
+          </a:bodyPr>
+          <a:lstStyle/>
+          <a:p>
+            <a:r>
+              <a:rPr lang="en-US" sz="7200" dirty="0">
+                <a:ln w="3175">
+                  <a:noFill/>
+                </a:ln>
+                <a:solidFill>
+                  <a:srgbClr val="242A9C"/>
+                </a:solidFill>
+                <a:latin typeface="Aafia" pitchFamily="50" charset="0"/>
+              </a:rPr>
+              <a:t>LaDe</a:t>
+            </a:r>
+            <a:r>
+              <a:rPr lang="en-US" sz="7200" dirty="0">
+                <a:ln w="3175">
+                  <a:noFill/>
+                </a:ln>
+                <a:solidFill>
+                  <a:srgbClr val="E101D1"/>
+                </a:solidFill>
+                <a:latin typeface="Aafia" pitchFamily="50" charset="0"/>
+              </a:rPr>
+              <a:t>RR</a:t>
+            </a:r>
+          </a:p>
+        </p:txBody>
+      </p:sp>
+    </p:spTree>
+    <p:extLst>
+      <p:ext uri="{BB962C8B-B14F-4D97-AF65-F5344CB8AC3E}">
+        <p14:creationId xmlns:p14="http://schemas.microsoft.com/office/powerpoint/2010/main" val="2087235503"/>
+      </p:ext>
+    </p:extLst>
+  </p:cSld>
+  <p:clrMapOvr>
+    <a:masterClrMapping/>
+  </p:clrMapOvr>
+</p:sld>
+</file>
+
+<file path=ppt/slides/slide12.xml><?xml version="1.0" encoding="utf-8"?>
+<p:sld xmlns:a="http://schemas.openxmlformats.org/drawingml/2006/main" xmlns:r="http://schemas.openxmlformats.org/officeDocument/2006/relationships" xmlns:p="http://schemas.openxmlformats.org/presentationml/2006/main" show="0">
+  <p:cSld>
+    <p:spTree>
+      <p:nvGrpSpPr>
+        <p:cNvPr id="1" name=""/>
+        <p:cNvGrpSpPr/>
+        <p:nvPr/>
+      </p:nvGrpSpPr>
+      <p:grpSpPr>
+        <a:xfrm>
+          <a:off x="0" y="0"/>
+          <a:ext cx="0" cy="0"/>
+          <a:chOff x="0" y="0"/>
+          <a:chExt cx="0" cy="0"/>
+        </a:xfrm>
+      </p:grpSpPr>
+      <p:grpSp>
+        <p:nvGrpSpPr>
+          <p:cNvPr id="9" name="Group 8">
+            <a:extLst>
+              <a:ext uri="{FF2B5EF4-FFF2-40B4-BE49-F238E27FC236}">
+                <a16:creationId xmlns:a16="http://schemas.microsoft.com/office/drawing/2014/main" id="{2590A2DE-16F5-44B0-79F7-D9518568AB64}"/>
+              </a:ext>
+            </a:extLst>
+          </p:cNvPr>
+          <p:cNvGrpSpPr/>
+          <p:nvPr/>
+        </p:nvGrpSpPr>
+        <p:grpSpPr>
+          <a:xfrm>
+            <a:off x="4519632" y="1987446"/>
+            <a:ext cx="3917629" cy="1286108"/>
+            <a:chOff x="4528506" y="1936845"/>
+            <a:chExt cx="4483316" cy="1471816"/>
+          </a:xfrm>
+        </p:grpSpPr>
+        <p:sp>
+          <p:nvSpPr>
+            <p:cNvPr id="6" name="Rectangle 5">
+              <a:extLst>
+                <a:ext uri="{FF2B5EF4-FFF2-40B4-BE49-F238E27FC236}">
+                  <a16:creationId xmlns:a16="http://schemas.microsoft.com/office/drawing/2014/main" id="{011E5DD6-E9CE-0E04-DAAC-92581C64AEF3}"/>
+                </a:ext>
+              </a:extLst>
+            </p:cNvPr>
+            <p:cNvSpPr/>
+            <p:nvPr/>
+          </p:nvSpPr>
+          <p:spPr>
+            <a:xfrm>
+              <a:off x="4528506" y="3087086"/>
+              <a:ext cx="1567494" cy="321575"/>
+            </a:xfrm>
+            <a:prstGeom prst="rect">
+              <a:avLst/>
+            </a:prstGeom>
+            <a:ln>
+              <a:noFill/>
+            </a:ln>
+          </p:spPr>
+          <p:style>
+            <a:lnRef idx="2">
+              <a:schemeClr val="accent1">
+                <a:shade val="15000"/>
+              </a:schemeClr>
+            </a:lnRef>
+            <a:fillRef idx="1">
+              <a:schemeClr val="accent1"/>
+            </a:fillRef>
+            <a:effectRef idx="0">
+              <a:schemeClr val="accent1"/>
+            </a:effectRef>
+            <a:fontRef idx="minor">
+              <a:schemeClr val="lt1"/>
+            </a:fontRef>
+          </p:style>
+          <p:txBody>
+            <a:bodyPr rtlCol="0" anchor="ctr"/>
+            <a:lstStyle/>
+            <a:p>
+              <a:pPr algn="ctr"/>
+              <a:endParaRPr lang="en-150"/>
+            </a:p>
+          </p:txBody>
+        </p:sp>
+        <p:sp>
+          <p:nvSpPr>
+            <p:cNvPr id="7" name="Rectangle 6">
+              <a:extLst>
+                <a:ext uri="{FF2B5EF4-FFF2-40B4-BE49-F238E27FC236}">
+                  <a16:creationId xmlns:a16="http://schemas.microsoft.com/office/drawing/2014/main" id="{4E011A50-3FA0-A8E8-8DF5-1CBB2DF4C4FE}"/>
+                </a:ext>
+              </a:extLst>
+            </p:cNvPr>
+            <p:cNvSpPr/>
+            <p:nvPr/>
+          </p:nvSpPr>
+          <p:spPr>
+            <a:xfrm>
+              <a:off x="5986419" y="2511965"/>
+              <a:ext cx="1567494" cy="321575"/>
+            </a:xfrm>
+            <a:prstGeom prst="rect">
+              <a:avLst/>
+            </a:prstGeom>
+            <a:ln>
+              <a:noFill/>
+            </a:ln>
+          </p:spPr>
+          <p:style>
+            <a:lnRef idx="2">
+              <a:schemeClr val="accent1">
+                <a:shade val="15000"/>
+              </a:schemeClr>
+            </a:lnRef>
+            <a:fillRef idx="1">
+              <a:schemeClr val="accent1"/>
+            </a:fillRef>
+            <a:effectRef idx="0">
+              <a:schemeClr val="accent1"/>
+            </a:effectRef>
+            <a:fontRef idx="minor">
+              <a:schemeClr val="lt1"/>
+            </a:fontRef>
+          </p:style>
+          <p:txBody>
+            <a:bodyPr rtlCol="0" anchor="ctr"/>
+            <a:lstStyle/>
+            <a:p>
+              <a:pPr algn="ctr"/>
+              <a:endParaRPr lang="en-150"/>
+            </a:p>
+          </p:txBody>
+        </p:sp>
+        <p:sp>
+          <p:nvSpPr>
+            <p:cNvPr id="8" name="Rectangle 7">
+              <a:extLst>
+                <a:ext uri="{FF2B5EF4-FFF2-40B4-BE49-F238E27FC236}">
+                  <a16:creationId xmlns:a16="http://schemas.microsoft.com/office/drawing/2014/main" id="{78B4BDD1-236D-438B-09EB-97CA895C3300}"/>
+                </a:ext>
+              </a:extLst>
+            </p:cNvPr>
+            <p:cNvSpPr/>
+            <p:nvPr/>
+          </p:nvSpPr>
+          <p:spPr>
+            <a:xfrm>
+              <a:off x="7444331" y="1936845"/>
+              <a:ext cx="1567491" cy="321575"/>
+            </a:xfrm>
+            <a:prstGeom prst="rect">
+              <a:avLst/>
+            </a:prstGeom>
+            <a:solidFill>
+              <a:schemeClr val="accent2"/>
+            </a:solidFill>
+            <a:ln>
+              <a:noFill/>
+            </a:ln>
+          </p:spPr>
+          <p:style>
+            <a:lnRef idx="2">
+              <a:schemeClr val="accent1">
+                <a:shade val="15000"/>
+              </a:schemeClr>
+            </a:lnRef>
+            <a:fillRef idx="1">
+              <a:schemeClr val="accent1"/>
+            </a:fillRef>
+            <a:effectRef idx="0">
+              <a:schemeClr val="accent1"/>
+            </a:effectRef>
+            <a:fontRef idx="minor">
+              <a:schemeClr val="lt1"/>
+            </a:fontRef>
+          </p:style>
+          <p:txBody>
+            <a:bodyPr rtlCol="0" anchor="ctr"/>
+            <a:lstStyle/>
+            <a:p>
+              <a:pPr algn="ctr"/>
+              <a:endParaRPr lang="en-150"/>
+            </a:p>
+          </p:txBody>
+        </p:sp>
+      </p:grpSp>
+      <p:sp>
+        <p:nvSpPr>
+          <p:cNvPr id="2" name="TextBox 1">
+            <a:extLst>
+              <a:ext uri="{FF2B5EF4-FFF2-40B4-BE49-F238E27FC236}">
+                <a16:creationId xmlns:a16="http://schemas.microsoft.com/office/drawing/2014/main" id="{5DF106CF-89D1-049C-3FD4-88578CB84BF1}"/>
+              </a:ext>
+            </a:extLst>
+          </p:cNvPr>
+          <p:cNvSpPr txBox="1"/>
+          <p:nvPr/>
+        </p:nvSpPr>
+        <p:spPr>
+          <a:xfrm>
+            <a:off x="4344360" y="3273553"/>
+            <a:ext cx="4253087" cy="1200329"/>
+          </a:xfrm>
+          <a:prstGeom prst="rect">
+            <a:avLst/>
+          </a:prstGeom>
+          <a:noFill/>
+        </p:spPr>
+        <p:txBody>
+          <a:bodyPr wrap="none" rtlCol="0">
+            <a:spAutoFit/>
+          </a:bodyPr>
+          <a:lstStyle/>
+          <a:p>
+            <a:r>
+              <a:rPr lang="en-US" sz="7200" dirty="0">
+                <a:solidFill>
+                  <a:srgbClr val="156082"/>
+                </a:solidFill>
+                <a:latin typeface="Aafia" pitchFamily="50" charset="0"/>
+              </a:rPr>
+              <a:t>LaDe</a:t>
+            </a:r>
+            <a:r>
+              <a:rPr lang="en-US" sz="7200" dirty="0">
+                <a:solidFill>
+                  <a:schemeClr val="accent2"/>
+                </a:solidFill>
+                <a:latin typeface="Aafia" pitchFamily="50" charset="0"/>
+              </a:rPr>
+              <a:t>RR</a:t>
+            </a:r>
+          </a:p>
+        </p:txBody>
+      </p:sp>
+    </p:spTree>
+    <p:extLst>
+      <p:ext uri="{BB962C8B-B14F-4D97-AF65-F5344CB8AC3E}">
+        <p14:creationId xmlns:p14="http://schemas.microsoft.com/office/powerpoint/2010/main" val="829168614"/>
+      </p:ext>
+    </p:extLst>
+  </p:cSld>
+  <p:clrMapOvr>
+    <a:masterClrMapping/>
+  </p:clrMapOvr>
+</p:sld>
+</file>
+
+<file path=ppt/slides/slide13.xml><?xml version="1.0" encoding="utf-8"?>
 <p:sld xmlns:a="http://schemas.openxmlformats.org/drawingml/2006/main" xmlns:r="http://schemas.openxmlformats.org/officeDocument/2006/relationships" xmlns:p="http://schemas.openxmlformats.org/presentationml/2006/main" show="0">
   <p:cSld>
     <p:spTree>
@@ -5198,7 +6488,7 @@
 </p:sld>
 </file>
 
-<file path=ppt/slides/slide11.xml><?xml version="1.0" encoding="utf-8"?>
+<file path=ppt/slides/slide14.xml><?xml version="1.0" encoding="utf-8"?>
 <p:sld xmlns:a="http://schemas.openxmlformats.org/drawingml/2006/main" xmlns:r="http://schemas.openxmlformats.org/officeDocument/2006/relationships" xmlns:p="http://schemas.openxmlformats.org/presentationml/2006/main" show="0">
   <p:cSld>
     <p:spTree>
@@ -5454,7 +6744,7 @@
 </p:sld>
 </file>
 
-<file path=ppt/slides/slide12.xml><?xml version="1.0" encoding="utf-8"?>
+<file path=ppt/slides/slide15.xml><?xml version="1.0" encoding="utf-8"?>
 <p:sld xmlns:a="http://schemas.openxmlformats.org/drawingml/2006/main" xmlns:r="http://schemas.openxmlformats.org/officeDocument/2006/relationships" xmlns:p="http://schemas.openxmlformats.org/presentationml/2006/main" show="0">
   <p:cSld>
     <p:spTree>
@@ -5710,7 +7000,7 @@
 </p:sld>
 </file>
 
-<file path=ppt/slides/slide13.xml><?xml version="1.0" encoding="utf-8"?>
+<file path=ppt/slides/slide16.xml><?xml version="1.0" encoding="utf-8"?>
 <p:sld xmlns:a="http://schemas.openxmlformats.org/drawingml/2006/main" xmlns:r="http://schemas.openxmlformats.org/officeDocument/2006/relationships" xmlns:p="http://schemas.openxmlformats.org/presentationml/2006/main" show="0">
   <p:cSld>
     <p:spTree>
@@ -5966,7 +7256,7 @@
 </p:sld>
 </file>
 
-<file path=ppt/slides/slide14.xml><?xml version="1.0" encoding="utf-8"?>
+<file path=ppt/slides/slide17.xml><?xml version="1.0" encoding="utf-8"?>
 <p:sld xmlns:a="http://schemas.openxmlformats.org/drawingml/2006/main" xmlns:r="http://schemas.openxmlformats.org/officeDocument/2006/relationships" xmlns:p="http://schemas.openxmlformats.org/presentationml/2006/main" show="0">
   <p:cSld>
     <p:spTree>
@@ -6228,6 +7518,4862 @@
   <p:cSld>
     <p:spTree>
       <p:nvGrpSpPr>
+        <p:cNvPr id="1" name="">
+          <a:extLst>
+            <a:ext uri="{FF2B5EF4-FFF2-40B4-BE49-F238E27FC236}">
+              <a16:creationId xmlns:a16="http://schemas.microsoft.com/office/drawing/2014/main" id="{80DF0422-E242-414C-AC75-1BC480A339EC}"/>
+            </a:ext>
+          </a:extLst>
+        </p:cNvPr>
+        <p:cNvGrpSpPr/>
+        <p:nvPr/>
+      </p:nvGrpSpPr>
+      <p:grpSpPr>
+        <a:xfrm>
+          <a:off x="0" y="0"/>
+          <a:ext cx="0" cy="0"/>
+          <a:chOff x="0" y="0"/>
+          <a:chExt cx="0" cy="0"/>
+        </a:xfrm>
+      </p:grpSpPr>
+      <p:sp>
+        <p:nvSpPr>
+          <p:cNvPr id="16" name="Rectangle 15">
+            <a:extLst>
+              <a:ext uri="{FF2B5EF4-FFF2-40B4-BE49-F238E27FC236}">
+                <a16:creationId xmlns:a16="http://schemas.microsoft.com/office/drawing/2014/main" id="{5555C9C5-9015-BE3E-9175-4AA255BAB7F3}"/>
+              </a:ext>
+            </a:extLst>
+          </p:cNvPr>
+          <p:cNvSpPr/>
+          <p:nvPr/>
+        </p:nvSpPr>
+        <p:spPr>
+          <a:xfrm>
+            <a:off x="0" y="0"/>
+            <a:ext cx="6096000" cy="6858000"/>
+          </a:xfrm>
+          <a:prstGeom prst="rect">
+            <a:avLst/>
+          </a:prstGeom>
+        </p:spPr>
+        <p:style>
+          <a:lnRef idx="2">
+            <a:schemeClr val="dk1">
+              <a:shade val="15000"/>
+            </a:schemeClr>
+          </a:lnRef>
+          <a:fillRef idx="1">
+            <a:schemeClr val="dk1"/>
+          </a:fillRef>
+          <a:effectRef idx="0">
+            <a:schemeClr val="dk1"/>
+          </a:effectRef>
+          <a:fontRef idx="minor">
+            <a:schemeClr val="lt1"/>
+          </a:fontRef>
+        </p:style>
+        <p:txBody>
+          <a:bodyPr rtlCol="0" anchor="ctr"/>
+          <a:lstStyle/>
+          <a:p>
+            <a:pPr algn="ctr"/>
+            <a:endParaRPr lang="en-US"/>
+          </a:p>
+        </p:txBody>
+      </p:sp>
+      <p:grpSp>
+        <p:nvGrpSpPr>
+          <p:cNvPr id="27" name="Group 26">
+            <a:extLst>
+              <a:ext uri="{FF2B5EF4-FFF2-40B4-BE49-F238E27FC236}">
+                <a16:creationId xmlns:a16="http://schemas.microsoft.com/office/drawing/2014/main" id="{D54601CF-FC22-468B-2BA2-9F1409B006F7}"/>
+              </a:ext>
+            </a:extLst>
+          </p:cNvPr>
+          <p:cNvGrpSpPr/>
+          <p:nvPr/>
+        </p:nvGrpSpPr>
+        <p:grpSpPr>
+          <a:xfrm>
+            <a:off x="6926632" y="4695891"/>
+            <a:ext cx="4513548" cy="1899023"/>
+            <a:chOff x="6986985" y="4577378"/>
+            <a:chExt cx="4513548" cy="1899023"/>
+          </a:xfrm>
+        </p:grpSpPr>
+        <p:sp>
+          <p:nvSpPr>
+            <p:cNvPr id="14" name="TextBox 13">
+              <a:extLst>
+                <a:ext uri="{FF2B5EF4-FFF2-40B4-BE49-F238E27FC236}">
+                  <a16:creationId xmlns:a16="http://schemas.microsoft.com/office/drawing/2014/main" id="{047EEC03-B9F1-86EC-6248-0E624D549A64}"/>
+                </a:ext>
+              </a:extLst>
+            </p:cNvPr>
+            <p:cNvSpPr txBox="1"/>
+            <p:nvPr/>
+          </p:nvSpPr>
+          <p:spPr>
+            <a:xfrm>
+              <a:off x="7088871" y="5645404"/>
+              <a:ext cx="4411662" cy="830997"/>
+            </a:xfrm>
+            <a:prstGeom prst="rect">
+              <a:avLst/>
+            </a:prstGeom>
+            <a:noFill/>
+            <a:ln>
+              <a:noFill/>
+            </a:ln>
+            <a:effectLst>
+              <a:outerShdw blurRad="44450" dist="27940" dir="5400000" algn="ctr">
+                <a:srgbClr val="000000">
+                  <a:alpha val="32000"/>
+                </a:srgbClr>
+              </a:outerShdw>
+            </a:effectLst>
+            <a:scene3d>
+              <a:camera prst="orthographicFront">
+                <a:rot lat="0" lon="0" rev="0"/>
+              </a:camera>
+              <a:lightRig rig="balanced" dir="t">
+                <a:rot lat="0" lon="0" rev="8700000"/>
+              </a:lightRig>
+            </a:scene3d>
+            <a:sp3d>
+              <a:bevelT w="190500" h="38100"/>
+            </a:sp3d>
+          </p:spPr>
+          <p:txBody>
+            <a:bodyPr wrap="square" lIns="0" tIns="0" rIns="0" bIns="0" rtlCol="0">
+              <a:spAutoFit/>
+            </a:bodyPr>
+            <a:lstStyle/>
+            <a:p>
+              <a:pPr algn="just"/>
+              <a:r>
+                <a:rPr lang="en-US" sz="5400" b="1" spc="780" dirty="0">
+                  <a:solidFill>
+                    <a:srgbClr val="B768A2"/>
+                  </a:solidFill>
+                  <a:latin typeface="Engravers MT" panose="02090707080505020304" pitchFamily="18" charset="0"/>
+                </a:rPr>
+                <a:t>Engine</a:t>
+              </a:r>
+            </a:p>
+          </p:txBody>
+        </p:sp>
+        <p:grpSp>
+          <p:nvGrpSpPr>
+            <p:cNvPr id="26" name="Group 25">
+              <a:extLst>
+                <a:ext uri="{FF2B5EF4-FFF2-40B4-BE49-F238E27FC236}">
+                  <a16:creationId xmlns:a16="http://schemas.microsoft.com/office/drawing/2014/main" id="{DB502D40-8DE2-86E3-D762-03A96FB95139}"/>
+                </a:ext>
+              </a:extLst>
+            </p:cNvPr>
+            <p:cNvGrpSpPr/>
+            <p:nvPr/>
+          </p:nvGrpSpPr>
+          <p:grpSpPr>
+            <a:xfrm>
+              <a:off x="6986985" y="4577378"/>
+              <a:ext cx="4253087" cy="1538135"/>
+              <a:chOff x="6986985" y="4577378"/>
+              <a:chExt cx="4253087" cy="1538135"/>
+            </a:xfrm>
+          </p:grpSpPr>
+          <p:sp>
+            <p:nvSpPr>
+              <p:cNvPr id="21" name="Rectangle 20">
+                <a:extLst>
+                  <a:ext uri="{FF2B5EF4-FFF2-40B4-BE49-F238E27FC236}">
+                    <a16:creationId xmlns:a16="http://schemas.microsoft.com/office/drawing/2014/main" id="{B7C08627-0A0F-61D2-0B11-A1381B0F57C1}"/>
+                  </a:ext>
+                </a:extLst>
+              </p:cNvPr>
+              <p:cNvSpPr/>
+              <p:nvPr/>
+            </p:nvSpPr>
+            <p:spPr>
+              <a:xfrm>
+                <a:off x="7114271" y="4876242"/>
+                <a:ext cx="1223963" cy="149432"/>
+              </a:xfrm>
+              <a:prstGeom prst="rect">
+                <a:avLst/>
+              </a:prstGeom>
+              <a:solidFill>
+                <a:schemeClr val="tx2">
+                  <a:lumMod val="50000"/>
+                  <a:lumOff val="50000"/>
+                </a:schemeClr>
+              </a:solidFill>
+              <a:ln w="3175">
+                <a:noFill/>
+              </a:ln>
+              <a:effectLst>
+                <a:outerShdw blurRad="57785" dist="33020" dir="3180000" algn="ctr">
+                  <a:srgbClr val="000000">
+                    <a:alpha val="30000"/>
+                  </a:srgbClr>
+                </a:outerShdw>
+              </a:effectLst>
+            </p:spPr>
+            <p:style>
+              <a:lnRef idx="2">
+                <a:schemeClr val="accent1">
+                  <a:shade val="15000"/>
+                </a:schemeClr>
+              </a:lnRef>
+              <a:fillRef idx="1">
+                <a:schemeClr val="accent1"/>
+              </a:fillRef>
+              <a:effectRef idx="0">
+                <a:schemeClr val="accent1"/>
+              </a:effectRef>
+              <a:fontRef idx="minor">
+                <a:schemeClr val="lt1"/>
+              </a:fontRef>
+            </p:style>
+            <p:txBody>
+              <a:bodyPr rtlCol="0" anchor="ctr"/>
+              <a:lstStyle/>
+              <a:p>
+                <a:pPr algn="ctr"/>
+                <a:endParaRPr lang="en-150">
+                  <a:ln w="3175">
+                    <a:solidFill>
+                      <a:schemeClr val="bg1">
+                        <a:lumMod val="95000"/>
+                      </a:schemeClr>
+                    </a:solidFill>
+                  </a:ln>
+                  <a:solidFill>
+                    <a:srgbClr val="1A1F71"/>
+                  </a:solidFill>
+                </a:endParaRPr>
+              </a:p>
+            </p:txBody>
+          </p:sp>
+          <p:sp>
+            <p:nvSpPr>
+              <p:cNvPr id="23" name="Rectangle 22">
+                <a:extLst>
+                  <a:ext uri="{FF2B5EF4-FFF2-40B4-BE49-F238E27FC236}">
+                    <a16:creationId xmlns:a16="http://schemas.microsoft.com/office/drawing/2014/main" id="{1CF3BD4C-174A-26A1-9529-41B9B2BFCB26}"/>
+                  </a:ext>
+                </a:extLst>
+              </p:cNvPr>
+              <p:cNvSpPr/>
+              <p:nvPr/>
+            </p:nvSpPr>
+            <p:spPr>
+              <a:xfrm>
+                <a:off x="8338234" y="4726810"/>
+                <a:ext cx="1368425" cy="149432"/>
+              </a:xfrm>
+              <a:prstGeom prst="rect">
+                <a:avLst/>
+              </a:prstGeom>
+              <a:solidFill>
+                <a:schemeClr val="tx2">
+                  <a:lumMod val="50000"/>
+                  <a:lumOff val="50000"/>
+                </a:schemeClr>
+              </a:solidFill>
+              <a:ln w="3175">
+                <a:noFill/>
+              </a:ln>
+              <a:effectLst>
+                <a:outerShdw blurRad="57785" dist="33020" dir="3180000" algn="ctr">
+                  <a:srgbClr val="000000">
+                    <a:alpha val="30000"/>
+                  </a:srgbClr>
+                </a:outerShdw>
+              </a:effectLst>
+            </p:spPr>
+            <p:style>
+              <a:lnRef idx="2">
+                <a:schemeClr val="accent1">
+                  <a:shade val="15000"/>
+                </a:schemeClr>
+              </a:lnRef>
+              <a:fillRef idx="1">
+                <a:schemeClr val="accent1"/>
+              </a:fillRef>
+              <a:effectRef idx="0">
+                <a:schemeClr val="accent1"/>
+              </a:effectRef>
+              <a:fontRef idx="minor">
+                <a:schemeClr val="lt1"/>
+              </a:fontRef>
+            </p:style>
+            <p:txBody>
+              <a:bodyPr rtlCol="0" anchor="ctr"/>
+              <a:lstStyle/>
+              <a:p>
+                <a:pPr algn="ctr"/>
+                <a:endParaRPr lang="en-150">
+                  <a:ln w="3175">
+                    <a:solidFill>
+                      <a:schemeClr val="bg1">
+                        <a:lumMod val="95000"/>
+                      </a:schemeClr>
+                    </a:solidFill>
+                  </a:ln>
+                  <a:solidFill>
+                    <a:srgbClr val="1A1F71"/>
+                  </a:solidFill>
+                </a:endParaRPr>
+              </a:p>
+            </p:txBody>
+          </p:sp>
+          <p:sp>
+            <p:nvSpPr>
+              <p:cNvPr id="24" name="TextBox 23">
+                <a:extLst>
+                  <a:ext uri="{FF2B5EF4-FFF2-40B4-BE49-F238E27FC236}">
+                    <a16:creationId xmlns:a16="http://schemas.microsoft.com/office/drawing/2014/main" id="{FE45AF6B-8CEE-7952-9BA9-129F5B637CC8}"/>
+                  </a:ext>
+                </a:extLst>
+              </p:cNvPr>
+              <p:cNvSpPr txBox="1"/>
+              <p:nvPr/>
+            </p:nvSpPr>
+            <p:spPr>
+              <a:xfrm>
+                <a:off x="6986985" y="4915184"/>
+                <a:ext cx="4253087" cy="1200329"/>
+              </a:xfrm>
+              <a:prstGeom prst="rect">
+                <a:avLst/>
+              </a:prstGeom>
+              <a:noFill/>
+              <a:ln>
+                <a:noFill/>
+              </a:ln>
+              <a:effectLst>
+                <a:outerShdw blurRad="57785" dist="33020" dir="3180000" algn="ctr">
+                  <a:srgbClr val="000000">
+                    <a:alpha val="30000"/>
+                  </a:srgbClr>
+                </a:outerShdw>
+              </a:effectLst>
+            </p:spPr>
+            <p:txBody>
+              <a:bodyPr wrap="none" rtlCol="0">
+                <a:spAutoFit/>
+                <a:sp3d extrusionH="38100">
+                  <a:bevelT w="38100" h="38100"/>
+                </a:sp3d>
+              </a:bodyPr>
+              <a:lstStyle/>
+              <a:p>
+                <a:r>
+                  <a:rPr lang="en-US" sz="7200" dirty="0">
+                    <a:ln w="3175">
+                      <a:noFill/>
+                    </a:ln>
+                    <a:solidFill>
+                      <a:schemeClr val="tx2">
+                        <a:lumMod val="50000"/>
+                        <a:lumOff val="50000"/>
+                      </a:schemeClr>
+                    </a:solidFill>
+                    <a:latin typeface="Aafia" pitchFamily="50" charset="0"/>
+                  </a:rPr>
+                  <a:t>LaDe</a:t>
+                </a:r>
+                <a:r>
+                  <a:rPr lang="en-US" sz="7200" dirty="0">
+                    <a:ln w="3175">
+                      <a:noFill/>
+                    </a:ln>
+                    <a:solidFill>
+                      <a:srgbClr val="FFD700"/>
+                    </a:solidFill>
+                    <a:latin typeface="Aafia" pitchFamily="50" charset="0"/>
+                  </a:rPr>
+                  <a:t>RR</a:t>
+                </a:r>
+              </a:p>
+            </p:txBody>
+          </p:sp>
+          <p:sp>
+            <p:nvSpPr>
+              <p:cNvPr id="25" name="Rectangle 24">
+                <a:extLst>
+                  <a:ext uri="{FF2B5EF4-FFF2-40B4-BE49-F238E27FC236}">
+                    <a16:creationId xmlns:a16="http://schemas.microsoft.com/office/drawing/2014/main" id="{6CE497AF-6BD3-666B-F4A8-A6660BE82178}"/>
+                  </a:ext>
+                </a:extLst>
+              </p:cNvPr>
+              <p:cNvSpPr/>
+              <p:nvPr/>
+            </p:nvSpPr>
+            <p:spPr>
+              <a:xfrm>
+                <a:off x="9706659" y="4577378"/>
+                <a:ext cx="1377950" cy="149432"/>
+              </a:xfrm>
+              <a:prstGeom prst="rect">
+                <a:avLst/>
+              </a:prstGeom>
+              <a:solidFill>
+                <a:srgbClr val="FFD700"/>
+              </a:solidFill>
+              <a:ln w="3175">
+                <a:noFill/>
+              </a:ln>
+              <a:effectLst>
+                <a:outerShdw blurRad="57785" dist="33020" dir="3180000" algn="ctr">
+                  <a:srgbClr val="000000">
+                    <a:alpha val="30000"/>
+                  </a:srgbClr>
+                </a:outerShdw>
+              </a:effectLst>
+            </p:spPr>
+            <p:style>
+              <a:lnRef idx="2">
+                <a:schemeClr val="accent1">
+                  <a:shade val="15000"/>
+                </a:schemeClr>
+              </a:lnRef>
+              <a:fillRef idx="1">
+                <a:schemeClr val="accent1"/>
+              </a:fillRef>
+              <a:effectRef idx="0">
+                <a:schemeClr val="accent1"/>
+              </a:effectRef>
+              <a:fontRef idx="minor">
+                <a:schemeClr val="lt1"/>
+              </a:fontRef>
+            </p:style>
+            <p:txBody>
+              <a:bodyPr rtlCol="0" anchor="ctr"/>
+              <a:lstStyle/>
+              <a:p>
+                <a:pPr algn="ctr"/>
+                <a:endParaRPr lang="en-150">
+                  <a:ln w="3175">
+                    <a:solidFill>
+                      <a:schemeClr val="bg1">
+                        <a:lumMod val="95000"/>
+                      </a:schemeClr>
+                    </a:solidFill>
+                  </a:ln>
+                  <a:solidFill>
+                    <a:srgbClr val="1A1F71"/>
+                  </a:solidFill>
+                </a:endParaRPr>
+              </a:p>
+            </p:txBody>
+          </p:sp>
+        </p:grpSp>
+      </p:grpSp>
+      <p:grpSp>
+        <p:nvGrpSpPr>
+          <p:cNvPr id="28" name="Group 27">
+            <a:extLst>
+              <a:ext uri="{FF2B5EF4-FFF2-40B4-BE49-F238E27FC236}">
+                <a16:creationId xmlns:a16="http://schemas.microsoft.com/office/drawing/2014/main" id="{CAA40191-0FD4-3835-AB35-697974A4F1EA}"/>
+              </a:ext>
+            </a:extLst>
+          </p:cNvPr>
+          <p:cNvGrpSpPr/>
+          <p:nvPr/>
+        </p:nvGrpSpPr>
+        <p:grpSpPr>
+          <a:xfrm>
+            <a:off x="6926632" y="2500154"/>
+            <a:ext cx="4513548" cy="1899023"/>
+            <a:chOff x="6986985" y="4577378"/>
+            <a:chExt cx="4513548" cy="1899023"/>
+          </a:xfrm>
+        </p:grpSpPr>
+        <p:sp>
+          <p:nvSpPr>
+            <p:cNvPr id="29" name="TextBox 28">
+              <a:extLst>
+                <a:ext uri="{FF2B5EF4-FFF2-40B4-BE49-F238E27FC236}">
+                  <a16:creationId xmlns:a16="http://schemas.microsoft.com/office/drawing/2014/main" id="{C80675D9-82DA-B390-FB50-F6C8B73285BA}"/>
+                </a:ext>
+              </a:extLst>
+            </p:cNvPr>
+            <p:cNvSpPr txBox="1"/>
+            <p:nvPr/>
+          </p:nvSpPr>
+          <p:spPr>
+            <a:xfrm>
+              <a:off x="7088871" y="5645404"/>
+              <a:ext cx="4411662" cy="830997"/>
+            </a:xfrm>
+            <a:prstGeom prst="rect">
+              <a:avLst/>
+            </a:prstGeom>
+            <a:noFill/>
+            <a:ln>
+              <a:noFill/>
+            </a:ln>
+            <a:effectLst>
+              <a:outerShdw blurRad="44450" dist="27940" dir="5400000" algn="ctr">
+                <a:srgbClr val="000000">
+                  <a:alpha val="32000"/>
+                </a:srgbClr>
+              </a:outerShdw>
+            </a:effectLst>
+            <a:scene3d>
+              <a:camera prst="orthographicFront">
+                <a:rot lat="0" lon="0" rev="0"/>
+              </a:camera>
+              <a:lightRig rig="balanced" dir="t">
+                <a:rot lat="0" lon="0" rev="8700000"/>
+              </a:lightRig>
+            </a:scene3d>
+            <a:sp3d>
+              <a:bevelT w="190500" h="38100"/>
+            </a:sp3d>
+          </p:spPr>
+          <p:txBody>
+            <a:bodyPr wrap="square" lIns="0" tIns="0" rIns="0" bIns="0" rtlCol="0">
+              <a:spAutoFit/>
+            </a:bodyPr>
+            <a:lstStyle/>
+            <a:p>
+              <a:pPr algn="just"/>
+              <a:r>
+                <a:rPr lang="en-US" sz="5400" b="1" spc="780" dirty="0">
+                  <a:solidFill>
+                    <a:srgbClr val="5C946E"/>
+                  </a:solidFill>
+                  <a:latin typeface="Engravers MT" panose="02090707080505020304" pitchFamily="18" charset="0"/>
+                </a:rPr>
+                <a:t>Engine</a:t>
+              </a:r>
+            </a:p>
+          </p:txBody>
+        </p:sp>
+        <p:grpSp>
+          <p:nvGrpSpPr>
+            <p:cNvPr id="30" name="Group 29">
+              <a:extLst>
+                <a:ext uri="{FF2B5EF4-FFF2-40B4-BE49-F238E27FC236}">
+                  <a16:creationId xmlns:a16="http://schemas.microsoft.com/office/drawing/2014/main" id="{7E5DA9AA-768E-89A9-C4D0-CB34DEBA10C0}"/>
+                </a:ext>
+              </a:extLst>
+            </p:cNvPr>
+            <p:cNvGrpSpPr/>
+            <p:nvPr/>
+          </p:nvGrpSpPr>
+          <p:grpSpPr>
+            <a:xfrm>
+              <a:off x="6986985" y="4577378"/>
+              <a:ext cx="4253087" cy="1538135"/>
+              <a:chOff x="6986985" y="4577378"/>
+              <a:chExt cx="4253087" cy="1538135"/>
+            </a:xfrm>
+          </p:grpSpPr>
+          <p:sp>
+            <p:nvSpPr>
+              <p:cNvPr id="31" name="Rectangle 30">
+                <a:extLst>
+                  <a:ext uri="{FF2B5EF4-FFF2-40B4-BE49-F238E27FC236}">
+                    <a16:creationId xmlns:a16="http://schemas.microsoft.com/office/drawing/2014/main" id="{E7F75135-24E9-0BF3-A811-7B2740EB87EB}"/>
+                  </a:ext>
+                </a:extLst>
+              </p:cNvPr>
+              <p:cNvSpPr/>
+              <p:nvPr/>
+            </p:nvSpPr>
+            <p:spPr>
+              <a:xfrm>
+                <a:off x="7114271" y="4876242"/>
+                <a:ext cx="1223963" cy="149432"/>
+              </a:xfrm>
+              <a:prstGeom prst="rect">
+                <a:avLst/>
+              </a:prstGeom>
+              <a:solidFill>
+                <a:schemeClr val="tx2">
+                  <a:lumMod val="50000"/>
+                  <a:lumOff val="50000"/>
+                </a:schemeClr>
+              </a:solidFill>
+              <a:ln w="3175">
+                <a:noFill/>
+              </a:ln>
+              <a:effectLst>
+                <a:outerShdw blurRad="57785" dist="33020" dir="3180000" algn="ctr">
+                  <a:srgbClr val="000000">
+                    <a:alpha val="30000"/>
+                  </a:srgbClr>
+                </a:outerShdw>
+              </a:effectLst>
+            </p:spPr>
+            <p:style>
+              <a:lnRef idx="2">
+                <a:schemeClr val="accent1">
+                  <a:shade val="15000"/>
+                </a:schemeClr>
+              </a:lnRef>
+              <a:fillRef idx="1">
+                <a:schemeClr val="accent1"/>
+              </a:fillRef>
+              <a:effectRef idx="0">
+                <a:schemeClr val="accent1"/>
+              </a:effectRef>
+              <a:fontRef idx="minor">
+                <a:schemeClr val="lt1"/>
+              </a:fontRef>
+            </p:style>
+            <p:txBody>
+              <a:bodyPr rtlCol="0" anchor="ctr"/>
+              <a:lstStyle/>
+              <a:p>
+                <a:pPr algn="ctr"/>
+                <a:endParaRPr lang="en-150">
+                  <a:ln w="3175">
+                    <a:solidFill>
+                      <a:schemeClr val="bg1">
+                        <a:lumMod val="95000"/>
+                      </a:schemeClr>
+                    </a:solidFill>
+                  </a:ln>
+                  <a:solidFill>
+                    <a:srgbClr val="1A1F71"/>
+                  </a:solidFill>
+                </a:endParaRPr>
+              </a:p>
+            </p:txBody>
+          </p:sp>
+          <p:sp>
+            <p:nvSpPr>
+              <p:cNvPr id="32" name="Rectangle 31">
+                <a:extLst>
+                  <a:ext uri="{FF2B5EF4-FFF2-40B4-BE49-F238E27FC236}">
+                    <a16:creationId xmlns:a16="http://schemas.microsoft.com/office/drawing/2014/main" id="{CFD12898-451D-350D-CD40-14C8053238BB}"/>
+                  </a:ext>
+                </a:extLst>
+              </p:cNvPr>
+              <p:cNvSpPr/>
+              <p:nvPr/>
+            </p:nvSpPr>
+            <p:spPr>
+              <a:xfrm>
+                <a:off x="8338234" y="4726810"/>
+                <a:ext cx="1368425" cy="149432"/>
+              </a:xfrm>
+              <a:prstGeom prst="rect">
+                <a:avLst/>
+              </a:prstGeom>
+              <a:solidFill>
+                <a:schemeClr val="tx2">
+                  <a:lumMod val="50000"/>
+                  <a:lumOff val="50000"/>
+                </a:schemeClr>
+              </a:solidFill>
+              <a:ln w="3175">
+                <a:noFill/>
+              </a:ln>
+              <a:effectLst>
+                <a:outerShdw blurRad="57785" dist="33020" dir="3180000" algn="ctr">
+                  <a:srgbClr val="000000">
+                    <a:alpha val="30000"/>
+                  </a:srgbClr>
+                </a:outerShdw>
+              </a:effectLst>
+            </p:spPr>
+            <p:style>
+              <a:lnRef idx="2">
+                <a:schemeClr val="accent1">
+                  <a:shade val="15000"/>
+                </a:schemeClr>
+              </a:lnRef>
+              <a:fillRef idx="1">
+                <a:schemeClr val="accent1"/>
+              </a:fillRef>
+              <a:effectRef idx="0">
+                <a:schemeClr val="accent1"/>
+              </a:effectRef>
+              <a:fontRef idx="minor">
+                <a:schemeClr val="lt1"/>
+              </a:fontRef>
+            </p:style>
+            <p:txBody>
+              <a:bodyPr rtlCol="0" anchor="ctr"/>
+              <a:lstStyle/>
+              <a:p>
+                <a:pPr algn="ctr"/>
+                <a:endParaRPr lang="en-150">
+                  <a:ln w="3175">
+                    <a:solidFill>
+                      <a:schemeClr val="bg1">
+                        <a:lumMod val="95000"/>
+                      </a:schemeClr>
+                    </a:solidFill>
+                  </a:ln>
+                  <a:solidFill>
+                    <a:srgbClr val="1A1F71"/>
+                  </a:solidFill>
+                </a:endParaRPr>
+              </a:p>
+            </p:txBody>
+          </p:sp>
+          <p:sp>
+            <p:nvSpPr>
+              <p:cNvPr id="33" name="TextBox 32">
+                <a:extLst>
+                  <a:ext uri="{FF2B5EF4-FFF2-40B4-BE49-F238E27FC236}">
+                    <a16:creationId xmlns:a16="http://schemas.microsoft.com/office/drawing/2014/main" id="{F578BE5A-8CCB-45C7-E339-C44BDC4DDA7E}"/>
+                  </a:ext>
+                </a:extLst>
+              </p:cNvPr>
+              <p:cNvSpPr txBox="1"/>
+              <p:nvPr/>
+            </p:nvSpPr>
+            <p:spPr>
+              <a:xfrm>
+                <a:off x="6986985" y="4915184"/>
+                <a:ext cx="4253087" cy="1200329"/>
+              </a:xfrm>
+              <a:prstGeom prst="rect">
+                <a:avLst/>
+              </a:prstGeom>
+              <a:noFill/>
+              <a:ln>
+                <a:noFill/>
+              </a:ln>
+              <a:effectLst>
+                <a:outerShdw blurRad="57785" dist="33020" dir="3180000" algn="ctr">
+                  <a:srgbClr val="000000">
+                    <a:alpha val="30000"/>
+                  </a:srgbClr>
+                </a:outerShdw>
+              </a:effectLst>
+            </p:spPr>
+            <p:txBody>
+              <a:bodyPr wrap="none" rtlCol="0">
+                <a:spAutoFit/>
+                <a:sp3d extrusionH="38100">
+                  <a:bevelT w="38100" h="38100"/>
+                </a:sp3d>
+              </a:bodyPr>
+              <a:lstStyle/>
+              <a:p>
+                <a:r>
+                  <a:rPr lang="en-US" sz="7200" dirty="0">
+                    <a:ln w="3175">
+                      <a:noFill/>
+                    </a:ln>
+                    <a:solidFill>
+                      <a:schemeClr val="tx2">
+                        <a:lumMod val="50000"/>
+                        <a:lumOff val="50000"/>
+                      </a:schemeClr>
+                    </a:solidFill>
+                    <a:latin typeface="Aafia" pitchFamily="50" charset="0"/>
+                  </a:rPr>
+                  <a:t>LaDe</a:t>
+                </a:r>
+                <a:r>
+                  <a:rPr lang="en-US" sz="7200" dirty="0">
+                    <a:ln w="3175">
+                      <a:noFill/>
+                    </a:ln>
+                    <a:solidFill>
+                      <a:srgbClr val="FFD700"/>
+                    </a:solidFill>
+                    <a:latin typeface="Aafia" pitchFamily="50" charset="0"/>
+                  </a:rPr>
+                  <a:t>RR</a:t>
+                </a:r>
+              </a:p>
+            </p:txBody>
+          </p:sp>
+          <p:sp>
+            <p:nvSpPr>
+              <p:cNvPr id="34" name="Rectangle 33">
+                <a:extLst>
+                  <a:ext uri="{FF2B5EF4-FFF2-40B4-BE49-F238E27FC236}">
+                    <a16:creationId xmlns:a16="http://schemas.microsoft.com/office/drawing/2014/main" id="{E83F5802-3D0F-551E-9BFC-0821CE1C42D1}"/>
+                  </a:ext>
+                </a:extLst>
+              </p:cNvPr>
+              <p:cNvSpPr/>
+              <p:nvPr/>
+            </p:nvSpPr>
+            <p:spPr>
+              <a:xfrm>
+                <a:off x="9706659" y="4577378"/>
+                <a:ext cx="1377950" cy="149432"/>
+              </a:xfrm>
+              <a:prstGeom prst="rect">
+                <a:avLst/>
+              </a:prstGeom>
+              <a:solidFill>
+                <a:srgbClr val="FFD700"/>
+              </a:solidFill>
+              <a:ln w="3175">
+                <a:noFill/>
+              </a:ln>
+              <a:effectLst>
+                <a:outerShdw blurRad="57785" dist="33020" dir="3180000" algn="ctr">
+                  <a:srgbClr val="000000">
+                    <a:alpha val="30000"/>
+                  </a:srgbClr>
+                </a:outerShdw>
+              </a:effectLst>
+            </p:spPr>
+            <p:style>
+              <a:lnRef idx="2">
+                <a:schemeClr val="accent1">
+                  <a:shade val="15000"/>
+                </a:schemeClr>
+              </a:lnRef>
+              <a:fillRef idx="1">
+                <a:schemeClr val="accent1"/>
+              </a:fillRef>
+              <a:effectRef idx="0">
+                <a:schemeClr val="accent1"/>
+              </a:effectRef>
+              <a:fontRef idx="minor">
+                <a:schemeClr val="lt1"/>
+              </a:fontRef>
+            </p:style>
+            <p:txBody>
+              <a:bodyPr rtlCol="0" anchor="ctr"/>
+              <a:lstStyle/>
+              <a:p>
+                <a:pPr algn="ctr"/>
+                <a:endParaRPr lang="en-150">
+                  <a:ln w="3175">
+                    <a:solidFill>
+                      <a:schemeClr val="bg1">
+                        <a:lumMod val="95000"/>
+                      </a:schemeClr>
+                    </a:solidFill>
+                  </a:ln>
+                  <a:solidFill>
+                    <a:srgbClr val="1A1F71"/>
+                  </a:solidFill>
+                </a:endParaRPr>
+              </a:p>
+            </p:txBody>
+          </p:sp>
+        </p:grpSp>
+      </p:grpSp>
+      <p:grpSp>
+        <p:nvGrpSpPr>
+          <p:cNvPr id="35" name="Group 34">
+            <a:extLst>
+              <a:ext uri="{FF2B5EF4-FFF2-40B4-BE49-F238E27FC236}">
+                <a16:creationId xmlns:a16="http://schemas.microsoft.com/office/drawing/2014/main" id="{ABC6F37A-DE74-F278-4D34-335E9F074F26}"/>
+              </a:ext>
+            </a:extLst>
+          </p:cNvPr>
+          <p:cNvGrpSpPr/>
+          <p:nvPr/>
+        </p:nvGrpSpPr>
+        <p:grpSpPr>
+          <a:xfrm>
+            <a:off x="6926632" y="304416"/>
+            <a:ext cx="4513548" cy="1899023"/>
+            <a:chOff x="6986985" y="4577378"/>
+            <a:chExt cx="4513548" cy="1899023"/>
+          </a:xfrm>
+        </p:grpSpPr>
+        <p:sp>
+          <p:nvSpPr>
+            <p:cNvPr id="36" name="TextBox 35">
+              <a:extLst>
+                <a:ext uri="{FF2B5EF4-FFF2-40B4-BE49-F238E27FC236}">
+                  <a16:creationId xmlns:a16="http://schemas.microsoft.com/office/drawing/2014/main" id="{FEFF24BA-532E-DF35-CD95-CC42DAC8A118}"/>
+                </a:ext>
+              </a:extLst>
+            </p:cNvPr>
+            <p:cNvSpPr txBox="1"/>
+            <p:nvPr/>
+          </p:nvSpPr>
+          <p:spPr>
+            <a:xfrm>
+              <a:off x="7088871" y="5645404"/>
+              <a:ext cx="4411662" cy="830997"/>
+            </a:xfrm>
+            <a:prstGeom prst="rect">
+              <a:avLst/>
+            </a:prstGeom>
+            <a:noFill/>
+            <a:ln>
+              <a:noFill/>
+            </a:ln>
+            <a:effectLst>
+              <a:outerShdw blurRad="44450" dist="27940" dir="5400000" algn="ctr">
+                <a:srgbClr val="000000">
+                  <a:alpha val="32000"/>
+                </a:srgbClr>
+              </a:outerShdw>
+            </a:effectLst>
+            <a:scene3d>
+              <a:camera prst="orthographicFront">
+                <a:rot lat="0" lon="0" rev="0"/>
+              </a:camera>
+              <a:lightRig rig="balanced" dir="t">
+                <a:rot lat="0" lon="0" rev="8700000"/>
+              </a:lightRig>
+            </a:scene3d>
+            <a:sp3d>
+              <a:bevelT w="190500" h="38100"/>
+            </a:sp3d>
+          </p:spPr>
+          <p:txBody>
+            <a:bodyPr wrap="square" lIns="0" tIns="0" rIns="0" bIns="0" rtlCol="0">
+              <a:spAutoFit/>
+            </a:bodyPr>
+            <a:lstStyle/>
+            <a:p>
+              <a:pPr algn="just"/>
+              <a:r>
+                <a:rPr lang="en-US" sz="5400" b="1" spc="780" dirty="0">
+                  <a:solidFill>
+                    <a:srgbClr val="E04F39"/>
+                  </a:solidFill>
+                  <a:latin typeface="Engravers MT" panose="02090707080505020304" pitchFamily="18" charset="0"/>
+                </a:rPr>
+                <a:t>Engine</a:t>
+              </a:r>
+            </a:p>
+          </p:txBody>
+        </p:sp>
+        <p:grpSp>
+          <p:nvGrpSpPr>
+            <p:cNvPr id="37" name="Group 36">
+              <a:extLst>
+                <a:ext uri="{FF2B5EF4-FFF2-40B4-BE49-F238E27FC236}">
+                  <a16:creationId xmlns:a16="http://schemas.microsoft.com/office/drawing/2014/main" id="{7E99F900-01F2-87A1-4D48-9FFD17AC4003}"/>
+                </a:ext>
+              </a:extLst>
+            </p:cNvPr>
+            <p:cNvGrpSpPr/>
+            <p:nvPr/>
+          </p:nvGrpSpPr>
+          <p:grpSpPr>
+            <a:xfrm>
+              <a:off x="6986985" y="4577378"/>
+              <a:ext cx="4253087" cy="1538135"/>
+              <a:chOff x="6986985" y="4577378"/>
+              <a:chExt cx="4253087" cy="1538135"/>
+            </a:xfrm>
+          </p:grpSpPr>
+          <p:sp>
+            <p:nvSpPr>
+              <p:cNvPr id="38" name="Rectangle 37">
+                <a:extLst>
+                  <a:ext uri="{FF2B5EF4-FFF2-40B4-BE49-F238E27FC236}">
+                    <a16:creationId xmlns:a16="http://schemas.microsoft.com/office/drawing/2014/main" id="{44E34D1A-CFA8-00D3-08A3-CBB060D72B18}"/>
+                  </a:ext>
+                </a:extLst>
+              </p:cNvPr>
+              <p:cNvSpPr/>
+              <p:nvPr/>
+            </p:nvSpPr>
+            <p:spPr>
+              <a:xfrm>
+                <a:off x="7114271" y="4876242"/>
+                <a:ext cx="1223963" cy="149432"/>
+              </a:xfrm>
+              <a:prstGeom prst="rect">
+                <a:avLst/>
+              </a:prstGeom>
+              <a:solidFill>
+                <a:schemeClr val="tx2">
+                  <a:lumMod val="50000"/>
+                  <a:lumOff val="50000"/>
+                </a:schemeClr>
+              </a:solidFill>
+              <a:ln w="3175">
+                <a:noFill/>
+              </a:ln>
+              <a:effectLst>
+                <a:outerShdw blurRad="57785" dist="33020" dir="3180000" algn="ctr">
+                  <a:srgbClr val="000000">
+                    <a:alpha val="30000"/>
+                  </a:srgbClr>
+                </a:outerShdw>
+              </a:effectLst>
+            </p:spPr>
+            <p:style>
+              <a:lnRef idx="2">
+                <a:schemeClr val="accent1">
+                  <a:shade val="15000"/>
+                </a:schemeClr>
+              </a:lnRef>
+              <a:fillRef idx="1">
+                <a:schemeClr val="accent1"/>
+              </a:fillRef>
+              <a:effectRef idx="0">
+                <a:schemeClr val="accent1"/>
+              </a:effectRef>
+              <a:fontRef idx="minor">
+                <a:schemeClr val="lt1"/>
+              </a:fontRef>
+            </p:style>
+            <p:txBody>
+              <a:bodyPr rtlCol="0" anchor="ctr"/>
+              <a:lstStyle/>
+              <a:p>
+                <a:pPr algn="ctr"/>
+                <a:endParaRPr lang="en-150">
+                  <a:ln w="3175">
+                    <a:solidFill>
+                      <a:schemeClr val="bg1">
+                        <a:lumMod val="95000"/>
+                      </a:schemeClr>
+                    </a:solidFill>
+                  </a:ln>
+                  <a:solidFill>
+                    <a:srgbClr val="1A1F71"/>
+                  </a:solidFill>
+                </a:endParaRPr>
+              </a:p>
+            </p:txBody>
+          </p:sp>
+          <p:sp>
+            <p:nvSpPr>
+              <p:cNvPr id="39" name="Rectangle 38">
+                <a:extLst>
+                  <a:ext uri="{FF2B5EF4-FFF2-40B4-BE49-F238E27FC236}">
+                    <a16:creationId xmlns:a16="http://schemas.microsoft.com/office/drawing/2014/main" id="{0D9B31FF-1E56-980E-8136-C20C4491D0C8}"/>
+                  </a:ext>
+                </a:extLst>
+              </p:cNvPr>
+              <p:cNvSpPr/>
+              <p:nvPr/>
+            </p:nvSpPr>
+            <p:spPr>
+              <a:xfrm>
+                <a:off x="8338234" y="4726810"/>
+                <a:ext cx="1368425" cy="149432"/>
+              </a:xfrm>
+              <a:prstGeom prst="rect">
+                <a:avLst/>
+              </a:prstGeom>
+              <a:solidFill>
+                <a:schemeClr val="tx2">
+                  <a:lumMod val="50000"/>
+                  <a:lumOff val="50000"/>
+                </a:schemeClr>
+              </a:solidFill>
+              <a:ln w="3175">
+                <a:noFill/>
+              </a:ln>
+              <a:effectLst>
+                <a:outerShdw blurRad="57785" dist="33020" dir="3180000" algn="ctr">
+                  <a:srgbClr val="000000">
+                    <a:alpha val="30000"/>
+                  </a:srgbClr>
+                </a:outerShdw>
+              </a:effectLst>
+            </p:spPr>
+            <p:style>
+              <a:lnRef idx="2">
+                <a:schemeClr val="accent1">
+                  <a:shade val="15000"/>
+                </a:schemeClr>
+              </a:lnRef>
+              <a:fillRef idx="1">
+                <a:schemeClr val="accent1"/>
+              </a:fillRef>
+              <a:effectRef idx="0">
+                <a:schemeClr val="accent1"/>
+              </a:effectRef>
+              <a:fontRef idx="minor">
+                <a:schemeClr val="lt1"/>
+              </a:fontRef>
+            </p:style>
+            <p:txBody>
+              <a:bodyPr rtlCol="0" anchor="ctr"/>
+              <a:lstStyle/>
+              <a:p>
+                <a:pPr algn="ctr"/>
+                <a:endParaRPr lang="en-150">
+                  <a:ln w="3175">
+                    <a:solidFill>
+                      <a:schemeClr val="bg1">
+                        <a:lumMod val="95000"/>
+                      </a:schemeClr>
+                    </a:solidFill>
+                  </a:ln>
+                  <a:solidFill>
+                    <a:srgbClr val="1A1F71"/>
+                  </a:solidFill>
+                </a:endParaRPr>
+              </a:p>
+            </p:txBody>
+          </p:sp>
+          <p:sp>
+            <p:nvSpPr>
+              <p:cNvPr id="40" name="TextBox 39">
+                <a:extLst>
+                  <a:ext uri="{FF2B5EF4-FFF2-40B4-BE49-F238E27FC236}">
+                    <a16:creationId xmlns:a16="http://schemas.microsoft.com/office/drawing/2014/main" id="{C8B4811D-D638-72FD-B34A-2078113FF2CE}"/>
+                  </a:ext>
+                </a:extLst>
+              </p:cNvPr>
+              <p:cNvSpPr txBox="1"/>
+              <p:nvPr/>
+            </p:nvSpPr>
+            <p:spPr>
+              <a:xfrm>
+                <a:off x="6986985" y="4915184"/>
+                <a:ext cx="4253087" cy="1200329"/>
+              </a:xfrm>
+              <a:prstGeom prst="rect">
+                <a:avLst/>
+              </a:prstGeom>
+              <a:noFill/>
+              <a:ln>
+                <a:noFill/>
+              </a:ln>
+              <a:effectLst>
+                <a:outerShdw blurRad="57785" dist="33020" dir="3180000" algn="ctr">
+                  <a:srgbClr val="000000">
+                    <a:alpha val="30000"/>
+                  </a:srgbClr>
+                </a:outerShdw>
+              </a:effectLst>
+            </p:spPr>
+            <p:txBody>
+              <a:bodyPr wrap="none" rtlCol="0">
+                <a:spAutoFit/>
+                <a:sp3d extrusionH="38100">
+                  <a:bevelT w="38100" h="38100"/>
+                </a:sp3d>
+              </a:bodyPr>
+              <a:lstStyle/>
+              <a:p>
+                <a:r>
+                  <a:rPr lang="en-US" sz="7200" dirty="0">
+                    <a:ln w="3175">
+                      <a:noFill/>
+                    </a:ln>
+                    <a:solidFill>
+                      <a:schemeClr val="tx2">
+                        <a:lumMod val="50000"/>
+                        <a:lumOff val="50000"/>
+                      </a:schemeClr>
+                    </a:solidFill>
+                    <a:latin typeface="Aafia" pitchFamily="50" charset="0"/>
+                  </a:rPr>
+                  <a:t>LaDe</a:t>
+                </a:r>
+                <a:r>
+                  <a:rPr lang="en-US" sz="7200" dirty="0">
+                    <a:ln w="3175">
+                      <a:noFill/>
+                    </a:ln>
+                    <a:solidFill>
+                      <a:srgbClr val="FFD700"/>
+                    </a:solidFill>
+                    <a:latin typeface="Aafia" pitchFamily="50" charset="0"/>
+                  </a:rPr>
+                  <a:t>RR</a:t>
+                </a:r>
+              </a:p>
+            </p:txBody>
+          </p:sp>
+          <p:sp>
+            <p:nvSpPr>
+              <p:cNvPr id="41" name="Rectangle 40">
+                <a:extLst>
+                  <a:ext uri="{FF2B5EF4-FFF2-40B4-BE49-F238E27FC236}">
+                    <a16:creationId xmlns:a16="http://schemas.microsoft.com/office/drawing/2014/main" id="{5152D457-C42D-BAC6-14C5-BFF1E9321B8B}"/>
+                  </a:ext>
+                </a:extLst>
+              </p:cNvPr>
+              <p:cNvSpPr/>
+              <p:nvPr/>
+            </p:nvSpPr>
+            <p:spPr>
+              <a:xfrm>
+                <a:off x="9706659" y="4577378"/>
+                <a:ext cx="1377950" cy="149432"/>
+              </a:xfrm>
+              <a:prstGeom prst="rect">
+                <a:avLst/>
+              </a:prstGeom>
+              <a:solidFill>
+                <a:srgbClr val="FFD700"/>
+              </a:solidFill>
+              <a:ln w="3175">
+                <a:noFill/>
+              </a:ln>
+              <a:effectLst>
+                <a:outerShdw blurRad="57785" dist="33020" dir="3180000" algn="ctr">
+                  <a:srgbClr val="000000">
+                    <a:alpha val="30000"/>
+                  </a:srgbClr>
+                </a:outerShdw>
+              </a:effectLst>
+            </p:spPr>
+            <p:style>
+              <a:lnRef idx="2">
+                <a:schemeClr val="accent1">
+                  <a:shade val="15000"/>
+                </a:schemeClr>
+              </a:lnRef>
+              <a:fillRef idx="1">
+                <a:schemeClr val="accent1"/>
+              </a:fillRef>
+              <a:effectRef idx="0">
+                <a:schemeClr val="accent1"/>
+              </a:effectRef>
+              <a:fontRef idx="minor">
+                <a:schemeClr val="lt1"/>
+              </a:fontRef>
+            </p:style>
+            <p:txBody>
+              <a:bodyPr rtlCol="0" anchor="ctr"/>
+              <a:lstStyle/>
+              <a:p>
+                <a:pPr algn="ctr"/>
+                <a:endParaRPr lang="en-150">
+                  <a:ln w="3175">
+                    <a:solidFill>
+                      <a:schemeClr val="bg1">
+                        <a:lumMod val="95000"/>
+                      </a:schemeClr>
+                    </a:solidFill>
+                  </a:ln>
+                  <a:solidFill>
+                    <a:srgbClr val="1A1F71"/>
+                  </a:solidFill>
+                </a:endParaRPr>
+              </a:p>
+            </p:txBody>
+          </p:sp>
+        </p:grpSp>
+      </p:grpSp>
+      <p:grpSp>
+        <p:nvGrpSpPr>
+          <p:cNvPr id="2" name="Group 1">
+            <a:extLst>
+              <a:ext uri="{FF2B5EF4-FFF2-40B4-BE49-F238E27FC236}">
+                <a16:creationId xmlns:a16="http://schemas.microsoft.com/office/drawing/2014/main" id="{828BA5FD-88FA-1166-D458-2684A6D4FBF0}"/>
+              </a:ext>
+            </a:extLst>
+          </p:cNvPr>
+          <p:cNvGrpSpPr/>
+          <p:nvPr/>
+        </p:nvGrpSpPr>
+        <p:grpSpPr>
+          <a:xfrm>
+            <a:off x="781416" y="4695891"/>
+            <a:ext cx="4513548" cy="1899023"/>
+            <a:chOff x="6986985" y="4577378"/>
+            <a:chExt cx="4513548" cy="1899023"/>
+          </a:xfrm>
+        </p:grpSpPr>
+        <p:sp>
+          <p:nvSpPr>
+            <p:cNvPr id="3" name="TextBox 2">
+              <a:extLst>
+                <a:ext uri="{FF2B5EF4-FFF2-40B4-BE49-F238E27FC236}">
+                  <a16:creationId xmlns:a16="http://schemas.microsoft.com/office/drawing/2014/main" id="{D6888A3C-AAC9-6F8B-A13E-E55416C89E4F}"/>
+                </a:ext>
+              </a:extLst>
+            </p:cNvPr>
+            <p:cNvSpPr txBox="1"/>
+            <p:nvPr/>
+          </p:nvSpPr>
+          <p:spPr>
+            <a:xfrm>
+              <a:off x="7088871" y="5645404"/>
+              <a:ext cx="4411662" cy="830997"/>
+            </a:xfrm>
+            <a:prstGeom prst="rect">
+              <a:avLst/>
+            </a:prstGeom>
+            <a:noFill/>
+            <a:ln>
+              <a:noFill/>
+            </a:ln>
+            <a:effectLst>
+              <a:outerShdw blurRad="44450" dist="27940" dir="5400000" algn="ctr">
+                <a:srgbClr val="000000">
+                  <a:alpha val="32000"/>
+                </a:srgbClr>
+              </a:outerShdw>
+            </a:effectLst>
+            <a:scene3d>
+              <a:camera prst="orthographicFront">
+                <a:rot lat="0" lon="0" rev="0"/>
+              </a:camera>
+              <a:lightRig rig="balanced" dir="t">
+                <a:rot lat="0" lon="0" rev="8700000"/>
+              </a:lightRig>
+            </a:scene3d>
+            <a:sp3d>
+              <a:bevelT w="190500" h="38100"/>
+            </a:sp3d>
+          </p:spPr>
+          <p:txBody>
+            <a:bodyPr wrap="square" lIns="0" tIns="0" rIns="0" bIns="0" rtlCol="0">
+              <a:spAutoFit/>
+            </a:bodyPr>
+            <a:lstStyle/>
+            <a:p>
+              <a:pPr algn="just"/>
+              <a:r>
+                <a:rPr lang="en-US" sz="5400" b="1" spc="780" dirty="0">
+                  <a:solidFill>
+                    <a:srgbClr val="B768A2"/>
+                  </a:solidFill>
+                  <a:latin typeface="Engravers MT" panose="02090707080505020304" pitchFamily="18" charset="0"/>
+                </a:rPr>
+                <a:t>Engine</a:t>
+              </a:r>
+            </a:p>
+          </p:txBody>
+        </p:sp>
+        <p:grpSp>
+          <p:nvGrpSpPr>
+            <p:cNvPr id="4" name="Group 3">
+              <a:extLst>
+                <a:ext uri="{FF2B5EF4-FFF2-40B4-BE49-F238E27FC236}">
+                  <a16:creationId xmlns:a16="http://schemas.microsoft.com/office/drawing/2014/main" id="{7F17711E-A3B7-4754-2381-7342F69151B4}"/>
+                </a:ext>
+              </a:extLst>
+            </p:cNvPr>
+            <p:cNvGrpSpPr/>
+            <p:nvPr/>
+          </p:nvGrpSpPr>
+          <p:grpSpPr>
+            <a:xfrm>
+              <a:off x="6986985" y="4577378"/>
+              <a:ext cx="4253087" cy="1538135"/>
+              <a:chOff x="6986985" y="4577378"/>
+              <a:chExt cx="4253087" cy="1538135"/>
+            </a:xfrm>
+          </p:grpSpPr>
+          <p:sp>
+            <p:nvSpPr>
+              <p:cNvPr id="5" name="Rectangle 4">
+                <a:extLst>
+                  <a:ext uri="{FF2B5EF4-FFF2-40B4-BE49-F238E27FC236}">
+                    <a16:creationId xmlns:a16="http://schemas.microsoft.com/office/drawing/2014/main" id="{2B27939A-05E6-6E41-4947-E25931192412}"/>
+                  </a:ext>
+                </a:extLst>
+              </p:cNvPr>
+              <p:cNvSpPr/>
+              <p:nvPr/>
+            </p:nvSpPr>
+            <p:spPr>
+              <a:xfrm>
+                <a:off x="7114271" y="4876242"/>
+                <a:ext cx="1223963" cy="149432"/>
+              </a:xfrm>
+              <a:prstGeom prst="rect">
+                <a:avLst/>
+              </a:prstGeom>
+              <a:solidFill>
+                <a:schemeClr val="tx2">
+                  <a:lumMod val="50000"/>
+                  <a:lumOff val="50000"/>
+                </a:schemeClr>
+              </a:solidFill>
+              <a:ln w="3175">
+                <a:noFill/>
+              </a:ln>
+              <a:effectLst>
+                <a:outerShdw blurRad="57785" dist="33020" dir="3180000" algn="ctr">
+                  <a:srgbClr val="000000">
+                    <a:alpha val="30000"/>
+                  </a:srgbClr>
+                </a:outerShdw>
+              </a:effectLst>
+            </p:spPr>
+            <p:style>
+              <a:lnRef idx="2">
+                <a:schemeClr val="accent1">
+                  <a:shade val="15000"/>
+                </a:schemeClr>
+              </a:lnRef>
+              <a:fillRef idx="1">
+                <a:schemeClr val="accent1"/>
+              </a:fillRef>
+              <a:effectRef idx="0">
+                <a:schemeClr val="accent1"/>
+              </a:effectRef>
+              <a:fontRef idx="minor">
+                <a:schemeClr val="lt1"/>
+              </a:fontRef>
+            </p:style>
+            <p:txBody>
+              <a:bodyPr rtlCol="0" anchor="ctr"/>
+              <a:lstStyle/>
+              <a:p>
+                <a:pPr algn="ctr"/>
+                <a:endParaRPr lang="en-150">
+                  <a:ln w="3175">
+                    <a:solidFill>
+                      <a:schemeClr val="bg1">
+                        <a:lumMod val="95000"/>
+                      </a:schemeClr>
+                    </a:solidFill>
+                  </a:ln>
+                  <a:solidFill>
+                    <a:srgbClr val="1A1F71"/>
+                  </a:solidFill>
+                </a:endParaRPr>
+              </a:p>
+            </p:txBody>
+          </p:sp>
+          <p:sp>
+            <p:nvSpPr>
+              <p:cNvPr id="6" name="Rectangle 5">
+                <a:extLst>
+                  <a:ext uri="{FF2B5EF4-FFF2-40B4-BE49-F238E27FC236}">
+                    <a16:creationId xmlns:a16="http://schemas.microsoft.com/office/drawing/2014/main" id="{68DA2E45-C961-CA34-9D19-5A3F8C99C26B}"/>
+                  </a:ext>
+                </a:extLst>
+              </p:cNvPr>
+              <p:cNvSpPr/>
+              <p:nvPr/>
+            </p:nvSpPr>
+            <p:spPr>
+              <a:xfrm>
+                <a:off x="8338234" y="4726810"/>
+                <a:ext cx="1368425" cy="149432"/>
+              </a:xfrm>
+              <a:prstGeom prst="rect">
+                <a:avLst/>
+              </a:prstGeom>
+              <a:solidFill>
+                <a:schemeClr val="tx2">
+                  <a:lumMod val="50000"/>
+                  <a:lumOff val="50000"/>
+                </a:schemeClr>
+              </a:solidFill>
+              <a:ln w="3175">
+                <a:noFill/>
+              </a:ln>
+              <a:effectLst>
+                <a:outerShdw blurRad="57785" dist="33020" dir="3180000" algn="ctr">
+                  <a:srgbClr val="000000">
+                    <a:alpha val="30000"/>
+                  </a:srgbClr>
+                </a:outerShdw>
+              </a:effectLst>
+            </p:spPr>
+            <p:style>
+              <a:lnRef idx="2">
+                <a:schemeClr val="accent1">
+                  <a:shade val="15000"/>
+                </a:schemeClr>
+              </a:lnRef>
+              <a:fillRef idx="1">
+                <a:schemeClr val="accent1"/>
+              </a:fillRef>
+              <a:effectRef idx="0">
+                <a:schemeClr val="accent1"/>
+              </a:effectRef>
+              <a:fontRef idx="minor">
+                <a:schemeClr val="lt1"/>
+              </a:fontRef>
+            </p:style>
+            <p:txBody>
+              <a:bodyPr rtlCol="0" anchor="ctr"/>
+              <a:lstStyle/>
+              <a:p>
+                <a:pPr algn="ctr"/>
+                <a:endParaRPr lang="en-150">
+                  <a:ln w="3175">
+                    <a:solidFill>
+                      <a:schemeClr val="bg1">
+                        <a:lumMod val="95000"/>
+                      </a:schemeClr>
+                    </a:solidFill>
+                  </a:ln>
+                  <a:solidFill>
+                    <a:srgbClr val="1A1F71"/>
+                  </a:solidFill>
+                </a:endParaRPr>
+              </a:p>
+            </p:txBody>
+          </p:sp>
+          <p:sp>
+            <p:nvSpPr>
+              <p:cNvPr id="7" name="TextBox 6">
+                <a:extLst>
+                  <a:ext uri="{FF2B5EF4-FFF2-40B4-BE49-F238E27FC236}">
+                    <a16:creationId xmlns:a16="http://schemas.microsoft.com/office/drawing/2014/main" id="{1653C6D8-620C-FDBA-21FF-035D1A4E4158}"/>
+                  </a:ext>
+                </a:extLst>
+              </p:cNvPr>
+              <p:cNvSpPr txBox="1"/>
+              <p:nvPr/>
+            </p:nvSpPr>
+            <p:spPr>
+              <a:xfrm>
+                <a:off x="6986985" y="4915184"/>
+                <a:ext cx="4253087" cy="1200329"/>
+              </a:xfrm>
+              <a:prstGeom prst="rect">
+                <a:avLst/>
+              </a:prstGeom>
+              <a:noFill/>
+              <a:ln>
+                <a:noFill/>
+              </a:ln>
+              <a:effectLst>
+                <a:outerShdw blurRad="57785" dist="33020" dir="3180000" algn="ctr">
+                  <a:srgbClr val="000000">
+                    <a:alpha val="30000"/>
+                  </a:srgbClr>
+                </a:outerShdw>
+              </a:effectLst>
+            </p:spPr>
+            <p:txBody>
+              <a:bodyPr wrap="none" rtlCol="0">
+                <a:spAutoFit/>
+                <a:sp3d extrusionH="38100">
+                  <a:bevelT w="38100" h="38100"/>
+                </a:sp3d>
+              </a:bodyPr>
+              <a:lstStyle/>
+              <a:p>
+                <a:r>
+                  <a:rPr lang="en-US" sz="7200" dirty="0">
+                    <a:ln w="3175">
+                      <a:noFill/>
+                    </a:ln>
+                    <a:solidFill>
+                      <a:schemeClr val="tx2">
+                        <a:lumMod val="50000"/>
+                        <a:lumOff val="50000"/>
+                      </a:schemeClr>
+                    </a:solidFill>
+                    <a:latin typeface="Aafia" pitchFamily="50" charset="0"/>
+                  </a:rPr>
+                  <a:t>LaDe</a:t>
+                </a:r>
+                <a:r>
+                  <a:rPr lang="en-US" sz="7200" dirty="0">
+                    <a:ln w="3175">
+                      <a:noFill/>
+                    </a:ln>
+                    <a:solidFill>
+                      <a:srgbClr val="FFD700"/>
+                    </a:solidFill>
+                    <a:latin typeface="Aafia" pitchFamily="50" charset="0"/>
+                  </a:rPr>
+                  <a:t>RR</a:t>
+                </a:r>
+              </a:p>
+            </p:txBody>
+          </p:sp>
+          <p:sp>
+            <p:nvSpPr>
+              <p:cNvPr id="8" name="Rectangle 7">
+                <a:extLst>
+                  <a:ext uri="{FF2B5EF4-FFF2-40B4-BE49-F238E27FC236}">
+                    <a16:creationId xmlns:a16="http://schemas.microsoft.com/office/drawing/2014/main" id="{F5D7F74B-FEFD-FD30-3E84-12BE6E6DE81F}"/>
+                  </a:ext>
+                </a:extLst>
+              </p:cNvPr>
+              <p:cNvSpPr/>
+              <p:nvPr/>
+            </p:nvSpPr>
+            <p:spPr>
+              <a:xfrm>
+                <a:off x="9706659" y="4577378"/>
+                <a:ext cx="1377950" cy="149432"/>
+              </a:xfrm>
+              <a:prstGeom prst="rect">
+                <a:avLst/>
+              </a:prstGeom>
+              <a:solidFill>
+                <a:srgbClr val="FFD700"/>
+              </a:solidFill>
+              <a:ln w="3175">
+                <a:noFill/>
+              </a:ln>
+              <a:effectLst>
+                <a:outerShdw blurRad="57785" dist="33020" dir="3180000" algn="ctr">
+                  <a:srgbClr val="000000">
+                    <a:alpha val="30000"/>
+                  </a:srgbClr>
+                </a:outerShdw>
+              </a:effectLst>
+            </p:spPr>
+            <p:style>
+              <a:lnRef idx="2">
+                <a:schemeClr val="accent1">
+                  <a:shade val="15000"/>
+                </a:schemeClr>
+              </a:lnRef>
+              <a:fillRef idx="1">
+                <a:schemeClr val="accent1"/>
+              </a:fillRef>
+              <a:effectRef idx="0">
+                <a:schemeClr val="accent1"/>
+              </a:effectRef>
+              <a:fontRef idx="minor">
+                <a:schemeClr val="lt1"/>
+              </a:fontRef>
+            </p:style>
+            <p:txBody>
+              <a:bodyPr rtlCol="0" anchor="ctr"/>
+              <a:lstStyle/>
+              <a:p>
+                <a:pPr algn="ctr"/>
+                <a:endParaRPr lang="en-150">
+                  <a:ln w="3175">
+                    <a:solidFill>
+                      <a:schemeClr val="bg1">
+                        <a:lumMod val="95000"/>
+                      </a:schemeClr>
+                    </a:solidFill>
+                  </a:ln>
+                  <a:solidFill>
+                    <a:srgbClr val="1A1F71"/>
+                  </a:solidFill>
+                </a:endParaRPr>
+              </a:p>
+            </p:txBody>
+          </p:sp>
+        </p:grpSp>
+      </p:grpSp>
+      <p:grpSp>
+        <p:nvGrpSpPr>
+          <p:cNvPr id="9" name="Group 8">
+            <a:extLst>
+              <a:ext uri="{FF2B5EF4-FFF2-40B4-BE49-F238E27FC236}">
+                <a16:creationId xmlns:a16="http://schemas.microsoft.com/office/drawing/2014/main" id="{C0AB3F2E-BB2A-06EF-EF44-59628FDB8656}"/>
+              </a:ext>
+            </a:extLst>
+          </p:cNvPr>
+          <p:cNvGrpSpPr/>
+          <p:nvPr/>
+        </p:nvGrpSpPr>
+        <p:grpSpPr>
+          <a:xfrm>
+            <a:off x="781416" y="2500154"/>
+            <a:ext cx="4513548" cy="1899023"/>
+            <a:chOff x="6986985" y="4577378"/>
+            <a:chExt cx="4513548" cy="1899023"/>
+          </a:xfrm>
+        </p:grpSpPr>
+        <p:sp>
+          <p:nvSpPr>
+            <p:cNvPr id="10" name="TextBox 9">
+              <a:extLst>
+                <a:ext uri="{FF2B5EF4-FFF2-40B4-BE49-F238E27FC236}">
+                  <a16:creationId xmlns:a16="http://schemas.microsoft.com/office/drawing/2014/main" id="{00AB8EEF-A4A2-C32E-4BA7-520762A70DC3}"/>
+                </a:ext>
+              </a:extLst>
+            </p:cNvPr>
+            <p:cNvSpPr txBox="1"/>
+            <p:nvPr/>
+          </p:nvSpPr>
+          <p:spPr>
+            <a:xfrm>
+              <a:off x="7088871" y="5645404"/>
+              <a:ext cx="4411662" cy="830997"/>
+            </a:xfrm>
+            <a:prstGeom prst="rect">
+              <a:avLst/>
+            </a:prstGeom>
+            <a:noFill/>
+            <a:ln>
+              <a:noFill/>
+            </a:ln>
+            <a:effectLst>
+              <a:outerShdw blurRad="44450" dist="27940" dir="5400000" algn="ctr">
+                <a:srgbClr val="000000">
+                  <a:alpha val="32000"/>
+                </a:srgbClr>
+              </a:outerShdw>
+            </a:effectLst>
+            <a:scene3d>
+              <a:camera prst="orthographicFront">
+                <a:rot lat="0" lon="0" rev="0"/>
+              </a:camera>
+              <a:lightRig rig="balanced" dir="t">
+                <a:rot lat="0" lon="0" rev="8700000"/>
+              </a:lightRig>
+            </a:scene3d>
+            <a:sp3d>
+              <a:bevelT w="190500" h="38100"/>
+            </a:sp3d>
+          </p:spPr>
+          <p:txBody>
+            <a:bodyPr wrap="square" lIns="0" tIns="0" rIns="0" bIns="0" rtlCol="0">
+              <a:spAutoFit/>
+            </a:bodyPr>
+            <a:lstStyle/>
+            <a:p>
+              <a:pPr algn="just"/>
+              <a:r>
+                <a:rPr lang="en-US" sz="5400" b="1" spc="780" dirty="0">
+                  <a:solidFill>
+                    <a:srgbClr val="5C946E"/>
+                  </a:solidFill>
+                  <a:latin typeface="Engravers MT" panose="02090707080505020304" pitchFamily="18" charset="0"/>
+                </a:rPr>
+                <a:t>Engine</a:t>
+              </a:r>
+            </a:p>
+          </p:txBody>
+        </p:sp>
+        <p:grpSp>
+          <p:nvGrpSpPr>
+            <p:cNvPr id="11" name="Group 10">
+              <a:extLst>
+                <a:ext uri="{FF2B5EF4-FFF2-40B4-BE49-F238E27FC236}">
+                  <a16:creationId xmlns:a16="http://schemas.microsoft.com/office/drawing/2014/main" id="{4129FBF7-4F55-C402-2190-CAF22DC288E1}"/>
+                </a:ext>
+              </a:extLst>
+            </p:cNvPr>
+            <p:cNvGrpSpPr/>
+            <p:nvPr/>
+          </p:nvGrpSpPr>
+          <p:grpSpPr>
+            <a:xfrm>
+              <a:off x="6986985" y="4577378"/>
+              <a:ext cx="4253087" cy="1538135"/>
+              <a:chOff x="6986985" y="4577378"/>
+              <a:chExt cx="4253087" cy="1538135"/>
+            </a:xfrm>
+          </p:grpSpPr>
+          <p:sp>
+            <p:nvSpPr>
+              <p:cNvPr id="12" name="Rectangle 11">
+                <a:extLst>
+                  <a:ext uri="{FF2B5EF4-FFF2-40B4-BE49-F238E27FC236}">
+                    <a16:creationId xmlns:a16="http://schemas.microsoft.com/office/drawing/2014/main" id="{4181E004-F8B1-C352-1E60-E1F28D995401}"/>
+                  </a:ext>
+                </a:extLst>
+              </p:cNvPr>
+              <p:cNvSpPr/>
+              <p:nvPr/>
+            </p:nvSpPr>
+            <p:spPr>
+              <a:xfrm>
+                <a:off x="7114271" y="4876242"/>
+                <a:ext cx="1223963" cy="149432"/>
+              </a:xfrm>
+              <a:prstGeom prst="rect">
+                <a:avLst/>
+              </a:prstGeom>
+              <a:solidFill>
+                <a:schemeClr val="tx2">
+                  <a:lumMod val="50000"/>
+                  <a:lumOff val="50000"/>
+                </a:schemeClr>
+              </a:solidFill>
+              <a:ln w="3175">
+                <a:noFill/>
+              </a:ln>
+              <a:effectLst>
+                <a:outerShdw blurRad="57785" dist="33020" dir="3180000" algn="ctr">
+                  <a:srgbClr val="000000">
+                    <a:alpha val="30000"/>
+                  </a:srgbClr>
+                </a:outerShdw>
+              </a:effectLst>
+            </p:spPr>
+            <p:style>
+              <a:lnRef idx="2">
+                <a:schemeClr val="accent1">
+                  <a:shade val="15000"/>
+                </a:schemeClr>
+              </a:lnRef>
+              <a:fillRef idx="1">
+                <a:schemeClr val="accent1"/>
+              </a:fillRef>
+              <a:effectRef idx="0">
+                <a:schemeClr val="accent1"/>
+              </a:effectRef>
+              <a:fontRef idx="minor">
+                <a:schemeClr val="lt1"/>
+              </a:fontRef>
+            </p:style>
+            <p:txBody>
+              <a:bodyPr rtlCol="0" anchor="ctr"/>
+              <a:lstStyle/>
+              <a:p>
+                <a:pPr algn="ctr"/>
+                <a:endParaRPr lang="en-150">
+                  <a:ln w="3175">
+                    <a:solidFill>
+                      <a:schemeClr val="bg1">
+                        <a:lumMod val="95000"/>
+                      </a:schemeClr>
+                    </a:solidFill>
+                  </a:ln>
+                  <a:solidFill>
+                    <a:srgbClr val="1A1F71"/>
+                  </a:solidFill>
+                </a:endParaRPr>
+              </a:p>
+            </p:txBody>
+          </p:sp>
+          <p:sp>
+            <p:nvSpPr>
+              <p:cNvPr id="13" name="Rectangle 12">
+                <a:extLst>
+                  <a:ext uri="{FF2B5EF4-FFF2-40B4-BE49-F238E27FC236}">
+                    <a16:creationId xmlns:a16="http://schemas.microsoft.com/office/drawing/2014/main" id="{82A5C05E-0247-06DF-18D4-7350773A0365}"/>
+                  </a:ext>
+                </a:extLst>
+              </p:cNvPr>
+              <p:cNvSpPr/>
+              <p:nvPr/>
+            </p:nvSpPr>
+            <p:spPr>
+              <a:xfrm>
+                <a:off x="8338234" y="4726810"/>
+                <a:ext cx="1368425" cy="149432"/>
+              </a:xfrm>
+              <a:prstGeom prst="rect">
+                <a:avLst/>
+              </a:prstGeom>
+              <a:solidFill>
+                <a:schemeClr val="tx2">
+                  <a:lumMod val="50000"/>
+                  <a:lumOff val="50000"/>
+                </a:schemeClr>
+              </a:solidFill>
+              <a:ln w="3175">
+                <a:noFill/>
+              </a:ln>
+              <a:effectLst>
+                <a:outerShdw blurRad="57785" dist="33020" dir="3180000" algn="ctr">
+                  <a:srgbClr val="000000">
+                    <a:alpha val="30000"/>
+                  </a:srgbClr>
+                </a:outerShdw>
+              </a:effectLst>
+            </p:spPr>
+            <p:style>
+              <a:lnRef idx="2">
+                <a:schemeClr val="accent1">
+                  <a:shade val="15000"/>
+                </a:schemeClr>
+              </a:lnRef>
+              <a:fillRef idx="1">
+                <a:schemeClr val="accent1"/>
+              </a:fillRef>
+              <a:effectRef idx="0">
+                <a:schemeClr val="accent1"/>
+              </a:effectRef>
+              <a:fontRef idx="minor">
+                <a:schemeClr val="lt1"/>
+              </a:fontRef>
+            </p:style>
+            <p:txBody>
+              <a:bodyPr rtlCol="0" anchor="ctr"/>
+              <a:lstStyle/>
+              <a:p>
+                <a:pPr algn="ctr"/>
+                <a:endParaRPr lang="en-150">
+                  <a:ln w="3175">
+                    <a:solidFill>
+                      <a:schemeClr val="bg1">
+                        <a:lumMod val="95000"/>
+                      </a:schemeClr>
+                    </a:solidFill>
+                  </a:ln>
+                  <a:solidFill>
+                    <a:srgbClr val="1A1F71"/>
+                  </a:solidFill>
+                </a:endParaRPr>
+              </a:p>
+            </p:txBody>
+          </p:sp>
+          <p:sp>
+            <p:nvSpPr>
+              <p:cNvPr id="15" name="TextBox 14">
+                <a:extLst>
+                  <a:ext uri="{FF2B5EF4-FFF2-40B4-BE49-F238E27FC236}">
+                    <a16:creationId xmlns:a16="http://schemas.microsoft.com/office/drawing/2014/main" id="{58D9FD94-AA3E-3A24-E334-CC6CCEAAE9D8}"/>
+                  </a:ext>
+                </a:extLst>
+              </p:cNvPr>
+              <p:cNvSpPr txBox="1"/>
+              <p:nvPr/>
+            </p:nvSpPr>
+            <p:spPr>
+              <a:xfrm>
+                <a:off x="6986985" y="4915184"/>
+                <a:ext cx="4253087" cy="1200329"/>
+              </a:xfrm>
+              <a:prstGeom prst="rect">
+                <a:avLst/>
+              </a:prstGeom>
+              <a:noFill/>
+              <a:ln>
+                <a:noFill/>
+              </a:ln>
+              <a:effectLst>
+                <a:outerShdw blurRad="57785" dist="33020" dir="3180000" algn="ctr">
+                  <a:srgbClr val="000000">
+                    <a:alpha val="30000"/>
+                  </a:srgbClr>
+                </a:outerShdw>
+              </a:effectLst>
+            </p:spPr>
+            <p:txBody>
+              <a:bodyPr wrap="none" rtlCol="0">
+                <a:spAutoFit/>
+                <a:sp3d extrusionH="38100">
+                  <a:bevelT w="38100" h="38100"/>
+                </a:sp3d>
+              </a:bodyPr>
+              <a:lstStyle/>
+              <a:p>
+                <a:r>
+                  <a:rPr lang="en-US" sz="7200" dirty="0">
+                    <a:ln w="3175">
+                      <a:noFill/>
+                    </a:ln>
+                    <a:solidFill>
+                      <a:schemeClr val="tx2">
+                        <a:lumMod val="50000"/>
+                        <a:lumOff val="50000"/>
+                      </a:schemeClr>
+                    </a:solidFill>
+                    <a:latin typeface="Aafia" pitchFamily="50" charset="0"/>
+                  </a:rPr>
+                  <a:t>LaDe</a:t>
+                </a:r>
+                <a:r>
+                  <a:rPr lang="en-US" sz="7200" dirty="0">
+                    <a:ln w="3175">
+                      <a:noFill/>
+                    </a:ln>
+                    <a:solidFill>
+                      <a:srgbClr val="FFD700"/>
+                    </a:solidFill>
+                    <a:latin typeface="Aafia" pitchFamily="50" charset="0"/>
+                  </a:rPr>
+                  <a:t>RR</a:t>
+                </a:r>
+              </a:p>
+            </p:txBody>
+          </p:sp>
+          <p:sp>
+            <p:nvSpPr>
+              <p:cNvPr id="17" name="Rectangle 16">
+                <a:extLst>
+                  <a:ext uri="{FF2B5EF4-FFF2-40B4-BE49-F238E27FC236}">
+                    <a16:creationId xmlns:a16="http://schemas.microsoft.com/office/drawing/2014/main" id="{9A973F47-4F6F-D173-5C25-50E46BD36107}"/>
+                  </a:ext>
+                </a:extLst>
+              </p:cNvPr>
+              <p:cNvSpPr/>
+              <p:nvPr/>
+            </p:nvSpPr>
+            <p:spPr>
+              <a:xfrm>
+                <a:off x="9706659" y="4577378"/>
+                <a:ext cx="1377950" cy="149432"/>
+              </a:xfrm>
+              <a:prstGeom prst="rect">
+                <a:avLst/>
+              </a:prstGeom>
+              <a:solidFill>
+                <a:srgbClr val="FFD700"/>
+              </a:solidFill>
+              <a:ln w="3175">
+                <a:noFill/>
+              </a:ln>
+              <a:effectLst>
+                <a:outerShdw blurRad="57785" dist="33020" dir="3180000" algn="ctr">
+                  <a:srgbClr val="000000">
+                    <a:alpha val="30000"/>
+                  </a:srgbClr>
+                </a:outerShdw>
+              </a:effectLst>
+            </p:spPr>
+            <p:style>
+              <a:lnRef idx="2">
+                <a:schemeClr val="accent1">
+                  <a:shade val="15000"/>
+                </a:schemeClr>
+              </a:lnRef>
+              <a:fillRef idx="1">
+                <a:schemeClr val="accent1"/>
+              </a:fillRef>
+              <a:effectRef idx="0">
+                <a:schemeClr val="accent1"/>
+              </a:effectRef>
+              <a:fontRef idx="minor">
+                <a:schemeClr val="lt1"/>
+              </a:fontRef>
+            </p:style>
+            <p:txBody>
+              <a:bodyPr rtlCol="0" anchor="ctr"/>
+              <a:lstStyle/>
+              <a:p>
+                <a:pPr algn="ctr"/>
+                <a:endParaRPr lang="en-150">
+                  <a:ln w="3175">
+                    <a:solidFill>
+                      <a:schemeClr val="bg1">
+                        <a:lumMod val="95000"/>
+                      </a:schemeClr>
+                    </a:solidFill>
+                  </a:ln>
+                  <a:solidFill>
+                    <a:srgbClr val="1A1F71"/>
+                  </a:solidFill>
+                </a:endParaRPr>
+              </a:p>
+            </p:txBody>
+          </p:sp>
+        </p:grpSp>
+      </p:grpSp>
+      <p:grpSp>
+        <p:nvGrpSpPr>
+          <p:cNvPr id="18" name="Group 17">
+            <a:extLst>
+              <a:ext uri="{FF2B5EF4-FFF2-40B4-BE49-F238E27FC236}">
+                <a16:creationId xmlns:a16="http://schemas.microsoft.com/office/drawing/2014/main" id="{F0E5B4A0-C471-F578-A1D9-B5EC2E406231}"/>
+              </a:ext>
+            </a:extLst>
+          </p:cNvPr>
+          <p:cNvGrpSpPr/>
+          <p:nvPr/>
+        </p:nvGrpSpPr>
+        <p:grpSpPr>
+          <a:xfrm>
+            <a:off x="781416" y="304416"/>
+            <a:ext cx="4513548" cy="1899023"/>
+            <a:chOff x="6986985" y="4577378"/>
+            <a:chExt cx="4513548" cy="1899023"/>
+          </a:xfrm>
+        </p:grpSpPr>
+        <p:sp>
+          <p:nvSpPr>
+            <p:cNvPr id="19" name="TextBox 18">
+              <a:extLst>
+                <a:ext uri="{FF2B5EF4-FFF2-40B4-BE49-F238E27FC236}">
+                  <a16:creationId xmlns:a16="http://schemas.microsoft.com/office/drawing/2014/main" id="{523D1ADC-4C48-487C-1CF2-05729C762535}"/>
+                </a:ext>
+              </a:extLst>
+            </p:cNvPr>
+            <p:cNvSpPr txBox="1"/>
+            <p:nvPr/>
+          </p:nvSpPr>
+          <p:spPr>
+            <a:xfrm>
+              <a:off x="7088871" y="5645404"/>
+              <a:ext cx="4411662" cy="830997"/>
+            </a:xfrm>
+            <a:prstGeom prst="rect">
+              <a:avLst/>
+            </a:prstGeom>
+            <a:noFill/>
+            <a:ln>
+              <a:noFill/>
+            </a:ln>
+            <a:effectLst>
+              <a:outerShdw blurRad="44450" dist="27940" dir="5400000" algn="ctr">
+                <a:srgbClr val="000000">
+                  <a:alpha val="32000"/>
+                </a:srgbClr>
+              </a:outerShdw>
+            </a:effectLst>
+            <a:scene3d>
+              <a:camera prst="orthographicFront">
+                <a:rot lat="0" lon="0" rev="0"/>
+              </a:camera>
+              <a:lightRig rig="balanced" dir="t">
+                <a:rot lat="0" lon="0" rev="8700000"/>
+              </a:lightRig>
+            </a:scene3d>
+            <a:sp3d>
+              <a:bevelT w="190500" h="38100"/>
+            </a:sp3d>
+          </p:spPr>
+          <p:txBody>
+            <a:bodyPr wrap="square" lIns="0" tIns="0" rIns="0" bIns="0" rtlCol="0">
+              <a:spAutoFit/>
+            </a:bodyPr>
+            <a:lstStyle/>
+            <a:p>
+              <a:pPr algn="just"/>
+              <a:r>
+                <a:rPr lang="en-US" sz="5400" b="1" spc="780" dirty="0">
+                  <a:solidFill>
+                    <a:srgbClr val="E04F39"/>
+                  </a:solidFill>
+                  <a:latin typeface="Engravers MT" panose="02090707080505020304" pitchFamily="18" charset="0"/>
+                </a:rPr>
+                <a:t>Engine</a:t>
+              </a:r>
+            </a:p>
+          </p:txBody>
+        </p:sp>
+        <p:grpSp>
+          <p:nvGrpSpPr>
+            <p:cNvPr id="20" name="Group 19">
+              <a:extLst>
+                <a:ext uri="{FF2B5EF4-FFF2-40B4-BE49-F238E27FC236}">
+                  <a16:creationId xmlns:a16="http://schemas.microsoft.com/office/drawing/2014/main" id="{DDF8EE72-CDCE-A98F-20DB-4CC4BAF0E078}"/>
+                </a:ext>
+              </a:extLst>
+            </p:cNvPr>
+            <p:cNvGrpSpPr/>
+            <p:nvPr/>
+          </p:nvGrpSpPr>
+          <p:grpSpPr>
+            <a:xfrm>
+              <a:off x="6986985" y="4577378"/>
+              <a:ext cx="4253087" cy="1538135"/>
+              <a:chOff x="6986985" y="4577378"/>
+              <a:chExt cx="4253087" cy="1538135"/>
+            </a:xfrm>
+          </p:grpSpPr>
+          <p:sp>
+            <p:nvSpPr>
+              <p:cNvPr id="22" name="Rectangle 21">
+                <a:extLst>
+                  <a:ext uri="{FF2B5EF4-FFF2-40B4-BE49-F238E27FC236}">
+                    <a16:creationId xmlns:a16="http://schemas.microsoft.com/office/drawing/2014/main" id="{5DE31B0D-0439-5A65-1D24-0F19D076FF20}"/>
+                  </a:ext>
+                </a:extLst>
+              </p:cNvPr>
+              <p:cNvSpPr/>
+              <p:nvPr/>
+            </p:nvSpPr>
+            <p:spPr>
+              <a:xfrm>
+                <a:off x="7114271" y="4876242"/>
+                <a:ext cx="1223963" cy="149432"/>
+              </a:xfrm>
+              <a:prstGeom prst="rect">
+                <a:avLst/>
+              </a:prstGeom>
+              <a:solidFill>
+                <a:schemeClr val="tx2">
+                  <a:lumMod val="50000"/>
+                  <a:lumOff val="50000"/>
+                </a:schemeClr>
+              </a:solidFill>
+              <a:ln w="3175">
+                <a:noFill/>
+              </a:ln>
+              <a:effectLst>
+                <a:outerShdw blurRad="57785" dist="33020" dir="3180000" algn="ctr">
+                  <a:srgbClr val="000000">
+                    <a:alpha val="30000"/>
+                  </a:srgbClr>
+                </a:outerShdw>
+              </a:effectLst>
+            </p:spPr>
+            <p:style>
+              <a:lnRef idx="2">
+                <a:schemeClr val="accent1">
+                  <a:shade val="15000"/>
+                </a:schemeClr>
+              </a:lnRef>
+              <a:fillRef idx="1">
+                <a:schemeClr val="accent1"/>
+              </a:fillRef>
+              <a:effectRef idx="0">
+                <a:schemeClr val="accent1"/>
+              </a:effectRef>
+              <a:fontRef idx="minor">
+                <a:schemeClr val="lt1"/>
+              </a:fontRef>
+            </p:style>
+            <p:txBody>
+              <a:bodyPr rtlCol="0" anchor="ctr"/>
+              <a:lstStyle/>
+              <a:p>
+                <a:pPr algn="ctr"/>
+                <a:endParaRPr lang="en-150">
+                  <a:ln w="3175">
+                    <a:solidFill>
+                      <a:schemeClr val="bg1">
+                        <a:lumMod val="95000"/>
+                      </a:schemeClr>
+                    </a:solidFill>
+                  </a:ln>
+                  <a:solidFill>
+                    <a:srgbClr val="1A1F71"/>
+                  </a:solidFill>
+                </a:endParaRPr>
+              </a:p>
+            </p:txBody>
+          </p:sp>
+          <p:sp>
+            <p:nvSpPr>
+              <p:cNvPr id="42" name="Rectangle 41">
+                <a:extLst>
+                  <a:ext uri="{FF2B5EF4-FFF2-40B4-BE49-F238E27FC236}">
+                    <a16:creationId xmlns:a16="http://schemas.microsoft.com/office/drawing/2014/main" id="{C590166F-2101-D6D1-FAB3-34905659FDB7}"/>
+                  </a:ext>
+                </a:extLst>
+              </p:cNvPr>
+              <p:cNvSpPr/>
+              <p:nvPr/>
+            </p:nvSpPr>
+            <p:spPr>
+              <a:xfrm>
+                <a:off x="8338234" y="4726810"/>
+                <a:ext cx="1368425" cy="149432"/>
+              </a:xfrm>
+              <a:prstGeom prst="rect">
+                <a:avLst/>
+              </a:prstGeom>
+              <a:solidFill>
+                <a:schemeClr val="tx2">
+                  <a:lumMod val="50000"/>
+                  <a:lumOff val="50000"/>
+                </a:schemeClr>
+              </a:solidFill>
+              <a:ln w="3175">
+                <a:noFill/>
+              </a:ln>
+              <a:effectLst>
+                <a:outerShdw blurRad="57785" dist="33020" dir="3180000" algn="ctr">
+                  <a:srgbClr val="000000">
+                    <a:alpha val="30000"/>
+                  </a:srgbClr>
+                </a:outerShdw>
+              </a:effectLst>
+            </p:spPr>
+            <p:style>
+              <a:lnRef idx="2">
+                <a:schemeClr val="accent1">
+                  <a:shade val="15000"/>
+                </a:schemeClr>
+              </a:lnRef>
+              <a:fillRef idx="1">
+                <a:schemeClr val="accent1"/>
+              </a:fillRef>
+              <a:effectRef idx="0">
+                <a:schemeClr val="accent1"/>
+              </a:effectRef>
+              <a:fontRef idx="minor">
+                <a:schemeClr val="lt1"/>
+              </a:fontRef>
+            </p:style>
+            <p:txBody>
+              <a:bodyPr rtlCol="0" anchor="ctr"/>
+              <a:lstStyle/>
+              <a:p>
+                <a:pPr algn="ctr"/>
+                <a:endParaRPr lang="en-150">
+                  <a:ln w="3175">
+                    <a:solidFill>
+                      <a:schemeClr val="bg1">
+                        <a:lumMod val="95000"/>
+                      </a:schemeClr>
+                    </a:solidFill>
+                  </a:ln>
+                  <a:solidFill>
+                    <a:srgbClr val="1A1F71"/>
+                  </a:solidFill>
+                </a:endParaRPr>
+              </a:p>
+            </p:txBody>
+          </p:sp>
+          <p:sp>
+            <p:nvSpPr>
+              <p:cNvPr id="43" name="TextBox 42">
+                <a:extLst>
+                  <a:ext uri="{FF2B5EF4-FFF2-40B4-BE49-F238E27FC236}">
+                    <a16:creationId xmlns:a16="http://schemas.microsoft.com/office/drawing/2014/main" id="{4C7CABC5-9758-3CCD-2F14-0E1B9CBB7ED3}"/>
+                  </a:ext>
+                </a:extLst>
+              </p:cNvPr>
+              <p:cNvSpPr txBox="1"/>
+              <p:nvPr/>
+            </p:nvSpPr>
+            <p:spPr>
+              <a:xfrm>
+                <a:off x="6986985" y="4915184"/>
+                <a:ext cx="4253087" cy="1200329"/>
+              </a:xfrm>
+              <a:prstGeom prst="rect">
+                <a:avLst/>
+              </a:prstGeom>
+              <a:noFill/>
+              <a:ln>
+                <a:noFill/>
+              </a:ln>
+              <a:effectLst>
+                <a:outerShdw blurRad="57785" dist="33020" dir="3180000" algn="ctr">
+                  <a:srgbClr val="000000">
+                    <a:alpha val="30000"/>
+                  </a:srgbClr>
+                </a:outerShdw>
+              </a:effectLst>
+            </p:spPr>
+            <p:txBody>
+              <a:bodyPr wrap="none" rtlCol="0">
+                <a:spAutoFit/>
+                <a:sp3d extrusionH="38100">
+                  <a:bevelT w="38100" h="38100"/>
+                </a:sp3d>
+              </a:bodyPr>
+              <a:lstStyle/>
+              <a:p>
+                <a:r>
+                  <a:rPr lang="en-US" sz="7200" dirty="0">
+                    <a:ln w="3175">
+                      <a:noFill/>
+                    </a:ln>
+                    <a:solidFill>
+                      <a:schemeClr val="tx2">
+                        <a:lumMod val="50000"/>
+                        <a:lumOff val="50000"/>
+                      </a:schemeClr>
+                    </a:solidFill>
+                    <a:latin typeface="Aafia" pitchFamily="50" charset="0"/>
+                  </a:rPr>
+                  <a:t>LaDe</a:t>
+                </a:r>
+                <a:r>
+                  <a:rPr lang="en-US" sz="7200" dirty="0">
+                    <a:ln w="3175">
+                      <a:noFill/>
+                    </a:ln>
+                    <a:solidFill>
+                      <a:srgbClr val="FFD700"/>
+                    </a:solidFill>
+                    <a:latin typeface="Aafia" pitchFamily="50" charset="0"/>
+                  </a:rPr>
+                  <a:t>RR</a:t>
+                </a:r>
+              </a:p>
+            </p:txBody>
+          </p:sp>
+          <p:sp>
+            <p:nvSpPr>
+              <p:cNvPr id="44" name="Rectangle 43">
+                <a:extLst>
+                  <a:ext uri="{FF2B5EF4-FFF2-40B4-BE49-F238E27FC236}">
+                    <a16:creationId xmlns:a16="http://schemas.microsoft.com/office/drawing/2014/main" id="{6B6728FF-31DA-94DE-8255-66650451D14F}"/>
+                  </a:ext>
+                </a:extLst>
+              </p:cNvPr>
+              <p:cNvSpPr/>
+              <p:nvPr/>
+            </p:nvSpPr>
+            <p:spPr>
+              <a:xfrm>
+                <a:off x="9706659" y="4577378"/>
+                <a:ext cx="1377950" cy="149432"/>
+              </a:xfrm>
+              <a:prstGeom prst="rect">
+                <a:avLst/>
+              </a:prstGeom>
+              <a:solidFill>
+                <a:srgbClr val="FFD700"/>
+              </a:solidFill>
+              <a:ln w="3175">
+                <a:noFill/>
+              </a:ln>
+              <a:effectLst>
+                <a:outerShdw blurRad="57785" dist="33020" dir="3180000" algn="ctr">
+                  <a:srgbClr val="000000">
+                    <a:alpha val="30000"/>
+                  </a:srgbClr>
+                </a:outerShdw>
+              </a:effectLst>
+            </p:spPr>
+            <p:style>
+              <a:lnRef idx="2">
+                <a:schemeClr val="accent1">
+                  <a:shade val="15000"/>
+                </a:schemeClr>
+              </a:lnRef>
+              <a:fillRef idx="1">
+                <a:schemeClr val="accent1"/>
+              </a:fillRef>
+              <a:effectRef idx="0">
+                <a:schemeClr val="accent1"/>
+              </a:effectRef>
+              <a:fontRef idx="minor">
+                <a:schemeClr val="lt1"/>
+              </a:fontRef>
+            </p:style>
+            <p:txBody>
+              <a:bodyPr rtlCol="0" anchor="ctr"/>
+              <a:lstStyle/>
+              <a:p>
+                <a:pPr algn="ctr"/>
+                <a:endParaRPr lang="en-150">
+                  <a:ln w="3175">
+                    <a:solidFill>
+                      <a:schemeClr val="bg1">
+                        <a:lumMod val="95000"/>
+                      </a:schemeClr>
+                    </a:solidFill>
+                  </a:ln>
+                  <a:solidFill>
+                    <a:srgbClr val="1A1F71"/>
+                  </a:solidFill>
+                </a:endParaRPr>
+              </a:p>
+            </p:txBody>
+          </p:sp>
+        </p:grpSp>
+      </p:grpSp>
+    </p:spTree>
+    <p:extLst>
+      <p:ext uri="{BB962C8B-B14F-4D97-AF65-F5344CB8AC3E}">
+        <p14:creationId xmlns:p14="http://schemas.microsoft.com/office/powerpoint/2010/main" val="3039035246"/>
+      </p:ext>
+    </p:extLst>
+  </p:cSld>
+  <p:clrMapOvr>
+    <a:masterClrMapping/>
+  </p:clrMapOvr>
+</p:sld>
+</file>
+
+<file path=ppt/slides/slide3.xml><?xml version="1.0" encoding="utf-8"?>
+<p:sld xmlns:a="http://schemas.openxmlformats.org/drawingml/2006/main" xmlns:r="http://schemas.openxmlformats.org/officeDocument/2006/relationships" xmlns:p="http://schemas.openxmlformats.org/presentationml/2006/main">
+  <p:cSld>
+    <p:spTree>
+      <p:nvGrpSpPr>
+        <p:cNvPr id="1" name="">
+          <a:extLst>
+            <a:ext uri="{FF2B5EF4-FFF2-40B4-BE49-F238E27FC236}">
+              <a16:creationId xmlns:a16="http://schemas.microsoft.com/office/drawing/2014/main" id="{A0635351-E78C-6129-93E0-8D178C0F8E09}"/>
+            </a:ext>
+          </a:extLst>
+        </p:cNvPr>
+        <p:cNvGrpSpPr/>
+        <p:nvPr/>
+      </p:nvGrpSpPr>
+      <p:grpSpPr>
+        <a:xfrm>
+          <a:off x="0" y="0"/>
+          <a:ext cx="0" cy="0"/>
+          <a:chOff x="0" y="0"/>
+          <a:chExt cx="0" cy="0"/>
+        </a:xfrm>
+      </p:grpSpPr>
+      <p:sp>
+        <p:nvSpPr>
+          <p:cNvPr id="16" name="Rectangle 15">
+            <a:extLst>
+              <a:ext uri="{FF2B5EF4-FFF2-40B4-BE49-F238E27FC236}">
+                <a16:creationId xmlns:a16="http://schemas.microsoft.com/office/drawing/2014/main" id="{A34F99E4-6909-5FE9-9906-320950907E16}"/>
+              </a:ext>
+            </a:extLst>
+          </p:cNvPr>
+          <p:cNvSpPr/>
+          <p:nvPr/>
+        </p:nvSpPr>
+        <p:spPr>
+          <a:xfrm>
+            <a:off x="0" y="0"/>
+            <a:ext cx="6096000" cy="6858000"/>
+          </a:xfrm>
+          <a:prstGeom prst="rect">
+            <a:avLst/>
+          </a:prstGeom>
+        </p:spPr>
+        <p:style>
+          <a:lnRef idx="2">
+            <a:schemeClr val="dk1">
+              <a:shade val="15000"/>
+            </a:schemeClr>
+          </a:lnRef>
+          <a:fillRef idx="1">
+            <a:schemeClr val="dk1"/>
+          </a:fillRef>
+          <a:effectRef idx="0">
+            <a:schemeClr val="dk1"/>
+          </a:effectRef>
+          <a:fontRef idx="minor">
+            <a:schemeClr val="lt1"/>
+          </a:fontRef>
+        </p:style>
+        <p:txBody>
+          <a:bodyPr rtlCol="0" anchor="ctr"/>
+          <a:lstStyle/>
+          <a:p>
+            <a:pPr algn="ctr"/>
+            <a:endParaRPr lang="en-US"/>
+          </a:p>
+        </p:txBody>
+      </p:sp>
+      <p:grpSp>
+        <p:nvGrpSpPr>
+          <p:cNvPr id="27" name="Group 26">
+            <a:extLst>
+              <a:ext uri="{FF2B5EF4-FFF2-40B4-BE49-F238E27FC236}">
+                <a16:creationId xmlns:a16="http://schemas.microsoft.com/office/drawing/2014/main" id="{890C16A7-A3A6-B280-8C67-6B2D23A2C879}"/>
+              </a:ext>
+            </a:extLst>
+          </p:cNvPr>
+          <p:cNvGrpSpPr/>
+          <p:nvPr/>
+        </p:nvGrpSpPr>
+        <p:grpSpPr>
+          <a:xfrm>
+            <a:off x="6926632" y="4695891"/>
+            <a:ext cx="4513548" cy="1899023"/>
+            <a:chOff x="6986985" y="4577378"/>
+            <a:chExt cx="4513548" cy="1899023"/>
+          </a:xfrm>
+        </p:grpSpPr>
+        <p:sp>
+          <p:nvSpPr>
+            <p:cNvPr id="14" name="TextBox 13">
+              <a:extLst>
+                <a:ext uri="{FF2B5EF4-FFF2-40B4-BE49-F238E27FC236}">
+                  <a16:creationId xmlns:a16="http://schemas.microsoft.com/office/drawing/2014/main" id="{1C7683E5-3813-BD24-3414-D36F94BB65FC}"/>
+                </a:ext>
+              </a:extLst>
+            </p:cNvPr>
+            <p:cNvSpPr txBox="1"/>
+            <p:nvPr/>
+          </p:nvSpPr>
+          <p:spPr>
+            <a:xfrm>
+              <a:off x="7088871" y="5645404"/>
+              <a:ext cx="4411662" cy="830997"/>
+            </a:xfrm>
+            <a:prstGeom prst="rect">
+              <a:avLst/>
+            </a:prstGeom>
+            <a:noFill/>
+            <a:ln>
+              <a:noFill/>
+            </a:ln>
+            <a:effectLst>
+              <a:outerShdw blurRad="44450" dist="27940" dir="5400000" algn="ctr">
+                <a:srgbClr val="000000">
+                  <a:alpha val="32000"/>
+                </a:srgbClr>
+              </a:outerShdw>
+            </a:effectLst>
+            <a:scene3d>
+              <a:camera prst="orthographicFront">
+                <a:rot lat="0" lon="0" rev="0"/>
+              </a:camera>
+              <a:lightRig rig="balanced" dir="t">
+                <a:rot lat="0" lon="0" rev="8700000"/>
+              </a:lightRig>
+            </a:scene3d>
+            <a:sp3d>
+              <a:bevelT w="190500" h="38100"/>
+            </a:sp3d>
+          </p:spPr>
+          <p:txBody>
+            <a:bodyPr wrap="square" lIns="0" tIns="0" rIns="0" bIns="0" rtlCol="0">
+              <a:spAutoFit/>
+            </a:bodyPr>
+            <a:lstStyle/>
+            <a:p>
+              <a:pPr algn="just"/>
+              <a:r>
+                <a:rPr lang="en-US" sz="5400" b="1" spc="780" dirty="0">
+                  <a:solidFill>
+                    <a:srgbClr val="008080"/>
+                  </a:solidFill>
+                  <a:latin typeface="Engravers MT" panose="02090707080505020304" pitchFamily="18" charset="0"/>
+                </a:rPr>
+                <a:t>Engine</a:t>
+              </a:r>
+            </a:p>
+          </p:txBody>
+        </p:sp>
+        <p:grpSp>
+          <p:nvGrpSpPr>
+            <p:cNvPr id="26" name="Group 25">
+              <a:extLst>
+                <a:ext uri="{FF2B5EF4-FFF2-40B4-BE49-F238E27FC236}">
+                  <a16:creationId xmlns:a16="http://schemas.microsoft.com/office/drawing/2014/main" id="{93C468FF-D62C-8067-4065-F3DD00F5F4B3}"/>
+                </a:ext>
+              </a:extLst>
+            </p:cNvPr>
+            <p:cNvGrpSpPr/>
+            <p:nvPr/>
+          </p:nvGrpSpPr>
+          <p:grpSpPr>
+            <a:xfrm>
+              <a:off x="6986985" y="4577378"/>
+              <a:ext cx="4253087" cy="1538135"/>
+              <a:chOff x="6986985" y="4577378"/>
+              <a:chExt cx="4253087" cy="1538135"/>
+            </a:xfrm>
+          </p:grpSpPr>
+          <p:sp>
+            <p:nvSpPr>
+              <p:cNvPr id="21" name="Rectangle 20">
+                <a:extLst>
+                  <a:ext uri="{FF2B5EF4-FFF2-40B4-BE49-F238E27FC236}">
+                    <a16:creationId xmlns:a16="http://schemas.microsoft.com/office/drawing/2014/main" id="{C6E52684-8DE7-DA53-B251-F17C819A2965}"/>
+                  </a:ext>
+                </a:extLst>
+              </p:cNvPr>
+              <p:cNvSpPr/>
+              <p:nvPr/>
+            </p:nvSpPr>
+            <p:spPr>
+              <a:xfrm>
+                <a:off x="7114271" y="4876242"/>
+                <a:ext cx="1223963" cy="149432"/>
+              </a:xfrm>
+              <a:prstGeom prst="rect">
+                <a:avLst/>
+              </a:prstGeom>
+              <a:solidFill>
+                <a:schemeClr val="tx2">
+                  <a:lumMod val="50000"/>
+                  <a:lumOff val="50000"/>
+                </a:schemeClr>
+              </a:solidFill>
+              <a:ln w="3175">
+                <a:noFill/>
+              </a:ln>
+              <a:effectLst>
+                <a:outerShdw blurRad="57785" dist="33020" dir="3180000" algn="ctr">
+                  <a:srgbClr val="000000">
+                    <a:alpha val="30000"/>
+                  </a:srgbClr>
+                </a:outerShdw>
+              </a:effectLst>
+            </p:spPr>
+            <p:style>
+              <a:lnRef idx="2">
+                <a:schemeClr val="accent1">
+                  <a:shade val="15000"/>
+                </a:schemeClr>
+              </a:lnRef>
+              <a:fillRef idx="1">
+                <a:schemeClr val="accent1"/>
+              </a:fillRef>
+              <a:effectRef idx="0">
+                <a:schemeClr val="accent1"/>
+              </a:effectRef>
+              <a:fontRef idx="minor">
+                <a:schemeClr val="lt1"/>
+              </a:fontRef>
+            </p:style>
+            <p:txBody>
+              <a:bodyPr rtlCol="0" anchor="ctr"/>
+              <a:lstStyle/>
+              <a:p>
+                <a:pPr algn="ctr"/>
+                <a:endParaRPr lang="en-150">
+                  <a:ln w="3175">
+                    <a:solidFill>
+                      <a:schemeClr val="bg1">
+                        <a:lumMod val="95000"/>
+                      </a:schemeClr>
+                    </a:solidFill>
+                  </a:ln>
+                  <a:solidFill>
+                    <a:srgbClr val="1A1F71"/>
+                  </a:solidFill>
+                </a:endParaRPr>
+              </a:p>
+            </p:txBody>
+          </p:sp>
+          <p:sp>
+            <p:nvSpPr>
+              <p:cNvPr id="23" name="Rectangle 22">
+                <a:extLst>
+                  <a:ext uri="{FF2B5EF4-FFF2-40B4-BE49-F238E27FC236}">
+                    <a16:creationId xmlns:a16="http://schemas.microsoft.com/office/drawing/2014/main" id="{8A0AD76C-12EF-7077-8E8C-9BD37BBCD65B}"/>
+                  </a:ext>
+                </a:extLst>
+              </p:cNvPr>
+              <p:cNvSpPr/>
+              <p:nvPr/>
+            </p:nvSpPr>
+            <p:spPr>
+              <a:xfrm>
+                <a:off x="8338234" y="4726810"/>
+                <a:ext cx="1368425" cy="149432"/>
+              </a:xfrm>
+              <a:prstGeom prst="rect">
+                <a:avLst/>
+              </a:prstGeom>
+              <a:solidFill>
+                <a:schemeClr val="tx2">
+                  <a:lumMod val="50000"/>
+                  <a:lumOff val="50000"/>
+                </a:schemeClr>
+              </a:solidFill>
+              <a:ln w="3175">
+                <a:noFill/>
+              </a:ln>
+              <a:effectLst>
+                <a:outerShdw blurRad="57785" dist="33020" dir="3180000" algn="ctr">
+                  <a:srgbClr val="000000">
+                    <a:alpha val="30000"/>
+                  </a:srgbClr>
+                </a:outerShdw>
+              </a:effectLst>
+            </p:spPr>
+            <p:style>
+              <a:lnRef idx="2">
+                <a:schemeClr val="accent1">
+                  <a:shade val="15000"/>
+                </a:schemeClr>
+              </a:lnRef>
+              <a:fillRef idx="1">
+                <a:schemeClr val="accent1"/>
+              </a:fillRef>
+              <a:effectRef idx="0">
+                <a:schemeClr val="accent1"/>
+              </a:effectRef>
+              <a:fontRef idx="minor">
+                <a:schemeClr val="lt1"/>
+              </a:fontRef>
+            </p:style>
+            <p:txBody>
+              <a:bodyPr rtlCol="0" anchor="ctr"/>
+              <a:lstStyle/>
+              <a:p>
+                <a:pPr algn="ctr"/>
+                <a:endParaRPr lang="en-150">
+                  <a:ln w="3175">
+                    <a:solidFill>
+                      <a:schemeClr val="bg1">
+                        <a:lumMod val="95000"/>
+                      </a:schemeClr>
+                    </a:solidFill>
+                  </a:ln>
+                  <a:solidFill>
+                    <a:srgbClr val="1A1F71"/>
+                  </a:solidFill>
+                </a:endParaRPr>
+              </a:p>
+            </p:txBody>
+          </p:sp>
+          <p:sp>
+            <p:nvSpPr>
+              <p:cNvPr id="24" name="TextBox 23">
+                <a:extLst>
+                  <a:ext uri="{FF2B5EF4-FFF2-40B4-BE49-F238E27FC236}">
+                    <a16:creationId xmlns:a16="http://schemas.microsoft.com/office/drawing/2014/main" id="{097A20E6-BF75-FF2A-ED2A-F241176B392C}"/>
+                  </a:ext>
+                </a:extLst>
+              </p:cNvPr>
+              <p:cNvSpPr txBox="1"/>
+              <p:nvPr/>
+            </p:nvSpPr>
+            <p:spPr>
+              <a:xfrm>
+                <a:off x="6986985" y="4915184"/>
+                <a:ext cx="4253087" cy="1200329"/>
+              </a:xfrm>
+              <a:prstGeom prst="rect">
+                <a:avLst/>
+              </a:prstGeom>
+              <a:noFill/>
+              <a:ln>
+                <a:noFill/>
+              </a:ln>
+              <a:effectLst>
+                <a:outerShdw blurRad="57785" dist="33020" dir="3180000" algn="ctr">
+                  <a:srgbClr val="000000">
+                    <a:alpha val="30000"/>
+                  </a:srgbClr>
+                </a:outerShdw>
+              </a:effectLst>
+            </p:spPr>
+            <p:txBody>
+              <a:bodyPr wrap="none" rtlCol="0">
+                <a:spAutoFit/>
+                <a:sp3d extrusionH="38100">
+                  <a:bevelT w="38100" h="38100"/>
+                </a:sp3d>
+              </a:bodyPr>
+              <a:lstStyle/>
+              <a:p>
+                <a:r>
+                  <a:rPr lang="en-US" sz="7200" dirty="0">
+                    <a:ln w="3175">
+                      <a:noFill/>
+                    </a:ln>
+                    <a:solidFill>
+                      <a:schemeClr val="tx2">
+                        <a:lumMod val="50000"/>
+                        <a:lumOff val="50000"/>
+                      </a:schemeClr>
+                    </a:solidFill>
+                    <a:latin typeface="Aafia" pitchFamily="50" charset="0"/>
+                  </a:rPr>
+                  <a:t>LaDe</a:t>
+                </a:r>
+                <a:r>
+                  <a:rPr lang="en-US" sz="7200" dirty="0">
+                    <a:ln w="3175">
+                      <a:noFill/>
+                    </a:ln>
+                    <a:solidFill>
+                      <a:srgbClr val="FFD700"/>
+                    </a:solidFill>
+                    <a:latin typeface="Aafia" pitchFamily="50" charset="0"/>
+                  </a:rPr>
+                  <a:t>RR</a:t>
+                </a:r>
+              </a:p>
+            </p:txBody>
+          </p:sp>
+          <p:sp>
+            <p:nvSpPr>
+              <p:cNvPr id="25" name="Rectangle 24">
+                <a:extLst>
+                  <a:ext uri="{FF2B5EF4-FFF2-40B4-BE49-F238E27FC236}">
+                    <a16:creationId xmlns:a16="http://schemas.microsoft.com/office/drawing/2014/main" id="{328A1399-B412-BCCA-FB2B-5018BA9F0929}"/>
+                  </a:ext>
+                </a:extLst>
+              </p:cNvPr>
+              <p:cNvSpPr/>
+              <p:nvPr/>
+            </p:nvSpPr>
+            <p:spPr>
+              <a:xfrm>
+                <a:off x="9706659" y="4577378"/>
+                <a:ext cx="1377950" cy="149432"/>
+              </a:xfrm>
+              <a:prstGeom prst="rect">
+                <a:avLst/>
+              </a:prstGeom>
+              <a:solidFill>
+                <a:srgbClr val="FFD700"/>
+              </a:solidFill>
+              <a:ln w="3175">
+                <a:noFill/>
+              </a:ln>
+              <a:effectLst>
+                <a:outerShdw blurRad="57785" dist="33020" dir="3180000" algn="ctr">
+                  <a:srgbClr val="000000">
+                    <a:alpha val="30000"/>
+                  </a:srgbClr>
+                </a:outerShdw>
+              </a:effectLst>
+            </p:spPr>
+            <p:style>
+              <a:lnRef idx="2">
+                <a:schemeClr val="accent1">
+                  <a:shade val="15000"/>
+                </a:schemeClr>
+              </a:lnRef>
+              <a:fillRef idx="1">
+                <a:schemeClr val="accent1"/>
+              </a:fillRef>
+              <a:effectRef idx="0">
+                <a:schemeClr val="accent1"/>
+              </a:effectRef>
+              <a:fontRef idx="minor">
+                <a:schemeClr val="lt1"/>
+              </a:fontRef>
+            </p:style>
+            <p:txBody>
+              <a:bodyPr rtlCol="0" anchor="ctr"/>
+              <a:lstStyle/>
+              <a:p>
+                <a:pPr algn="ctr"/>
+                <a:endParaRPr lang="en-150">
+                  <a:ln w="3175">
+                    <a:solidFill>
+                      <a:schemeClr val="bg1">
+                        <a:lumMod val="95000"/>
+                      </a:schemeClr>
+                    </a:solidFill>
+                  </a:ln>
+                  <a:solidFill>
+                    <a:srgbClr val="1A1F71"/>
+                  </a:solidFill>
+                </a:endParaRPr>
+              </a:p>
+            </p:txBody>
+          </p:sp>
+        </p:grpSp>
+      </p:grpSp>
+      <p:grpSp>
+        <p:nvGrpSpPr>
+          <p:cNvPr id="28" name="Group 27">
+            <a:extLst>
+              <a:ext uri="{FF2B5EF4-FFF2-40B4-BE49-F238E27FC236}">
+                <a16:creationId xmlns:a16="http://schemas.microsoft.com/office/drawing/2014/main" id="{822C13E6-2895-629F-FC55-470BB1AD8236}"/>
+              </a:ext>
+            </a:extLst>
+          </p:cNvPr>
+          <p:cNvGrpSpPr/>
+          <p:nvPr/>
+        </p:nvGrpSpPr>
+        <p:grpSpPr>
+          <a:xfrm>
+            <a:off x="6926632" y="2500154"/>
+            <a:ext cx="4513548" cy="1899023"/>
+            <a:chOff x="6986985" y="4577378"/>
+            <a:chExt cx="4513548" cy="1899023"/>
+          </a:xfrm>
+        </p:grpSpPr>
+        <p:sp>
+          <p:nvSpPr>
+            <p:cNvPr id="29" name="TextBox 28">
+              <a:extLst>
+                <a:ext uri="{FF2B5EF4-FFF2-40B4-BE49-F238E27FC236}">
+                  <a16:creationId xmlns:a16="http://schemas.microsoft.com/office/drawing/2014/main" id="{D27C93FE-E299-CD38-1EFF-9F1C213FDDB6}"/>
+                </a:ext>
+              </a:extLst>
+            </p:cNvPr>
+            <p:cNvSpPr txBox="1"/>
+            <p:nvPr/>
+          </p:nvSpPr>
+          <p:spPr>
+            <a:xfrm>
+              <a:off x="7088871" y="5645404"/>
+              <a:ext cx="4411662" cy="830997"/>
+            </a:xfrm>
+            <a:prstGeom prst="rect">
+              <a:avLst/>
+            </a:prstGeom>
+            <a:noFill/>
+            <a:ln>
+              <a:noFill/>
+            </a:ln>
+            <a:effectLst>
+              <a:outerShdw blurRad="44450" dist="27940" dir="5400000" algn="ctr">
+                <a:srgbClr val="000000">
+                  <a:alpha val="32000"/>
+                </a:srgbClr>
+              </a:outerShdw>
+            </a:effectLst>
+            <a:scene3d>
+              <a:camera prst="orthographicFront">
+                <a:rot lat="0" lon="0" rev="0"/>
+              </a:camera>
+              <a:lightRig rig="balanced" dir="t">
+                <a:rot lat="0" lon="0" rev="8700000"/>
+              </a:lightRig>
+            </a:scene3d>
+            <a:sp3d>
+              <a:bevelT w="190500" h="38100"/>
+            </a:sp3d>
+          </p:spPr>
+          <p:txBody>
+            <a:bodyPr wrap="square" lIns="0" tIns="0" rIns="0" bIns="0" rtlCol="0">
+              <a:spAutoFit/>
+            </a:bodyPr>
+            <a:lstStyle/>
+            <a:p>
+              <a:pPr algn="just"/>
+              <a:r>
+                <a:rPr lang="en-US" sz="5400" b="1" spc="780" dirty="0">
+                  <a:solidFill>
+                    <a:srgbClr val="C0392B"/>
+                  </a:solidFill>
+                  <a:latin typeface="Engravers MT" panose="02090707080505020304" pitchFamily="18" charset="0"/>
+                </a:rPr>
+                <a:t>Engine</a:t>
+              </a:r>
+            </a:p>
+          </p:txBody>
+        </p:sp>
+        <p:grpSp>
+          <p:nvGrpSpPr>
+            <p:cNvPr id="30" name="Group 29">
+              <a:extLst>
+                <a:ext uri="{FF2B5EF4-FFF2-40B4-BE49-F238E27FC236}">
+                  <a16:creationId xmlns:a16="http://schemas.microsoft.com/office/drawing/2014/main" id="{C70F7326-5ECC-C503-741C-03636DFC5E69}"/>
+                </a:ext>
+              </a:extLst>
+            </p:cNvPr>
+            <p:cNvGrpSpPr/>
+            <p:nvPr/>
+          </p:nvGrpSpPr>
+          <p:grpSpPr>
+            <a:xfrm>
+              <a:off x="6986985" y="4577378"/>
+              <a:ext cx="4253087" cy="1538135"/>
+              <a:chOff x="6986985" y="4577378"/>
+              <a:chExt cx="4253087" cy="1538135"/>
+            </a:xfrm>
+          </p:grpSpPr>
+          <p:sp>
+            <p:nvSpPr>
+              <p:cNvPr id="31" name="Rectangle 30">
+                <a:extLst>
+                  <a:ext uri="{FF2B5EF4-FFF2-40B4-BE49-F238E27FC236}">
+                    <a16:creationId xmlns:a16="http://schemas.microsoft.com/office/drawing/2014/main" id="{03E7FD8F-80EE-3F62-8711-6F69404FC2E7}"/>
+                  </a:ext>
+                </a:extLst>
+              </p:cNvPr>
+              <p:cNvSpPr/>
+              <p:nvPr/>
+            </p:nvSpPr>
+            <p:spPr>
+              <a:xfrm>
+                <a:off x="7114271" y="4876242"/>
+                <a:ext cx="1223963" cy="149432"/>
+              </a:xfrm>
+              <a:prstGeom prst="rect">
+                <a:avLst/>
+              </a:prstGeom>
+              <a:solidFill>
+                <a:schemeClr val="tx2">
+                  <a:lumMod val="50000"/>
+                  <a:lumOff val="50000"/>
+                </a:schemeClr>
+              </a:solidFill>
+              <a:ln w="3175">
+                <a:noFill/>
+              </a:ln>
+              <a:effectLst>
+                <a:outerShdw blurRad="57785" dist="33020" dir="3180000" algn="ctr">
+                  <a:srgbClr val="000000">
+                    <a:alpha val="30000"/>
+                  </a:srgbClr>
+                </a:outerShdw>
+              </a:effectLst>
+            </p:spPr>
+            <p:style>
+              <a:lnRef idx="2">
+                <a:schemeClr val="accent1">
+                  <a:shade val="15000"/>
+                </a:schemeClr>
+              </a:lnRef>
+              <a:fillRef idx="1">
+                <a:schemeClr val="accent1"/>
+              </a:fillRef>
+              <a:effectRef idx="0">
+                <a:schemeClr val="accent1"/>
+              </a:effectRef>
+              <a:fontRef idx="minor">
+                <a:schemeClr val="lt1"/>
+              </a:fontRef>
+            </p:style>
+            <p:txBody>
+              <a:bodyPr rtlCol="0" anchor="ctr"/>
+              <a:lstStyle/>
+              <a:p>
+                <a:pPr algn="ctr"/>
+                <a:endParaRPr lang="en-150">
+                  <a:ln w="3175">
+                    <a:solidFill>
+                      <a:schemeClr val="bg1">
+                        <a:lumMod val="95000"/>
+                      </a:schemeClr>
+                    </a:solidFill>
+                  </a:ln>
+                  <a:solidFill>
+                    <a:srgbClr val="1A1F71"/>
+                  </a:solidFill>
+                </a:endParaRPr>
+              </a:p>
+            </p:txBody>
+          </p:sp>
+          <p:sp>
+            <p:nvSpPr>
+              <p:cNvPr id="32" name="Rectangle 31">
+                <a:extLst>
+                  <a:ext uri="{FF2B5EF4-FFF2-40B4-BE49-F238E27FC236}">
+                    <a16:creationId xmlns:a16="http://schemas.microsoft.com/office/drawing/2014/main" id="{D590932E-2DB5-68B8-4449-49F455A247E0}"/>
+                  </a:ext>
+                </a:extLst>
+              </p:cNvPr>
+              <p:cNvSpPr/>
+              <p:nvPr/>
+            </p:nvSpPr>
+            <p:spPr>
+              <a:xfrm>
+                <a:off x="8338234" y="4726810"/>
+                <a:ext cx="1368425" cy="149432"/>
+              </a:xfrm>
+              <a:prstGeom prst="rect">
+                <a:avLst/>
+              </a:prstGeom>
+              <a:solidFill>
+                <a:schemeClr val="tx2">
+                  <a:lumMod val="50000"/>
+                  <a:lumOff val="50000"/>
+                </a:schemeClr>
+              </a:solidFill>
+              <a:ln w="3175">
+                <a:noFill/>
+              </a:ln>
+              <a:effectLst>
+                <a:outerShdw blurRad="57785" dist="33020" dir="3180000" algn="ctr">
+                  <a:srgbClr val="000000">
+                    <a:alpha val="30000"/>
+                  </a:srgbClr>
+                </a:outerShdw>
+              </a:effectLst>
+            </p:spPr>
+            <p:style>
+              <a:lnRef idx="2">
+                <a:schemeClr val="accent1">
+                  <a:shade val="15000"/>
+                </a:schemeClr>
+              </a:lnRef>
+              <a:fillRef idx="1">
+                <a:schemeClr val="accent1"/>
+              </a:fillRef>
+              <a:effectRef idx="0">
+                <a:schemeClr val="accent1"/>
+              </a:effectRef>
+              <a:fontRef idx="minor">
+                <a:schemeClr val="lt1"/>
+              </a:fontRef>
+            </p:style>
+            <p:txBody>
+              <a:bodyPr rtlCol="0" anchor="ctr"/>
+              <a:lstStyle/>
+              <a:p>
+                <a:pPr algn="ctr"/>
+                <a:endParaRPr lang="en-150">
+                  <a:ln w="3175">
+                    <a:solidFill>
+                      <a:schemeClr val="bg1">
+                        <a:lumMod val="95000"/>
+                      </a:schemeClr>
+                    </a:solidFill>
+                  </a:ln>
+                  <a:solidFill>
+                    <a:srgbClr val="1A1F71"/>
+                  </a:solidFill>
+                </a:endParaRPr>
+              </a:p>
+            </p:txBody>
+          </p:sp>
+          <p:sp>
+            <p:nvSpPr>
+              <p:cNvPr id="33" name="TextBox 32">
+                <a:extLst>
+                  <a:ext uri="{FF2B5EF4-FFF2-40B4-BE49-F238E27FC236}">
+                    <a16:creationId xmlns:a16="http://schemas.microsoft.com/office/drawing/2014/main" id="{379E42A2-C04C-F093-EFA1-B6FBA6D7959D}"/>
+                  </a:ext>
+                </a:extLst>
+              </p:cNvPr>
+              <p:cNvSpPr txBox="1"/>
+              <p:nvPr/>
+            </p:nvSpPr>
+            <p:spPr>
+              <a:xfrm>
+                <a:off x="6986985" y="4915184"/>
+                <a:ext cx="4253087" cy="1200329"/>
+              </a:xfrm>
+              <a:prstGeom prst="rect">
+                <a:avLst/>
+              </a:prstGeom>
+              <a:noFill/>
+              <a:ln>
+                <a:noFill/>
+              </a:ln>
+              <a:effectLst>
+                <a:outerShdw blurRad="57785" dist="33020" dir="3180000" algn="ctr">
+                  <a:srgbClr val="000000">
+                    <a:alpha val="30000"/>
+                  </a:srgbClr>
+                </a:outerShdw>
+              </a:effectLst>
+            </p:spPr>
+            <p:txBody>
+              <a:bodyPr wrap="none" rtlCol="0">
+                <a:spAutoFit/>
+                <a:sp3d extrusionH="38100">
+                  <a:bevelT w="38100" h="38100"/>
+                </a:sp3d>
+              </a:bodyPr>
+              <a:lstStyle/>
+              <a:p>
+                <a:r>
+                  <a:rPr lang="en-US" sz="7200" dirty="0">
+                    <a:ln w="3175">
+                      <a:noFill/>
+                    </a:ln>
+                    <a:solidFill>
+                      <a:schemeClr val="tx2">
+                        <a:lumMod val="50000"/>
+                        <a:lumOff val="50000"/>
+                      </a:schemeClr>
+                    </a:solidFill>
+                    <a:latin typeface="Aafia" pitchFamily="50" charset="0"/>
+                  </a:rPr>
+                  <a:t>LaDe</a:t>
+                </a:r>
+                <a:r>
+                  <a:rPr lang="en-US" sz="7200" dirty="0">
+                    <a:ln w="3175">
+                      <a:noFill/>
+                    </a:ln>
+                    <a:solidFill>
+                      <a:srgbClr val="FFD700"/>
+                    </a:solidFill>
+                    <a:latin typeface="Aafia" pitchFamily="50" charset="0"/>
+                  </a:rPr>
+                  <a:t>RR</a:t>
+                </a:r>
+              </a:p>
+            </p:txBody>
+          </p:sp>
+          <p:sp>
+            <p:nvSpPr>
+              <p:cNvPr id="34" name="Rectangle 33">
+                <a:extLst>
+                  <a:ext uri="{FF2B5EF4-FFF2-40B4-BE49-F238E27FC236}">
+                    <a16:creationId xmlns:a16="http://schemas.microsoft.com/office/drawing/2014/main" id="{5D995924-A3DE-8A5D-80B4-0EEB3BA133A9}"/>
+                  </a:ext>
+                </a:extLst>
+              </p:cNvPr>
+              <p:cNvSpPr/>
+              <p:nvPr/>
+            </p:nvSpPr>
+            <p:spPr>
+              <a:xfrm>
+                <a:off x="9706659" y="4577378"/>
+                <a:ext cx="1377950" cy="149432"/>
+              </a:xfrm>
+              <a:prstGeom prst="rect">
+                <a:avLst/>
+              </a:prstGeom>
+              <a:solidFill>
+                <a:srgbClr val="FFD700"/>
+              </a:solidFill>
+              <a:ln w="3175">
+                <a:noFill/>
+              </a:ln>
+              <a:effectLst>
+                <a:outerShdw blurRad="57785" dist="33020" dir="3180000" algn="ctr">
+                  <a:srgbClr val="000000">
+                    <a:alpha val="30000"/>
+                  </a:srgbClr>
+                </a:outerShdw>
+              </a:effectLst>
+            </p:spPr>
+            <p:style>
+              <a:lnRef idx="2">
+                <a:schemeClr val="accent1">
+                  <a:shade val="15000"/>
+                </a:schemeClr>
+              </a:lnRef>
+              <a:fillRef idx="1">
+                <a:schemeClr val="accent1"/>
+              </a:fillRef>
+              <a:effectRef idx="0">
+                <a:schemeClr val="accent1"/>
+              </a:effectRef>
+              <a:fontRef idx="minor">
+                <a:schemeClr val="lt1"/>
+              </a:fontRef>
+            </p:style>
+            <p:txBody>
+              <a:bodyPr rtlCol="0" anchor="ctr"/>
+              <a:lstStyle/>
+              <a:p>
+                <a:pPr algn="ctr"/>
+                <a:endParaRPr lang="en-150">
+                  <a:ln w="3175">
+                    <a:solidFill>
+                      <a:schemeClr val="bg1">
+                        <a:lumMod val="95000"/>
+                      </a:schemeClr>
+                    </a:solidFill>
+                  </a:ln>
+                  <a:solidFill>
+                    <a:srgbClr val="1A1F71"/>
+                  </a:solidFill>
+                </a:endParaRPr>
+              </a:p>
+            </p:txBody>
+          </p:sp>
+        </p:grpSp>
+      </p:grpSp>
+      <p:grpSp>
+        <p:nvGrpSpPr>
+          <p:cNvPr id="35" name="Group 34">
+            <a:extLst>
+              <a:ext uri="{FF2B5EF4-FFF2-40B4-BE49-F238E27FC236}">
+                <a16:creationId xmlns:a16="http://schemas.microsoft.com/office/drawing/2014/main" id="{BF2C4355-3640-4CC6-19C5-C17823F65D8D}"/>
+              </a:ext>
+            </a:extLst>
+          </p:cNvPr>
+          <p:cNvGrpSpPr/>
+          <p:nvPr/>
+        </p:nvGrpSpPr>
+        <p:grpSpPr>
+          <a:xfrm>
+            <a:off x="6926632" y="304416"/>
+            <a:ext cx="4513548" cy="1899023"/>
+            <a:chOff x="6986985" y="4577378"/>
+            <a:chExt cx="4513548" cy="1899023"/>
+          </a:xfrm>
+        </p:grpSpPr>
+        <p:sp>
+          <p:nvSpPr>
+            <p:cNvPr id="36" name="TextBox 35">
+              <a:extLst>
+                <a:ext uri="{FF2B5EF4-FFF2-40B4-BE49-F238E27FC236}">
+                  <a16:creationId xmlns:a16="http://schemas.microsoft.com/office/drawing/2014/main" id="{D76913A1-65F8-AFD6-E161-72C436EE350E}"/>
+                </a:ext>
+              </a:extLst>
+            </p:cNvPr>
+            <p:cNvSpPr txBox="1"/>
+            <p:nvPr/>
+          </p:nvSpPr>
+          <p:spPr>
+            <a:xfrm>
+              <a:off x="7088871" y="5645404"/>
+              <a:ext cx="4411662" cy="830997"/>
+            </a:xfrm>
+            <a:prstGeom prst="rect">
+              <a:avLst/>
+            </a:prstGeom>
+            <a:noFill/>
+            <a:ln>
+              <a:noFill/>
+            </a:ln>
+            <a:effectLst>
+              <a:outerShdw blurRad="44450" dist="27940" dir="5400000" algn="ctr">
+                <a:srgbClr val="000000">
+                  <a:alpha val="32000"/>
+                </a:srgbClr>
+              </a:outerShdw>
+            </a:effectLst>
+            <a:scene3d>
+              <a:camera prst="orthographicFront">
+                <a:rot lat="0" lon="0" rev="0"/>
+              </a:camera>
+              <a:lightRig rig="balanced" dir="t">
+                <a:rot lat="0" lon="0" rev="8700000"/>
+              </a:lightRig>
+            </a:scene3d>
+            <a:sp3d>
+              <a:bevelT w="190500" h="38100"/>
+            </a:sp3d>
+          </p:spPr>
+          <p:txBody>
+            <a:bodyPr wrap="square" lIns="0" tIns="0" rIns="0" bIns="0" rtlCol="0">
+              <a:spAutoFit/>
+            </a:bodyPr>
+            <a:lstStyle/>
+            <a:p>
+              <a:pPr algn="just"/>
+              <a:r>
+                <a:rPr lang="en-US" sz="5400" b="1" spc="780" dirty="0">
+                  <a:solidFill>
+                    <a:srgbClr val="4A4A4A"/>
+                  </a:solidFill>
+                  <a:latin typeface="Engravers MT" panose="02090707080505020304" pitchFamily="18" charset="0"/>
+                </a:rPr>
+                <a:t>Engine</a:t>
+              </a:r>
+            </a:p>
+          </p:txBody>
+        </p:sp>
+        <p:grpSp>
+          <p:nvGrpSpPr>
+            <p:cNvPr id="37" name="Group 36">
+              <a:extLst>
+                <a:ext uri="{FF2B5EF4-FFF2-40B4-BE49-F238E27FC236}">
+                  <a16:creationId xmlns:a16="http://schemas.microsoft.com/office/drawing/2014/main" id="{4CB1A1F2-1907-206C-61E9-E6A3B75F78DD}"/>
+                </a:ext>
+              </a:extLst>
+            </p:cNvPr>
+            <p:cNvGrpSpPr/>
+            <p:nvPr/>
+          </p:nvGrpSpPr>
+          <p:grpSpPr>
+            <a:xfrm>
+              <a:off x="6986985" y="4577378"/>
+              <a:ext cx="4253087" cy="1538135"/>
+              <a:chOff x="6986985" y="4577378"/>
+              <a:chExt cx="4253087" cy="1538135"/>
+            </a:xfrm>
+          </p:grpSpPr>
+          <p:sp>
+            <p:nvSpPr>
+              <p:cNvPr id="38" name="Rectangle 37">
+                <a:extLst>
+                  <a:ext uri="{FF2B5EF4-FFF2-40B4-BE49-F238E27FC236}">
+                    <a16:creationId xmlns:a16="http://schemas.microsoft.com/office/drawing/2014/main" id="{CD18A72C-B8BD-C71F-E187-7D04F724EE50}"/>
+                  </a:ext>
+                </a:extLst>
+              </p:cNvPr>
+              <p:cNvSpPr/>
+              <p:nvPr/>
+            </p:nvSpPr>
+            <p:spPr>
+              <a:xfrm>
+                <a:off x="7114271" y="4876242"/>
+                <a:ext cx="1223963" cy="149432"/>
+              </a:xfrm>
+              <a:prstGeom prst="rect">
+                <a:avLst/>
+              </a:prstGeom>
+              <a:solidFill>
+                <a:schemeClr val="tx2">
+                  <a:lumMod val="50000"/>
+                  <a:lumOff val="50000"/>
+                </a:schemeClr>
+              </a:solidFill>
+              <a:ln w="3175">
+                <a:noFill/>
+              </a:ln>
+              <a:effectLst>
+                <a:outerShdw blurRad="57785" dist="33020" dir="3180000" algn="ctr">
+                  <a:srgbClr val="000000">
+                    <a:alpha val="30000"/>
+                  </a:srgbClr>
+                </a:outerShdw>
+              </a:effectLst>
+            </p:spPr>
+            <p:style>
+              <a:lnRef idx="2">
+                <a:schemeClr val="accent1">
+                  <a:shade val="15000"/>
+                </a:schemeClr>
+              </a:lnRef>
+              <a:fillRef idx="1">
+                <a:schemeClr val="accent1"/>
+              </a:fillRef>
+              <a:effectRef idx="0">
+                <a:schemeClr val="accent1"/>
+              </a:effectRef>
+              <a:fontRef idx="minor">
+                <a:schemeClr val="lt1"/>
+              </a:fontRef>
+            </p:style>
+            <p:txBody>
+              <a:bodyPr rtlCol="0" anchor="ctr"/>
+              <a:lstStyle/>
+              <a:p>
+                <a:pPr algn="ctr"/>
+                <a:endParaRPr lang="en-150">
+                  <a:ln w="3175">
+                    <a:solidFill>
+                      <a:schemeClr val="bg1">
+                        <a:lumMod val="95000"/>
+                      </a:schemeClr>
+                    </a:solidFill>
+                  </a:ln>
+                  <a:solidFill>
+                    <a:srgbClr val="1A1F71"/>
+                  </a:solidFill>
+                </a:endParaRPr>
+              </a:p>
+            </p:txBody>
+          </p:sp>
+          <p:sp>
+            <p:nvSpPr>
+              <p:cNvPr id="39" name="Rectangle 38">
+                <a:extLst>
+                  <a:ext uri="{FF2B5EF4-FFF2-40B4-BE49-F238E27FC236}">
+                    <a16:creationId xmlns:a16="http://schemas.microsoft.com/office/drawing/2014/main" id="{64310A21-199A-3FEA-A9F7-D3C71B8762A8}"/>
+                  </a:ext>
+                </a:extLst>
+              </p:cNvPr>
+              <p:cNvSpPr/>
+              <p:nvPr/>
+            </p:nvSpPr>
+            <p:spPr>
+              <a:xfrm>
+                <a:off x="8338234" y="4726810"/>
+                <a:ext cx="1368425" cy="149432"/>
+              </a:xfrm>
+              <a:prstGeom prst="rect">
+                <a:avLst/>
+              </a:prstGeom>
+              <a:solidFill>
+                <a:schemeClr val="tx2">
+                  <a:lumMod val="50000"/>
+                  <a:lumOff val="50000"/>
+                </a:schemeClr>
+              </a:solidFill>
+              <a:ln w="3175">
+                <a:noFill/>
+              </a:ln>
+              <a:effectLst>
+                <a:outerShdw blurRad="57785" dist="33020" dir="3180000" algn="ctr">
+                  <a:srgbClr val="000000">
+                    <a:alpha val="30000"/>
+                  </a:srgbClr>
+                </a:outerShdw>
+              </a:effectLst>
+            </p:spPr>
+            <p:style>
+              <a:lnRef idx="2">
+                <a:schemeClr val="accent1">
+                  <a:shade val="15000"/>
+                </a:schemeClr>
+              </a:lnRef>
+              <a:fillRef idx="1">
+                <a:schemeClr val="accent1"/>
+              </a:fillRef>
+              <a:effectRef idx="0">
+                <a:schemeClr val="accent1"/>
+              </a:effectRef>
+              <a:fontRef idx="minor">
+                <a:schemeClr val="lt1"/>
+              </a:fontRef>
+            </p:style>
+            <p:txBody>
+              <a:bodyPr rtlCol="0" anchor="ctr"/>
+              <a:lstStyle/>
+              <a:p>
+                <a:pPr algn="ctr"/>
+                <a:endParaRPr lang="en-150">
+                  <a:ln w="3175">
+                    <a:solidFill>
+                      <a:schemeClr val="bg1">
+                        <a:lumMod val="95000"/>
+                      </a:schemeClr>
+                    </a:solidFill>
+                  </a:ln>
+                  <a:solidFill>
+                    <a:srgbClr val="1A1F71"/>
+                  </a:solidFill>
+                </a:endParaRPr>
+              </a:p>
+            </p:txBody>
+          </p:sp>
+          <p:sp>
+            <p:nvSpPr>
+              <p:cNvPr id="40" name="TextBox 39">
+                <a:extLst>
+                  <a:ext uri="{FF2B5EF4-FFF2-40B4-BE49-F238E27FC236}">
+                    <a16:creationId xmlns:a16="http://schemas.microsoft.com/office/drawing/2014/main" id="{C52801D7-72B0-2EFB-AA18-69DB47D8EC62}"/>
+                  </a:ext>
+                </a:extLst>
+              </p:cNvPr>
+              <p:cNvSpPr txBox="1"/>
+              <p:nvPr/>
+            </p:nvSpPr>
+            <p:spPr>
+              <a:xfrm>
+                <a:off x="6986985" y="4915184"/>
+                <a:ext cx="4253087" cy="1200329"/>
+              </a:xfrm>
+              <a:prstGeom prst="rect">
+                <a:avLst/>
+              </a:prstGeom>
+              <a:noFill/>
+              <a:ln>
+                <a:noFill/>
+              </a:ln>
+              <a:effectLst>
+                <a:outerShdw blurRad="57785" dist="33020" dir="3180000" algn="ctr">
+                  <a:srgbClr val="000000">
+                    <a:alpha val="30000"/>
+                  </a:srgbClr>
+                </a:outerShdw>
+              </a:effectLst>
+            </p:spPr>
+            <p:txBody>
+              <a:bodyPr wrap="none" rtlCol="0">
+                <a:spAutoFit/>
+                <a:sp3d extrusionH="38100">
+                  <a:bevelT w="38100" h="38100"/>
+                </a:sp3d>
+              </a:bodyPr>
+              <a:lstStyle/>
+              <a:p>
+                <a:r>
+                  <a:rPr lang="en-US" sz="7200" dirty="0">
+                    <a:ln w="3175">
+                      <a:noFill/>
+                    </a:ln>
+                    <a:solidFill>
+                      <a:schemeClr val="tx2">
+                        <a:lumMod val="50000"/>
+                        <a:lumOff val="50000"/>
+                      </a:schemeClr>
+                    </a:solidFill>
+                    <a:latin typeface="Aafia" pitchFamily="50" charset="0"/>
+                  </a:rPr>
+                  <a:t>LaDe</a:t>
+                </a:r>
+                <a:r>
+                  <a:rPr lang="en-US" sz="7200" dirty="0">
+                    <a:ln w="3175">
+                      <a:noFill/>
+                    </a:ln>
+                    <a:solidFill>
+                      <a:srgbClr val="FFD700"/>
+                    </a:solidFill>
+                    <a:latin typeface="Aafia" pitchFamily="50" charset="0"/>
+                  </a:rPr>
+                  <a:t>RR</a:t>
+                </a:r>
+              </a:p>
+            </p:txBody>
+          </p:sp>
+          <p:sp>
+            <p:nvSpPr>
+              <p:cNvPr id="41" name="Rectangle 40">
+                <a:extLst>
+                  <a:ext uri="{FF2B5EF4-FFF2-40B4-BE49-F238E27FC236}">
+                    <a16:creationId xmlns:a16="http://schemas.microsoft.com/office/drawing/2014/main" id="{60104207-91C5-93DD-6847-E5B4F05BD4BA}"/>
+                  </a:ext>
+                </a:extLst>
+              </p:cNvPr>
+              <p:cNvSpPr/>
+              <p:nvPr/>
+            </p:nvSpPr>
+            <p:spPr>
+              <a:xfrm>
+                <a:off x="9706659" y="4577378"/>
+                <a:ext cx="1377950" cy="149432"/>
+              </a:xfrm>
+              <a:prstGeom prst="rect">
+                <a:avLst/>
+              </a:prstGeom>
+              <a:solidFill>
+                <a:srgbClr val="FFD700"/>
+              </a:solidFill>
+              <a:ln w="3175">
+                <a:noFill/>
+              </a:ln>
+              <a:effectLst>
+                <a:outerShdw blurRad="57785" dist="33020" dir="3180000" algn="ctr">
+                  <a:srgbClr val="000000">
+                    <a:alpha val="30000"/>
+                  </a:srgbClr>
+                </a:outerShdw>
+              </a:effectLst>
+            </p:spPr>
+            <p:style>
+              <a:lnRef idx="2">
+                <a:schemeClr val="accent1">
+                  <a:shade val="15000"/>
+                </a:schemeClr>
+              </a:lnRef>
+              <a:fillRef idx="1">
+                <a:schemeClr val="accent1"/>
+              </a:fillRef>
+              <a:effectRef idx="0">
+                <a:schemeClr val="accent1"/>
+              </a:effectRef>
+              <a:fontRef idx="minor">
+                <a:schemeClr val="lt1"/>
+              </a:fontRef>
+            </p:style>
+            <p:txBody>
+              <a:bodyPr rtlCol="0" anchor="ctr"/>
+              <a:lstStyle/>
+              <a:p>
+                <a:pPr algn="ctr"/>
+                <a:endParaRPr lang="en-150">
+                  <a:ln w="3175">
+                    <a:solidFill>
+                      <a:schemeClr val="bg1">
+                        <a:lumMod val="95000"/>
+                      </a:schemeClr>
+                    </a:solidFill>
+                  </a:ln>
+                  <a:solidFill>
+                    <a:srgbClr val="1A1F71"/>
+                  </a:solidFill>
+                </a:endParaRPr>
+              </a:p>
+            </p:txBody>
+          </p:sp>
+        </p:grpSp>
+      </p:grpSp>
+      <p:grpSp>
+        <p:nvGrpSpPr>
+          <p:cNvPr id="42" name="Group 41">
+            <a:extLst>
+              <a:ext uri="{FF2B5EF4-FFF2-40B4-BE49-F238E27FC236}">
+                <a16:creationId xmlns:a16="http://schemas.microsoft.com/office/drawing/2014/main" id="{DC072372-9799-CA1C-F50D-8CEAC18FA525}"/>
+              </a:ext>
+            </a:extLst>
+          </p:cNvPr>
+          <p:cNvGrpSpPr/>
+          <p:nvPr/>
+        </p:nvGrpSpPr>
+        <p:grpSpPr>
+          <a:xfrm>
+            <a:off x="776597" y="4695891"/>
+            <a:ext cx="4513548" cy="1899023"/>
+            <a:chOff x="6986985" y="4577378"/>
+            <a:chExt cx="4513548" cy="1899023"/>
+          </a:xfrm>
+        </p:grpSpPr>
+        <p:sp>
+          <p:nvSpPr>
+            <p:cNvPr id="43" name="TextBox 42">
+              <a:extLst>
+                <a:ext uri="{FF2B5EF4-FFF2-40B4-BE49-F238E27FC236}">
+                  <a16:creationId xmlns:a16="http://schemas.microsoft.com/office/drawing/2014/main" id="{81A6011C-F4C8-1782-74A2-AC509326F697}"/>
+                </a:ext>
+              </a:extLst>
+            </p:cNvPr>
+            <p:cNvSpPr txBox="1"/>
+            <p:nvPr/>
+          </p:nvSpPr>
+          <p:spPr>
+            <a:xfrm>
+              <a:off x="7088871" y="5645404"/>
+              <a:ext cx="4411662" cy="830997"/>
+            </a:xfrm>
+            <a:prstGeom prst="rect">
+              <a:avLst/>
+            </a:prstGeom>
+            <a:noFill/>
+            <a:ln>
+              <a:noFill/>
+            </a:ln>
+            <a:effectLst>
+              <a:outerShdw blurRad="44450" dist="27940" dir="5400000" algn="ctr">
+                <a:srgbClr val="000000">
+                  <a:alpha val="32000"/>
+                </a:srgbClr>
+              </a:outerShdw>
+            </a:effectLst>
+            <a:scene3d>
+              <a:camera prst="orthographicFront">
+                <a:rot lat="0" lon="0" rev="0"/>
+              </a:camera>
+              <a:lightRig rig="balanced" dir="t">
+                <a:rot lat="0" lon="0" rev="8700000"/>
+              </a:lightRig>
+            </a:scene3d>
+            <a:sp3d>
+              <a:bevelT w="190500" h="38100"/>
+            </a:sp3d>
+          </p:spPr>
+          <p:txBody>
+            <a:bodyPr wrap="square" lIns="0" tIns="0" rIns="0" bIns="0" rtlCol="0">
+              <a:spAutoFit/>
+            </a:bodyPr>
+            <a:lstStyle/>
+            <a:p>
+              <a:pPr algn="just"/>
+              <a:r>
+                <a:rPr lang="en-US" sz="5400" b="1" spc="780" dirty="0">
+                  <a:solidFill>
+                    <a:srgbClr val="008080"/>
+                  </a:solidFill>
+                  <a:latin typeface="Engravers MT" panose="02090707080505020304" pitchFamily="18" charset="0"/>
+                </a:rPr>
+                <a:t>Engine</a:t>
+              </a:r>
+            </a:p>
+          </p:txBody>
+        </p:sp>
+        <p:grpSp>
+          <p:nvGrpSpPr>
+            <p:cNvPr id="44" name="Group 43">
+              <a:extLst>
+                <a:ext uri="{FF2B5EF4-FFF2-40B4-BE49-F238E27FC236}">
+                  <a16:creationId xmlns:a16="http://schemas.microsoft.com/office/drawing/2014/main" id="{0B3EF4B8-3B8D-4412-0141-073947779AD1}"/>
+                </a:ext>
+              </a:extLst>
+            </p:cNvPr>
+            <p:cNvGrpSpPr/>
+            <p:nvPr/>
+          </p:nvGrpSpPr>
+          <p:grpSpPr>
+            <a:xfrm>
+              <a:off x="6986985" y="4577378"/>
+              <a:ext cx="4253087" cy="1538135"/>
+              <a:chOff x="6986985" y="4577378"/>
+              <a:chExt cx="4253087" cy="1538135"/>
+            </a:xfrm>
+          </p:grpSpPr>
+          <p:sp>
+            <p:nvSpPr>
+              <p:cNvPr id="45" name="Rectangle 44">
+                <a:extLst>
+                  <a:ext uri="{FF2B5EF4-FFF2-40B4-BE49-F238E27FC236}">
+                    <a16:creationId xmlns:a16="http://schemas.microsoft.com/office/drawing/2014/main" id="{0AB65660-E09B-A013-C720-7D63D779137E}"/>
+                  </a:ext>
+                </a:extLst>
+              </p:cNvPr>
+              <p:cNvSpPr/>
+              <p:nvPr/>
+            </p:nvSpPr>
+            <p:spPr>
+              <a:xfrm>
+                <a:off x="7114271" y="4876242"/>
+                <a:ext cx="1223963" cy="149432"/>
+              </a:xfrm>
+              <a:prstGeom prst="rect">
+                <a:avLst/>
+              </a:prstGeom>
+              <a:solidFill>
+                <a:schemeClr val="tx2">
+                  <a:lumMod val="50000"/>
+                  <a:lumOff val="50000"/>
+                </a:schemeClr>
+              </a:solidFill>
+              <a:ln w="3175">
+                <a:noFill/>
+              </a:ln>
+              <a:effectLst>
+                <a:outerShdw blurRad="57785" dist="33020" dir="3180000" algn="ctr">
+                  <a:srgbClr val="000000">
+                    <a:alpha val="30000"/>
+                  </a:srgbClr>
+                </a:outerShdw>
+              </a:effectLst>
+            </p:spPr>
+            <p:style>
+              <a:lnRef idx="2">
+                <a:schemeClr val="accent1">
+                  <a:shade val="15000"/>
+                </a:schemeClr>
+              </a:lnRef>
+              <a:fillRef idx="1">
+                <a:schemeClr val="accent1"/>
+              </a:fillRef>
+              <a:effectRef idx="0">
+                <a:schemeClr val="accent1"/>
+              </a:effectRef>
+              <a:fontRef idx="minor">
+                <a:schemeClr val="lt1"/>
+              </a:fontRef>
+            </p:style>
+            <p:txBody>
+              <a:bodyPr rtlCol="0" anchor="ctr"/>
+              <a:lstStyle/>
+              <a:p>
+                <a:pPr algn="ctr"/>
+                <a:endParaRPr lang="en-150">
+                  <a:ln w="3175">
+                    <a:solidFill>
+                      <a:schemeClr val="bg1">
+                        <a:lumMod val="95000"/>
+                      </a:schemeClr>
+                    </a:solidFill>
+                  </a:ln>
+                  <a:solidFill>
+                    <a:srgbClr val="1A1F71"/>
+                  </a:solidFill>
+                </a:endParaRPr>
+              </a:p>
+            </p:txBody>
+          </p:sp>
+          <p:sp>
+            <p:nvSpPr>
+              <p:cNvPr id="46" name="Rectangle 45">
+                <a:extLst>
+                  <a:ext uri="{FF2B5EF4-FFF2-40B4-BE49-F238E27FC236}">
+                    <a16:creationId xmlns:a16="http://schemas.microsoft.com/office/drawing/2014/main" id="{19114469-FD74-551A-A185-4FB90AE07CF8}"/>
+                  </a:ext>
+                </a:extLst>
+              </p:cNvPr>
+              <p:cNvSpPr/>
+              <p:nvPr/>
+            </p:nvSpPr>
+            <p:spPr>
+              <a:xfrm>
+                <a:off x="8338234" y="4726810"/>
+                <a:ext cx="1368425" cy="149432"/>
+              </a:xfrm>
+              <a:prstGeom prst="rect">
+                <a:avLst/>
+              </a:prstGeom>
+              <a:solidFill>
+                <a:schemeClr val="tx2">
+                  <a:lumMod val="50000"/>
+                  <a:lumOff val="50000"/>
+                </a:schemeClr>
+              </a:solidFill>
+              <a:ln w="3175">
+                <a:noFill/>
+              </a:ln>
+              <a:effectLst>
+                <a:outerShdw blurRad="57785" dist="33020" dir="3180000" algn="ctr">
+                  <a:srgbClr val="000000">
+                    <a:alpha val="30000"/>
+                  </a:srgbClr>
+                </a:outerShdw>
+              </a:effectLst>
+            </p:spPr>
+            <p:style>
+              <a:lnRef idx="2">
+                <a:schemeClr val="accent1">
+                  <a:shade val="15000"/>
+                </a:schemeClr>
+              </a:lnRef>
+              <a:fillRef idx="1">
+                <a:schemeClr val="accent1"/>
+              </a:fillRef>
+              <a:effectRef idx="0">
+                <a:schemeClr val="accent1"/>
+              </a:effectRef>
+              <a:fontRef idx="minor">
+                <a:schemeClr val="lt1"/>
+              </a:fontRef>
+            </p:style>
+            <p:txBody>
+              <a:bodyPr rtlCol="0" anchor="ctr"/>
+              <a:lstStyle/>
+              <a:p>
+                <a:pPr algn="ctr"/>
+                <a:endParaRPr lang="en-150">
+                  <a:ln w="3175">
+                    <a:solidFill>
+                      <a:schemeClr val="bg1">
+                        <a:lumMod val="95000"/>
+                      </a:schemeClr>
+                    </a:solidFill>
+                  </a:ln>
+                  <a:solidFill>
+                    <a:srgbClr val="1A1F71"/>
+                  </a:solidFill>
+                </a:endParaRPr>
+              </a:p>
+            </p:txBody>
+          </p:sp>
+          <p:sp>
+            <p:nvSpPr>
+              <p:cNvPr id="47" name="TextBox 46">
+                <a:extLst>
+                  <a:ext uri="{FF2B5EF4-FFF2-40B4-BE49-F238E27FC236}">
+                    <a16:creationId xmlns:a16="http://schemas.microsoft.com/office/drawing/2014/main" id="{16DFCB44-8E4B-8A7E-476F-70A9A8B7DC23}"/>
+                  </a:ext>
+                </a:extLst>
+              </p:cNvPr>
+              <p:cNvSpPr txBox="1"/>
+              <p:nvPr/>
+            </p:nvSpPr>
+            <p:spPr>
+              <a:xfrm>
+                <a:off x="6986985" y="4915184"/>
+                <a:ext cx="4253087" cy="1200329"/>
+              </a:xfrm>
+              <a:prstGeom prst="rect">
+                <a:avLst/>
+              </a:prstGeom>
+              <a:noFill/>
+              <a:ln>
+                <a:noFill/>
+              </a:ln>
+              <a:effectLst>
+                <a:outerShdw blurRad="57785" dist="33020" dir="3180000" algn="ctr">
+                  <a:srgbClr val="000000">
+                    <a:alpha val="30000"/>
+                  </a:srgbClr>
+                </a:outerShdw>
+              </a:effectLst>
+            </p:spPr>
+            <p:txBody>
+              <a:bodyPr wrap="none" rtlCol="0">
+                <a:spAutoFit/>
+                <a:sp3d extrusionH="38100">
+                  <a:bevelT w="38100" h="38100"/>
+                </a:sp3d>
+              </a:bodyPr>
+              <a:lstStyle/>
+              <a:p>
+                <a:r>
+                  <a:rPr lang="en-US" sz="7200" dirty="0">
+                    <a:ln w="3175">
+                      <a:noFill/>
+                    </a:ln>
+                    <a:solidFill>
+                      <a:schemeClr val="tx2">
+                        <a:lumMod val="50000"/>
+                        <a:lumOff val="50000"/>
+                      </a:schemeClr>
+                    </a:solidFill>
+                    <a:latin typeface="Aafia" pitchFamily="50" charset="0"/>
+                  </a:rPr>
+                  <a:t>LaDe</a:t>
+                </a:r>
+                <a:r>
+                  <a:rPr lang="en-US" sz="7200" dirty="0">
+                    <a:ln w="3175">
+                      <a:noFill/>
+                    </a:ln>
+                    <a:solidFill>
+                      <a:srgbClr val="FFD700"/>
+                    </a:solidFill>
+                    <a:latin typeface="Aafia" pitchFamily="50" charset="0"/>
+                  </a:rPr>
+                  <a:t>RR</a:t>
+                </a:r>
+              </a:p>
+            </p:txBody>
+          </p:sp>
+          <p:sp>
+            <p:nvSpPr>
+              <p:cNvPr id="48" name="Rectangle 47">
+                <a:extLst>
+                  <a:ext uri="{FF2B5EF4-FFF2-40B4-BE49-F238E27FC236}">
+                    <a16:creationId xmlns:a16="http://schemas.microsoft.com/office/drawing/2014/main" id="{EACCBE89-E20F-7ECC-0817-6D772F89A035}"/>
+                  </a:ext>
+                </a:extLst>
+              </p:cNvPr>
+              <p:cNvSpPr/>
+              <p:nvPr/>
+            </p:nvSpPr>
+            <p:spPr>
+              <a:xfrm>
+                <a:off x="9706659" y="4577378"/>
+                <a:ext cx="1377950" cy="149432"/>
+              </a:xfrm>
+              <a:prstGeom prst="rect">
+                <a:avLst/>
+              </a:prstGeom>
+              <a:solidFill>
+                <a:srgbClr val="FFD700"/>
+              </a:solidFill>
+              <a:ln w="3175">
+                <a:noFill/>
+              </a:ln>
+              <a:effectLst>
+                <a:outerShdw blurRad="57785" dist="33020" dir="3180000" algn="ctr">
+                  <a:srgbClr val="000000">
+                    <a:alpha val="30000"/>
+                  </a:srgbClr>
+                </a:outerShdw>
+              </a:effectLst>
+            </p:spPr>
+            <p:style>
+              <a:lnRef idx="2">
+                <a:schemeClr val="accent1">
+                  <a:shade val="15000"/>
+                </a:schemeClr>
+              </a:lnRef>
+              <a:fillRef idx="1">
+                <a:schemeClr val="accent1"/>
+              </a:fillRef>
+              <a:effectRef idx="0">
+                <a:schemeClr val="accent1"/>
+              </a:effectRef>
+              <a:fontRef idx="minor">
+                <a:schemeClr val="lt1"/>
+              </a:fontRef>
+            </p:style>
+            <p:txBody>
+              <a:bodyPr rtlCol="0" anchor="ctr"/>
+              <a:lstStyle/>
+              <a:p>
+                <a:pPr algn="ctr"/>
+                <a:endParaRPr lang="en-150">
+                  <a:ln w="3175">
+                    <a:solidFill>
+                      <a:schemeClr val="bg1">
+                        <a:lumMod val="95000"/>
+                      </a:schemeClr>
+                    </a:solidFill>
+                  </a:ln>
+                  <a:solidFill>
+                    <a:srgbClr val="1A1F71"/>
+                  </a:solidFill>
+                </a:endParaRPr>
+              </a:p>
+            </p:txBody>
+          </p:sp>
+        </p:grpSp>
+      </p:grpSp>
+      <p:grpSp>
+        <p:nvGrpSpPr>
+          <p:cNvPr id="49" name="Group 48">
+            <a:extLst>
+              <a:ext uri="{FF2B5EF4-FFF2-40B4-BE49-F238E27FC236}">
+                <a16:creationId xmlns:a16="http://schemas.microsoft.com/office/drawing/2014/main" id="{4C4E17BF-2499-D9E0-E217-68F388C1BFEC}"/>
+              </a:ext>
+            </a:extLst>
+          </p:cNvPr>
+          <p:cNvGrpSpPr/>
+          <p:nvPr/>
+        </p:nvGrpSpPr>
+        <p:grpSpPr>
+          <a:xfrm>
+            <a:off x="776597" y="2500154"/>
+            <a:ext cx="4513548" cy="1899023"/>
+            <a:chOff x="6986985" y="4577378"/>
+            <a:chExt cx="4513548" cy="1899023"/>
+          </a:xfrm>
+        </p:grpSpPr>
+        <p:sp>
+          <p:nvSpPr>
+            <p:cNvPr id="50" name="TextBox 49">
+              <a:extLst>
+                <a:ext uri="{FF2B5EF4-FFF2-40B4-BE49-F238E27FC236}">
+                  <a16:creationId xmlns:a16="http://schemas.microsoft.com/office/drawing/2014/main" id="{F796324A-44B0-641A-7D3E-B5D2C087D62F}"/>
+                </a:ext>
+              </a:extLst>
+            </p:cNvPr>
+            <p:cNvSpPr txBox="1"/>
+            <p:nvPr/>
+          </p:nvSpPr>
+          <p:spPr>
+            <a:xfrm>
+              <a:off x="7088871" y="5645404"/>
+              <a:ext cx="4411662" cy="830997"/>
+            </a:xfrm>
+            <a:prstGeom prst="rect">
+              <a:avLst/>
+            </a:prstGeom>
+            <a:noFill/>
+            <a:ln>
+              <a:noFill/>
+            </a:ln>
+            <a:effectLst>
+              <a:outerShdw blurRad="44450" dist="27940" dir="5400000" algn="ctr">
+                <a:srgbClr val="000000">
+                  <a:alpha val="32000"/>
+                </a:srgbClr>
+              </a:outerShdw>
+            </a:effectLst>
+            <a:scene3d>
+              <a:camera prst="orthographicFront">
+                <a:rot lat="0" lon="0" rev="0"/>
+              </a:camera>
+              <a:lightRig rig="balanced" dir="t">
+                <a:rot lat="0" lon="0" rev="8700000"/>
+              </a:lightRig>
+            </a:scene3d>
+            <a:sp3d>
+              <a:bevelT w="190500" h="38100"/>
+            </a:sp3d>
+          </p:spPr>
+          <p:txBody>
+            <a:bodyPr wrap="square" lIns="0" tIns="0" rIns="0" bIns="0" rtlCol="0">
+              <a:spAutoFit/>
+            </a:bodyPr>
+            <a:lstStyle/>
+            <a:p>
+              <a:pPr algn="just"/>
+              <a:r>
+                <a:rPr lang="en-US" sz="5400" b="1" spc="780" dirty="0">
+                  <a:solidFill>
+                    <a:srgbClr val="C0392B"/>
+                  </a:solidFill>
+                  <a:latin typeface="Engravers MT" panose="02090707080505020304" pitchFamily="18" charset="0"/>
+                </a:rPr>
+                <a:t>Engine</a:t>
+              </a:r>
+            </a:p>
+          </p:txBody>
+        </p:sp>
+        <p:grpSp>
+          <p:nvGrpSpPr>
+            <p:cNvPr id="51" name="Group 50">
+              <a:extLst>
+                <a:ext uri="{FF2B5EF4-FFF2-40B4-BE49-F238E27FC236}">
+                  <a16:creationId xmlns:a16="http://schemas.microsoft.com/office/drawing/2014/main" id="{2A04077E-2AB6-0BBA-045D-4531716C45C0}"/>
+                </a:ext>
+              </a:extLst>
+            </p:cNvPr>
+            <p:cNvGrpSpPr/>
+            <p:nvPr/>
+          </p:nvGrpSpPr>
+          <p:grpSpPr>
+            <a:xfrm>
+              <a:off x="6986985" y="4577378"/>
+              <a:ext cx="4253087" cy="1538135"/>
+              <a:chOff x="6986985" y="4577378"/>
+              <a:chExt cx="4253087" cy="1538135"/>
+            </a:xfrm>
+          </p:grpSpPr>
+          <p:sp>
+            <p:nvSpPr>
+              <p:cNvPr id="52" name="Rectangle 51">
+                <a:extLst>
+                  <a:ext uri="{FF2B5EF4-FFF2-40B4-BE49-F238E27FC236}">
+                    <a16:creationId xmlns:a16="http://schemas.microsoft.com/office/drawing/2014/main" id="{1A66619E-6953-CED8-7E19-8E7E78F03BB6}"/>
+                  </a:ext>
+                </a:extLst>
+              </p:cNvPr>
+              <p:cNvSpPr/>
+              <p:nvPr/>
+            </p:nvSpPr>
+            <p:spPr>
+              <a:xfrm>
+                <a:off x="7114271" y="4876242"/>
+                <a:ext cx="1223963" cy="149432"/>
+              </a:xfrm>
+              <a:prstGeom prst="rect">
+                <a:avLst/>
+              </a:prstGeom>
+              <a:solidFill>
+                <a:schemeClr val="tx2">
+                  <a:lumMod val="50000"/>
+                  <a:lumOff val="50000"/>
+                </a:schemeClr>
+              </a:solidFill>
+              <a:ln w="3175">
+                <a:noFill/>
+              </a:ln>
+              <a:effectLst>
+                <a:outerShdw blurRad="57785" dist="33020" dir="3180000" algn="ctr">
+                  <a:srgbClr val="000000">
+                    <a:alpha val="30000"/>
+                  </a:srgbClr>
+                </a:outerShdw>
+              </a:effectLst>
+            </p:spPr>
+            <p:style>
+              <a:lnRef idx="2">
+                <a:schemeClr val="accent1">
+                  <a:shade val="15000"/>
+                </a:schemeClr>
+              </a:lnRef>
+              <a:fillRef idx="1">
+                <a:schemeClr val="accent1"/>
+              </a:fillRef>
+              <a:effectRef idx="0">
+                <a:schemeClr val="accent1"/>
+              </a:effectRef>
+              <a:fontRef idx="minor">
+                <a:schemeClr val="lt1"/>
+              </a:fontRef>
+            </p:style>
+            <p:txBody>
+              <a:bodyPr rtlCol="0" anchor="ctr"/>
+              <a:lstStyle/>
+              <a:p>
+                <a:pPr algn="ctr"/>
+                <a:endParaRPr lang="en-150">
+                  <a:ln w="3175">
+                    <a:solidFill>
+                      <a:schemeClr val="bg1">
+                        <a:lumMod val="95000"/>
+                      </a:schemeClr>
+                    </a:solidFill>
+                  </a:ln>
+                  <a:solidFill>
+                    <a:srgbClr val="1A1F71"/>
+                  </a:solidFill>
+                </a:endParaRPr>
+              </a:p>
+            </p:txBody>
+          </p:sp>
+          <p:sp>
+            <p:nvSpPr>
+              <p:cNvPr id="53" name="Rectangle 52">
+                <a:extLst>
+                  <a:ext uri="{FF2B5EF4-FFF2-40B4-BE49-F238E27FC236}">
+                    <a16:creationId xmlns:a16="http://schemas.microsoft.com/office/drawing/2014/main" id="{A6710B13-527E-2C52-5F2A-2C06D08828D4}"/>
+                  </a:ext>
+                </a:extLst>
+              </p:cNvPr>
+              <p:cNvSpPr/>
+              <p:nvPr/>
+            </p:nvSpPr>
+            <p:spPr>
+              <a:xfrm>
+                <a:off x="8338234" y="4726810"/>
+                <a:ext cx="1368425" cy="149432"/>
+              </a:xfrm>
+              <a:prstGeom prst="rect">
+                <a:avLst/>
+              </a:prstGeom>
+              <a:solidFill>
+                <a:schemeClr val="tx2">
+                  <a:lumMod val="50000"/>
+                  <a:lumOff val="50000"/>
+                </a:schemeClr>
+              </a:solidFill>
+              <a:ln w="3175">
+                <a:noFill/>
+              </a:ln>
+              <a:effectLst>
+                <a:outerShdw blurRad="57785" dist="33020" dir="3180000" algn="ctr">
+                  <a:srgbClr val="000000">
+                    <a:alpha val="30000"/>
+                  </a:srgbClr>
+                </a:outerShdw>
+              </a:effectLst>
+            </p:spPr>
+            <p:style>
+              <a:lnRef idx="2">
+                <a:schemeClr val="accent1">
+                  <a:shade val="15000"/>
+                </a:schemeClr>
+              </a:lnRef>
+              <a:fillRef idx="1">
+                <a:schemeClr val="accent1"/>
+              </a:fillRef>
+              <a:effectRef idx="0">
+                <a:schemeClr val="accent1"/>
+              </a:effectRef>
+              <a:fontRef idx="minor">
+                <a:schemeClr val="lt1"/>
+              </a:fontRef>
+            </p:style>
+            <p:txBody>
+              <a:bodyPr rtlCol="0" anchor="ctr"/>
+              <a:lstStyle/>
+              <a:p>
+                <a:pPr algn="ctr"/>
+                <a:endParaRPr lang="en-150">
+                  <a:ln w="3175">
+                    <a:solidFill>
+                      <a:schemeClr val="bg1">
+                        <a:lumMod val="95000"/>
+                      </a:schemeClr>
+                    </a:solidFill>
+                  </a:ln>
+                  <a:solidFill>
+                    <a:srgbClr val="1A1F71"/>
+                  </a:solidFill>
+                </a:endParaRPr>
+              </a:p>
+            </p:txBody>
+          </p:sp>
+          <p:sp>
+            <p:nvSpPr>
+              <p:cNvPr id="54" name="TextBox 53">
+                <a:extLst>
+                  <a:ext uri="{FF2B5EF4-FFF2-40B4-BE49-F238E27FC236}">
+                    <a16:creationId xmlns:a16="http://schemas.microsoft.com/office/drawing/2014/main" id="{FED01276-34F3-7A96-D91B-1982DD826778}"/>
+                  </a:ext>
+                </a:extLst>
+              </p:cNvPr>
+              <p:cNvSpPr txBox="1"/>
+              <p:nvPr/>
+            </p:nvSpPr>
+            <p:spPr>
+              <a:xfrm>
+                <a:off x="6986985" y="4915184"/>
+                <a:ext cx="4253087" cy="1200329"/>
+              </a:xfrm>
+              <a:prstGeom prst="rect">
+                <a:avLst/>
+              </a:prstGeom>
+              <a:noFill/>
+              <a:ln>
+                <a:noFill/>
+              </a:ln>
+              <a:effectLst>
+                <a:outerShdw blurRad="57785" dist="33020" dir="3180000" algn="ctr">
+                  <a:srgbClr val="000000">
+                    <a:alpha val="30000"/>
+                  </a:srgbClr>
+                </a:outerShdw>
+              </a:effectLst>
+            </p:spPr>
+            <p:txBody>
+              <a:bodyPr wrap="none" rtlCol="0">
+                <a:spAutoFit/>
+                <a:sp3d extrusionH="38100">
+                  <a:bevelT w="38100" h="38100"/>
+                </a:sp3d>
+              </a:bodyPr>
+              <a:lstStyle/>
+              <a:p>
+                <a:r>
+                  <a:rPr lang="en-US" sz="7200" dirty="0">
+                    <a:ln w="3175">
+                      <a:noFill/>
+                    </a:ln>
+                    <a:solidFill>
+                      <a:schemeClr val="tx2">
+                        <a:lumMod val="50000"/>
+                        <a:lumOff val="50000"/>
+                      </a:schemeClr>
+                    </a:solidFill>
+                    <a:latin typeface="Aafia" pitchFamily="50" charset="0"/>
+                  </a:rPr>
+                  <a:t>LaDe</a:t>
+                </a:r>
+                <a:r>
+                  <a:rPr lang="en-US" sz="7200" dirty="0">
+                    <a:ln w="3175">
+                      <a:noFill/>
+                    </a:ln>
+                    <a:solidFill>
+                      <a:srgbClr val="FFD700"/>
+                    </a:solidFill>
+                    <a:latin typeface="Aafia" pitchFamily="50" charset="0"/>
+                  </a:rPr>
+                  <a:t>RR</a:t>
+                </a:r>
+              </a:p>
+            </p:txBody>
+          </p:sp>
+          <p:sp>
+            <p:nvSpPr>
+              <p:cNvPr id="55" name="Rectangle 54">
+                <a:extLst>
+                  <a:ext uri="{FF2B5EF4-FFF2-40B4-BE49-F238E27FC236}">
+                    <a16:creationId xmlns:a16="http://schemas.microsoft.com/office/drawing/2014/main" id="{7F37D255-2F49-E04B-1CE6-89000ECEEAD5}"/>
+                  </a:ext>
+                </a:extLst>
+              </p:cNvPr>
+              <p:cNvSpPr/>
+              <p:nvPr/>
+            </p:nvSpPr>
+            <p:spPr>
+              <a:xfrm>
+                <a:off x="9706659" y="4577378"/>
+                <a:ext cx="1377950" cy="149432"/>
+              </a:xfrm>
+              <a:prstGeom prst="rect">
+                <a:avLst/>
+              </a:prstGeom>
+              <a:solidFill>
+                <a:srgbClr val="FFD700"/>
+              </a:solidFill>
+              <a:ln w="3175">
+                <a:noFill/>
+              </a:ln>
+              <a:effectLst>
+                <a:outerShdw blurRad="57785" dist="33020" dir="3180000" algn="ctr">
+                  <a:srgbClr val="000000">
+                    <a:alpha val="30000"/>
+                  </a:srgbClr>
+                </a:outerShdw>
+              </a:effectLst>
+            </p:spPr>
+            <p:style>
+              <a:lnRef idx="2">
+                <a:schemeClr val="accent1">
+                  <a:shade val="15000"/>
+                </a:schemeClr>
+              </a:lnRef>
+              <a:fillRef idx="1">
+                <a:schemeClr val="accent1"/>
+              </a:fillRef>
+              <a:effectRef idx="0">
+                <a:schemeClr val="accent1"/>
+              </a:effectRef>
+              <a:fontRef idx="minor">
+                <a:schemeClr val="lt1"/>
+              </a:fontRef>
+            </p:style>
+            <p:txBody>
+              <a:bodyPr rtlCol="0" anchor="ctr"/>
+              <a:lstStyle/>
+              <a:p>
+                <a:pPr algn="ctr"/>
+                <a:endParaRPr lang="en-150">
+                  <a:ln w="3175">
+                    <a:solidFill>
+                      <a:schemeClr val="bg1">
+                        <a:lumMod val="95000"/>
+                      </a:schemeClr>
+                    </a:solidFill>
+                  </a:ln>
+                  <a:solidFill>
+                    <a:srgbClr val="1A1F71"/>
+                  </a:solidFill>
+                </a:endParaRPr>
+              </a:p>
+            </p:txBody>
+          </p:sp>
+        </p:grpSp>
+      </p:grpSp>
+      <p:grpSp>
+        <p:nvGrpSpPr>
+          <p:cNvPr id="56" name="Group 55">
+            <a:extLst>
+              <a:ext uri="{FF2B5EF4-FFF2-40B4-BE49-F238E27FC236}">
+                <a16:creationId xmlns:a16="http://schemas.microsoft.com/office/drawing/2014/main" id="{D611541A-94C7-4299-B113-F0DCF44BEBFA}"/>
+              </a:ext>
+            </a:extLst>
+          </p:cNvPr>
+          <p:cNvGrpSpPr/>
+          <p:nvPr/>
+        </p:nvGrpSpPr>
+        <p:grpSpPr>
+          <a:xfrm>
+            <a:off x="776597" y="304416"/>
+            <a:ext cx="4513548" cy="1899023"/>
+            <a:chOff x="6986985" y="4577378"/>
+            <a:chExt cx="4513548" cy="1899023"/>
+          </a:xfrm>
+        </p:grpSpPr>
+        <p:sp>
+          <p:nvSpPr>
+            <p:cNvPr id="57" name="TextBox 56">
+              <a:extLst>
+                <a:ext uri="{FF2B5EF4-FFF2-40B4-BE49-F238E27FC236}">
+                  <a16:creationId xmlns:a16="http://schemas.microsoft.com/office/drawing/2014/main" id="{9B75FE23-7F00-1092-3015-B8BA56BF4E81}"/>
+                </a:ext>
+              </a:extLst>
+            </p:cNvPr>
+            <p:cNvSpPr txBox="1"/>
+            <p:nvPr/>
+          </p:nvSpPr>
+          <p:spPr>
+            <a:xfrm>
+              <a:off x="7088871" y="5645404"/>
+              <a:ext cx="4411662" cy="830997"/>
+            </a:xfrm>
+            <a:prstGeom prst="rect">
+              <a:avLst/>
+            </a:prstGeom>
+            <a:noFill/>
+            <a:ln>
+              <a:noFill/>
+            </a:ln>
+            <a:effectLst>
+              <a:outerShdw blurRad="44450" dist="27940" dir="5400000" algn="ctr">
+                <a:srgbClr val="000000">
+                  <a:alpha val="32000"/>
+                </a:srgbClr>
+              </a:outerShdw>
+            </a:effectLst>
+            <a:scene3d>
+              <a:camera prst="orthographicFront">
+                <a:rot lat="0" lon="0" rev="0"/>
+              </a:camera>
+              <a:lightRig rig="balanced" dir="t">
+                <a:rot lat="0" lon="0" rev="8700000"/>
+              </a:lightRig>
+            </a:scene3d>
+            <a:sp3d>
+              <a:bevelT w="190500" h="38100"/>
+            </a:sp3d>
+          </p:spPr>
+          <p:txBody>
+            <a:bodyPr wrap="square" lIns="0" tIns="0" rIns="0" bIns="0" rtlCol="0">
+              <a:spAutoFit/>
+            </a:bodyPr>
+            <a:lstStyle/>
+            <a:p>
+              <a:pPr algn="just"/>
+              <a:r>
+                <a:rPr lang="en-US" sz="5400" b="1" spc="780" dirty="0">
+                  <a:solidFill>
+                    <a:srgbClr val="4A4A4A"/>
+                  </a:solidFill>
+                  <a:latin typeface="Engravers MT" panose="02090707080505020304" pitchFamily="18" charset="0"/>
+                </a:rPr>
+                <a:t>Engine</a:t>
+              </a:r>
+            </a:p>
+          </p:txBody>
+        </p:sp>
+        <p:grpSp>
+          <p:nvGrpSpPr>
+            <p:cNvPr id="58" name="Group 57">
+              <a:extLst>
+                <a:ext uri="{FF2B5EF4-FFF2-40B4-BE49-F238E27FC236}">
+                  <a16:creationId xmlns:a16="http://schemas.microsoft.com/office/drawing/2014/main" id="{334AD68D-AA8B-9F0D-E212-6D976BDF30F4}"/>
+                </a:ext>
+              </a:extLst>
+            </p:cNvPr>
+            <p:cNvGrpSpPr/>
+            <p:nvPr/>
+          </p:nvGrpSpPr>
+          <p:grpSpPr>
+            <a:xfrm>
+              <a:off x="6986985" y="4577378"/>
+              <a:ext cx="4253087" cy="1538135"/>
+              <a:chOff x="6986985" y="4577378"/>
+              <a:chExt cx="4253087" cy="1538135"/>
+            </a:xfrm>
+          </p:grpSpPr>
+          <p:sp>
+            <p:nvSpPr>
+              <p:cNvPr id="59" name="Rectangle 58">
+                <a:extLst>
+                  <a:ext uri="{FF2B5EF4-FFF2-40B4-BE49-F238E27FC236}">
+                    <a16:creationId xmlns:a16="http://schemas.microsoft.com/office/drawing/2014/main" id="{683993B0-01FA-4AF9-3B82-B03BBEC65F9E}"/>
+                  </a:ext>
+                </a:extLst>
+              </p:cNvPr>
+              <p:cNvSpPr/>
+              <p:nvPr/>
+            </p:nvSpPr>
+            <p:spPr>
+              <a:xfrm>
+                <a:off x="7114271" y="4876242"/>
+                <a:ext cx="1223963" cy="149432"/>
+              </a:xfrm>
+              <a:prstGeom prst="rect">
+                <a:avLst/>
+              </a:prstGeom>
+              <a:solidFill>
+                <a:schemeClr val="tx2">
+                  <a:lumMod val="50000"/>
+                  <a:lumOff val="50000"/>
+                </a:schemeClr>
+              </a:solidFill>
+              <a:ln w="3175">
+                <a:noFill/>
+              </a:ln>
+              <a:effectLst>
+                <a:outerShdw blurRad="57785" dist="33020" dir="3180000" algn="ctr">
+                  <a:srgbClr val="000000">
+                    <a:alpha val="30000"/>
+                  </a:srgbClr>
+                </a:outerShdw>
+              </a:effectLst>
+            </p:spPr>
+            <p:style>
+              <a:lnRef idx="2">
+                <a:schemeClr val="accent1">
+                  <a:shade val="15000"/>
+                </a:schemeClr>
+              </a:lnRef>
+              <a:fillRef idx="1">
+                <a:schemeClr val="accent1"/>
+              </a:fillRef>
+              <a:effectRef idx="0">
+                <a:schemeClr val="accent1"/>
+              </a:effectRef>
+              <a:fontRef idx="minor">
+                <a:schemeClr val="lt1"/>
+              </a:fontRef>
+            </p:style>
+            <p:txBody>
+              <a:bodyPr rtlCol="0" anchor="ctr"/>
+              <a:lstStyle/>
+              <a:p>
+                <a:pPr algn="ctr"/>
+                <a:endParaRPr lang="en-150">
+                  <a:ln w="3175">
+                    <a:solidFill>
+                      <a:schemeClr val="bg1">
+                        <a:lumMod val="95000"/>
+                      </a:schemeClr>
+                    </a:solidFill>
+                  </a:ln>
+                  <a:solidFill>
+                    <a:srgbClr val="1A1F71"/>
+                  </a:solidFill>
+                </a:endParaRPr>
+              </a:p>
+            </p:txBody>
+          </p:sp>
+          <p:sp>
+            <p:nvSpPr>
+              <p:cNvPr id="60" name="Rectangle 59">
+                <a:extLst>
+                  <a:ext uri="{FF2B5EF4-FFF2-40B4-BE49-F238E27FC236}">
+                    <a16:creationId xmlns:a16="http://schemas.microsoft.com/office/drawing/2014/main" id="{FF9C3717-90DC-1E74-C90A-016B1A1184F9}"/>
+                  </a:ext>
+                </a:extLst>
+              </p:cNvPr>
+              <p:cNvSpPr/>
+              <p:nvPr/>
+            </p:nvSpPr>
+            <p:spPr>
+              <a:xfrm>
+                <a:off x="8338234" y="4726810"/>
+                <a:ext cx="1368425" cy="149432"/>
+              </a:xfrm>
+              <a:prstGeom prst="rect">
+                <a:avLst/>
+              </a:prstGeom>
+              <a:solidFill>
+                <a:schemeClr val="tx2">
+                  <a:lumMod val="50000"/>
+                  <a:lumOff val="50000"/>
+                </a:schemeClr>
+              </a:solidFill>
+              <a:ln w="3175">
+                <a:noFill/>
+              </a:ln>
+              <a:effectLst>
+                <a:outerShdw blurRad="57785" dist="33020" dir="3180000" algn="ctr">
+                  <a:srgbClr val="000000">
+                    <a:alpha val="30000"/>
+                  </a:srgbClr>
+                </a:outerShdw>
+              </a:effectLst>
+            </p:spPr>
+            <p:style>
+              <a:lnRef idx="2">
+                <a:schemeClr val="accent1">
+                  <a:shade val="15000"/>
+                </a:schemeClr>
+              </a:lnRef>
+              <a:fillRef idx="1">
+                <a:schemeClr val="accent1"/>
+              </a:fillRef>
+              <a:effectRef idx="0">
+                <a:schemeClr val="accent1"/>
+              </a:effectRef>
+              <a:fontRef idx="minor">
+                <a:schemeClr val="lt1"/>
+              </a:fontRef>
+            </p:style>
+            <p:txBody>
+              <a:bodyPr rtlCol="0" anchor="ctr"/>
+              <a:lstStyle/>
+              <a:p>
+                <a:pPr algn="ctr"/>
+                <a:endParaRPr lang="en-150">
+                  <a:ln w="3175">
+                    <a:solidFill>
+                      <a:schemeClr val="bg1">
+                        <a:lumMod val="95000"/>
+                      </a:schemeClr>
+                    </a:solidFill>
+                  </a:ln>
+                  <a:solidFill>
+                    <a:srgbClr val="1A1F71"/>
+                  </a:solidFill>
+                </a:endParaRPr>
+              </a:p>
+            </p:txBody>
+          </p:sp>
+          <p:sp>
+            <p:nvSpPr>
+              <p:cNvPr id="61" name="TextBox 60">
+                <a:extLst>
+                  <a:ext uri="{FF2B5EF4-FFF2-40B4-BE49-F238E27FC236}">
+                    <a16:creationId xmlns:a16="http://schemas.microsoft.com/office/drawing/2014/main" id="{6D40CD1E-1FAB-E7BC-D581-CD7697555FA8}"/>
+                  </a:ext>
+                </a:extLst>
+              </p:cNvPr>
+              <p:cNvSpPr txBox="1"/>
+              <p:nvPr/>
+            </p:nvSpPr>
+            <p:spPr>
+              <a:xfrm>
+                <a:off x="6986985" y="4915184"/>
+                <a:ext cx="4253087" cy="1200329"/>
+              </a:xfrm>
+              <a:prstGeom prst="rect">
+                <a:avLst/>
+              </a:prstGeom>
+              <a:noFill/>
+              <a:ln>
+                <a:noFill/>
+              </a:ln>
+              <a:effectLst>
+                <a:outerShdw blurRad="57785" dist="33020" dir="3180000" algn="ctr">
+                  <a:srgbClr val="000000">
+                    <a:alpha val="30000"/>
+                  </a:srgbClr>
+                </a:outerShdw>
+              </a:effectLst>
+            </p:spPr>
+            <p:txBody>
+              <a:bodyPr wrap="none" rtlCol="0">
+                <a:spAutoFit/>
+                <a:sp3d extrusionH="38100">
+                  <a:bevelT w="38100" h="38100"/>
+                </a:sp3d>
+              </a:bodyPr>
+              <a:lstStyle/>
+              <a:p>
+                <a:r>
+                  <a:rPr lang="en-US" sz="7200" dirty="0">
+                    <a:ln w="3175">
+                      <a:noFill/>
+                    </a:ln>
+                    <a:solidFill>
+                      <a:schemeClr val="tx2">
+                        <a:lumMod val="50000"/>
+                        <a:lumOff val="50000"/>
+                      </a:schemeClr>
+                    </a:solidFill>
+                    <a:latin typeface="Aafia" pitchFamily="50" charset="0"/>
+                  </a:rPr>
+                  <a:t>LaDe</a:t>
+                </a:r>
+                <a:r>
+                  <a:rPr lang="en-US" sz="7200" dirty="0">
+                    <a:ln w="3175">
+                      <a:noFill/>
+                    </a:ln>
+                    <a:solidFill>
+                      <a:srgbClr val="FFD700"/>
+                    </a:solidFill>
+                    <a:latin typeface="Aafia" pitchFamily="50" charset="0"/>
+                  </a:rPr>
+                  <a:t>RR</a:t>
+                </a:r>
+              </a:p>
+            </p:txBody>
+          </p:sp>
+          <p:sp>
+            <p:nvSpPr>
+              <p:cNvPr id="62" name="Rectangle 61">
+                <a:extLst>
+                  <a:ext uri="{FF2B5EF4-FFF2-40B4-BE49-F238E27FC236}">
+                    <a16:creationId xmlns:a16="http://schemas.microsoft.com/office/drawing/2014/main" id="{AF7A1CFD-0A9C-1765-2C41-8BA0C70F5546}"/>
+                  </a:ext>
+                </a:extLst>
+              </p:cNvPr>
+              <p:cNvSpPr/>
+              <p:nvPr/>
+            </p:nvSpPr>
+            <p:spPr>
+              <a:xfrm>
+                <a:off x="9706659" y="4577378"/>
+                <a:ext cx="1377950" cy="149432"/>
+              </a:xfrm>
+              <a:prstGeom prst="rect">
+                <a:avLst/>
+              </a:prstGeom>
+              <a:solidFill>
+                <a:srgbClr val="FFD700"/>
+              </a:solidFill>
+              <a:ln w="3175">
+                <a:noFill/>
+              </a:ln>
+              <a:effectLst>
+                <a:outerShdw blurRad="57785" dist="33020" dir="3180000" algn="ctr">
+                  <a:srgbClr val="000000">
+                    <a:alpha val="30000"/>
+                  </a:srgbClr>
+                </a:outerShdw>
+              </a:effectLst>
+            </p:spPr>
+            <p:style>
+              <a:lnRef idx="2">
+                <a:schemeClr val="accent1">
+                  <a:shade val="15000"/>
+                </a:schemeClr>
+              </a:lnRef>
+              <a:fillRef idx="1">
+                <a:schemeClr val="accent1"/>
+              </a:fillRef>
+              <a:effectRef idx="0">
+                <a:schemeClr val="accent1"/>
+              </a:effectRef>
+              <a:fontRef idx="minor">
+                <a:schemeClr val="lt1"/>
+              </a:fontRef>
+            </p:style>
+            <p:txBody>
+              <a:bodyPr rtlCol="0" anchor="ctr"/>
+              <a:lstStyle/>
+              <a:p>
+                <a:pPr algn="ctr"/>
+                <a:endParaRPr lang="en-150">
+                  <a:ln w="3175">
+                    <a:solidFill>
+                      <a:schemeClr val="bg1">
+                        <a:lumMod val="95000"/>
+                      </a:schemeClr>
+                    </a:solidFill>
+                  </a:ln>
+                  <a:solidFill>
+                    <a:srgbClr val="1A1F71"/>
+                  </a:solidFill>
+                </a:endParaRPr>
+              </a:p>
+            </p:txBody>
+          </p:sp>
+        </p:grpSp>
+      </p:grpSp>
+    </p:spTree>
+    <p:extLst>
+      <p:ext uri="{BB962C8B-B14F-4D97-AF65-F5344CB8AC3E}">
+        <p14:creationId xmlns:p14="http://schemas.microsoft.com/office/powerpoint/2010/main" val="3035842877"/>
+      </p:ext>
+    </p:extLst>
+  </p:cSld>
+  <p:clrMapOvr>
+    <a:masterClrMapping/>
+  </p:clrMapOvr>
+</p:sld>
+</file>
+
+<file path=ppt/slides/slide4.xml><?xml version="1.0" encoding="utf-8"?>
+<p:sld xmlns:a="http://schemas.openxmlformats.org/drawingml/2006/main" xmlns:r="http://schemas.openxmlformats.org/officeDocument/2006/relationships" xmlns:p="http://schemas.openxmlformats.org/presentationml/2006/main">
+  <p:cSld>
+    <p:spTree>
+      <p:nvGrpSpPr>
         <p:cNvPr id="1" name=""/>
         <p:cNvGrpSpPr/>
         <p:nvPr/>
@@ -6389,7 +12535,992 @@
 </p:sld>
 </file>
 
-<file path=ppt/slides/slide3.xml><?xml version="1.0" encoding="utf-8"?>
+<file path=ppt/slides/slide5.xml><?xml version="1.0" encoding="utf-8"?>
+<p:sld xmlns:a="http://schemas.openxmlformats.org/drawingml/2006/main" xmlns:r="http://schemas.openxmlformats.org/officeDocument/2006/relationships" xmlns:p="http://schemas.openxmlformats.org/presentationml/2006/main" show="0">
+  <p:cSld>
+    <p:spTree>
+      <p:nvGrpSpPr>
+        <p:cNvPr id="1" name="">
+          <a:extLst>
+            <a:ext uri="{FF2B5EF4-FFF2-40B4-BE49-F238E27FC236}">
+              <a16:creationId xmlns:a16="http://schemas.microsoft.com/office/drawing/2014/main" id="{543591FC-3D57-91F7-09C6-96047E458AFD}"/>
+            </a:ext>
+          </a:extLst>
+        </p:cNvPr>
+        <p:cNvGrpSpPr/>
+        <p:nvPr/>
+      </p:nvGrpSpPr>
+      <p:grpSpPr>
+        <a:xfrm>
+          <a:off x="0" y="0"/>
+          <a:ext cx="0" cy="0"/>
+          <a:chOff x="0" y="0"/>
+          <a:chExt cx="0" cy="0"/>
+        </a:xfrm>
+      </p:grpSpPr>
+      <p:sp>
+        <p:nvSpPr>
+          <p:cNvPr id="16" name="Rectangle 15">
+            <a:extLst>
+              <a:ext uri="{FF2B5EF4-FFF2-40B4-BE49-F238E27FC236}">
+                <a16:creationId xmlns:a16="http://schemas.microsoft.com/office/drawing/2014/main" id="{61A46A82-9845-FC30-D1C7-DFF186F8F698}"/>
+              </a:ext>
+            </a:extLst>
+          </p:cNvPr>
+          <p:cNvSpPr/>
+          <p:nvPr/>
+        </p:nvSpPr>
+        <p:spPr>
+          <a:xfrm>
+            <a:off x="281781" y="2505544"/>
+            <a:ext cx="5457825" cy="4124325"/>
+          </a:xfrm>
+          <a:prstGeom prst="rect">
+            <a:avLst/>
+          </a:prstGeom>
+        </p:spPr>
+        <p:style>
+          <a:lnRef idx="2">
+            <a:schemeClr val="dk1">
+              <a:shade val="15000"/>
+            </a:schemeClr>
+          </a:lnRef>
+          <a:fillRef idx="1">
+            <a:schemeClr val="dk1"/>
+          </a:fillRef>
+          <a:effectRef idx="0">
+            <a:schemeClr val="dk1"/>
+          </a:effectRef>
+          <a:fontRef idx="minor">
+            <a:schemeClr val="lt1"/>
+          </a:fontRef>
+        </p:style>
+        <p:txBody>
+          <a:bodyPr rtlCol="0" anchor="ctr"/>
+          <a:lstStyle/>
+          <a:p>
+            <a:pPr algn="ctr"/>
+            <a:endParaRPr lang="en-US"/>
+          </a:p>
+        </p:txBody>
+      </p:sp>
+      <p:sp>
+        <p:nvSpPr>
+          <p:cNvPr id="12" name="Rectangle 11">
+            <a:extLst>
+              <a:ext uri="{FF2B5EF4-FFF2-40B4-BE49-F238E27FC236}">
+                <a16:creationId xmlns:a16="http://schemas.microsoft.com/office/drawing/2014/main" id="{194527D7-E8DD-5F42-D08E-BE968522E583}"/>
+              </a:ext>
+            </a:extLst>
+          </p:cNvPr>
+          <p:cNvSpPr/>
+          <p:nvPr/>
+        </p:nvSpPr>
+        <p:spPr>
+          <a:xfrm>
+            <a:off x="6734175" y="2816191"/>
+            <a:ext cx="1223963" cy="149432"/>
+          </a:xfrm>
+          <a:prstGeom prst="rect">
+            <a:avLst/>
+          </a:prstGeom>
+          <a:solidFill>
+            <a:srgbClr val="1A1F71"/>
+          </a:solidFill>
+          <a:ln w="3175">
+            <a:noFill/>
+          </a:ln>
+          <a:effectLst/>
+        </p:spPr>
+        <p:style>
+          <a:lnRef idx="2">
+            <a:schemeClr val="accent1">
+              <a:shade val="15000"/>
+            </a:schemeClr>
+          </a:lnRef>
+          <a:fillRef idx="1">
+            <a:schemeClr val="accent1"/>
+          </a:fillRef>
+          <a:effectRef idx="0">
+            <a:schemeClr val="accent1"/>
+          </a:effectRef>
+          <a:fontRef idx="minor">
+            <a:schemeClr val="lt1"/>
+          </a:fontRef>
+        </p:style>
+        <p:txBody>
+          <a:bodyPr rtlCol="0" anchor="ctr"/>
+          <a:lstStyle/>
+          <a:p>
+            <a:pPr algn="ctr"/>
+            <a:endParaRPr lang="en-150">
+              <a:solidFill>
+                <a:srgbClr val="1A1F71"/>
+              </a:solidFill>
+            </a:endParaRPr>
+          </a:p>
+        </p:txBody>
+      </p:sp>
+      <p:sp>
+        <p:nvSpPr>
+          <p:cNvPr id="13" name="Rectangle 12">
+            <a:extLst>
+              <a:ext uri="{FF2B5EF4-FFF2-40B4-BE49-F238E27FC236}">
+                <a16:creationId xmlns:a16="http://schemas.microsoft.com/office/drawing/2014/main" id="{8913E7D7-2762-D819-B28F-0CFD723ABC46}"/>
+              </a:ext>
+            </a:extLst>
+          </p:cNvPr>
+          <p:cNvSpPr/>
+          <p:nvPr/>
+        </p:nvSpPr>
+        <p:spPr>
+          <a:xfrm>
+            <a:off x="7958138" y="2659139"/>
+            <a:ext cx="1368425" cy="149432"/>
+          </a:xfrm>
+          <a:prstGeom prst="rect">
+            <a:avLst/>
+          </a:prstGeom>
+          <a:solidFill>
+            <a:srgbClr val="1A1F71"/>
+          </a:solidFill>
+          <a:ln w="3175">
+            <a:noFill/>
+          </a:ln>
+          <a:effectLst/>
+        </p:spPr>
+        <p:style>
+          <a:lnRef idx="2">
+            <a:schemeClr val="accent1">
+              <a:shade val="15000"/>
+            </a:schemeClr>
+          </a:lnRef>
+          <a:fillRef idx="1">
+            <a:schemeClr val="accent1"/>
+          </a:fillRef>
+          <a:effectRef idx="0">
+            <a:schemeClr val="accent1"/>
+          </a:effectRef>
+          <a:fontRef idx="minor">
+            <a:schemeClr val="lt1"/>
+          </a:fontRef>
+        </p:style>
+        <p:txBody>
+          <a:bodyPr rtlCol="0" anchor="ctr"/>
+          <a:lstStyle/>
+          <a:p>
+            <a:pPr algn="ctr"/>
+            <a:endParaRPr lang="en-150">
+              <a:solidFill>
+                <a:srgbClr val="1A1F71"/>
+              </a:solidFill>
+            </a:endParaRPr>
+          </a:p>
+        </p:txBody>
+      </p:sp>
+      <p:sp>
+        <p:nvSpPr>
+          <p:cNvPr id="14" name="Rectangle 13">
+            <a:extLst>
+              <a:ext uri="{FF2B5EF4-FFF2-40B4-BE49-F238E27FC236}">
+                <a16:creationId xmlns:a16="http://schemas.microsoft.com/office/drawing/2014/main" id="{DFD63C7F-A8D1-F991-8F31-7744DC3BC41C}"/>
+              </a:ext>
+            </a:extLst>
+          </p:cNvPr>
+          <p:cNvSpPr/>
+          <p:nvPr/>
+        </p:nvSpPr>
+        <p:spPr>
+          <a:xfrm>
+            <a:off x="9326564" y="2502087"/>
+            <a:ext cx="1377950" cy="149432"/>
+          </a:xfrm>
+          <a:prstGeom prst="rect">
+            <a:avLst/>
+          </a:prstGeom>
+          <a:gradFill flip="none" rotWithShape="1">
+            <a:gsLst>
+              <a:gs pos="0">
+                <a:srgbClr val="FFD700"/>
+              </a:gs>
+              <a:gs pos="78000">
+                <a:srgbClr val="FFD700"/>
+              </a:gs>
+              <a:gs pos="100000">
+                <a:schemeClr val="bg1"/>
+              </a:gs>
+            </a:gsLst>
+            <a:lin ang="18900000" scaled="1"/>
+            <a:tileRect/>
+          </a:gradFill>
+          <a:ln w="3175">
+            <a:noFill/>
+          </a:ln>
+          <a:effectLst/>
+        </p:spPr>
+        <p:style>
+          <a:lnRef idx="2">
+            <a:schemeClr val="accent1">
+              <a:shade val="15000"/>
+            </a:schemeClr>
+          </a:lnRef>
+          <a:fillRef idx="1">
+            <a:schemeClr val="accent1"/>
+          </a:fillRef>
+          <a:effectRef idx="0">
+            <a:schemeClr val="accent1"/>
+          </a:effectRef>
+          <a:fontRef idx="minor">
+            <a:schemeClr val="lt1"/>
+          </a:fontRef>
+        </p:style>
+        <p:txBody>
+          <a:bodyPr rtlCol="0" anchor="ctr"/>
+          <a:lstStyle/>
+          <a:p>
+            <a:pPr algn="ctr"/>
+            <a:endParaRPr lang="en-150"/>
+          </a:p>
+        </p:txBody>
+      </p:sp>
+      <p:sp>
+        <p:nvSpPr>
+          <p:cNvPr id="15" name="TextBox 14">
+            <a:extLst>
+              <a:ext uri="{FF2B5EF4-FFF2-40B4-BE49-F238E27FC236}">
+                <a16:creationId xmlns:a16="http://schemas.microsoft.com/office/drawing/2014/main" id="{A7F48B1B-DD59-3B3C-9689-E8EBCF2C470F}"/>
+              </a:ext>
+            </a:extLst>
+          </p:cNvPr>
+          <p:cNvSpPr txBox="1"/>
+          <p:nvPr/>
+        </p:nvSpPr>
+        <p:spPr>
+          <a:xfrm>
+            <a:off x="6606889" y="2855133"/>
+            <a:ext cx="4253087" cy="1200329"/>
+          </a:xfrm>
+          <a:prstGeom prst="rect">
+            <a:avLst/>
+          </a:prstGeom>
+          <a:noFill/>
+          <a:ln>
+            <a:noFill/>
+          </a:ln>
+          <a:effectLst/>
+        </p:spPr>
+        <p:txBody>
+          <a:bodyPr wrap="none" rtlCol="0">
+            <a:spAutoFit/>
+            <a:scene3d>
+              <a:camera prst="orthographicFront"/>
+              <a:lightRig rig="threePt" dir="t"/>
+            </a:scene3d>
+            <a:sp3d extrusionH="38100"/>
+          </a:bodyPr>
+          <a:lstStyle/>
+          <a:p>
+            <a:r>
+              <a:rPr lang="en-US" sz="7200" dirty="0">
+                <a:ln w="3175">
+                  <a:noFill/>
+                </a:ln>
+                <a:solidFill>
+                  <a:srgbClr val="1A1F71"/>
+                </a:solidFill>
+                <a:latin typeface="Aafia" pitchFamily="50" charset="0"/>
+              </a:rPr>
+              <a:t>LaDe</a:t>
+            </a:r>
+            <a:r>
+              <a:rPr lang="en-US" sz="7200" dirty="0">
+                <a:ln w="3175">
+                  <a:noFill/>
+                </a:ln>
+                <a:gradFill flip="none" rotWithShape="1">
+                  <a:gsLst>
+                    <a:gs pos="80000">
+                      <a:srgbClr val="FFD700"/>
+                    </a:gs>
+                    <a:gs pos="0">
+                      <a:srgbClr val="FFD700"/>
+                    </a:gs>
+                    <a:gs pos="100000">
+                      <a:schemeClr val="bg1"/>
+                    </a:gs>
+                  </a:gsLst>
+                  <a:lin ang="18900000" scaled="1"/>
+                  <a:tileRect/>
+                </a:gradFill>
+                <a:latin typeface="Aafia" pitchFamily="50" charset="0"/>
+              </a:rPr>
+              <a:t>RR</a:t>
+            </a:r>
+          </a:p>
+        </p:txBody>
+      </p:sp>
+      <p:sp>
+        <p:nvSpPr>
+          <p:cNvPr id="19" name="TextBox 18">
+            <a:extLst>
+              <a:ext uri="{FF2B5EF4-FFF2-40B4-BE49-F238E27FC236}">
+                <a16:creationId xmlns:a16="http://schemas.microsoft.com/office/drawing/2014/main" id="{A5A7EABA-0082-B9A8-E837-F7B06ACDDB32}"/>
+              </a:ext>
+            </a:extLst>
+          </p:cNvPr>
+          <p:cNvSpPr txBox="1"/>
+          <p:nvPr/>
+        </p:nvSpPr>
+        <p:spPr>
+          <a:xfrm>
+            <a:off x="6713538" y="3578479"/>
+            <a:ext cx="4411662" cy="830997"/>
+          </a:xfrm>
+          <a:prstGeom prst="rect">
+            <a:avLst/>
+          </a:prstGeom>
+          <a:noFill/>
+          <a:ln>
+            <a:noFill/>
+          </a:ln>
+          <a:effectLst>
+            <a:outerShdw blurRad="44450" dist="27940" dir="5400000" algn="ctr">
+              <a:srgbClr val="000000">
+                <a:alpha val="32000"/>
+              </a:srgbClr>
+            </a:outerShdw>
+          </a:effectLst>
+          <a:scene3d>
+            <a:camera prst="orthographicFront">
+              <a:rot lat="0" lon="0" rev="0"/>
+            </a:camera>
+            <a:lightRig rig="balanced" dir="t">
+              <a:rot lat="0" lon="0" rev="8700000"/>
+            </a:lightRig>
+          </a:scene3d>
+          <a:sp3d>
+            <a:bevelT w="190500" h="38100"/>
+          </a:sp3d>
+        </p:spPr>
+        <p:txBody>
+          <a:bodyPr wrap="square" lIns="0" tIns="0" rIns="0" bIns="0" rtlCol="0">
+            <a:spAutoFit/>
+          </a:bodyPr>
+          <a:lstStyle/>
+          <a:p>
+            <a:pPr algn="just"/>
+            <a:r>
+              <a:rPr lang="en-US" sz="5400" b="1" spc="780" dirty="0">
+                <a:solidFill>
+                  <a:srgbClr val="97258F"/>
+                </a:solidFill>
+                <a:latin typeface="Engravers MT" panose="02090707080505020304" pitchFamily="18" charset="0"/>
+              </a:rPr>
+              <a:t>Engine</a:t>
+            </a:r>
+          </a:p>
+        </p:txBody>
+      </p:sp>
+      <p:grpSp>
+        <p:nvGrpSpPr>
+          <p:cNvPr id="22" name="Group 21">
+            <a:extLst>
+              <a:ext uri="{FF2B5EF4-FFF2-40B4-BE49-F238E27FC236}">
+                <a16:creationId xmlns:a16="http://schemas.microsoft.com/office/drawing/2014/main" id="{6104F80E-F7C9-072E-2402-76128B637237}"/>
+              </a:ext>
+            </a:extLst>
+          </p:cNvPr>
+          <p:cNvGrpSpPr/>
+          <p:nvPr/>
+        </p:nvGrpSpPr>
+        <p:grpSpPr>
+          <a:xfrm>
+            <a:off x="769938" y="598525"/>
+            <a:ext cx="4253087" cy="1538135"/>
+            <a:chOff x="769938" y="598525"/>
+            <a:chExt cx="4253087" cy="1538135"/>
+          </a:xfrm>
+        </p:grpSpPr>
+        <p:sp>
+          <p:nvSpPr>
+            <p:cNvPr id="8" name="Rectangle 7">
+              <a:extLst>
+                <a:ext uri="{FF2B5EF4-FFF2-40B4-BE49-F238E27FC236}">
+                  <a16:creationId xmlns:a16="http://schemas.microsoft.com/office/drawing/2014/main" id="{6E5FB2B3-2667-78BC-8A42-D70D6B7BEBB2}"/>
+                </a:ext>
+              </a:extLst>
+            </p:cNvPr>
+            <p:cNvSpPr/>
+            <p:nvPr/>
+          </p:nvSpPr>
+          <p:spPr>
+            <a:xfrm>
+              <a:off x="897224" y="897389"/>
+              <a:ext cx="1223963" cy="149432"/>
+            </a:xfrm>
+            <a:prstGeom prst="rect">
+              <a:avLst/>
+            </a:prstGeom>
+            <a:solidFill>
+              <a:schemeClr val="tx2">
+                <a:lumMod val="50000"/>
+                <a:lumOff val="50000"/>
+              </a:schemeClr>
+            </a:solidFill>
+            <a:ln w="3175">
+              <a:noFill/>
+            </a:ln>
+            <a:effectLst>
+              <a:outerShdw blurRad="57785" dist="33020" dir="3180000" algn="ctr">
+                <a:srgbClr val="000000">
+                  <a:alpha val="30000"/>
+                </a:srgbClr>
+              </a:outerShdw>
+            </a:effectLst>
+          </p:spPr>
+          <p:style>
+            <a:lnRef idx="2">
+              <a:schemeClr val="accent1">
+                <a:shade val="15000"/>
+              </a:schemeClr>
+            </a:lnRef>
+            <a:fillRef idx="1">
+              <a:schemeClr val="accent1"/>
+            </a:fillRef>
+            <a:effectRef idx="0">
+              <a:schemeClr val="accent1"/>
+            </a:effectRef>
+            <a:fontRef idx="minor">
+              <a:schemeClr val="lt1"/>
+            </a:fontRef>
+          </p:style>
+          <p:txBody>
+            <a:bodyPr rtlCol="0" anchor="ctr"/>
+            <a:lstStyle/>
+            <a:p>
+              <a:pPr algn="ctr"/>
+              <a:endParaRPr lang="en-150">
+                <a:ln w="3175">
+                  <a:solidFill>
+                    <a:schemeClr val="bg1">
+                      <a:lumMod val="95000"/>
+                    </a:schemeClr>
+                  </a:solidFill>
+                </a:ln>
+                <a:solidFill>
+                  <a:srgbClr val="1A1F71"/>
+                </a:solidFill>
+              </a:endParaRPr>
+            </a:p>
+          </p:txBody>
+        </p:sp>
+        <p:sp>
+          <p:nvSpPr>
+            <p:cNvPr id="9" name="Rectangle 8">
+              <a:extLst>
+                <a:ext uri="{FF2B5EF4-FFF2-40B4-BE49-F238E27FC236}">
+                  <a16:creationId xmlns:a16="http://schemas.microsoft.com/office/drawing/2014/main" id="{E50A6EDA-51DF-127A-864E-5C51051469A8}"/>
+                </a:ext>
+              </a:extLst>
+            </p:cNvPr>
+            <p:cNvSpPr/>
+            <p:nvPr/>
+          </p:nvSpPr>
+          <p:spPr>
+            <a:xfrm>
+              <a:off x="2121187" y="747957"/>
+              <a:ext cx="1368425" cy="149432"/>
+            </a:xfrm>
+            <a:prstGeom prst="rect">
+              <a:avLst/>
+            </a:prstGeom>
+            <a:solidFill>
+              <a:schemeClr val="tx2">
+                <a:lumMod val="50000"/>
+                <a:lumOff val="50000"/>
+              </a:schemeClr>
+            </a:solidFill>
+            <a:ln w="3175">
+              <a:noFill/>
+            </a:ln>
+            <a:effectLst>
+              <a:outerShdw blurRad="57785" dist="33020" dir="3180000" algn="ctr">
+                <a:srgbClr val="000000">
+                  <a:alpha val="30000"/>
+                </a:srgbClr>
+              </a:outerShdw>
+            </a:effectLst>
+          </p:spPr>
+          <p:style>
+            <a:lnRef idx="2">
+              <a:schemeClr val="accent1">
+                <a:shade val="15000"/>
+              </a:schemeClr>
+            </a:lnRef>
+            <a:fillRef idx="1">
+              <a:schemeClr val="accent1"/>
+            </a:fillRef>
+            <a:effectRef idx="0">
+              <a:schemeClr val="accent1"/>
+            </a:effectRef>
+            <a:fontRef idx="minor">
+              <a:schemeClr val="lt1"/>
+            </a:fontRef>
+          </p:style>
+          <p:txBody>
+            <a:bodyPr rtlCol="0" anchor="ctr"/>
+            <a:lstStyle/>
+            <a:p>
+              <a:pPr algn="ctr"/>
+              <a:endParaRPr lang="en-150">
+                <a:ln w="3175">
+                  <a:solidFill>
+                    <a:schemeClr val="bg1">
+                      <a:lumMod val="95000"/>
+                    </a:schemeClr>
+                  </a:solidFill>
+                </a:ln>
+                <a:solidFill>
+                  <a:srgbClr val="1A1F71"/>
+                </a:solidFill>
+              </a:endParaRPr>
+            </a:p>
+          </p:txBody>
+        </p:sp>
+        <p:sp>
+          <p:nvSpPr>
+            <p:cNvPr id="11" name="TextBox 10">
+              <a:extLst>
+                <a:ext uri="{FF2B5EF4-FFF2-40B4-BE49-F238E27FC236}">
+                  <a16:creationId xmlns:a16="http://schemas.microsoft.com/office/drawing/2014/main" id="{468171CD-13AC-294C-775E-C271379FFE46}"/>
+                </a:ext>
+              </a:extLst>
+            </p:cNvPr>
+            <p:cNvSpPr txBox="1"/>
+            <p:nvPr/>
+          </p:nvSpPr>
+          <p:spPr>
+            <a:xfrm>
+              <a:off x="769938" y="936331"/>
+              <a:ext cx="4253087" cy="1200329"/>
+            </a:xfrm>
+            <a:prstGeom prst="rect">
+              <a:avLst/>
+            </a:prstGeom>
+            <a:noFill/>
+            <a:ln>
+              <a:noFill/>
+            </a:ln>
+            <a:effectLst>
+              <a:outerShdw blurRad="57785" dist="33020" dir="3180000" algn="ctr">
+                <a:srgbClr val="000000">
+                  <a:alpha val="30000"/>
+                </a:srgbClr>
+              </a:outerShdw>
+            </a:effectLst>
+          </p:spPr>
+          <p:txBody>
+            <a:bodyPr wrap="none" rtlCol="0">
+              <a:spAutoFit/>
+              <a:sp3d extrusionH="38100">
+                <a:bevelT w="38100" h="38100"/>
+              </a:sp3d>
+            </a:bodyPr>
+            <a:lstStyle/>
+            <a:p>
+              <a:r>
+                <a:rPr lang="en-US" sz="7200" dirty="0">
+                  <a:ln w="3175">
+                    <a:noFill/>
+                  </a:ln>
+                  <a:solidFill>
+                    <a:schemeClr val="tx2">
+                      <a:lumMod val="50000"/>
+                      <a:lumOff val="50000"/>
+                    </a:schemeClr>
+                  </a:solidFill>
+                  <a:latin typeface="Aafia" pitchFamily="50" charset="0"/>
+                </a:rPr>
+                <a:t>LaDe</a:t>
+              </a:r>
+              <a:r>
+                <a:rPr lang="en-US" sz="7200" dirty="0">
+                  <a:ln w="3175">
+                    <a:noFill/>
+                  </a:ln>
+                  <a:solidFill>
+                    <a:srgbClr val="FFD700"/>
+                  </a:solidFill>
+                  <a:latin typeface="Aafia" pitchFamily="50" charset="0"/>
+                </a:rPr>
+                <a:t>RR</a:t>
+              </a:r>
+            </a:p>
+          </p:txBody>
+        </p:sp>
+        <p:sp>
+          <p:nvSpPr>
+            <p:cNvPr id="2" name="Rectangle 1">
+              <a:extLst>
+                <a:ext uri="{FF2B5EF4-FFF2-40B4-BE49-F238E27FC236}">
+                  <a16:creationId xmlns:a16="http://schemas.microsoft.com/office/drawing/2014/main" id="{CE7E8974-D937-3DBD-ED10-A5C936AF6930}"/>
+                </a:ext>
+              </a:extLst>
+            </p:cNvPr>
+            <p:cNvSpPr/>
+            <p:nvPr/>
+          </p:nvSpPr>
+          <p:spPr>
+            <a:xfrm>
+              <a:off x="3489612" y="598525"/>
+              <a:ext cx="1377950" cy="149432"/>
+            </a:xfrm>
+            <a:prstGeom prst="rect">
+              <a:avLst/>
+            </a:prstGeom>
+            <a:solidFill>
+              <a:srgbClr val="FFD700"/>
+            </a:solidFill>
+            <a:ln w="3175">
+              <a:noFill/>
+            </a:ln>
+            <a:effectLst>
+              <a:outerShdw blurRad="57785" dist="33020" dir="3180000" algn="ctr">
+                <a:srgbClr val="000000">
+                  <a:alpha val="30000"/>
+                </a:srgbClr>
+              </a:outerShdw>
+            </a:effectLst>
+          </p:spPr>
+          <p:style>
+            <a:lnRef idx="2">
+              <a:schemeClr val="accent1">
+                <a:shade val="15000"/>
+              </a:schemeClr>
+            </a:lnRef>
+            <a:fillRef idx="1">
+              <a:schemeClr val="accent1"/>
+            </a:fillRef>
+            <a:effectRef idx="0">
+              <a:schemeClr val="accent1"/>
+            </a:effectRef>
+            <a:fontRef idx="minor">
+              <a:schemeClr val="lt1"/>
+            </a:fontRef>
+          </p:style>
+          <p:txBody>
+            <a:bodyPr rtlCol="0" anchor="ctr"/>
+            <a:lstStyle/>
+            <a:p>
+              <a:pPr algn="ctr"/>
+              <a:endParaRPr lang="en-150">
+                <a:ln w="3175">
+                  <a:solidFill>
+                    <a:schemeClr val="bg1">
+                      <a:lumMod val="95000"/>
+                    </a:schemeClr>
+                  </a:solidFill>
+                </a:ln>
+                <a:solidFill>
+                  <a:srgbClr val="1A1F71"/>
+                </a:solidFill>
+              </a:endParaRPr>
+            </a:p>
+          </p:txBody>
+        </p:sp>
+      </p:grpSp>
+      <p:sp>
+        <p:nvSpPr>
+          <p:cNvPr id="3" name="Rectangle 2">
+            <a:extLst>
+              <a:ext uri="{FF2B5EF4-FFF2-40B4-BE49-F238E27FC236}">
+                <a16:creationId xmlns:a16="http://schemas.microsoft.com/office/drawing/2014/main" id="{65A805B1-4904-A4EE-61BA-0CD1F1D7F07B}"/>
+              </a:ext>
+            </a:extLst>
+          </p:cNvPr>
+          <p:cNvSpPr/>
+          <p:nvPr/>
+        </p:nvSpPr>
+        <p:spPr>
+          <a:xfrm>
+            <a:off x="6840824" y="5390598"/>
+            <a:ext cx="1223963" cy="149432"/>
+          </a:xfrm>
+          <a:prstGeom prst="rect">
+            <a:avLst/>
+          </a:prstGeom>
+          <a:solidFill>
+            <a:srgbClr val="20257A"/>
+          </a:solidFill>
+          <a:ln w="3175">
+            <a:noFill/>
+          </a:ln>
+          <a:effectLst>
+            <a:outerShdw blurRad="57785" dist="33020" dir="3180000" algn="ctr">
+              <a:srgbClr val="000000">
+                <a:alpha val="30000"/>
+              </a:srgbClr>
+            </a:outerShdw>
+          </a:effectLst>
+        </p:spPr>
+        <p:style>
+          <a:lnRef idx="2">
+            <a:schemeClr val="accent1">
+              <a:shade val="15000"/>
+            </a:schemeClr>
+          </a:lnRef>
+          <a:fillRef idx="1">
+            <a:schemeClr val="accent1"/>
+          </a:fillRef>
+          <a:effectRef idx="0">
+            <a:schemeClr val="accent1"/>
+          </a:effectRef>
+          <a:fontRef idx="minor">
+            <a:schemeClr val="lt1"/>
+          </a:fontRef>
+        </p:style>
+        <p:txBody>
+          <a:bodyPr rtlCol="0" anchor="ctr"/>
+          <a:lstStyle/>
+          <a:p>
+            <a:pPr algn="ctr"/>
+            <a:endParaRPr lang="en-150">
+              <a:ln w="3175">
+                <a:solidFill>
+                  <a:schemeClr val="bg1">
+                    <a:lumMod val="95000"/>
+                  </a:schemeClr>
+                </a:solidFill>
+              </a:ln>
+              <a:solidFill>
+                <a:srgbClr val="1A1F71"/>
+              </a:solidFill>
+            </a:endParaRPr>
+          </a:p>
+        </p:txBody>
+      </p:sp>
+      <p:sp>
+        <p:nvSpPr>
+          <p:cNvPr id="4" name="Rectangle 3">
+            <a:extLst>
+              <a:ext uri="{FF2B5EF4-FFF2-40B4-BE49-F238E27FC236}">
+                <a16:creationId xmlns:a16="http://schemas.microsoft.com/office/drawing/2014/main" id="{9F5AEA27-E3BD-63E7-249D-33A3B52E560C}"/>
+              </a:ext>
+            </a:extLst>
+          </p:cNvPr>
+          <p:cNvSpPr/>
+          <p:nvPr/>
+        </p:nvSpPr>
+        <p:spPr>
+          <a:xfrm>
+            <a:off x="8064787" y="5241166"/>
+            <a:ext cx="1368425" cy="149432"/>
+          </a:xfrm>
+          <a:prstGeom prst="rect">
+            <a:avLst/>
+          </a:prstGeom>
+          <a:solidFill>
+            <a:srgbClr val="20257A"/>
+          </a:solidFill>
+          <a:ln w="3175">
+            <a:noFill/>
+          </a:ln>
+          <a:effectLst>
+            <a:outerShdw blurRad="57785" dist="33020" dir="3180000" algn="ctr">
+              <a:srgbClr val="000000">
+                <a:alpha val="30000"/>
+              </a:srgbClr>
+            </a:outerShdw>
+          </a:effectLst>
+        </p:spPr>
+        <p:style>
+          <a:lnRef idx="2">
+            <a:schemeClr val="accent1">
+              <a:shade val="15000"/>
+            </a:schemeClr>
+          </a:lnRef>
+          <a:fillRef idx="1">
+            <a:schemeClr val="accent1"/>
+          </a:fillRef>
+          <a:effectRef idx="0">
+            <a:schemeClr val="accent1"/>
+          </a:effectRef>
+          <a:fontRef idx="minor">
+            <a:schemeClr val="lt1"/>
+          </a:fontRef>
+        </p:style>
+        <p:txBody>
+          <a:bodyPr rtlCol="0" anchor="ctr"/>
+          <a:lstStyle/>
+          <a:p>
+            <a:pPr algn="ctr"/>
+            <a:endParaRPr lang="en-150">
+              <a:ln w="3175">
+                <a:solidFill>
+                  <a:schemeClr val="bg1">
+                    <a:lumMod val="95000"/>
+                  </a:schemeClr>
+                </a:solidFill>
+              </a:ln>
+              <a:solidFill>
+                <a:srgbClr val="1A1F71"/>
+              </a:solidFill>
+            </a:endParaRPr>
+          </a:p>
+        </p:txBody>
+      </p:sp>
+      <p:sp>
+        <p:nvSpPr>
+          <p:cNvPr id="5" name="TextBox 4">
+            <a:extLst>
+              <a:ext uri="{FF2B5EF4-FFF2-40B4-BE49-F238E27FC236}">
+                <a16:creationId xmlns:a16="http://schemas.microsoft.com/office/drawing/2014/main" id="{4D45774A-B302-4A0E-9171-FE0F941C319E}"/>
+              </a:ext>
+            </a:extLst>
+          </p:cNvPr>
+          <p:cNvSpPr txBox="1"/>
+          <p:nvPr/>
+        </p:nvSpPr>
+        <p:spPr>
+          <a:xfrm>
+            <a:off x="6713538" y="5429540"/>
+            <a:ext cx="4253087" cy="1200329"/>
+          </a:xfrm>
+          <a:prstGeom prst="rect">
+            <a:avLst/>
+          </a:prstGeom>
+          <a:noFill/>
+          <a:ln>
+            <a:noFill/>
+          </a:ln>
+          <a:effectLst>
+            <a:outerShdw blurRad="57785" dist="33020" dir="3180000" algn="ctr">
+              <a:srgbClr val="000000">
+                <a:alpha val="30000"/>
+              </a:srgbClr>
+            </a:outerShdw>
+          </a:effectLst>
+        </p:spPr>
+        <p:txBody>
+          <a:bodyPr wrap="none" rtlCol="0">
+            <a:spAutoFit/>
+            <a:sp3d extrusionH="38100">
+              <a:bevelT w="38100" h="38100"/>
+            </a:sp3d>
+          </a:bodyPr>
+          <a:lstStyle/>
+          <a:p>
+            <a:r>
+              <a:rPr lang="en-US" sz="7200" dirty="0">
+                <a:ln w="3175">
+                  <a:noFill/>
+                </a:ln>
+                <a:solidFill>
+                  <a:srgbClr val="20257A"/>
+                </a:solidFill>
+                <a:latin typeface="Aafia" pitchFamily="50" charset="0"/>
+              </a:rPr>
+              <a:t>LaDe</a:t>
+            </a:r>
+            <a:r>
+              <a:rPr lang="en-US" sz="7200" dirty="0">
+                <a:ln w="3175">
+                  <a:noFill/>
+                </a:ln>
+                <a:solidFill>
+                  <a:srgbClr val="FFD700"/>
+                </a:solidFill>
+                <a:latin typeface="Aafia" pitchFamily="50" charset="0"/>
+              </a:rPr>
+              <a:t>RR</a:t>
+            </a:r>
+          </a:p>
+        </p:txBody>
+      </p:sp>
+      <p:sp>
+        <p:nvSpPr>
+          <p:cNvPr id="6" name="Rectangle 5">
+            <a:extLst>
+              <a:ext uri="{FF2B5EF4-FFF2-40B4-BE49-F238E27FC236}">
+                <a16:creationId xmlns:a16="http://schemas.microsoft.com/office/drawing/2014/main" id="{A3B506D2-D3FE-1934-6B56-E1284D2F43FC}"/>
+              </a:ext>
+            </a:extLst>
+          </p:cNvPr>
+          <p:cNvSpPr/>
+          <p:nvPr/>
+        </p:nvSpPr>
+        <p:spPr>
+          <a:xfrm>
+            <a:off x="9433212" y="5091734"/>
+            <a:ext cx="1377950" cy="149432"/>
+          </a:xfrm>
+          <a:prstGeom prst="rect">
+            <a:avLst/>
+          </a:prstGeom>
+          <a:solidFill>
+            <a:srgbClr val="FFD700"/>
+          </a:solidFill>
+          <a:ln w="3175">
+            <a:noFill/>
+          </a:ln>
+          <a:effectLst>
+            <a:outerShdw blurRad="57785" dist="33020" dir="3180000" algn="ctr">
+              <a:srgbClr val="000000">
+                <a:alpha val="30000"/>
+              </a:srgbClr>
+            </a:outerShdw>
+          </a:effectLst>
+        </p:spPr>
+        <p:style>
+          <a:lnRef idx="2">
+            <a:schemeClr val="accent1">
+              <a:shade val="15000"/>
+            </a:schemeClr>
+          </a:lnRef>
+          <a:fillRef idx="1">
+            <a:schemeClr val="accent1"/>
+          </a:fillRef>
+          <a:effectRef idx="0">
+            <a:schemeClr val="accent1"/>
+          </a:effectRef>
+          <a:fontRef idx="minor">
+            <a:schemeClr val="lt1"/>
+          </a:fontRef>
+        </p:style>
+        <p:txBody>
+          <a:bodyPr rtlCol="0" anchor="ctr"/>
+          <a:lstStyle/>
+          <a:p>
+            <a:pPr algn="ctr"/>
+            <a:endParaRPr lang="en-150">
+              <a:ln w="3175">
+                <a:solidFill>
+                  <a:schemeClr val="bg1">
+                    <a:lumMod val="95000"/>
+                  </a:schemeClr>
+                </a:solidFill>
+              </a:ln>
+              <a:solidFill>
+                <a:srgbClr val="1A1F71"/>
+              </a:solidFill>
+            </a:endParaRPr>
+          </a:p>
+        </p:txBody>
+      </p:sp>
+    </p:spTree>
+    <p:extLst>
+      <p:ext uri="{BB962C8B-B14F-4D97-AF65-F5344CB8AC3E}">
+        <p14:creationId xmlns:p14="http://schemas.microsoft.com/office/powerpoint/2010/main" val="4215836161"/>
+      </p:ext>
+    </p:extLst>
+  </p:cSld>
+  <p:clrMapOvr>
+    <a:masterClrMapping/>
+  </p:clrMapOvr>
+</p:sld>
+</file>
+
+<file path=ppt/slides/slide6.xml><?xml version="1.0" encoding="utf-8"?>
 <p:sld xmlns:a="http://schemas.openxmlformats.org/drawingml/2006/main" xmlns:r="http://schemas.openxmlformats.org/officeDocument/2006/relationships" xmlns:p="http://schemas.openxmlformats.org/presentationml/2006/main" show="0">
   <p:cSld>
     <p:spTree>
@@ -6562,7 +13693,7 @@
 </p:sld>
 </file>
 
-<file path=ppt/slides/slide4.xml><?xml version="1.0" encoding="utf-8"?>
+<file path=ppt/slides/slide7.xml><?xml version="1.0" encoding="utf-8"?>
 <p:sld xmlns:a="http://schemas.openxmlformats.org/drawingml/2006/main" xmlns:r="http://schemas.openxmlformats.org/officeDocument/2006/relationships" xmlns:p="http://schemas.openxmlformats.org/presentationml/2006/main" show="0">
   <p:cSld>
     <p:spTree>
@@ -7211,960 +14342,6 @@
     <p:extLst>
       <p:ext uri="{BB962C8B-B14F-4D97-AF65-F5344CB8AC3E}">
         <p14:creationId xmlns:p14="http://schemas.microsoft.com/office/powerpoint/2010/main" val="2648620447"/>
-      </p:ext>
-    </p:extLst>
-  </p:cSld>
-  <p:clrMapOvr>
-    <a:masterClrMapping/>
-  </p:clrMapOvr>
-</p:sld>
-</file>
-
-<file path=ppt/slides/slide5.xml><?xml version="1.0" encoding="utf-8"?>
-<p:sld xmlns:a="http://schemas.openxmlformats.org/drawingml/2006/main" xmlns:r="http://schemas.openxmlformats.org/officeDocument/2006/relationships" xmlns:p="http://schemas.openxmlformats.org/presentationml/2006/main" show="0">
-  <p:cSld>
-    <p:spTree>
-      <p:nvGrpSpPr>
-        <p:cNvPr id="1" name=""/>
-        <p:cNvGrpSpPr/>
-        <p:nvPr/>
-      </p:nvGrpSpPr>
-      <p:grpSpPr>
-        <a:xfrm>
-          <a:off x="0" y="0"/>
-          <a:ext cx="0" cy="0"/>
-          <a:chOff x="0" y="0"/>
-          <a:chExt cx="0" cy="0"/>
-        </a:xfrm>
-      </p:grpSpPr>
-      <p:sp>
-        <p:nvSpPr>
-          <p:cNvPr id="4" name="Rectangle 3">
-            <a:extLst>
-              <a:ext uri="{FF2B5EF4-FFF2-40B4-BE49-F238E27FC236}">
-                <a16:creationId xmlns:a16="http://schemas.microsoft.com/office/drawing/2014/main" id="{0EA7F422-11B4-801C-3967-BC77A3C5E938}"/>
-              </a:ext>
-            </a:extLst>
-          </p:cNvPr>
-          <p:cNvSpPr/>
-          <p:nvPr/>
-        </p:nvSpPr>
-        <p:spPr>
-          <a:xfrm>
-            <a:off x="4148185" y="3422272"/>
-            <a:ext cx="1369714" cy="344274"/>
-          </a:xfrm>
-          <a:prstGeom prst="rect">
-            <a:avLst/>
-          </a:prstGeom>
-          <a:solidFill>
-            <a:srgbClr val="242A9C"/>
-          </a:solidFill>
-          <a:ln w="3175">
-            <a:noFill/>
-          </a:ln>
-          <a:scene3d>
-            <a:camera prst="orthographicFront"/>
-            <a:lightRig rig="threePt" dir="t"/>
-          </a:scene3d>
-          <a:sp3d>
-            <a:bevelT w="38100" h="38100"/>
-          </a:sp3d>
-        </p:spPr>
-        <p:style>
-          <a:lnRef idx="2">
-            <a:schemeClr val="accent1">
-              <a:shade val="15000"/>
-            </a:schemeClr>
-          </a:lnRef>
-          <a:fillRef idx="1">
-            <a:schemeClr val="accent1"/>
-          </a:fillRef>
-          <a:effectRef idx="0">
-            <a:schemeClr val="accent1"/>
-          </a:effectRef>
-          <a:fontRef idx="minor">
-            <a:schemeClr val="lt1"/>
-          </a:fontRef>
-        </p:style>
-        <p:txBody>
-          <a:bodyPr rtlCol="0" anchor="ctr"/>
-          <a:lstStyle/>
-          <a:p>
-            <a:pPr algn="ctr"/>
-            <a:endParaRPr lang="en-150"/>
-          </a:p>
-        </p:txBody>
-      </p:sp>
-      <p:sp>
-        <p:nvSpPr>
-          <p:cNvPr id="5" name="Rectangle 4">
-            <a:extLst>
-              <a:ext uri="{FF2B5EF4-FFF2-40B4-BE49-F238E27FC236}">
-                <a16:creationId xmlns:a16="http://schemas.microsoft.com/office/drawing/2014/main" id="{C77BE717-C333-AA2E-AE01-211F68893DDE}"/>
-              </a:ext>
-            </a:extLst>
-          </p:cNvPr>
-          <p:cNvSpPr/>
-          <p:nvPr/>
-        </p:nvSpPr>
-        <p:spPr>
-          <a:xfrm>
-            <a:off x="5440432" y="2981377"/>
-            <a:ext cx="1369714" cy="344274"/>
-          </a:xfrm>
-          <a:prstGeom prst="rect">
-            <a:avLst/>
-          </a:prstGeom>
-          <a:solidFill>
-            <a:srgbClr val="242A9C"/>
-          </a:solidFill>
-          <a:ln w="3175">
-            <a:noFill/>
-          </a:ln>
-          <a:scene3d>
-            <a:camera prst="orthographicFront"/>
-            <a:lightRig rig="threePt" dir="t"/>
-          </a:scene3d>
-          <a:sp3d>
-            <a:bevelT w="38100" h="38100"/>
-          </a:sp3d>
-        </p:spPr>
-        <p:style>
-          <a:lnRef idx="2">
-            <a:schemeClr val="accent1">
-              <a:shade val="15000"/>
-            </a:schemeClr>
-          </a:lnRef>
-          <a:fillRef idx="1">
-            <a:schemeClr val="accent1"/>
-          </a:fillRef>
-          <a:effectRef idx="0">
-            <a:schemeClr val="accent1"/>
-          </a:effectRef>
-          <a:fontRef idx="minor">
-            <a:schemeClr val="lt1"/>
-          </a:fontRef>
-        </p:style>
-        <p:txBody>
-          <a:bodyPr rtlCol="0" anchor="ctr"/>
-          <a:lstStyle/>
-          <a:p>
-            <a:pPr algn="ctr"/>
-            <a:endParaRPr lang="en-150"/>
-          </a:p>
-        </p:txBody>
-      </p:sp>
-      <p:sp>
-        <p:nvSpPr>
-          <p:cNvPr id="6" name="Rectangle 5">
-            <a:extLst>
-              <a:ext uri="{FF2B5EF4-FFF2-40B4-BE49-F238E27FC236}">
-                <a16:creationId xmlns:a16="http://schemas.microsoft.com/office/drawing/2014/main" id="{0F3EA294-0FAE-D6B7-F4F6-0E3492015699}"/>
-              </a:ext>
-            </a:extLst>
-          </p:cNvPr>
-          <p:cNvSpPr/>
-          <p:nvPr/>
-        </p:nvSpPr>
-        <p:spPr>
-          <a:xfrm>
-            <a:off x="6732679" y="2540482"/>
-            <a:ext cx="1369711" cy="344274"/>
-          </a:xfrm>
-          <a:prstGeom prst="rect">
-            <a:avLst/>
-          </a:prstGeom>
-          <a:solidFill>
-            <a:srgbClr val="E101D1"/>
-          </a:solidFill>
-          <a:ln w="3175">
-            <a:noFill/>
-          </a:ln>
-          <a:scene3d>
-            <a:camera prst="orthographicFront"/>
-            <a:lightRig rig="threePt" dir="t"/>
-          </a:scene3d>
-          <a:sp3d>
-            <a:bevelT w="38100" h="38100"/>
-          </a:sp3d>
-        </p:spPr>
-        <p:style>
-          <a:lnRef idx="2">
-            <a:schemeClr val="accent1">
-              <a:shade val="15000"/>
-            </a:schemeClr>
-          </a:lnRef>
-          <a:fillRef idx="1">
-            <a:schemeClr val="accent1"/>
-          </a:fillRef>
-          <a:effectRef idx="0">
-            <a:schemeClr val="accent1"/>
-          </a:effectRef>
-          <a:fontRef idx="minor">
-            <a:schemeClr val="lt1"/>
-          </a:fontRef>
-        </p:style>
-        <p:txBody>
-          <a:bodyPr rtlCol="0" anchor="ctr"/>
-          <a:lstStyle/>
-          <a:p>
-            <a:pPr algn="ctr"/>
-            <a:endParaRPr lang="en-150"/>
-          </a:p>
-        </p:txBody>
-      </p:sp>
-      <p:sp>
-        <p:nvSpPr>
-          <p:cNvPr id="9" name="TextBox 8">
-            <a:extLst>
-              <a:ext uri="{FF2B5EF4-FFF2-40B4-BE49-F238E27FC236}">
-                <a16:creationId xmlns:a16="http://schemas.microsoft.com/office/drawing/2014/main" id="{C4A505D0-0167-DE42-F11E-1D8999064CCB}"/>
-              </a:ext>
-            </a:extLst>
-          </p:cNvPr>
-          <p:cNvSpPr txBox="1"/>
-          <p:nvPr/>
-        </p:nvSpPr>
-        <p:spPr>
-          <a:xfrm>
-            <a:off x="4009489" y="3766546"/>
-            <a:ext cx="4253087" cy="1200329"/>
-          </a:xfrm>
-          <a:prstGeom prst="rect">
-            <a:avLst/>
-          </a:prstGeom>
-          <a:noFill/>
-          <a:ln>
-            <a:noFill/>
-          </a:ln>
-        </p:spPr>
-        <p:txBody>
-          <a:bodyPr wrap="none" rtlCol="0">
-            <a:spAutoFit/>
-            <a:scene3d>
-              <a:camera prst="orthographicFront"/>
-              <a:lightRig rig="threePt" dir="t"/>
-            </a:scene3d>
-            <a:sp3d extrusionH="38100">
-              <a:bevelT w="38100" h="38100"/>
-            </a:sp3d>
-          </a:bodyPr>
-          <a:lstStyle/>
-          <a:p>
-            <a:r>
-              <a:rPr lang="en-US" sz="7200" dirty="0">
-                <a:ln w="3175">
-                  <a:noFill/>
-                </a:ln>
-                <a:solidFill>
-                  <a:srgbClr val="242A9C"/>
-                </a:solidFill>
-                <a:latin typeface="Aafia" pitchFamily="50" charset="0"/>
-              </a:rPr>
-              <a:t>LaDe</a:t>
-            </a:r>
-            <a:r>
-              <a:rPr lang="en-US" sz="7200" dirty="0">
-                <a:ln w="3175">
-                  <a:noFill/>
-                </a:ln>
-                <a:solidFill>
-                  <a:srgbClr val="E101D1"/>
-                </a:solidFill>
-                <a:latin typeface="Aafia" pitchFamily="50" charset="0"/>
-              </a:rPr>
-              <a:t>RR</a:t>
-            </a:r>
-          </a:p>
-        </p:txBody>
-      </p:sp>
-      <p:sp>
-        <p:nvSpPr>
-          <p:cNvPr id="2" name="TextBox 1">
-            <a:extLst>
-              <a:ext uri="{FF2B5EF4-FFF2-40B4-BE49-F238E27FC236}">
-                <a16:creationId xmlns:a16="http://schemas.microsoft.com/office/drawing/2014/main" id="{9435C635-2A61-E220-D6E5-32F47585513F}"/>
-              </a:ext>
-            </a:extLst>
-          </p:cNvPr>
-          <p:cNvSpPr txBox="1"/>
-          <p:nvPr/>
-        </p:nvSpPr>
-        <p:spPr>
-          <a:xfrm>
-            <a:off x="4444234" y="4616450"/>
-            <a:ext cx="3303532" cy="1446550"/>
-          </a:xfrm>
-          <a:prstGeom prst="rect">
-            <a:avLst/>
-          </a:prstGeom>
-          <a:noFill/>
-        </p:spPr>
-        <p:txBody>
-          <a:bodyPr wrap="square" rtlCol="0">
-            <a:spAutoFit/>
-          </a:bodyPr>
-          <a:lstStyle/>
-          <a:p>
-            <a:r>
-              <a:rPr lang="en-US" sz="8800" b="1" dirty="0">
-                <a:ln w="19050">
-                  <a:solidFill>
-                    <a:schemeClr val="accent3">
-                      <a:lumMod val="60000"/>
-                      <a:lumOff val="40000"/>
-                    </a:schemeClr>
-                  </a:solidFill>
-                </a:ln>
-                <a:solidFill>
-                  <a:srgbClr val="58FF37"/>
-                </a:solidFill>
-                <a:latin typeface="always  forever" pitchFamily="2" charset="0"/>
-                <a:cs typeface="Libertinus Keyboard" pitchFamily="50" charset="-79"/>
-              </a:rPr>
-              <a:t>Python  Lib</a:t>
-            </a:r>
-            <a:endParaRPr lang="en-150" sz="8800" b="1" dirty="0">
-              <a:ln w="19050">
-                <a:solidFill>
-                  <a:schemeClr val="accent3">
-                    <a:lumMod val="60000"/>
-                    <a:lumOff val="40000"/>
-                  </a:schemeClr>
-                </a:solidFill>
-              </a:ln>
-              <a:solidFill>
-                <a:srgbClr val="58FF37"/>
-              </a:solidFill>
-              <a:latin typeface="always  forever" pitchFamily="2" charset="0"/>
-              <a:cs typeface="Libertinus Keyboard" pitchFamily="50" charset="-79"/>
-            </a:endParaRPr>
-          </a:p>
-        </p:txBody>
-      </p:sp>
-    </p:spTree>
-    <p:extLst>
-      <p:ext uri="{BB962C8B-B14F-4D97-AF65-F5344CB8AC3E}">
-        <p14:creationId xmlns:p14="http://schemas.microsoft.com/office/powerpoint/2010/main" val="1988947253"/>
-      </p:ext>
-    </p:extLst>
-  </p:cSld>
-  <p:clrMapOvr>
-    <a:masterClrMapping/>
-  </p:clrMapOvr>
-</p:sld>
-</file>
-
-<file path=ppt/slides/slide6.xml><?xml version="1.0" encoding="utf-8"?>
-<p:sld xmlns:a="http://schemas.openxmlformats.org/drawingml/2006/main" xmlns:r="http://schemas.openxmlformats.org/officeDocument/2006/relationships" xmlns:p="http://schemas.openxmlformats.org/presentationml/2006/main" show="0">
-  <p:cSld>
-    <p:spTree>
-      <p:nvGrpSpPr>
-        <p:cNvPr id="1" name=""/>
-        <p:cNvGrpSpPr/>
-        <p:nvPr/>
-      </p:nvGrpSpPr>
-      <p:grpSpPr>
-        <a:xfrm>
-          <a:off x="0" y="0"/>
-          <a:ext cx="0" cy="0"/>
-          <a:chOff x="0" y="0"/>
-          <a:chExt cx="0" cy="0"/>
-        </a:xfrm>
-      </p:grpSpPr>
-      <p:sp>
-        <p:nvSpPr>
-          <p:cNvPr id="4" name="Rectangle 3">
-            <a:extLst>
-              <a:ext uri="{FF2B5EF4-FFF2-40B4-BE49-F238E27FC236}">
-                <a16:creationId xmlns:a16="http://schemas.microsoft.com/office/drawing/2014/main" id="{0EA7F422-11B4-801C-3967-BC77A3C5E938}"/>
-              </a:ext>
-            </a:extLst>
-          </p:cNvPr>
-          <p:cNvSpPr/>
-          <p:nvPr/>
-        </p:nvSpPr>
-        <p:spPr>
-          <a:xfrm>
-            <a:off x="4148185" y="3422272"/>
-            <a:ext cx="1369714" cy="344274"/>
-          </a:xfrm>
-          <a:prstGeom prst="rect">
-            <a:avLst/>
-          </a:prstGeom>
-          <a:solidFill>
-            <a:srgbClr val="1A1F71"/>
-          </a:solidFill>
-          <a:ln w="3175">
-            <a:noFill/>
-          </a:ln>
-          <a:scene3d>
-            <a:camera prst="orthographicFront"/>
-            <a:lightRig rig="threePt" dir="t"/>
-          </a:scene3d>
-          <a:sp3d>
-            <a:bevelT w="38100" h="38100"/>
-          </a:sp3d>
-        </p:spPr>
-        <p:style>
-          <a:lnRef idx="2">
-            <a:schemeClr val="accent1">
-              <a:shade val="15000"/>
-            </a:schemeClr>
-          </a:lnRef>
-          <a:fillRef idx="1">
-            <a:schemeClr val="accent1"/>
-          </a:fillRef>
-          <a:effectRef idx="0">
-            <a:schemeClr val="accent1"/>
-          </a:effectRef>
-          <a:fontRef idx="minor">
-            <a:schemeClr val="lt1"/>
-          </a:fontRef>
-        </p:style>
-        <p:txBody>
-          <a:bodyPr rtlCol="0" anchor="ctr"/>
-          <a:lstStyle/>
-          <a:p>
-            <a:pPr algn="ctr"/>
-            <a:endParaRPr lang="en-150">
-              <a:solidFill>
-                <a:srgbClr val="1A1F71"/>
-              </a:solidFill>
-            </a:endParaRPr>
-          </a:p>
-        </p:txBody>
-      </p:sp>
-      <p:sp>
-        <p:nvSpPr>
-          <p:cNvPr id="5" name="Rectangle 4">
-            <a:extLst>
-              <a:ext uri="{FF2B5EF4-FFF2-40B4-BE49-F238E27FC236}">
-                <a16:creationId xmlns:a16="http://schemas.microsoft.com/office/drawing/2014/main" id="{C77BE717-C333-AA2E-AE01-211F68893DDE}"/>
-              </a:ext>
-            </a:extLst>
-          </p:cNvPr>
-          <p:cNvSpPr/>
-          <p:nvPr/>
-        </p:nvSpPr>
-        <p:spPr>
-          <a:xfrm>
-            <a:off x="5440432" y="2981377"/>
-            <a:ext cx="1369714" cy="344274"/>
-          </a:xfrm>
-          <a:prstGeom prst="rect">
-            <a:avLst/>
-          </a:prstGeom>
-          <a:solidFill>
-            <a:srgbClr val="1A1F71"/>
-          </a:solidFill>
-          <a:ln w="3175">
-            <a:noFill/>
-          </a:ln>
-          <a:scene3d>
-            <a:camera prst="orthographicFront"/>
-            <a:lightRig rig="threePt" dir="t"/>
-          </a:scene3d>
-          <a:sp3d>
-            <a:bevelT w="38100" h="38100"/>
-          </a:sp3d>
-        </p:spPr>
-        <p:style>
-          <a:lnRef idx="2">
-            <a:schemeClr val="accent1">
-              <a:shade val="15000"/>
-            </a:schemeClr>
-          </a:lnRef>
-          <a:fillRef idx="1">
-            <a:schemeClr val="accent1"/>
-          </a:fillRef>
-          <a:effectRef idx="0">
-            <a:schemeClr val="accent1"/>
-          </a:effectRef>
-          <a:fontRef idx="minor">
-            <a:schemeClr val="lt1"/>
-          </a:fontRef>
-        </p:style>
-        <p:txBody>
-          <a:bodyPr rtlCol="0" anchor="ctr"/>
-          <a:lstStyle/>
-          <a:p>
-            <a:pPr algn="ctr"/>
-            <a:endParaRPr lang="en-150">
-              <a:solidFill>
-                <a:srgbClr val="1A1F71"/>
-              </a:solidFill>
-            </a:endParaRPr>
-          </a:p>
-        </p:txBody>
-      </p:sp>
-      <p:sp>
-        <p:nvSpPr>
-          <p:cNvPr id="6" name="Rectangle 5">
-            <a:extLst>
-              <a:ext uri="{FF2B5EF4-FFF2-40B4-BE49-F238E27FC236}">
-                <a16:creationId xmlns:a16="http://schemas.microsoft.com/office/drawing/2014/main" id="{0F3EA294-0FAE-D6B7-F4F6-0E3492015699}"/>
-              </a:ext>
-            </a:extLst>
-          </p:cNvPr>
-          <p:cNvSpPr/>
-          <p:nvPr/>
-        </p:nvSpPr>
-        <p:spPr>
-          <a:xfrm>
-            <a:off x="6732679" y="2540482"/>
-            <a:ext cx="1369711" cy="344274"/>
-          </a:xfrm>
-          <a:prstGeom prst="rect">
-            <a:avLst/>
-          </a:prstGeom>
-          <a:solidFill>
-            <a:srgbClr val="FFD700"/>
-          </a:solidFill>
-          <a:ln w="3175">
-            <a:noFill/>
-          </a:ln>
-          <a:scene3d>
-            <a:camera prst="orthographicFront"/>
-            <a:lightRig rig="threePt" dir="t"/>
-          </a:scene3d>
-          <a:sp3d>
-            <a:bevelT w="38100" h="38100"/>
-          </a:sp3d>
-        </p:spPr>
-        <p:style>
-          <a:lnRef idx="2">
-            <a:schemeClr val="accent1">
-              <a:shade val="15000"/>
-            </a:schemeClr>
-          </a:lnRef>
-          <a:fillRef idx="1">
-            <a:schemeClr val="accent1"/>
-          </a:fillRef>
-          <a:effectRef idx="0">
-            <a:schemeClr val="accent1"/>
-          </a:effectRef>
-          <a:fontRef idx="minor">
-            <a:schemeClr val="lt1"/>
-          </a:fontRef>
-        </p:style>
-        <p:txBody>
-          <a:bodyPr rtlCol="0" anchor="ctr"/>
-          <a:lstStyle/>
-          <a:p>
-            <a:pPr algn="ctr"/>
-            <a:endParaRPr lang="en-150"/>
-          </a:p>
-        </p:txBody>
-      </p:sp>
-      <p:sp>
-        <p:nvSpPr>
-          <p:cNvPr id="9" name="TextBox 8">
-            <a:extLst>
-              <a:ext uri="{FF2B5EF4-FFF2-40B4-BE49-F238E27FC236}">
-                <a16:creationId xmlns:a16="http://schemas.microsoft.com/office/drawing/2014/main" id="{C4A505D0-0167-DE42-F11E-1D8999064CCB}"/>
-              </a:ext>
-            </a:extLst>
-          </p:cNvPr>
-          <p:cNvSpPr txBox="1"/>
-          <p:nvPr/>
-        </p:nvSpPr>
-        <p:spPr>
-          <a:xfrm>
-            <a:off x="4009489" y="3766546"/>
-            <a:ext cx="4253087" cy="1200329"/>
-          </a:xfrm>
-          <a:prstGeom prst="rect">
-            <a:avLst/>
-          </a:prstGeom>
-          <a:noFill/>
-          <a:ln>
-            <a:noFill/>
-          </a:ln>
-        </p:spPr>
-        <p:txBody>
-          <a:bodyPr wrap="none" rtlCol="0">
-            <a:spAutoFit/>
-            <a:scene3d>
-              <a:camera prst="orthographicFront"/>
-              <a:lightRig rig="threePt" dir="t"/>
-            </a:scene3d>
-            <a:sp3d extrusionH="38100">
-              <a:bevelT w="38100" h="38100"/>
-            </a:sp3d>
-          </a:bodyPr>
-          <a:lstStyle/>
-          <a:p>
-            <a:r>
-              <a:rPr lang="en-US" sz="7200" dirty="0">
-                <a:ln w="3175">
-                  <a:noFill/>
-                </a:ln>
-                <a:solidFill>
-                  <a:srgbClr val="1A1F71"/>
-                </a:solidFill>
-                <a:latin typeface="Aafia" pitchFamily="50" charset="0"/>
-              </a:rPr>
-              <a:t>LaDe</a:t>
-            </a:r>
-            <a:r>
-              <a:rPr lang="en-US" sz="7200" dirty="0">
-                <a:ln w="3175">
-                  <a:noFill/>
-                </a:ln>
-                <a:solidFill>
-                  <a:srgbClr val="FFD700"/>
-                </a:solidFill>
-                <a:latin typeface="Aafia" pitchFamily="50" charset="0"/>
-              </a:rPr>
-              <a:t>RR</a:t>
-            </a:r>
-          </a:p>
-        </p:txBody>
-      </p:sp>
-      <p:sp>
-        <p:nvSpPr>
-          <p:cNvPr id="2" name="TextBox 1">
-            <a:extLst>
-              <a:ext uri="{FF2B5EF4-FFF2-40B4-BE49-F238E27FC236}">
-                <a16:creationId xmlns:a16="http://schemas.microsoft.com/office/drawing/2014/main" id="{9435C635-2A61-E220-D6E5-32F47585513F}"/>
-              </a:ext>
-            </a:extLst>
-          </p:cNvPr>
-          <p:cNvSpPr txBox="1"/>
-          <p:nvPr/>
-        </p:nvSpPr>
-        <p:spPr>
-          <a:xfrm>
-            <a:off x="6825504" y="3987710"/>
-            <a:ext cx="2812272" cy="1323439"/>
-          </a:xfrm>
-          <a:prstGeom prst="rect">
-            <a:avLst/>
-          </a:prstGeom>
-          <a:noFill/>
-        </p:spPr>
-        <p:txBody>
-          <a:bodyPr wrap="square" rtlCol="0">
-            <a:spAutoFit/>
-            <a:scene3d>
-              <a:camera prst="isometricRightUp"/>
-              <a:lightRig rig="threePt" dir="t"/>
-            </a:scene3d>
-          </a:bodyPr>
-          <a:lstStyle/>
-          <a:p>
-            <a:r>
-              <a:rPr lang="en-US" sz="8000" b="1" dirty="0">
-                <a:ln w="19050">
-                  <a:noFill/>
-                </a:ln>
-                <a:solidFill>
-                  <a:srgbClr val="FE02EC"/>
-                </a:solidFill>
-                <a:latin typeface="always  forever" pitchFamily="2" charset="0"/>
-                <a:cs typeface="Libertinus Keyboard" pitchFamily="50" charset="-79"/>
-              </a:rPr>
-              <a:t>Python Lib</a:t>
-            </a:r>
-            <a:endParaRPr lang="en-150" sz="8000" b="1" dirty="0">
-              <a:ln w="19050">
-                <a:noFill/>
-              </a:ln>
-              <a:solidFill>
-                <a:srgbClr val="FE02EC"/>
-              </a:solidFill>
-              <a:latin typeface="always  forever" pitchFamily="2" charset="0"/>
-              <a:cs typeface="Libertinus Keyboard" pitchFamily="50" charset="-79"/>
-            </a:endParaRPr>
-          </a:p>
-        </p:txBody>
-      </p:sp>
-    </p:spTree>
-    <p:extLst>
-      <p:ext uri="{BB962C8B-B14F-4D97-AF65-F5344CB8AC3E}">
-        <p14:creationId xmlns:p14="http://schemas.microsoft.com/office/powerpoint/2010/main" val="4070659874"/>
-      </p:ext>
-    </p:extLst>
-  </p:cSld>
-  <p:clrMapOvr>
-    <a:masterClrMapping/>
-  </p:clrMapOvr>
-</p:sld>
-</file>
-
-<file path=ppt/slides/slide7.xml><?xml version="1.0" encoding="utf-8"?>
-<p:sld xmlns:a="http://schemas.openxmlformats.org/drawingml/2006/main" xmlns:r="http://schemas.openxmlformats.org/officeDocument/2006/relationships" xmlns:p="http://schemas.openxmlformats.org/presentationml/2006/main" show="0">
-  <p:cSld>
-    <p:spTree>
-      <p:nvGrpSpPr>
-        <p:cNvPr id="1" name=""/>
-        <p:cNvGrpSpPr/>
-        <p:nvPr/>
-      </p:nvGrpSpPr>
-      <p:grpSpPr>
-        <a:xfrm>
-          <a:off x="0" y="0"/>
-          <a:ext cx="0" cy="0"/>
-          <a:chOff x="0" y="0"/>
-          <a:chExt cx="0" cy="0"/>
-        </a:xfrm>
-      </p:grpSpPr>
-      <p:sp>
-        <p:nvSpPr>
-          <p:cNvPr id="4" name="Rectangle 3">
-            <a:extLst>
-              <a:ext uri="{FF2B5EF4-FFF2-40B4-BE49-F238E27FC236}">
-                <a16:creationId xmlns:a16="http://schemas.microsoft.com/office/drawing/2014/main" id="{0EA7F422-11B4-801C-3967-BC77A3C5E938}"/>
-              </a:ext>
-            </a:extLst>
-          </p:cNvPr>
-          <p:cNvSpPr/>
-          <p:nvPr/>
-        </p:nvSpPr>
-        <p:spPr>
-          <a:xfrm>
-            <a:off x="4148185" y="3422272"/>
-            <a:ext cx="1369714" cy="344274"/>
-          </a:xfrm>
-          <a:prstGeom prst="rect">
-            <a:avLst/>
-          </a:prstGeom>
-          <a:solidFill>
-            <a:srgbClr val="1A1F71"/>
-          </a:solidFill>
-          <a:ln w="3175">
-            <a:noFill/>
-          </a:ln>
-          <a:scene3d>
-            <a:camera prst="orthographicFront"/>
-            <a:lightRig rig="threePt" dir="t"/>
-          </a:scene3d>
-          <a:sp3d>
-            <a:bevelT w="38100" h="38100"/>
-          </a:sp3d>
-        </p:spPr>
-        <p:style>
-          <a:lnRef idx="2">
-            <a:schemeClr val="accent1">
-              <a:shade val="15000"/>
-            </a:schemeClr>
-          </a:lnRef>
-          <a:fillRef idx="1">
-            <a:schemeClr val="accent1"/>
-          </a:fillRef>
-          <a:effectRef idx="0">
-            <a:schemeClr val="accent1"/>
-          </a:effectRef>
-          <a:fontRef idx="minor">
-            <a:schemeClr val="lt1"/>
-          </a:fontRef>
-        </p:style>
-        <p:txBody>
-          <a:bodyPr rtlCol="0" anchor="ctr"/>
-          <a:lstStyle/>
-          <a:p>
-            <a:pPr algn="ctr"/>
-            <a:endParaRPr lang="en-150">
-              <a:solidFill>
-                <a:srgbClr val="1A1F71"/>
-              </a:solidFill>
-            </a:endParaRPr>
-          </a:p>
-        </p:txBody>
-      </p:sp>
-      <p:sp>
-        <p:nvSpPr>
-          <p:cNvPr id="5" name="Rectangle 4">
-            <a:extLst>
-              <a:ext uri="{FF2B5EF4-FFF2-40B4-BE49-F238E27FC236}">
-                <a16:creationId xmlns:a16="http://schemas.microsoft.com/office/drawing/2014/main" id="{C77BE717-C333-AA2E-AE01-211F68893DDE}"/>
-              </a:ext>
-            </a:extLst>
-          </p:cNvPr>
-          <p:cNvSpPr/>
-          <p:nvPr/>
-        </p:nvSpPr>
-        <p:spPr>
-          <a:xfrm>
-            <a:off x="5440432" y="2981377"/>
-            <a:ext cx="1369714" cy="344274"/>
-          </a:xfrm>
-          <a:prstGeom prst="rect">
-            <a:avLst/>
-          </a:prstGeom>
-          <a:solidFill>
-            <a:srgbClr val="1A1F71"/>
-          </a:solidFill>
-          <a:ln w="3175">
-            <a:noFill/>
-          </a:ln>
-          <a:scene3d>
-            <a:camera prst="orthographicFront"/>
-            <a:lightRig rig="threePt" dir="t"/>
-          </a:scene3d>
-          <a:sp3d>
-            <a:bevelT w="38100" h="38100"/>
-          </a:sp3d>
-        </p:spPr>
-        <p:style>
-          <a:lnRef idx="2">
-            <a:schemeClr val="accent1">
-              <a:shade val="15000"/>
-            </a:schemeClr>
-          </a:lnRef>
-          <a:fillRef idx="1">
-            <a:schemeClr val="accent1"/>
-          </a:fillRef>
-          <a:effectRef idx="0">
-            <a:schemeClr val="accent1"/>
-          </a:effectRef>
-          <a:fontRef idx="minor">
-            <a:schemeClr val="lt1"/>
-          </a:fontRef>
-        </p:style>
-        <p:txBody>
-          <a:bodyPr rtlCol="0" anchor="ctr"/>
-          <a:lstStyle/>
-          <a:p>
-            <a:pPr algn="ctr"/>
-            <a:endParaRPr lang="en-150">
-              <a:solidFill>
-                <a:srgbClr val="1A1F71"/>
-              </a:solidFill>
-            </a:endParaRPr>
-          </a:p>
-        </p:txBody>
-      </p:sp>
-      <p:sp>
-        <p:nvSpPr>
-          <p:cNvPr id="6" name="Rectangle 5">
-            <a:extLst>
-              <a:ext uri="{FF2B5EF4-FFF2-40B4-BE49-F238E27FC236}">
-                <a16:creationId xmlns:a16="http://schemas.microsoft.com/office/drawing/2014/main" id="{0F3EA294-0FAE-D6B7-F4F6-0E3492015699}"/>
-              </a:ext>
-            </a:extLst>
-          </p:cNvPr>
-          <p:cNvSpPr/>
-          <p:nvPr/>
-        </p:nvSpPr>
-        <p:spPr>
-          <a:xfrm>
-            <a:off x="6732679" y="2540482"/>
-            <a:ext cx="1369711" cy="344274"/>
-          </a:xfrm>
-          <a:prstGeom prst="rect">
-            <a:avLst/>
-          </a:prstGeom>
-          <a:solidFill>
-            <a:srgbClr val="FFD700"/>
-          </a:solidFill>
-          <a:ln w="3175">
-            <a:noFill/>
-          </a:ln>
-          <a:scene3d>
-            <a:camera prst="orthographicFront"/>
-            <a:lightRig rig="threePt" dir="t"/>
-          </a:scene3d>
-          <a:sp3d>
-            <a:bevelT w="38100" h="38100"/>
-          </a:sp3d>
-        </p:spPr>
-        <p:style>
-          <a:lnRef idx="2">
-            <a:schemeClr val="accent1">
-              <a:shade val="15000"/>
-            </a:schemeClr>
-          </a:lnRef>
-          <a:fillRef idx="1">
-            <a:schemeClr val="accent1"/>
-          </a:fillRef>
-          <a:effectRef idx="0">
-            <a:schemeClr val="accent1"/>
-          </a:effectRef>
-          <a:fontRef idx="minor">
-            <a:schemeClr val="lt1"/>
-          </a:fontRef>
-        </p:style>
-        <p:txBody>
-          <a:bodyPr rtlCol="0" anchor="ctr"/>
-          <a:lstStyle/>
-          <a:p>
-            <a:pPr algn="ctr"/>
-            <a:endParaRPr lang="en-150"/>
-          </a:p>
-        </p:txBody>
-      </p:sp>
-      <p:sp>
-        <p:nvSpPr>
-          <p:cNvPr id="9" name="TextBox 8">
-            <a:extLst>
-              <a:ext uri="{FF2B5EF4-FFF2-40B4-BE49-F238E27FC236}">
-                <a16:creationId xmlns:a16="http://schemas.microsoft.com/office/drawing/2014/main" id="{C4A505D0-0167-DE42-F11E-1D8999064CCB}"/>
-              </a:ext>
-            </a:extLst>
-          </p:cNvPr>
-          <p:cNvSpPr txBox="1"/>
-          <p:nvPr/>
-        </p:nvSpPr>
-        <p:spPr>
-          <a:xfrm>
-            <a:off x="4009489" y="3766546"/>
-            <a:ext cx="4253087" cy="1200329"/>
-          </a:xfrm>
-          <a:prstGeom prst="rect">
-            <a:avLst/>
-          </a:prstGeom>
-          <a:noFill/>
-          <a:ln>
-            <a:noFill/>
-          </a:ln>
-        </p:spPr>
-        <p:txBody>
-          <a:bodyPr wrap="none" rtlCol="0">
-            <a:spAutoFit/>
-            <a:scene3d>
-              <a:camera prst="orthographicFront"/>
-              <a:lightRig rig="threePt" dir="t"/>
-            </a:scene3d>
-            <a:sp3d extrusionH="38100">
-              <a:bevelT w="38100" h="38100"/>
-            </a:sp3d>
-          </a:bodyPr>
-          <a:lstStyle/>
-          <a:p>
-            <a:r>
-              <a:rPr lang="en-US" sz="7200" dirty="0">
-                <a:ln w="3175">
-                  <a:noFill/>
-                </a:ln>
-                <a:solidFill>
-                  <a:srgbClr val="1A1F71"/>
-                </a:solidFill>
-                <a:latin typeface="Aafia" pitchFamily="50" charset="0"/>
-              </a:rPr>
-              <a:t>LaDe</a:t>
-            </a:r>
-            <a:r>
-              <a:rPr lang="en-US" sz="7200" dirty="0">
-                <a:ln w="3175">
-                  <a:noFill/>
-                </a:ln>
-                <a:solidFill>
-                  <a:srgbClr val="FFD700"/>
-                </a:solidFill>
-                <a:latin typeface="Aafia" pitchFamily="50" charset="0"/>
-              </a:rPr>
-              <a:t>RR</a:t>
-            </a:r>
-          </a:p>
-        </p:txBody>
-      </p:sp>
-    </p:spTree>
-    <p:extLst>
-      <p:ext uri="{BB962C8B-B14F-4D97-AF65-F5344CB8AC3E}">
-        <p14:creationId xmlns:p14="http://schemas.microsoft.com/office/powerpoint/2010/main" val="1245543223"/>
       </p:ext>
     </p:extLst>
   </p:cSld>
@@ -8433,10 +14610,74 @@
           </a:p>
         </p:txBody>
       </p:sp>
+      <p:sp>
+        <p:nvSpPr>
+          <p:cNvPr id="2" name="TextBox 1">
+            <a:extLst>
+              <a:ext uri="{FF2B5EF4-FFF2-40B4-BE49-F238E27FC236}">
+                <a16:creationId xmlns:a16="http://schemas.microsoft.com/office/drawing/2014/main" id="{9435C635-2A61-E220-D6E5-32F47585513F}"/>
+              </a:ext>
+            </a:extLst>
+          </p:cNvPr>
+          <p:cNvSpPr txBox="1"/>
+          <p:nvPr/>
+        </p:nvSpPr>
+        <p:spPr>
+          <a:xfrm>
+            <a:off x="4444234" y="4616450"/>
+            <a:ext cx="3303532" cy="1446550"/>
+          </a:xfrm>
+          <a:prstGeom prst="rect">
+            <a:avLst/>
+          </a:prstGeom>
+          <a:noFill/>
+        </p:spPr>
+        <p:txBody>
+          <a:bodyPr wrap="square" rtlCol="0">
+            <a:spAutoFit/>
+          </a:bodyPr>
+          <a:lstStyle/>
+          <a:p>
+            <a:r>
+              <a:rPr lang="en-US" sz="8800" b="1" dirty="0">
+                <a:ln w="19050">
+                  <a:solidFill>
+                    <a:schemeClr val="accent3">
+                      <a:lumMod val="60000"/>
+                      <a:lumOff val="40000"/>
+                    </a:schemeClr>
+                  </a:solidFill>
+                </a:ln>
+                <a:solidFill>
+                  <a:srgbClr val="58FF37"/>
+                </a:solidFill>
+                <a:latin typeface="always  forever" pitchFamily="2" charset="0"/>
+                <a:cs typeface="Libertinus Keyboard" pitchFamily="50" charset="-79"/>
+              </a:rPr>
+              <a:t>Python  Lib</a:t>
+            </a:r>
+            <a:endParaRPr lang="en-150" sz="8800" b="1" dirty="0">
+              <a:ln w="19050">
+                <a:solidFill>
+                  <a:schemeClr val="accent3">
+                    <a:lumMod val="60000"/>
+                    <a:lumOff val="40000"/>
+                  </a:schemeClr>
+                </a:solidFill>
+              </a:ln>
+              <a:solidFill>
+                <a:srgbClr val="58FF37"/>
+              </a:solidFill>
+              <a:latin typeface="always  forever" pitchFamily="2" charset="0"/>
+              <a:cs typeface="Libertinus Keyboard" pitchFamily="50" charset="-79"/>
+            </a:endParaRPr>
+          </a:p>
+        </p:txBody>
+      </p:sp>
     </p:spTree>
     <p:extLst>
       <p:ext uri="{BB962C8B-B14F-4D97-AF65-F5344CB8AC3E}">
-        <p14:creationId xmlns:p14="http://schemas.microsoft.com/office/powerpoint/2010/main" val="2087235503"/>
+        <p14:creationId xmlns:p14="http://schemas.microsoft.com/office/powerpoint/2010/main" val="1988947253"/>
       </p:ext>
     </p:extLst>
   </p:cSld>
@@ -8463,183 +14704,197 @@
           <a:chExt cx="0" cy="0"/>
         </a:xfrm>
       </p:grpSpPr>
-      <p:grpSp>
-        <p:nvGrpSpPr>
-          <p:cNvPr id="9" name="Group 8">
+      <p:sp>
+        <p:nvSpPr>
+          <p:cNvPr id="4" name="Rectangle 3">
             <a:extLst>
               <a:ext uri="{FF2B5EF4-FFF2-40B4-BE49-F238E27FC236}">
-                <a16:creationId xmlns:a16="http://schemas.microsoft.com/office/drawing/2014/main" id="{2590A2DE-16F5-44B0-79F7-D9518568AB64}"/>
+                <a16:creationId xmlns:a16="http://schemas.microsoft.com/office/drawing/2014/main" id="{0EA7F422-11B4-801C-3967-BC77A3C5E938}"/>
               </a:ext>
             </a:extLst>
           </p:cNvPr>
-          <p:cNvGrpSpPr/>
+          <p:cNvSpPr/>
           <p:nvPr/>
-        </p:nvGrpSpPr>
-        <p:grpSpPr>
+        </p:nvSpPr>
+        <p:spPr>
           <a:xfrm>
-            <a:off x="4519632" y="1987446"/>
-            <a:ext cx="3917629" cy="1286108"/>
-            <a:chOff x="4528506" y="1936845"/>
-            <a:chExt cx="4483316" cy="1471816"/>
+            <a:off x="4148185" y="3422272"/>
+            <a:ext cx="1369714" cy="344274"/>
           </a:xfrm>
-        </p:grpSpPr>
-        <p:sp>
-          <p:nvSpPr>
-            <p:cNvPr id="6" name="Rectangle 5">
-              <a:extLst>
-                <a:ext uri="{FF2B5EF4-FFF2-40B4-BE49-F238E27FC236}">
-                  <a16:creationId xmlns:a16="http://schemas.microsoft.com/office/drawing/2014/main" id="{011E5DD6-E9CE-0E04-DAAC-92581C64AEF3}"/>
-                </a:ext>
-              </a:extLst>
-            </p:cNvPr>
-            <p:cNvSpPr/>
-            <p:nvPr/>
-          </p:nvSpPr>
-          <p:spPr>
-            <a:xfrm>
-              <a:off x="4528506" y="3087086"/>
-              <a:ext cx="1567494" cy="321575"/>
-            </a:xfrm>
-            <a:prstGeom prst="rect">
-              <a:avLst/>
-            </a:prstGeom>
-            <a:ln>
-              <a:noFill/>
-            </a:ln>
-          </p:spPr>
-          <p:style>
-            <a:lnRef idx="2">
-              <a:schemeClr val="accent1">
-                <a:shade val="15000"/>
-              </a:schemeClr>
-            </a:lnRef>
-            <a:fillRef idx="1">
-              <a:schemeClr val="accent1"/>
-            </a:fillRef>
-            <a:effectRef idx="0">
-              <a:schemeClr val="accent1"/>
-            </a:effectRef>
-            <a:fontRef idx="minor">
-              <a:schemeClr val="lt1"/>
-            </a:fontRef>
-          </p:style>
-          <p:txBody>
-            <a:bodyPr rtlCol="0" anchor="ctr"/>
-            <a:lstStyle/>
-            <a:p>
-              <a:pPr algn="ctr"/>
-              <a:endParaRPr lang="en-150"/>
-            </a:p>
-          </p:txBody>
-        </p:sp>
-        <p:sp>
-          <p:nvSpPr>
-            <p:cNvPr id="7" name="Rectangle 6">
-              <a:extLst>
-                <a:ext uri="{FF2B5EF4-FFF2-40B4-BE49-F238E27FC236}">
-                  <a16:creationId xmlns:a16="http://schemas.microsoft.com/office/drawing/2014/main" id="{4E011A50-3FA0-A8E8-8DF5-1CBB2DF4C4FE}"/>
-                </a:ext>
-              </a:extLst>
-            </p:cNvPr>
-            <p:cNvSpPr/>
-            <p:nvPr/>
-          </p:nvSpPr>
-          <p:spPr>
-            <a:xfrm>
-              <a:off x="5986419" y="2511965"/>
-              <a:ext cx="1567494" cy="321575"/>
-            </a:xfrm>
-            <a:prstGeom prst="rect">
-              <a:avLst/>
-            </a:prstGeom>
-            <a:ln>
-              <a:noFill/>
-            </a:ln>
-          </p:spPr>
-          <p:style>
-            <a:lnRef idx="2">
-              <a:schemeClr val="accent1">
-                <a:shade val="15000"/>
-              </a:schemeClr>
-            </a:lnRef>
-            <a:fillRef idx="1">
-              <a:schemeClr val="accent1"/>
-            </a:fillRef>
-            <a:effectRef idx="0">
-              <a:schemeClr val="accent1"/>
-            </a:effectRef>
-            <a:fontRef idx="minor">
-              <a:schemeClr val="lt1"/>
-            </a:fontRef>
-          </p:style>
-          <p:txBody>
-            <a:bodyPr rtlCol="0" anchor="ctr"/>
-            <a:lstStyle/>
-            <a:p>
-              <a:pPr algn="ctr"/>
-              <a:endParaRPr lang="en-150"/>
-            </a:p>
-          </p:txBody>
-        </p:sp>
-        <p:sp>
-          <p:nvSpPr>
-            <p:cNvPr id="8" name="Rectangle 7">
-              <a:extLst>
-                <a:ext uri="{FF2B5EF4-FFF2-40B4-BE49-F238E27FC236}">
-                  <a16:creationId xmlns:a16="http://schemas.microsoft.com/office/drawing/2014/main" id="{78B4BDD1-236D-438B-09EB-97CA895C3300}"/>
-                </a:ext>
-              </a:extLst>
-            </p:cNvPr>
-            <p:cNvSpPr/>
-            <p:nvPr/>
-          </p:nvSpPr>
-          <p:spPr>
-            <a:xfrm>
-              <a:off x="7444331" y="1936845"/>
-              <a:ext cx="1567491" cy="321575"/>
-            </a:xfrm>
-            <a:prstGeom prst="rect">
-              <a:avLst/>
-            </a:prstGeom>
-            <a:solidFill>
-              <a:schemeClr val="accent2"/>
-            </a:solidFill>
-            <a:ln>
-              <a:noFill/>
-            </a:ln>
-          </p:spPr>
-          <p:style>
-            <a:lnRef idx="2">
-              <a:schemeClr val="accent1">
-                <a:shade val="15000"/>
-              </a:schemeClr>
-            </a:lnRef>
-            <a:fillRef idx="1">
-              <a:schemeClr val="accent1"/>
-            </a:fillRef>
-            <a:effectRef idx="0">
-              <a:schemeClr val="accent1"/>
-            </a:effectRef>
-            <a:fontRef idx="minor">
-              <a:schemeClr val="lt1"/>
-            </a:fontRef>
-          </p:style>
-          <p:txBody>
-            <a:bodyPr rtlCol="0" anchor="ctr"/>
-            <a:lstStyle/>
-            <a:p>
-              <a:pPr algn="ctr"/>
-              <a:endParaRPr lang="en-150"/>
-            </a:p>
-          </p:txBody>
-        </p:sp>
-      </p:grpSp>
+          <a:prstGeom prst="rect">
+            <a:avLst/>
+          </a:prstGeom>
+          <a:solidFill>
+            <a:srgbClr val="1A1F71"/>
+          </a:solidFill>
+          <a:ln w="3175">
+            <a:noFill/>
+          </a:ln>
+          <a:scene3d>
+            <a:camera prst="orthographicFront"/>
+            <a:lightRig rig="threePt" dir="t"/>
+          </a:scene3d>
+          <a:sp3d>
+            <a:bevelT w="38100" h="38100"/>
+          </a:sp3d>
+        </p:spPr>
+        <p:style>
+          <a:lnRef idx="2">
+            <a:schemeClr val="accent1">
+              <a:shade val="15000"/>
+            </a:schemeClr>
+          </a:lnRef>
+          <a:fillRef idx="1">
+            <a:schemeClr val="accent1"/>
+          </a:fillRef>
+          <a:effectRef idx="0">
+            <a:schemeClr val="accent1"/>
+          </a:effectRef>
+          <a:fontRef idx="minor">
+            <a:schemeClr val="lt1"/>
+          </a:fontRef>
+        </p:style>
+        <p:txBody>
+          <a:bodyPr rtlCol="0" anchor="ctr"/>
+          <a:lstStyle/>
+          <a:p>
+            <a:pPr algn="ctr"/>
+            <a:endParaRPr lang="en-150">
+              <a:solidFill>
+                <a:srgbClr val="1A1F71"/>
+              </a:solidFill>
+            </a:endParaRPr>
+          </a:p>
+        </p:txBody>
+      </p:sp>
       <p:sp>
         <p:nvSpPr>
-          <p:cNvPr id="2" name="TextBox 1">
+          <p:cNvPr id="5" name="Rectangle 4">
             <a:extLst>
               <a:ext uri="{FF2B5EF4-FFF2-40B4-BE49-F238E27FC236}">
-                <a16:creationId xmlns:a16="http://schemas.microsoft.com/office/drawing/2014/main" id="{5DF106CF-89D1-049C-3FD4-88578CB84BF1}"/>
+                <a16:creationId xmlns:a16="http://schemas.microsoft.com/office/drawing/2014/main" id="{C77BE717-C333-AA2E-AE01-211F68893DDE}"/>
+              </a:ext>
+            </a:extLst>
+          </p:cNvPr>
+          <p:cNvSpPr/>
+          <p:nvPr/>
+        </p:nvSpPr>
+        <p:spPr>
+          <a:xfrm>
+            <a:off x="5440432" y="2981377"/>
+            <a:ext cx="1369714" cy="344274"/>
+          </a:xfrm>
+          <a:prstGeom prst="rect">
+            <a:avLst/>
+          </a:prstGeom>
+          <a:solidFill>
+            <a:srgbClr val="1A1F71"/>
+          </a:solidFill>
+          <a:ln w="3175">
+            <a:noFill/>
+          </a:ln>
+          <a:scene3d>
+            <a:camera prst="orthographicFront"/>
+            <a:lightRig rig="threePt" dir="t"/>
+          </a:scene3d>
+          <a:sp3d>
+            <a:bevelT w="38100" h="38100"/>
+          </a:sp3d>
+        </p:spPr>
+        <p:style>
+          <a:lnRef idx="2">
+            <a:schemeClr val="accent1">
+              <a:shade val="15000"/>
+            </a:schemeClr>
+          </a:lnRef>
+          <a:fillRef idx="1">
+            <a:schemeClr val="accent1"/>
+          </a:fillRef>
+          <a:effectRef idx="0">
+            <a:schemeClr val="accent1"/>
+          </a:effectRef>
+          <a:fontRef idx="minor">
+            <a:schemeClr val="lt1"/>
+          </a:fontRef>
+        </p:style>
+        <p:txBody>
+          <a:bodyPr rtlCol="0" anchor="ctr"/>
+          <a:lstStyle/>
+          <a:p>
+            <a:pPr algn="ctr"/>
+            <a:endParaRPr lang="en-150">
+              <a:solidFill>
+                <a:srgbClr val="1A1F71"/>
+              </a:solidFill>
+            </a:endParaRPr>
+          </a:p>
+        </p:txBody>
+      </p:sp>
+      <p:sp>
+        <p:nvSpPr>
+          <p:cNvPr id="6" name="Rectangle 5">
+            <a:extLst>
+              <a:ext uri="{FF2B5EF4-FFF2-40B4-BE49-F238E27FC236}">
+                <a16:creationId xmlns:a16="http://schemas.microsoft.com/office/drawing/2014/main" id="{0F3EA294-0FAE-D6B7-F4F6-0E3492015699}"/>
+              </a:ext>
+            </a:extLst>
+          </p:cNvPr>
+          <p:cNvSpPr/>
+          <p:nvPr/>
+        </p:nvSpPr>
+        <p:spPr>
+          <a:xfrm>
+            <a:off x="6732679" y="2540482"/>
+            <a:ext cx="1369711" cy="344274"/>
+          </a:xfrm>
+          <a:prstGeom prst="rect">
+            <a:avLst/>
+          </a:prstGeom>
+          <a:solidFill>
+            <a:srgbClr val="FFD700"/>
+          </a:solidFill>
+          <a:ln w="3175">
+            <a:noFill/>
+          </a:ln>
+          <a:scene3d>
+            <a:camera prst="orthographicFront"/>
+            <a:lightRig rig="threePt" dir="t"/>
+          </a:scene3d>
+          <a:sp3d>
+            <a:bevelT w="38100" h="38100"/>
+          </a:sp3d>
+        </p:spPr>
+        <p:style>
+          <a:lnRef idx="2">
+            <a:schemeClr val="accent1">
+              <a:shade val="15000"/>
+            </a:schemeClr>
+          </a:lnRef>
+          <a:fillRef idx="1">
+            <a:schemeClr val="accent1"/>
+          </a:fillRef>
+          <a:effectRef idx="0">
+            <a:schemeClr val="accent1"/>
+          </a:effectRef>
+          <a:fontRef idx="minor">
+            <a:schemeClr val="lt1"/>
+          </a:fontRef>
+        </p:style>
+        <p:txBody>
+          <a:bodyPr rtlCol="0" anchor="ctr"/>
+          <a:lstStyle/>
+          <a:p>
+            <a:pPr algn="ctr"/>
+            <a:endParaRPr lang="en-150"/>
+          </a:p>
+        </p:txBody>
+      </p:sp>
+      <p:sp>
+        <p:nvSpPr>
+          <p:cNvPr id="9" name="TextBox 8">
+            <a:extLst>
+              <a:ext uri="{FF2B5EF4-FFF2-40B4-BE49-F238E27FC236}">
+                <a16:creationId xmlns:a16="http://schemas.microsoft.com/office/drawing/2014/main" id="{C4A505D0-0167-DE42-F11E-1D8999064CCB}"/>
               </a:ext>
             </a:extLst>
           </p:cNvPr>
@@ -8648,8 +14903,73 @@
         </p:nvSpPr>
         <p:spPr>
           <a:xfrm>
-            <a:off x="4344360" y="3273553"/>
+            <a:off x="4009489" y="3766546"/>
             <a:ext cx="4253087" cy="1200329"/>
+          </a:xfrm>
+          <a:prstGeom prst="rect">
+            <a:avLst/>
+          </a:prstGeom>
+          <a:noFill/>
+          <a:ln>
+            <a:noFill/>
+          </a:ln>
+        </p:spPr>
+        <p:txBody>
+          <a:bodyPr wrap="none" rtlCol="0">
+            <a:spAutoFit/>
+            <a:scene3d>
+              <a:camera prst="orthographicFront"/>
+              <a:lightRig rig="threePt" dir="t"/>
+            </a:scene3d>
+            <a:sp3d extrusionH="38100">
+              <a:bevelT w="38100" h="38100"/>
+            </a:sp3d>
+          </a:bodyPr>
+          <a:lstStyle/>
+          <a:p>
+            <a:r>
+              <a:rPr lang="en-US" sz="7200" dirty="0">
+                <a:ln w="3175">
+                  <a:noFill/>
+                </a:ln>
+                <a:solidFill>
+                  <a:srgbClr val="1A1F71"/>
+                </a:solidFill>
+                <a:latin typeface="Aafia" pitchFamily="50" charset="0"/>
+              </a:rPr>
+              <a:t>LaDe</a:t>
+            </a:r>
+            <a:r>
+              <a:rPr lang="en-US" sz="7200" dirty="0">
+                <a:ln w="3175">
+                  <a:noFill/>
+                </a:ln>
+                <a:solidFill>
+                  <a:srgbClr val="FFD700"/>
+                </a:solidFill>
+                <a:latin typeface="Aafia" pitchFamily="50" charset="0"/>
+              </a:rPr>
+              <a:t>RR</a:t>
+            </a:r>
+          </a:p>
+        </p:txBody>
+      </p:sp>
+      <p:sp>
+        <p:nvSpPr>
+          <p:cNvPr id="2" name="TextBox 1">
+            <a:extLst>
+              <a:ext uri="{FF2B5EF4-FFF2-40B4-BE49-F238E27FC236}">
+                <a16:creationId xmlns:a16="http://schemas.microsoft.com/office/drawing/2014/main" id="{9435C635-2A61-E220-D6E5-32F47585513F}"/>
+              </a:ext>
+            </a:extLst>
+          </p:cNvPr>
+          <p:cNvSpPr txBox="1"/>
+          <p:nvPr/>
+        </p:nvSpPr>
+        <p:spPr>
+          <a:xfrm>
+            <a:off x="6825504" y="3987710"/>
+            <a:ext cx="2812272" cy="1323439"/>
           </a:xfrm>
           <a:prstGeom prst="rect">
             <a:avLst/>
@@ -8657,36 +14977,45 @@
           <a:noFill/>
         </p:spPr>
         <p:txBody>
-          <a:bodyPr wrap="none" rtlCol="0">
+          <a:bodyPr wrap="square" rtlCol="0">
             <a:spAutoFit/>
+            <a:scene3d>
+              <a:camera prst="isometricRightUp"/>
+              <a:lightRig rig="threePt" dir="t"/>
+            </a:scene3d>
           </a:bodyPr>
           <a:lstStyle/>
           <a:p>
             <a:r>
-              <a:rPr lang="en-US" sz="7200" dirty="0">
+              <a:rPr lang="en-US" sz="8000" b="1" dirty="0">
+                <a:ln w="19050">
+                  <a:noFill/>
+                </a:ln>
                 <a:solidFill>
-                  <a:srgbClr val="156082"/>
+                  <a:srgbClr val="FE02EC"/>
                 </a:solidFill>
-                <a:latin typeface="Aafia" pitchFamily="50" charset="0"/>
+                <a:latin typeface="always  forever" pitchFamily="2" charset="0"/>
+                <a:cs typeface="Libertinus Keyboard" pitchFamily="50" charset="-79"/>
               </a:rPr>
-              <a:t>LaDe</a:t>
+              <a:t>Python Lib</a:t>
             </a:r>
-            <a:r>
-              <a:rPr lang="en-US" sz="7200" dirty="0">
-                <a:solidFill>
-                  <a:schemeClr val="accent2"/>
-                </a:solidFill>
-                <a:latin typeface="Aafia" pitchFamily="50" charset="0"/>
-              </a:rPr>
-              <a:t>RR</a:t>
-            </a:r>
+            <a:endParaRPr lang="en-150" sz="8000" b="1" dirty="0">
+              <a:ln w="19050">
+                <a:noFill/>
+              </a:ln>
+              <a:solidFill>
+                <a:srgbClr val="FE02EC"/>
+              </a:solidFill>
+              <a:latin typeface="always  forever" pitchFamily="2" charset="0"/>
+              <a:cs typeface="Libertinus Keyboard" pitchFamily="50" charset="-79"/>
+            </a:endParaRPr>
           </a:p>
         </p:txBody>
       </p:sp>
     </p:spTree>
     <p:extLst>
       <p:ext uri="{BB962C8B-B14F-4D97-AF65-F5344CB8AC3E}">
-        <p14:creationId xmlns:p14="http://schemas.microsoft.com/office/powerpoint/2010/main" val="829168614"/>
+        <p14:creationId xmlns:p14="http://schemas.microsoft.com/office/powerpoint/2010/main" val="4070659874"/>
       </p:ext>
     </p:extLst>
   </p:cSld>

--- a/resources/base logo.pptx
+++ b/resources/base logo.pptx
@@ -5,26 +5,27 @@
     <p:sldMasterId id="2147483648" r:id="rId1"/>
   </p:sldMasterIdLst>
   <p:notesMasterIdLst>
-    <p:notesMasterId r:id="rId19"/>
+    <p:notesMasterId r:id="rId20"/>
   </p:notesMasterIdLst>
   <p:sldIdLst>
     <p:sldId id="293" r:id="rId2"/>
-    <p:sldId id="298" r:id="rId3"/>
-    <p:sldId id="297" r:id="rId4"/>
-    <p:sldId id="294" r:id="rId5"/>
-    <p:sldId id="296" r:id="rId6"/>
-    <p:sldId id="295" r:id="rId7"/>
-    <p:sldId id="291" r:id="rId8"/>
-    <p:sldId id="286" r:id="rId9"/>
-    <p:sldId id="288" r:id="rId10"/>
-    <p:sldId id="289" r:id="rId11"/>
-    <p:sldId id="287" r:id="rId12"/>
-    <p:sldId id="278" r:id="rId13"/>
-    <p:sldId id="285" r:id="rId14"/>
-    <p:sldId id="281" r:id="rId15"/>
-    <p:sldId id="283" r:id="rId16"/>
-    <p:sldId id="284" r:id="rId17"/>
-    <p:sldId id="280" r:id="rId18"/>
+    <p:sldId id="294" r:id="rId3"/>
+    <p:sldId id="299" r:id="rId4"/>
+    <p:sldId id="298" r:id="rId5"/>
+    <p:sldId id="297" r:id="rId6"/>
+    <p:sldId id="296" r:id="rId7"/>
+    <p:sldId id="295" r:id="rId8"/>
+    <p:sldId id="291" r:id="rId9"/>
+    <p:sldId id="286" r:id="rId10"/>
+    <p:sldId id="288" r:id="rId11"/>
+    <p:sldId id="289" r:id="rId12"/>
+    <p:sldId id="287" r:id="rId13"/>
+    <p:sldId id="278" r:id="rId14"/>
+    <p:sldId id="285" r:id="rId15"/>
+    <p:sldId id="281" r:id="rId16"/>
+    <p:sldId id="283" r:id="rId17"/>
+    <p:sldId id="284" r:id="rId18"/>
+    <p:sldId id="280" r:id="rId19"/>
   </p:sldIdLst>
   <p:sldSz cx="12192000" cy="6858000"/>
   <p:notesSz cx="6858000" cy="9144000"/>
@@ -224,7 +225,7 @@
           <a:p>
             <a:fld id="{DC0890D7-75A3-4AFD-AFCE-7BC66DB681C5}" type="datetimeFigureOut">
               <a:rPr lang="en-150" smtClean="0"/>
-              <a:t>13/03/2025</a:t>
+              <a:t>14/03/2025</a:t>
             </a:fld>
             <a:endParaRPr lang="en-150"/>
           </a:p>
@@ -641,7 +642,7 @@
           <a:p>
             <a:fld id="{97A7BB66-1ADB-47C6-8EE2-F72BFA79F05A}" type="datetimeFigureOut">
               <a:rPr lang="en-150" smtClean="0"/>
-              <a:t>13/03/2025</a:t>
+              <a:t>14/03/2025</a:t>
             </a:fld>
             <a:endParaRPr lang="en-150"/>
           </a:p>
@@ -857,7 +858,7 @@
           <a:p>
             <a:fld id="{97A7BB66-1ADB-47C6-8EE2-F72BFA79F05A}" type="datetimeFigureOut">
               <a:rPr lang="en-150" smtClean="0"/>
-              <a:t>13/03/2025</a:t>
+              <a:t>14/03/2025</a:t>
             </a:fld>
             <a:endParaRPr lang="en-150"/>
           </a:p>
@@ -1067,7 +1068,7 @@
           <a:p>
             <a:fld id="{97A7BB66-1ADB-47C6-8EE2-F72BFA79F05A}" type="datetimeFigureOut">
               <a:rPr lang="en-150" smtClean="0"/>
-              <a:t>13/03/2025</a:t>
+              <a:t>14/03/2025</a:t>
             </a:fld>
             <a:endParaRPr lang="en-150"/>
           </a:p>
@@ -1267,7 +1268,7 @@
           <a:p>
             <a:fld id="{97A7BB66-1ADB-47C6-8EE2-F72BFA79F05A}" type="datetimeFigureOut">
               <a:rPr lang="en-150" smtClean="0"/>
-              <a:t>13/03/2025</a:t>
+              <a:t>14/03/2025</a:t>
             </a:fld>
             <a:endParaRPr lang="en-150"/>
           </a:p>
@@ -1559,7 +1560,7 @@
           <a:p>
             <a:fld id="{97A7BB66-1ADB-47C6-8EE2-F72BFA79F05A}" type="datetimeFigureOut">
               <a:rPr lang="en-150" smtClean="0"/>
-              <a:t>13/03/2025</a:t>
+              <a:t>14/03/2025</a:t>
             </a:fld>
             <a:endParaRPr lang="en-150"/>
           </a:p>
@@ -1827,7 +1828,7 @@
           <a:p>
             <a:fld id="{97A7BB66-1ADB-47C6-8EE2-F72BFA79F05A}" type="datetimeFigureOut">
               <a:rPr lang="en-150" smtClean="0"/>
-              <a:t>13/03/2025</a:t>
+              <a:t>14/03/2025</a:t>
             </a:fld>
             <a:endParaRPr lang="en-150"/>
           </a:p>
@@ -2242,7 +2243,7 @@
           <a:p>
             <a:fld id="{97A7BB66-1ADB-47C6-8EE2-F72BFA79F05A}" type="datetimeFigureOut">
               <a:rPr lang="en-150" smtClean="0"/>
-              <a:t>13/03/2025</a:t>
+              <a:t>14/03/2025</a:t>
             </a:fld>
             <a:endParaRPr lang="en-150"/>
           </a:p>
@@ -2384,7 +2385,7 @@
           <a:p>
             <a:fld id="{97A7BB66-1ADB-47C6-8EE2-F72BFA79F05A}" type="datetimeFigureOut">
               <a:rPr lang="en-150" smtClean="0"/>
-              <a:t>13/03/2025</a:t>
+              <a:t>14/03/2025</a:t>
             </a:fld>
             <a:endParaRPr lang="en-150"/>
           </a:p>
@@ -2497,7 +2498,7 @@
           <a:p>
             <a:fld id="{97A7BB66-1ADB-47C6-8EE2-F72BFA79F05A}" type="datetimeFigureOut">
               <a:rPr lang="en-150" smtClean="0"/>
-              <a:t>13/03/2025</a:t>
+              <a:t>14/03/2025</a:t>
             </a:fld>
             <a:endParaRPr lang="en-150"/>
           </a:p>
@@ -2810,7 +2811,7 @@
           <a:p>
             <a:fld id="{97A7BB66-1ADB-47C6-8EE2-F72BFA79F05A}" type="datetimeFigureOut">
               <a:rPr lang="en-150" smtClean="0"/>
-              <a:t>13/03/2025</a:t>
+              <a:t>14/03/2025</a:t>
             </a:fld>
             <a:endParaRPr lang="en-150"/>
           </a:p>
@@ -3099,7 +3100,7 @@
           <a:p>
             <a:fld id="{97A7BB66-1ADB-47C6-8EE2-F72BFA79F05A}" type="datetimeFigureOut">
               <a:rPr lang="en-150" smtClean="0"/>
-              <a:t>13/03/2025</a:t>
+              <a:t>14/03/2025</a:t>
             </a:fld>
             <a:endParaRPr lang="en-150"/>
           </a:p>
@@ -3341,7 +3342,7 @@
           <a:p>
             <a:fld id="{97A7BB66-1ADB-47C6-8EE2-F72BFA79F05A}" type="datetimeFigureOut">
               <a:rPr lang="en-150" smtClean="0"/>
-              <a:t>13/03/2025</a:t>
+              <a:t>14/03/2025</a:t>
             </a:fld>
             <a:endParaRPr lang="en-150"/>
           </a:p>
@@ -5519,6 +5520,344 @@
           </a:p>
         </p:txBody>
       </p:sp>
+      <p:sp>
+        <p:nvSpPr>
+          <p:cNvPr id="2" name="TextBox 1">
+            <a:extLst>
+              <a:ext uri="{FF2B5EF4-FFF2-40B4-BE49-F238E27FC236}">
+                <a16:creationId xmlns:a16="http://schemas.microsoft.com/office/drawing/2014/main" id="{9435C635-2A61-E220-D6E5-32F47585513F}"/>
+              </a:ext>
+            </a:extLst>
+          </p:cNvPr>
+          <p:cNvSpPr txBox="1"/>
+          <p:nvPr/>
+        </p:nvSpPr>
+        <p:spPr>
+          <a:xfrm>
+            <a:off x="6825504" y="3987710"/>
+            <a:ext cx="2812272" cy="1323439"/>
+          </a:xfrm>
+          <a:prstGeom prst="rect">
+            <a:avLst/>
+          </a:prstGeom>
+          <a:noFill/>
+        </p:spPr>
+        <p:txBody>
+          <a:bodyPr wrap="square" rtlCol="0">
+            <a:spAutoFit/>
+            <a:scene3d>
+              <a:camera prst="isometricRightUp"/>
+              <a:lightRig rig="threePt" dir="t"/>
+            </a:scene3d>
+          </a:bodyPr>
+          <a:lstStyle/>
+          <a:p>
+            <a:r>
+              <a:rPr lang="en-US" sz="8000" b="1" dirty="0">
+                <a:ln w="19050">
+                  <a:noFill/>
+                </a:ln>
+                <a:solidFill>
+                  <a:srgbClr val="FE02EC"/>
+                </a:solidFill>
+                <a:latin typeface="always  forever" pitchFamily="2" charset="0"/>
+                <a:cs typeface="Libertinus Keyboard" pitchFamily="50" charset="-79"/>
+              </a:rPr>
+              <a:t>Python Lib</a:t>
+            </a:r>
+            <a:endParaRPr lang="en-150" sz="8000" b="1" dirty="0">
+              <a:ln w="19050">
+                <a:noFill/>
+              </a:ln>
+              <a:solidFill>
+                <a:srgbClr val="FE02EC"/>
+              </a:solidFill>
+              <a:latin typeface="always  forever" pitchFamily="2" charset="0"/>
+              <a:cs typeface="Libertinus Keyboard" pitchFamily="50" charset="-79"/>
+            </a:endParaRPr>
+          </a:p>
+        </p:txBody>
+      </p:sp>
+    </p:spTree>
+    <p:extLst>
+      <p:ext uri="{BB962C8B-B14F-4D97-AF65-F5344CB8AC3E}">
+        <p14:creationId xmlns:p14="http://schemas.microsoft.com/office/powerpoint/2010/main" val="4070659874"/>
+      </p:ext>
+    </p:extLst>
+  </p:cSld>
+  <p:clrMapOvr>
+    <a:masterClrMapping/>
+  </p:clrMapOvr>
+</p:sld>
+</file>
+
+<file path=ppt/slides/slide11.xml><?xml version="1.0" encoding="utf-8"?>
+<p:sld xmlns:a="http://schemas.openxmlformats.org/drawingml/2006/main" xmlns:r="http://schemas.openxmlformats.org/officeDocument/2006/relationships" xmlns:p="http://schemas.openxmlformats.org/presentationml/2006/main" show="0">
+  <p:cSld>
+    <p:spTree>
+      <p:nvGrpSpPr>
+        <p:cNvPr id="1" name=""/>
+        <p:cNvGrpSpPr/>
+        <p:nvPr/>
+      </p:nvGrpSpPr>
+      <p:grpSpPr>
+        <a:xfrm>
+          <a:off x="0" y="0"/>
+          <a:ext cx="0" cy="0"/>
+          <a:chOff x="0" y="0"/>
+          <a:chExt cx="0" cy="0"/>
+        </a:xfrm>
+      </p:grpSpPr>
+      <p:sp>
+        <p:nvSpPr>
+          <p:cNvPr id="4" name="Rectangle 3">
+            <a:extLst>
+              <a:ext uri="{FF2B5EF4-FFF2-40B4-BE49-F238E27FC236}">
+                <a16:creationId xmlns:a16="http://schemas.microsoft.com/office/drawing/2014/main" id="{0EA7F422-11B4-801C-3967-BC77A3C5E938}"/>
+              </a:ext>
+            </a:extLst>
+          </p:cNvPr>
+          <p:cNvSpPr/>
+          <p:nvPr/>
+        </p:nvSpPr>
+        <p:spPr>
+          <a:xfrm>
+            <a:off x="4148185" y="3422272"/>
+            <a:ext cx="1369714" cy="344274"/>
+          </a:xfrm>
+          <a:prstGeom prst="rect">
+            <a:avLst/>
+          </a:prstGeom>
+          <a:solidFill>
+            <a:srgbClr val="1A1F71"/>
+          </a:solidFill>
+          <a:ln w="3175">
+            <a:noFill/>
+          </a:ln>
+          <a:scene3d>
+            <a:camera prst="orthographicFront"/>
+            <a:lightRig rig="threePt" dir="t"/>
+          </a:scene3d>
+          <a:sp3d>
+            <a:bevelT w="38100" h="38100"/>
+          </a:sp3d>
+        </p:spPr>
+        <p:style>
+          <a:lnRef idx="2">
+            <a:schemeClr val="accent1">
+              <a:shade val="15000"/>
+            </a:schemeClr>
+          </a:lnRef>
+          <a:fillRef idx="1">
+            <a:schemeClr val="accent1"/>
+          </a:fillRef>
+          <a:effectRef idx="0">
+            <a:schemeClr val="accent1"/>
+          </a:effectRef>
+          <a:fontRef idx="minor">
+            <a:schemeClr val="lt1"/>
+          </a:fontRef>
+        </p:style>
+        <p:txBody>
+          <a:bodyPr rtlCol="0" anchor="ctr"/>
+          <a:lstStyle/>
+          <a:p>
+            <a:pPr algn="ctr"/>
+            <a:endParaRPr lang="en-150">
+              <a:solidFill>
+                <a:srgbClr val="1A1F71"/>
+              </a:solidFill>
+            </a:endParaRPr>
+          </a:p>
+        </p:txBody>
+      </p:sp>
+      <p:sp>
+        <p:nvSpPr>
+          <p:cNvPr id="5" name="Rectangle 4">
+            <a:extLst>
+              <a:ext uri="{FF2B5EF4-FFF2-40B4-BE49-F238E27FC236}">
+                <a16:creationId xmlns:a16="http://schemas.microsoft.com/office/drawing/2014/main" id="{C77BE717-C333-AA2E-AE01-211F68893DDE}"/>
+              </a:ext>
+            </a:extLst>
+          </p:cNvPr>
+          <p:cNvSpPr/>
+          <p:nvPr/>
+        </p:nvSpPr>
+        <p:spPr>
+          <a:xfrm>
+            <a:off x="5440432" y="2981377"/>
+            <a:ext cx="1369714" cy="344274"/>
+          </a:xfrm>
+          <a:prstGeom prst="rect">
+            <a:avLst/>
+          </a:prstGeom>
+          <a:solidFill>
+            <a:srgbClr val="1A1F71"/>
+          </a:solidFill>
+          <a:ln w="3175">
+            <a:noFill/>
+          </a:ln>
+          <a:scene3d>
+            <a:camera prst="orthographicFront"/>
+            <a:lightRig rig="threePt" dir="t"/>
+          </a:scene3d>
+          <a:sp3d>
+            <a:bevelT w="38100" h="38100"/>
+          </a:sp3d>
+        </p:spPr>
+        <p:style>
+          <a:lnRef idx="2">
+            <a:schemeClr val="accent1">
+              <a:shade val="15000"/>
+            </a:schemeClr>
+          </a:lnRef>
+          <a:fillRef idx="1">
+            <a:schemeClr val="accent1"/>
+          </a:fillRef>
+          <a:effectRef idx="0">
+            <a:schemeClr val="accent1"/>
+          </a:effectRef>
+          <a:fontRef idx="minor">
+            <a:schemeClr val="lt1"/>
+          </a:fontRef>
+        </p:style>
+        <p:txBody>
+          <a:bodyPr rtlCol="0" anchor="ctr"/>
+          <a:lstStyle/>
+          <a:p>
+            <a:pPr algn="ctr"/>
+            <a:endParaRPr lang="en-150">
+              <a:solidFill>
+                <a:srgbClr val="1A1F71"/>
+              </a:solidFill>
+            </a:endParaRPr>
+          </a:p>
+        </p:txBody>
+      </p:sp>
+      <p:sp>
+        <p:nvSpPr>
+          <p:cNvPr id="6" name="Rectangle 5">
+            <a:extLst>
+              <a:ext uri="{FF2B5EF4-FFF2-40B4-BE49-F238E27FC236}">
+                <a16:creationId xmlns:a16="http://schemas.microsoft.com/office/drawing/2014/main" id="{0F3EA294-0FAE-D6B7-F4F6-0E3492015699}"/>
+              </a:ext>
+            </a:extLst>
+          </p:cNvPr>
+          <p:cNvSpPr/>
+          <p:nvPr/>
+        </p:nvSpPr>
+        <p:spPr>
+          <a:xfrm>
+            <a:off x="6732679" y="2540482"/>
+            <a:ext cx="1369711" cy="344274"/>
+          </a:xfrm>
+          <a:prstGeom prst="rect">
+            <a:avLst/>
+          </a:prstGeom>
+          <a:solidFill>
+            <a:srgbClr val="FFD700"/>
+          </a:solidFill>
+          <a:ln w="3175">
+            <a:noFill/>
+          </a:ln>
+          <a:scene3d>
+            <a:camera prst="orthographicFront"/>
+            <a:lightRig rig="threePt" dir="t"/>
+          </a:scene3d>
+          <a:sp3d>
+            <a:bevelT w="38100" h="38100"/>
+          </a:sp3d>
+        </p:spPr>
+        <p:style>
+          <a:lnRef idx="2">
+            <a:schemeClr val="accent1">
+              <a:shade val="15000"/>
+            </a:schemeClr>
+          </a:lnRef>
+          <a:fillRef idx="1">
+            <a:schemeClr val="accent1"/>
+          </a:fillRef>
+          <a:effectRef idx="0">
+            <a:schemeClr val="accent1"/>
+          </a:effectRef>
+          <a:fontRef idx="minor">
+            <a:schemeClr val="lt1"/>
+          </a:fontRef>
+        </p:style>
+        <p:txBody>
+          <a:bodyPr rtlCol="0" anchor="ctr"/>
+          <a:lstStyle/>
+          <a:p>
+            <a:pPr algn="ctr"/>
+            <a:endParaRPr lang="en-150"/>
+          </a:p>
+        </p:txBody>
+      </p:sp>
+      <p:sp>
+        <p:nvSpPr>
+          <p:cNvPr id="9" name="TextBox 8">
+            <a:extLst>
+              <a:ext uri="{FF2B5EF4-FFF2-40B4-BE49-F238E27FC236}">
+                <a16:creationId xmlns:a16="http://schemas.microsoft.com/office/drawing/2014/main" id="{C4A505D0-0167-DE42-F11E-1D8999064CCB}"/>
+              </a:ext>
+            </a:extLst>
+          </p:cNvPr>
+          <p:cNvSpPr txBox="1"/>
+          <p:nvPr/>
+        </p:nvSpPr>
+        <p:spPr>
+          <a:xfrm>
+            <a:off x="4009489" y="3766546"/>
+            <a:ext cx="4253087" cy="1200329"/>
+          </a:xfrm>
+          <a:prstGeom prst="rect">
+            <a:avLst/>
+          </a:prstGeom>
+          <a:noFill/>
+          <a:ln>
+            <a:noFill/>
+          </a:ln>
+        </p:spPr>
+        <p:txBody>
+          <a:bodyPr wrap="none" rtlCol="0">
+            <a:spAutoFit/>
+            <a:scene3d>
+              <a:camera prst="orthographicFront"/>
+              <a:lightRig rig="threePt" dir="t"/>
+            </a:scene3d>
+            <a:sp3d extrusionH="38100">
+              <a:bevelT w="38100" h="38100"/>
+            </a:sp3d>
+          </a:bodyPr>
+          <a:lstStyle/>
+          <a:p>
+            <a:r>
+              <a:rPr lang="en-US" sz="7200" dirty="0">
+                <a:ln w="3175">
+                  <a:noFill/>
+                </a:ln>
+                <a:solidFill>
+                  <a:srgbClr val="1A1F71"/>
+                </a:solidFill>
+                <a:latin typeface="Aafia" pitchFamily="50" charset="0"/>
+              </a:rPr>
+              <a:t>LaDe</a:t>
+            </a:r>
+            <a:r>
+              <a:rPr lang="en-US" sz="7200" dirty="0">
+                <a:ln w="3175">
+                  <a:noFill/>
+                </a:ln>
+                <a:solidFill>
+                  <a:srgbClr val="FFD700"/>
+                </a:solidFill>
+                <a:latin typeface="Aafia" pitchFamily="50" charset="0"/>
+              </a:rPr>
+              <a:t>RR</a:t>
+            </a:r>
+          </a:p>
+        </p:txBody>
+      </p:sp>
     </p:spTree>
     <p:extLst>
       <p:ext uri="{BB962C8B-B14F-4D97-AF65-F5344CB8AC3E}">
@@ -5532,7 +5871,7 @@
 </p:sld>
 </file>
 
-<file path=ppt/slides/slide11.xml><?xml version="1.0" encoding="utf-8"?>
+<file path=ppt/slides/slide12.xml><?xml version="1.0" encoding="utf-8"?>
 <p:sld xmlns:a="http://schemas.openxmlformats.org/drawingml/2006/main" xmlns:r="http://schemas.openxmlformats.org/officeDocument/2006/relationships" xmlns:p="http://schemas.openxmlformats.org/presentationml/2006/main" show="0">
   <p:cSld>
     <p:spTree>
@@ -5804,7 +6143,7 @@
 </p:sld>
 </file>
 
-<file path=ppt/slides/slide12.xml><?xml version="1.0" encoding="utf-8"?>
+<file path=ppt/slides/slide13.xml><?xml version="1.0" encoding="utf-8"?>
 <p:sld xmlns:a="http://schemas.openxmlformats.org/drawingml/2006/main" xmlns:r="http://schemas.openxmlformats.org/officeDocument/2006/relationships" xmlns:p="http://schemas.openxmlformats.org/presentationml/2006/main" show="0">
   <p:cSld>
     <p:spTree>
@@ -6054,7 +6393,7 @@
 </p:sld>
 </file>
 
-<file path=ppt/slides/slide13.xml><?xml version="1.0" encoding="utf-8"?>
+<file path=ppt/slides/slide14.xml><?xml version="1.0" encoding="utf-8"?>
 <p:sld xmlns:a="http://schemas.openxmlformats.org/drawingml/2006/main" xmlns:r="http://schemas.openxmlformats.org/officeDocument/2006/relationships" xmlns:p="http://schemas.openxmlformats.org/presentationml/2006/main" show="0">
   <p:cSld>
     <p:spTree>
@@ -6488,7 +6827,7 @@
 </p:sld>
 </file>
 
-<file path=ppt/slides/slide14.xml><?xml version="1.0" encoding="utf-8"?>
+<file path=ppt/slides/slide15.xml><?xml version="1.0" encoding="utf-8"?>
 <p:sld xmlns:a="http://schemas.openxmlformats.org/drawingml/2006/main" xmlns:r="http://schemas.openxmlformats.org/officeDocument/2006/relationships" xmlns:p="http://schemas.openxmlformats.org/presentationml/2006/main" show="0">
   <p:cSld>
     <p:spTree>
@@ -6744,7 +7083,7 @@
 </p:sld>
 </file>
 
-<file path=ppt/slides/slide15.xml><?xml version="1.0" encoding="utf-8"?>
+<file path=ppt/slides/slide16.xml><?xml version="1.0" encoding="utf-8"?>
 <p:sld xmlns:a="http://schemas.openxmlformats.org/drawingml/2006/main" xmlns:r="http://schemas.openxmlformats.org/officeDocument/2006/relationships" xmlns:p="http://schemas.openxmlformats.org/presentationml/2006/main" show="0">
   <p:cSld>
     <p:spTree>
@@ -7000,7 +7339,7 @@
 </p:sld>
 </file>
 
-<file path=ppt/slides/slide16.xml><?xml version="1.0" encoding="utf-8"?>
+<file path=ppt/slides/slide17.xml><?xml version="1.0" encoding="utf-8"?>
 <p:sld xmlns:a="http://schemas.openxmlformats.org/drawingml/2006/main" xmlns:r="http://schemas.openxmlformats.org/officeDocument/2006/relationships" xmlns:p="http://schemas.openxmlformats.org/presentationml/2006/main" show="0">
   <p:cSld>
     <p:spTree>
@@ -7256,7 +7595,7 @@
 </p:sld>
 </file>
 
-<file path=ppt/slides/slide17.xml><?xml version="1.0" encoding="utf-8"?>
+<file path=ppt/slides/slide18.xml><?xml version="1.0" encoding="utf-8"?>
 <p:sld xmlns:a="http://schemas.openxmlformats.org/drawingml/2006/main" xmlns:r="http://schemas.openxmlformats.org/officeDocument/2006/relationships" xmlns:p="http://schemas.openxmlformats.org/presentationml/2006/main" show="0">
   <p:cSld>
     <p:spTree>
@@ -7515,6 +7854,344 @@
 
 <file path=ppt/slides/slide2.xml><?xml version="1.0" encoding="utf-8"?>
 <p:sld xmlns:a="http://schemas.openxmlformats.org/drawingml/2006/main" xmlns:r="http://schemas.openxmlformats.org/officeDocument/2006/relationships" xmlns:p="http://schemas.openxmlformats.org/presentationml/2006/main">
+  <p:cSld>
+    <p:spTree>
+      <p:nvGrpSpPr>
+        <p:cNvPr id="1" name=""/>
+        <p:cNvGrpSpPr/>
+        <p:nvPr/>
+      </p:nvGrpSpPr>
+      <p:grpSpPr>
+        <a:xfrm>
+          <a:off x="0" y="0"/>
+          <a:ext cx="0" cy="0"/>
+          <a:chOff x="0" y="0"/>
+          <a:chExt cx="0" cy="0"/>
+        </a:xfrm>
+      </p:grpSpPr>
+      <p:pic>
+        <p:nvPicPr>
+          <p:cNvPr id="5" name="Picture 4" descr="A white card with black text and black text&#10;&#10;AI-generated content may be incorrect.">
+            <a:extLst>
+              <a:ext uri="{FF2B5EF4-FFF2-40B4-BE49-F238E27FC236}">
+                <a16:creationId xmlns:a16="http://schemas.microsoft.com/office/drawing/2014/main" id="{1E7BEED1-CF56-A13F-35EB-36FFC9A54899}"/>
+              </a:ext>
+            </a:extLst>
+          </p:cNvPr>
+          <p:cNvPicPr>
+            <a:picLocks noChangeAspect="1"/>
+          </p:cNvPicPr>
+          <p:nvPr/>
+        </p:nvPicPr>
+        <p:blipFill>
+          <a:blip r:embed="rId2">
+            <a:duotone>
+              <a:schemeClr val="bg2">
+                <a:shade val="45000"/>
+                <a:satMod val="135000"/>
+              </a:schemeClr>
+              <a:prstClr val="white"/>
+            </a:duotone>
+            <a:extLst>
+              <a:ext uri="{BEBA8EAE-BF5A-486C-A8C5-ECC9F3942E4B}">
+                <a14:imgProps xmlns:a14="http://schemas.microsoft.com/office/drawing/2010/main">
+                  <a14:imgLayer r:embed="rId3">
+                    <a14:imgEffect>
+                      <a14:artisticCutout/>
+                    </a14:imgEffect>
+                    <a14:imgEffect>
+                      <a14:saturation sat="0"/>
+                    </a14:imgEffect>
+                    <a14:imgEffect>
+                      <a14:brightnessContrast bright="40000" contrast="40000"/>
+                    </a14:imgEffect>
+                  </a14:imgLayer>
+                </a14:imgProps>
+              </a:ext>
+              <a:ext uri="{28A0092B-C50C-407E-A947-70E740481C1C}">
+                <a14:useLocalDpi xmlns:a14="http://schemas.microsoft.com/office/drawing/2010/main" val="0"/>
+              </a:ext>
+            </a:extLst>
+          </a:blip>
+          <a:stretch>
+            <a:fillRect/>
+          </a:stretch>
+        </p:blipFill>
+        <p:spPr>
+          <a:xfrm>
+            <a:off x="0" y="381000"/>
+            <a:ext cx="12192000" cy="6096000"/>
+          </a:xfrm>
+          <a:prstGeom prst="rect">
+            <a:avLst/>
+          </a:prstGeom>
+        </p:spPr>
+      </p:pic>
+      <p:sp>
+        <p:nvSpPr>
+          <p:cNvPr id="6" name="Rectangle 5">
+            <a:extLst>
+              <a:ext uri="{FF2B5EF4-FFF2-40B4-BE49-F238E27FC236}">
+                <a16:creationId xmlns:a16="http://schemas.microsoft.com/office/drawing/2014/main" id="{DD03AB48-C6E9-BD43-4EEA-B2FD96D544E2}"/>
+              </a:ext>
+            </a:extLst>
+          </p:cNvPr>
+          <p:cNvSpPr/>
+          <p:nvPr/>
+        </p:nvSpPr>
+        <p:spPr>
+          <a:xfrm>
+            <a:off x="914401" y="1333500"/>
+            <a:ext cx="10191750" cy="4219575"/>
+          </a:xfrm>
+          <a:prstGeom prst="rect">
+            <a:avLst/>
+          </a:prstGeom>
+          <a:ln>
+            <a:solidFill>
+              <a:schemeClr val="bg1"/>
+            </a:solidFill>
+          </a:ln>
+        </p:spPr>
+        <p:style>
+          <a:lnRef idx="2">
+            <a:schemeClr val="dk1"/>
+          </a:lnRef>
+          <a:fillRef idx="1">
+            <a:schemeClr val="lt1"/>
+          </a:fillRef>
+          <a:effectRef idx="0">
+            <a:schemeClr val="dk1"/>
+          </a:effectRef>
+          <a:fontRef idx="minor">
+            <a:schemeClr val="dk1"/>
+          </a:fontRef>
+        </p:style>
+        <p:txBody>
+          <a:bodyPr rtlCol="0" anchor="ctr"/>
+          <a:lstStyle/>
+          <a:p>
+            <a:pPr algn="ctr"/>
+            <a:endParaRPr lang="en-US"/>
+          </a:p>
+        </p:txBody>
+      </p:sp>
+      <p:pic>
+        <p:nvPicPr>
+          <p:cNvPr id="9" name="Picture 8">
+            <a:extLst>
+              <a:ext uri="{FF2B5EF4-FFF2-40B4-BE49-F238E27FC236}">
+                <a16:creationId xmlns:a16="http://schemas.microsoft.com/office/drawing/2014/main" id="{8B571E79-CA3F-5BC9-E30D-F0218A06C6F2}"/>
+              </a:ext>
+            </a:extLst>
+          </p:cNvPr>
+          <p:cNvPicPr>
+            <a:picLocks noChangeAspect="1"/>
+          </p:cNvPicPr>
+          <p:nvPr/>
+        </p:nvPicPr>
+        <p:blipFill>
+          <a:blip r:embed="rId4"/>
+          <a:srcRect b="25244"/>
+          <a:stretch/>
+        </p:blipFill>
+        <p:spPr>
+          <a:xfrm>
+            <a:off x="748798" y="1912568"/>
+            <a:ext cx="10694403" cy="3032864"/>
+          </a:xfrm>
+          <a:prstGeom prst="rect">
+            <a:avLst/>
+          </a:prstGeom>
+        </p:spPr>
+      </p:pic>
+    </p:spTree>
+    <p:extLst>
+      <p:ext uri="{BB962C8B-B14F-4D97-AF65-F5344CB8AC3E}">
+        <p14:creationId xmlns:p14="http://schemas.microsoft.com/office/powerpoint/2010/main" val="2690937209"/>
+      </p:ext>
+    </p:extLst>
+  </p:cSld>
+  <p:clrMapOvr>
+    <a:masterClrMapping/>
+  </p:clrMapOvr>
+</p:sld>
+</file>
+
+<file path=ppt/slides/slide3.xml><?xml version="1.0" encoding="utf-8"?>
+<p:sld xmlns:a="http://schemas.openxmlformats.org/drawingml/2006/main" xmlns:r="http://schemas.openxmlformats.org/officeDocument/2006/relationships" xmlns:p="http://schemas.openxmlformats.org/presentationml/2006/main">
+  <p:cSld>
+    <p:spTree>
+      <p:nvGrpSpPr>
+        <p:cNvPr id="1" name="">
+          <a:extLst>
+            <a:ext uri="{FF2B5EF4-FFF2-40B4-BE49-F238E27FC236}">
+              <a16:creationId xmlns:a16="http://schemas.microsoft.com/office/drawing/2014/main" id="{1732FA14-18E7-C0A6-F23A-D566B57D9FB6}"/>
+            </a:ext>
+          </a:extLst>
+        </p:cNvPr>
+        <p:cNvGrpSpPr/>
+        <p:nvPr/>
+      </p:nvGrpSpPr>
+      <p:grpSpPr>
+        <a:xfrm>
+          <a:off x="0" y="0"/>
+          <a:ext cx="0" cy="0"/>
+          <a:chOff x="0" y="0"/>
+          <a:chExt cx="0" cy="0"/>
+        </a:xfrm>
+      </p:grpSpPr>
+      <p:pic>
+        <p:nvPicPr>
+          <p:cNvPr id="5" name="Picture 4" descr="A white card with black text and black text&#10;&#10;AI-generated content may be incorrect.">
+            <a:extLst>
+              <a:ext uri="{FF2B5EF4-FFF2-40B4-BE49-F238E27FC236}">
+                <a16:creationId xmlns:a16="http://schemas.microsoft.com/office/drawing/2014/main" id="{812ACC6D-EB2E-7C53-39A4-D6D42974C731}"/>
+              </a:ext>
+            </a:extLst>
+          </p:cNvPr>
+          <p:cNvPicPr>
+            <a:picLocks noChangeAspect="1"/>
+          </p:cNvPicPr>
+          <p:nvPr/>
+        </p:nvPicPr>
+        <p:blipFill>
+          <a:blip r:embed="rId2">
+            <a:duotone>
+              <a:schemeClr val="bg2">
+                <a:shade val="45000"/>
+                <a:satMod val="135000"/>
+              </a:schemeClr>
+              <a:prstClr val="white"/>
+            </a:duotone>
+            <a:extLst>
+              <a:ext uri="{BEBA8EAE-BF5A-486C-A8C5-ECC9F3942E4B}">
+                <a14:imgProps xmlns:a14="http://schemas.microsoft.com/office/drawing/2010/main">
+                  <a14:imgLayer r:embed="rId3">
+                    <a14:imgEffect>
+                      <a14:artisticCutout/>
+                    </a14:imgEffect>
+                    <a14:imgEffect>
+                      <a14:saturation sat="0"/>
+                    </a14:imgEffect>
+                    <a14:imgEffect>
+                      <a14:brightnessContrast bright="40000" contrast="40000"/>
+                    </a14:imgEffect>
+                  </a14:imgLayer>
+                </a14:imgProps>
+              </a:ext>
+              <a:ext uri="{28A0092B-C50C-407E-A947-70E740481C1C}">
+                <a14:useLocalDpi xmlns:a14="http://schemas.microsoft.com/office/drawing/2010/main" val="0"/>
+              </a:ext>
+            </a:extLst>
+          </a:blip>
+          <a:stretch>
+            <a:fillRect/>
+          </a:stretch>
+        </p:blipFill>
+        <p:spPr>
+          <a:xfrm>
+            <a:off x="0" y="381000"/>
+            <a:ext cx="12192000" cy="6096000"/>
+          </a:xfrm>
+          <a:prstGeom prst="rect">
+            <a:avLst/>
+          </a:prstGeom>
+        </p:spPr>
+      </p:pic>
+      <p:sp>
+        <p:nvSpPr>
+          <p:cNvPr id="6" name="Rectangle 5">
+            <a:extLst>
+              <a:ext uri="{FF2B5EF4-FFF2-40B4-BE49-F238E27FC236}">
+                <a16:creationId xmlns:a16="http://schemas.microsoft.com/office/drawing/2014/main" id="{976F0469-196B-8DED-C2E9-268A38DA89C1}"/>
+              </a:ext>
+            </a:extLst>
+          </p:cNvPr>
+          <p:cNvSpPr/>
+          <p:nvPr/>
+        </p:nvSpPr>
+        <p:spPr>
+          <a:xfrm>
+            <a:off x="914401" y="1333500"/>
+            <a:ext cx="10191750" cy="4219575"/>
+          </a:xfrm>
+          <a:prstGeom prst="rect">
+            <a:avLst/>
+          </a:prstGeom>
+          <a:ln>
+            <a:solidFill>
+              <a:schemeClr val="bg1"/>
+            </a:solidFill>
+          </a:ln>
+        </p:spPr>
+        <p:style>
+          <a:lnRef idx="2">
+            <a:schemeClr val="dk1"/>
+          </a:lnRef>
+          <a:fillRef idx="1">
+            <a:schemeClr val="lt1"/>
+          </a:fillRef>
+          <a:effectRef idx="0">
+            <a:schemeClr val="dk1"/>
+          </a:effectRef>
+          <a:fontRef idx="minor">
+            <a:schemeClr val="dk1"/>
+          </a:fontRef>
+        </p:style>
+        <p:txBody>
+          <a:bodyPr rtlCol="0" anchor="ctr"/>
+          <a:lstStyle/>
+          <a:p>
+            <a:pPr algn="ctr"/>
+            <a:endParaRPr lang="en-US"/>
+          </a:p>
+        </p:txBody>
+      </p:sp>
+      <p:pic>
+        <p:nvPicPr>
+          <p:cNvPr id="2" name="Picture 1">
+            <a:extLst>
+              <a:ext uri="{FF2B5EF4-FFF2-40B4-BE49-F238E27FC236}">
+                <a16:creationId xmlns:a16="http://schemas.microsoft.com/office/drawing/2014/main" id="{3B102F61-78F9-1514-F96D-55009544A4C6}"/>
+              </a:ext>
+            </a:extLst>
+          </p:cNvPr>
+          <p:cNvPicPr>
+            <a:picLocks noChangeAspect="1"/>
+          </p:cNvPicPr>
+          <p:nvPr/>
+        </p:nvPicPr>
+        <p:blipFill>
+          <a:blip r:embed="rId4"/>
+          <a:srcRect l="8553" r="10632" b="23942"/>
+          <a:stretch/>
+        </p:blipFill>
+        <p:spPr>
+          <a:xfrm>
+            <a:off x="1000125" y="1135380"/>
+            <a:ext cx="10191749" cy="4587240"/>
+          </a:xfrm>
+          <a:prstGeom prst="rect">
+            <a:avLst/>
+          </a:prstGeom>
+        </p:spPr>
+      </p:pic>
+    </p:spTree>
+    <p:extLst>
+      <p:ext uri="{BB962C8B-B14F-4D97-AF65-F5344CB8AC3E}">
+        <p14:creationId xmlns:p14="http://schemas.microsoft.com/office/powerpoint/2010/main" val="3402519921"/>
+      </p:ext>
+    </p:extLst>
+  </p:cSld>
+  <p:clrMapOvr>
+    <a:masterClrMapping/>
+  </p:clrMapOvr>
+</p:sld>
+</file>
+
+<file path=ppt/slides/slide4.xml><?xml version="1.0" encoding="utf-8"?>
+<p:sld xmlns:a="http://schemas.openxmlformats.org/drawingml/2006/main" xmlns:r="http://schemas.openxmlformats.org/officeDocument/2006/relationships" xmlns:p="http://schemas.openxmlformats.org/presentationml/2006/main" show="0">
   <p:cSld>
     <p:spTree>
       <p:nvGrpSpPr>
@@ -9941,8 +10618,8 @@
 </p:sld>
 </file>
 
-<file path=ppt/slides/slide3.xml><?xml version="1.0" encoding="utf-8"?>
-<p:sld xmlns:a="http://schemas.openxmlformats.org/drawingml/2006/main" xmlns:r="http://schemas.openxmlformats.org/officeDocument/2006/relationships" xmlns:p="http://schemas.openxmlformats.org/presentationml/2006/main">
+<file path=ppt/slides/slide5.xml><?xml version="1.0" encoding="utf-8"?>
+<p:sld xmlns:a="http://schemas.openxmlformats.org/drawingml/2006/main" xmlns:r="http://schemas.openxmlformats.org/officeDocument/2006/relationships" xmlns:p="http://schemas.openxmlformats.org/presentationml/2006/main" show="0">
   <p:cSld>
     <p:spTree>
       <p:nvGrpSpPr>
@@ -12369,173 +13046,7 @@
 </p:sld>
 </file>
 
-<file path=ppt/slides/slide4.xml><?xml version="1.0" encoding="utf-8"?>
-<p:sld xmlns:a="http://schemas.openxmlformats.org/drawingml/2006/main" xmlns:r="http://schemas.openxmlformats.org/officeDocument/2006/relationships" xmlns:p="http://schemas.openxmlformats.org/presentationml/2006/main">
-  <p:cSld>
-    <p:spTree>
-      <p:nvGrpSpPr>
-        <p:cNvPr id="1" name=""/>
-        <p:cNvGrpSpPr/>
-        <p:nvPr/>
-      </p:nvGrpSpPr>
-      <p:grpSpPr>
-        <a:xfrm>
-          <a:off x="0" y="0"/>
-          <a:ext cx="0" cy="0"/>
-          <a:chOff x="0" y="0"/>
-          <a:chExt cx="0" cy="0"/>
-        </a:xfrm>
-      </p:grpSpPr>
-      <p:pic>
-        <p:nvPicPr>
-          <p:cNvPr id="5" name="Picture 4" descr="A white card with black text and black text&#10;&#10;AI-generated content may be incorrect.">
-            <a:extLst>
-              <a:ext uri="{FF2B5EF4-FFF2-40B4-BE49-F238E27FC236}">
-                <a16:creationId xmlns:a16="http://schemas.microsoft.com/office/drawing/2014/main" id="{1E7BEED1-CF56-A13F-35EB-36FFC9A54899}"/>
-              </a:ext>
-            </a:extLst>
-          </p:cNvPr>
-          <p:cNvPicPr>
-            <a:picLocks noChangeAspect="1"/>
-          </p:cNvPicPr>
-          <p:nvPr/>
-        </p:nvPicPr>
-        <p:blipFill>
-          <a:blip r:embed="rId2">
-            <a:duotone>
-              <a:schemeClr val="bg2">
-                <a:shade val="45000"/>
-                <a:satMod val="135000"/>
-              </a:schemeClr>
-              <a:prstClr val="white"/>
-            </a:duotone>
-            <a:extLst>
-              <a:ext uri="{BEBA8EAE-BF5A-486C-A8C5-ECC9F3942E4B}">
-                <a14:imgProps xmlns:a14="http://schemas.microsoft.com/office/drawing/2010/main">
-                  <a14:imgLayer r:embed="rId3">
-                    <a14:imgEffect>
-                      <a14:artisticCutout/>
-                    </a14:imgEffect>
-                    <a14:imgEffect>
-                      <a14:saturation sat="0"/>
-                    </a14:imgEffect>
-                    <a14:imgEffect>
-                      <a14:brightnessContrast bright="40000" contrast="40000"/>
-                    </a14:imgEffect>
-                  </a14:imgLayer>
-                </a14:imgProps>
-              </a:ext>
-              <a:ext uri="{28A0092B-C50C-407E-A947-70E740481C1C}">
-                <a14:useLocalDpi xmlns:a14="http://schemas.microsoft.com/office/drawing/2010/main" val="0"/>
-              </a:ext>
-            </a:extLst>
-          </a:blip>
-          <a:stretch>
-            <a:fillRect/>
-          </a:stretch>
-        </p:blipFill>
-        <p:spPr>
-          <a:xfrm>
-            <a:off x="0" y="381000"/>
-            <a:ext cx="12192000" cy="6096000"/>
-          </a:xfrm>
-          <a:prstGeom prst="rect">
-            <a:avLst/>
-          </a:prstGeom>
-        </p:spPr>
-      </p:pic>
-      <p:sp>
-        <p:nvSpPr>
-          <p:cNvPr id="6" name="Rectangle 5">
-            <a:extLst>
-              <a:ext uri="{FF2B5EF4-FFF2-40B4-BE49-F238E27FC236}">
-                <a16:creationId xmlns:a16="http://schemas.microsoft.com/office/drawing/2014/main" id="{DD03AB48-C6E9-BD43-4EEA-B2FD96D544E2}"/>
-              </a:ext>
-            </a:extLst>
-          </p:cNvPr>
-          <p:cNvSpPr/>
-          <p:nvPr/>
-        </p:nvSpPr>
-        <p:spPr>
-          <a:xfrm>
-            <a:off x="914401" y="1333500"/>
-            <a:ext cx="10191750" cy="4219575"/>
-          </a:xfrm>
-          <a:prstGeom prst="rect">
-            <a:avLst/>
-          </a:prstGeom>
-          <a:ln>
-            <a:solidFill>
-              <a:schemeClr val="bg1"/>
-            </a:solidFill>
-          </a:ln>
-        </p:spPr>
-        <p:style>
-          <a:lnRef idx="2">
-            <a:schemeClr val="dk1"/>
-          </a:lnRef>
-          <a:fillRef idx="1">
-            <a:schemeClr val="lt1"/>
-          </a:fillRef>
-          <a:effectRef idx="0">
-            <a:schemeClr val="dk1"/>
-          </a:effectRef>
-          <a:fontRef idx="minor">
-            <a:schemeClr val="dk1"/>
-          </a:fontRef>
-        </p:style>
-        <p:txBody>
-          <a:bodyPr rtlCol="0" anchor="ctr"/>
-          <a:lstStyle/>
-          <a:p>
-            <a:pPr algn="ctr"/>
-            <a:endParaRPr lang="en-US"/>
-          </a:p>
-        </p:txBody>
-      </p:sp>
-      <p:pic>
-        <p:nvPicPr>
-          <p:cNvPr id="9" name="Picture 8">
-            <a:extLst>
-              <a:ext uri="{FF2B5EF4-FFF2-40B4-BE49-F238E27FC236}">
-                <a16:creationId xmlns:a16="http://schemas.microsoft.com/office/drawing/2014/main" id="{8B571E79-CA3F-5BC9-E30D-F0218A06C6F2}"/>
-              </a:ext>
-            </a:extLst>
-          </p:cNvPr>
-          <p:cNvPicPr>
-            <a:picLocks noChangeAspect="1"/>
-          </p:cNvPicPr>
-          <p:nvPr/>
-        </p:nvPicPr>
-        <p:blipFill>
-          <a:blip r:embed="rId4"/>
-          <a:srcRect b="25244"/>
-          <a:stretch/>
-        </p:blipFill>
-        <p:spPr>
-          <a:xfrm>
-            <a:off x="748798" y="1912568"/>
-            <a:ext cx="10694403" cy="3032864"/>
-          </a:xfrm>
-          <a:prstGeom prst="rect">
-            <a:avLst/>
-          </a:prstGeom>
-        </p:spPr>
-      </p:pic>
-    </p:spTree>
-    <p:extLst>
-      <p:ext uri="{BB962C8B-B14F-4D97-AF65-F5344CB8AC3E}">
-        <p14:creationId xmlns:p14="http://schemas.microsoft.com/office/powerpoint/2010/main" val="2690937209"/>
-      </p:ext>
-    </p:extLst>
-  </p:cSld>
-  <p:clrMapOvr>
-    <a:masterClrMapping/>
-  </p:clrMapOvr>
-</p:sld>
-</file>
-
-<file path=ppt/slides/slide5.xml><?xml version="1.0" encoding="utf-8"?>
+<file path=ppt/slides/slide6.xml><?xml version="1.0" encoding="utf-8"?>
 <p:sld xmlns:a="http://schemas.openxmlformats.org/drawingml/2006/main" xmlns:r="http://schemas.openxmlformats.org/officeDocument/2006/relationships" xmlns:p="http://schemas.openxmlformats.org/presentationml/2006/main" show="0">
   <p:cSld>
     <p:spTree>
@@ -13520,7 +14031,7 @@
 </p:sld>
 </file>
 
-<file path=ppt/slides/slide6.xml><?xml version="1.0" encoding="utf-8"?>
+<file path=ppt/slides/slide7.xml><?xml version="1.0" encoding="utf-8"?>
 <p:sld xmlns:a="http://schemas.openxmlformats.org/drawingml/2006/main" xmlns:r="http://schemas.openxmlformats.org/officeDocument/2006/relationships" xmlns:p="http://schemas.openxmlformats.org/presentationml/2006/main" show="0">
   <p:cSld>
     <p:spTree>
@@ -13693,7 +14204,7 @@
 </p:sld>
 </file>
 
-<file path=ppt/slides/slide7.xml><?xml version="1.0" encoding="utf-8"?>
+<file path=ppt/slides/slide8.xml><?xml version="1.0" encoding="utf-8"?>
 <p:sld xmlns:a="http://schemas.openxmlformats.org/drawingml/2006/main" xmlns:r="http://schemas.openxmlformats.org/officeDocument/2006/relationships" xmlns:p="http://schemas.openxmlformats.org/presentationml/2006/main" show="0">
   <p:cSld>
     <p:spTree>
@@ -14351,7 +14862,7 @@
 </p:sld>
 </file>
 
-<file path=ppt/slides/slide8.xml><?xml version="1.0" encoding="utf-8"?>
+<file path=ppt/slides/slide9.xml><?xml version="1.0" encoding="utf-8"?>
 <p:sld xmlns:a="http://schemas.openxmlformats.org/drawingml/2006/main" xmlns:r="http://schemas.openxmlformats.org/officeDocument/2006/relationships" xmlns:p="http://schemas.openxmlformats.org/presentationml/2006/main" show="0">
   <p:cSld>
     <p:spTree>
@@ -14678,344 +15189,6 @@
     <p:extLst>
       <p:ext uri="{BB962C8B-B14F-4D97-AF65-F5344CB8AC3E}">
         <p14:creationId xmlns:p14="http://schemas.microsoft.com/office/powerpoint/2010/main" val="1988947253"/>
-      </p:ext>
-    </p:extLst>
-  </p:cSld>
-  <p:clrMapOvr>
-    <a:masterClrMapping/>
-  </p:clrMapOvr>
-</p:sld>
-</file>
-
-<file path=ppt/slides/slide9.xml><?xml version="1.0" encoding="utf-8"?>
-<p:sld xmlns:a="http://schemas.openxmlformats.org/drawingml/2006/main" xmlns:r="http://schemas.openxmlformats.org/officeDocument/2006/relationships" xmlns:p="http://schemas.openxmlformats.org/presentationml/2006/main" show="0">
-  <p:cSld>
-    <p:spTree>
-      <p:nvGrpSpPr>
-        <p:cNvPr id="1" name=""/>
-        <p:cNvGrpSpPr/>
-        <p:nvPr/>
-      </p:nvGrpSpPr>
-      <p:grpSpPr>
-        <a:xfrm>
-          <a:off x="0" y="0"/>
-          <a:ext cx="0" cy="0"/>
-          <a:chOff x="0" y="0"/>
-          <a:chExt cx="0" cy="0"/>
-        </a:xfrm>
-      </p:grpSpPr>
-      <p:sp>
-        <p:nvSpPr>
-          <p:cNvPr id="4" name="Rectangle 3">
-            <a:extLst>
-              <a:ext uri="{FF2B5EF4-FFF2-40B4-BE49-F238E27FC236}">
-                <a16:creationId xmlns:a16="http://schemas.microsoft.com/office/drawing/2014/main" id="{0EA7F422-11B4-801C-3967-BC77A3C5E938}"/>
-              </a:ext>
-            </a:extLst>
-          </p:cNvPr>
-          <p:cNvSpPr/>
-          <p:nvPr/>
-        </p:nvSpPr>
-        <p:spPr>
-          <a:xfrm>
-            <a:off x="4148185" y="3422272"/>
-            <a:ext cx="1369714" cy="344274"/>
-          </a:xfrm>
-          <a:prstGeom prst="rect">
-            <a:avLst/>
-          </a:prstGeom>
-          <a:solidFill>
-            <a:srgbClr val="1A1F71"/>
-          </a:solidFill>
-          <a:ln w="3175">
-            <a:noFill/>
-          </a:ln>
-          <a:scene3d>
-            <a:camera prst="orthographicFront"/>
-            <a:lightRig rig="threePt" dir="t"/>
-          </a:scene3d>
-          <a:sp3d>
-            <a:bevelT w="38100" h="38100"/>
-          </a:sp3d>
-        </p:spPr>
-        <p:style>
-          <a:lnRef idx="2">
-            <a:schemeClr val="accent1">
-              <a:shade val="15000"/>
-            </a:schemeClr>
-          </a:lnRef>
-          <a:fillRef idx="1">
-            <a:schemeClr val="accent1"/>
-          </a:fillRef>
-          <a:effectRef idx="0">
-            <a:schemeClr val="accent1"/>
-          </a:effectRef>
-          <a:fontRef idx="minor">
-            <a:schemeClr val="lt1"/>
-          </a:fontRef>
-        </p:style>
-        <p:txBody>
-          <a:bodyPr rtlCol="0" anchor="ctr"/>
-          <a:lstStyle/>
-          <a:p>
-            <a:pPr algn="ctr"/>
-            <a:endParaRPr lang="en-150">
-              <a:solidFill>
-                <a:srgbClr val="1A1F71"/>
-              </a:solidFill>
-            </a:endParaRPr>
-          </a:p>
-        </p:txBody>
-      </p:sp>
-      <p:sp>
-        <p:nvSpPr>
-          <p:cNvPr id="5" name="Rectangle 4">
-            <a:extLst>
-              <a:ext uri="{FF2B5EF4-FFF2-40B4-BE49-F238E27FC236}">
-                <a16:creationId xmlns:a16="http://schemas.microsoft.com/office/drawing/2014/main" id="{C77BE717-C333-AA2E-AE01-211F68893DDE}"/>
-              </a:ext>
-            </a:extLst>
-          </p:cNvPr>
-          <p:cNvSpPr/>
-          <p:nvPr/>
-        </p:nvSpPr>
-        <p:spPr>
-          <a:xfrm>
-            <a:off x="5440432" y="2981377"/>
-            <a:ext cx="1369714" cy="344274"/>
-          </a:xfrm>
-          <a:prstGeom prst="rect">
-            <a:avLst/>
-          </a:prstGeom>
-          <a:solidFill>
-            <a:srgbClr val="1A1F71"/>
-          </a:solidFill>
-          <a:ln w="3175">
-            <a:noFill/>
-          </a:ln>
-          <a:scene3d>
-            <a:camera prst="orthographicFront"/>
-            <a:lightRig rig="threePt" dir="t"/>
-          </a:scene3d>
-          <a:sp3d>
-            <a:bevelT w="38100" h="38100"/>
-          </a:sp3d>
-        </p:spPr>
-        <p:style>
-          <a:lnRef idx="2">
-            <a:schemeClr val="accent1">
-              <a:shade val="15000"/>
-            </a:schemeClr>
-          </a:lnRef>
-          <a:fillRef idx="1">
-            <a:schemeClr val="accent1"/>
-          </a:fillRef>
-          <a:effectRef idx="0">
-            <a:schemeClr val="accent1"/>
-          </a:effectRef>
-          <a:fontRef idx="minor">
-            <a:schemeClr val="lt1"/>
-          </a:fontRef>
-        </p:style>
-        <p:txBody>
-          <a:bodyPr rtlCol="0" anchor="ctr"/>
-          <a:lstStyle/>
-          <a:p>
-            <a:pPr algn="ctr"/>
-            <a:endParaRPr lang="en-150">
-              <a:solidFill>
-                <a:srgbClr val="1A1F71"/>
-              </a:solidFill>
-            </a:endParaRPr>
-          </a:p>
-        </p:txBody>
-      </p:sp>
-      <p:sp>
-        <p:nvSpPr>
-          <p:cNvPr id="6" name="Rectangle 5">
-            <a:extLst>
-              <a:ext uri="{FF2B5EF4-FFF2-40B4-BE49-F238E27FC236}">
-                <a16:creationId xmlns:a16="http://schemas.microsoft.com/office/drawing/2014/main" id="{0F3EA294-0FAE-D6B7-F4F6-0E3492015699}"/>
-              </a:ext>
-            </a:extLst>
-          </p:cNvPr>
-          <p:cNvSpPr/>
-          <p:nvPr/>
-        </p:nvSpPr>
-        <p:spPr>
-          <a:xfrm>
-            <a:off x="6732679" y="2540482"/>
-            <a:ext cx="1369711" cy="344274"/>
-          </a:xfrm>
-          <a:prstGeom prst="rect">
-            <a:avLst/>
-          </a:prstGeom>
-          <a:solidFill>
-            <a:srgbClr val="FFD700"/>
-          </a:solidFill>
-          <a:ln w="3175">
-            <a:noFill/>
-          </a:ln>
-          <a:scene3d>
-            <a:camera prst="orthographicFront"/>
-            <a:lightRig rig="threePt" dir="t"/>
-          </a:scene3d>
-          <a:sp3d>
-            <a:bevelT w="38100" h="38100"/>
-          </a:sp3d>
-        </p:spPr>
-        <p:style>
-          <a:lnRef idx="2">
-            <a:schemeClr val="accent1">
-              <a:shade val="15000"/>
-            </a:schemeClr>
-          </a:lnRef>
-          <a:fillRef idx="1">
-            <a:schemeClr val="accent1"/>
-          </a:fillRef>
-          <a:effectRef idx="0">
-            <a:schemeClr val="accent1"/>
-          </a:effectRef>
-          <a:fontRef idx="minor">
-            <a:schemeClr val="lt1"/>
-          </a:fontRef>
-        </p:style>
-        <p:txBody>
-          <a:bodyPr rtlCol="0" anchor="ctr"/>
-          <a:lstStyle/>
-          <a:p>
-            <a:pPr algn="ctr"/>
-            <a:endParaRPr lang="en-150"/>
-          </a:p>
-        </p:txBody>
-      </p:sp>
-      <p:sp>
-        <p:nvSpPr>
-          <p:cNvPr id="9" name="TextBox 8">
-            <a:extLst>
-              <a:ext uri="{FF2B5EF4-FFF2-40B4-BE49-F238E27FC236}">
-                <a16:creationId xmlns:a16="http://schemas.microsoft.com/office/drawing/2014/main" id="{C4A505D0-0167-DE42-F11E-1D8999064CCB}"/>
-              </a:ext>
-            </a:extLst>
-          </p:cNvPr>
-          <p:cNvSpPr txBox="1"/>
-          <p:nvPr/>
-        </p:nvSpPr>
-        <p:spPr>
-          <a:xfrm>
-            <a:off x="4009489" y="3766546"/>
-            <a:ext cx="4253087" cy="1200329"/>
-          </a:xfrm>
-          <a:prstGeom prst="rect">
-            <a:avLst/>
-          </a:prstGeom>
-          <a:noFill/>
-          <a:ln>
-            <a:noFill/>
-          </a:ln>
-        </p:spPr>
-        <p:txBody>
-          <a:bodyPr wrap="none" rtlCol="0">
-            <a:spAutoFit/>
-            <a:scene3d>
-              <a:camera prst="orthographicFront"/>
-              <a:lightRig rig="threePt" dir="t"/>
-            </a:scene3d>
-            <a:sp3d extrusionH="38100">
-              <a:bevelT w="38100" h="38100"/>
-            </a:sp3d>
-          </a:bodyPr>
-          <a:lstStyle/>
-          <a:p>
-            <a:r>
-              <a:rPr lang="en-US" sz="7200" dirty="0">
-                <a:ln w="3175">
-                  <a:noFill/>
-                </a:ln>
-                <a:solidFill>
-                  <a:srgbClr val="1A1F71"/>
-                </a:solidFill>
-                <a:latin typeface="Aafia" pitchFamily="50" charset="0"/>
-              </a:rPr>
-              <a:t>LaDe</a:t>
-            </a:r>
-            <a:r>
-              <a:rPr lang="en-US" sz="7200" dirty="0">
-                <a:ln w="3175">
-                  <a:noFill/>
-                </a:ln>
-                <a:solidFill>
-                  <a:srgbClr val="FFD700"/>
-                </a:solidFill>
-                <a:latin typeface="Aafia" pitchFamily="50" charset="0"/>
-              </a:rPr>
-              <a:t>RR</a:t>
-            </a:r>
-          </a:p>
-        </p:txBody>
-      </p:sp>
-      <p:sp>
-        <p:nvSpPr>
-          <p:cNvPr id="2" name="TextBox 1">
-            <a:extLst>
-              <a:ext uri="{FF2B5EF4-FFF2-40B4-BE49-F238E27FC236}">
-                <a16:creationId xmlns:a16="http://schemas.microsoft.com/office/drawing/2014/main" id="{9435C635-2A61-E220-D6E5-32F47585513F}"/>
-              </a:ext>
-            </a:extLst>
-          </p:cNvPr>
-          <p:cNvSpPr txBox="1"/>
-          <p:nvPr/>
-        </p:nvSpPr>
-        <p:spPr>
-          <a:xfrm>
-            <a:off x="6825504" y="3987710"/>
-            <a:ext cx="2812272" cy="1323439"/>
-          </a:xfrm>
-          <a:prstGeom prst="rect">
-            <a:avLst/>
-          </a:prstGeom>
-          <a:noFill/>
-        </p:spPr>
-        <p:txBody>
-          <a:bodyPr wrap="square" rtlCol="0">
-            <a:spAutoFit/>
-            <a:scene3d>
-              <a:camera prst="isometricRightUp"/>
-              <a:lightRig rig="threePt" dir="t"/>
-            </a:scene3d>
-          </a:bodyPr>
-          <a:lstStyle/>
-          <a:p>
-            <a:r>
-              <a:rPr lang="en-US" sz="8000" b="1" dirty="0">
-                <a:ln w="19050">
-                  <a:noFill/>
-                </a:ln>
-                <a:solidFill>
-                  <a:srgbClr val="FE02EC"/>
-                </a:solidFill>
-                <a:latin typeface="always  forever" pitchFamily="2" charset="0"/>
-                <a:cs typeface="Libertinus Keyboard" pitchFamily="50" charset="-79"/>
-              </a:rPr>
-              <a:t>Python Lib</a:t>
-            </a:r>
-            <a:endParaRPr lang="en-150" sz="8000" b="1" dirty="0">
-              <a:ln w="19050">
-                <a:noFill/>
-              </a:ln>
-              <a:solidFill>
-                <a:srgbClr val="FE02EC"/>
-              </a:solidFill>
-              <a:latin typeface="always  forever" pitchFamily="2" charset="0"/>
-              <a:cs typeface="Libertinus Keyboard" pitchFamily="50" charset="-79"/>
-            </a:endParaRPr>
-          </a:p>
-        </p:txBody>
-      </p:sp>
-    </p:spTree>
-    <p:extLst>
-      <p:ext uri="{BB962C8B-B14F-4D97-AF65-F5344CB8AC3E}">
-        <p14:creationId xmlns:p14="http://schemas.microsoft.com/office/powerpoint/2010/main" val="4070659874"/>
       </p:ext>
     </p:extLst>
   </p:cSld>

--- a/resources/base logo.pptx
+++ b/resources/base logo.pptx
@@ -5,27 +5,28 @@
     <p:sldMasterId id="2147483648" r:id="rId1"/>
   </p:sldMasterIdLst>
   <p:notesMasterIdLst>
-    <p:notesMasterId r:id="rId20"/>
+    <p:notesMasterId r:id="rId21"/>
   </p:notesMasterIdLst>
   <p:sldIdLst>
     <p:sldId id="293" r:id="rId2"/>
-    <p:sldId id="294" r:id="rId3"/>
+    <p:sldId id="300" r:id="rId3"/>
     <p:sldId id="299" r:id="rId4"/>
-    <p:sldId id="298" r:id="rId5"/>
-    <p:sldId id="297" r:id="rId6"/>
-    <p:sldId id="296" r:id="rId7"/>
-    <p:sldId id="295" r:id="rId8"/>
-    <p:sldId id="291" r:id="rId9"/>
-    <p:sldId id="286" r:id="rId10"/>
-    <p:sldId id="288" r:id="rId11"/>
-    <p:sldId id="289" r:id="rId12"/>
-    <p:sldId id="287" r:id="rId13"/>
-    <p:sldId id="278" r:id="rId14"/>
-    <p:sldId id="285" r:id="rId15"/>
-    <p:sldId id="281" r:id="rId16"/>
-    <p:sldId id="283" r:id="rId17"/>
-    <p:sldId id="284" r:id="rId18"/>
-    <p:sldId id="280" r:id="rId19"/>
+    <p:sldId id="294" r:id="rId5"/>
+    <p:sldId id="298" r:id="rId6"/>
+    <p:sldId id="297" r:id="rId7"/>
+    <p:sldId id="296" r:id="rId8"/>
+    <p:sldId id="295" r:id="rId9"/>
+    <p:sldId id="291" r:id="rId10"/>
+    <p:sldId id="286" r:id="rId11"/>
+    <p:sldId id="288" r:id="rId12"/>
+    <p:sldId id="289" r:id="rId13"/>
+    <p:sldId id="287" r:id="rId14"/>
+    <p:sldId id="278" r:id="rId15"/>
+    <p:sldId id="285" r:id="rId16"/>
+    <p:sldId id="281" r:id="rId17"/>
+    <p:sldId id="283" r:id="rId18"/>
+    <p:sldId id="284" r:id="rId19"/>
+    <p:sldId id="280" r:id="rId20"/>
   </p:sldIdLst>
   <p:sldSz cx="12192000" cy="6858000"/>
   <p:notesSz cx="6858000" cy="9144000"/>
@@ -127,12 +128,42 @@
   <p:extLst>
     <p:ext uri="{EFAFB233-063F-42B5-8137-9DF3F51BA10A}">
       <p15:sldGuideLst xmlns:p15="http://schemas.microsoft.com/office/powerpoint/2012/main">
-        <p15:guide id="4" pos="3840" userDrawn="1">
+        <p15:guide id="4" pos="619" userDrawn="1">
           <p15:clr>
             <a:srgbClr val="A4A3A4"/>
           </p15:clr>
         </p15:guide>
-        <p15:guide id="7" orient="horz" pos="2160">
+        <p15:guide id="7" orient="horz" pos="2296" userDrawn="1">
+          <p15:clr>
+            <a:srgbClr val="A4A3A4"/>
+          </p15:clr>
+        </p15:guide>
+        <p15:guide id="8" pos="6743" userDrawn="1">
+          <p15:clr>
+            <a:srgbClr val="A4A3A4"/>
+          </p15:clr>
+        </p15:guide>
+        <p15:guide id="9" pos="3681" userDrawn="1">
+          <p15:clr>
+            <a:srgbClr val="A4A3A4"/>
+          </p15:clr>
+        </p15:guide>
+        <p15:guide id="10" orient="horz" pos="2500" userDrawn="1">
+          <p15:clr>
+            <a:srgbClr val="A4A3A4"/>
+          </p15:clr>
+        </p15:guide>
+        <p15:guide id="11" orient="horz" pos="2659" userDrawn="1">
+          <p15:clr>
+            <a:srgbClr val="A4A3A4"/>
+          </p15:clr>
+        </p15:guide>
+        <p15:guide id="12" orient="horz" pos="3612" userDrawn="1">
+          <p15:clr>
+            <a:srgbClr val="A4A3A4"/>
+          </p15:clr>
+        </p15:guide>
+        <p15:guide id="13" orient="horz" pos="3453" userDrawn="1">
           <p15:clr>
             <a:srgbClr val="A4A3A4"/>
           </p15:clr>
@@ -225,7 +256,7 @@
           <a:p>
             <a:fld id="{DC0890D7-75A3-4AFD-AFCE-7BC66DB681C5}" type="datetimeFigureOut">
               <a:rPr lang="en-150" smtClean="0"/>
-              <a:t>14/03/2025</a:t>
+              <a:t>17/03/2025</a:t>
             </a:fld>
             <a:endParaRPr lang="en-150"/>
           </a:p>
@@ -642,7 +673,7 @@
           <a:p>
             <a:fld id="{97A7BB66-1ADB-47C6-8EE2-F72BFA79F05A}" type="datetimeFigureOut">
               <a:rPr lang="en-150" smtClean="0"/>
-              <a:t>14/03/2025</a:t>
+              <a:t>17/03/2025</a:t>
             </a:fld>
             <a:endParaRPr lang="en-150"/>
           </a:p>
@@ -858,7 +889,7 @@
           <a:p>
             <a:fld id="{97A7BB66-1ADB-47C6-8EE2-F72BFA79F05A}" type="datetimeFigureOut">
               <a:rPr lang="en-150" smtClean="0"/>
-              <a:t>14/03/2025</a:t>
+              <a:t>17/03/2025</a:t>
             </a:fld>
             <a:endParaRPr lang="en-150"/>
           </a:p>
@@ -1068,7 +1099,7 @@
           <a:p>
             <a:fld id="{97A7BB66-1ADB-47C6-8EE2-F72BFA79F05A}" type="datetimeFigureOut">
               <a:rPr lang="en-150" smtClean="0"/>
-              <a:t>14/03/2025</a:t>
+              <a:t>17/03/2025</a:t>
             </a:fld>
             <a:endParaRPr lang="en-150"/>
           </a:p>
@@ -1268,7 +1299,7 @@
           <a:p>
             <a:fld id="{97A7BB66-1ADB-47C6-8EE2-F72BFA79F05A}" type="datetimeFigureOut">
               <a:rPr lang="en-150" smtClean="0"/>
-              <a:t>14/03/2025</a:t>
+              <a:t>17/03/2025</a:t>
             </a:fld>
             <a:endParaRPr lang="en-150"/>
           </a:p>
@@ -1560,7 +1591,7 @@
           <a:p>
             <a:fld id="{97A7BB66-1ADB-47C6-8EE2-F72BFA79F05A}" type="datetimeFigureOut">
               <a:rPr lang="en-150" smtClean="0"/>
-              <a:t>14/03/2025</a:t>
+              <a:t>17/03/2025</a:t>
             </a:fld>
             <a:endParaRPr lang="en-150"/>
           </a:p>
@@ -1828,7 +1859,7 @@
           <a:p>
             <a:fld id="{97A7BB66-1ADB-47C6-8EE2-F72BFA79F05A}" type="datetimeFigureOut">
               <a:rPr lang="en-150" smtClean="0"/>
-              <a:t>14/03/2025</a:t>
+              <a:t>17/03/2025</a:t>
             </a:fld>
             <a:endParaRPr lang="en-150"/>
           </a:p>
@@ -2243,7 +2274,7 @@
           <a:p>
             <a:fld id="{97A7BB66-1ADB-47C6-8EE2-F72BFA79F05A}" type="datetimeFigureOut">
               <a:rPr lang="en-150" smtClean="0"/>
-              <a:t>14/03/2025</a:t>
+              <a:t>17/03/2025</a:t>
             </a:fld>
             <a:endParaRPr lang="en-150"/>
           </a:p>
@@ -2385,7 +2416,7 @@
           <a:p>
             <a:fld id="{97A7BB66-1ADB-47C6-8EE2-F72BFA79F05A}" type="datetimeFigureOut">
               <a:rPr lang="en-150" smtClean="0"/>
-              <a:t>14/03/2025</a:t>
+              <a:t>17/03/2025</a:t>
             </a:fld>
             <a:endParaRPr lang="en-150"/>
           </a:p>
@@ -2498,7 +2529,7 @@
           <a:p>
             <a:fld id="{97A7BB66-1ADB-47C6-8EE2-F72BFA79F05A}" type="datetimeFigureOut">
               <a:rPr lang="en-150" smtClean="0"/>
-              <a:t>14/03/2025</a:t>
+              <a:t>17/03/2025</a:t>
             </a:fld>
             <a:endParaRPr lang="en-150"/>
           </a:p>
@@ -2811,7 +2842,7 @@
           <a:p>
             <a:fld id="{97A7BB66-1ADB-47C6-8EE2-F72BFA79F05A}" type="datetimeFigureOut">
               <a:rPr lang="en-150" smtClean="0"/>
-              <a:t>14/03/2025</a:t>
+              <a:t>17/03/2025</a:t>
             </a:fld>
             <a:endParaRPr lang="en-150"/>
           </a:p>
@@ -3100,7 +3131,7 @@
           <a:p>
             <a:fld id="{97A7BB66-1ADB-47C6-8EE2-F72BFA79F05A}" type="datetimeFigureOut">
               <a:rPr lang="en-150" smtClean="0"/>
-              <a:t>14/03/2025</a:t>
+              <a:t>17/03/2025</a:t>
             </a:fld>
             <a:endParaRPr lang="en-150"/>
           </a:p>
@@ -3342,7 +3373,7 @@
           <a:p>
             <a:fld id="{97A7BB66-1ADB-47C6-8EE2-F72BFA79F05A}" type="datetimeFigureOut">
               <a:rPr lang="en-150" smtClean="0"/>
-              <a:t>14/03/2025</a:t>
+              <a:t>17/03/2025</a:t>
             </a:fld>
             <a:endParaRPr lang="en-150"/>
           </a:p>
@@ -5291,7 +5322,7 @@
             <a:avLst/>
           </a:prstGeom>
           <a:solidFill>
-            <a:srgbClr val="1A1F71"/>
+            <a:srgbClr val="242A9C"/>
           </a:solidFill>
           <a:ln w="3175">
             <a:noFill/>
@@ -5325,11 +5356,7 @@
           <a:lstStyle/>
           <a:p>
             <a:pPr algn="ctr"/>
-            <a:endParaRPr lang="en-150">
-              <a:solidFill>
-                <a:srgbClr val="1A1F71"/>
-              </a:solidFill>
-            </a:endParaRPr>
+            <a:endParaRPr lang="en-150"/>
           </a:p>
         </p:txBody>
       </p:sp>
@@ -5354,7 +5381,7 @@
             <a:avLst/>
           </a:prstGeom>
           <a:solidFill>
-            <a:srgbClr val="1A1F71"/>
+            <a:srgbClr val="242A9C"/>
           </a:solidFill>
           <a:ln w="3175">
             <a:noFill/>
@@ -5388,11 +5415,7 @@
           <a:lstStyle/>
           <a:p>
             <a:pPr algn="ctr"/>
-            <a:endParaRPr lang="en-150">
-              <a:solidFill>
-                <a:srgbClr val="1A1F71"/>
-              </a:solidFill>
-            </a:endParaRPr>
+            <a:endParaRPr lang="en-150"/>
           </a:p>
         </p:txBody>
       </p:sp>
@@ -5417,7 +5440,7 @@
             <a:avLst/>
           </a:prstGeom>
           <a:solidFill>
-            <a:srgbClr val="FFD700"/>
+            <a:srgbClr val="E101D1"/>
           </a:solidFill>
           <a:ln w="3175">
             <a:noFill/>
@@ -5499,7 +5522,7 @@
                   <a:noFill/>
                 </a:ln>
                 <a:solidFill>
-                  <a:srgbClr val="1A1F71"/>
+                  <a:srgbClr val="242A9C"/>
                 </a:solidFill>
                 <a:latin typeface="Aafia" pitchFamily="50" charset="0"/>
               </a:rPr>
@@ -5511,7 +5534,7 @@
                   <a:noFill/>
                 </a:ln>
                 <a:solidFill>
-                  <a:srgbClr val="FFD700"/>
+                  <a:srgbClr val="E101D1"/>
                 </a:solidFill>
                 <a:latin typeface="Aafia" pitchFamily="50" charset="0"/>
               </a:rPr>
@@ -5534,8 +5557,8 @@
         </p:nvSpPr>
         <p:spPr>
           <a:xfrm>
-            <a:off x="6825504" y="3987710"/>
-            <a:ext cx="2812272" cy="1323439"/>
+            <a:off x="4444234" y="4616450"/>
+            <a:ext cx="3303532" cy="1446550"/>
           </a:xfrm>
           <a:prstGeom prst="rect">
             <a:avLst/>
@@ -5545,32 +5568,38 @@
         <p:txBody>
           <a:bodyPr wrap="square" rtlCol="0">
             <a:spAutoFit/>
-            <a:scene3d>
-              <a:camera prst="isometricRightUp"/>
-              <a:lightRig rig="threePt" dir="t"/>
-            </a:scene3d>
           </a:bodyPr>
           <a:lstStyle/>
           <a:p>
             <a:r>
-              <a:rPr lang="en-US" sz="8000" b="1" dirty="0">
+              <a:rPr lang="en-US" sz="8800" b="1" dirty="0">
                 <a:ln w="19050">
-                  <a:noFill/>
+                  <a:solidFill>
+                    <a:schemeClr val="accent3">
+                      <a:lumMod val="60000"/>
+                      <a:lumOff val="40000"/>
+                    </a:schemeClr>
+                  </a:solidFill>
                 </a:ln>
                 <a:solidFill>
-                  <a:srgbClr val="FE02EC"/>
+                  <a:srgbClr val="58FF37"/>
                 </a:solidFill>
                 <a:latin typeface="always  forever" pitchFamily="2" charset="0"/>
                 <a:cs typeface="Libertinus Keyboard" pitchFamily="50" charset="-79"/>
               </a:rPr>
-              <a:t>Python Lib</a:t>
+              <a:t>Python  Lib</a:t>
             </a:r>
-            <a:endParaRPr lang="en-150" sz="8000" b="1" dirty="0">
+            <a:endParaRPr lang="en-150" sz="8800" b="1" dirty="0">
               <a:ln w="19050">
-                <a:noFill/>
+                <a:solidFill>
+                  <a:schemeClr val="accent3">
+                    <a:lumMod val="60000"/>
+                    <a:lumOff val="40000"/>
+                  </a:schemeClr>
+                </a:solidFill>
               </a:ln>
               <a:solidFill>
-                <a:srgbClr val="FE02EC"/>
+                <a:srgbClr val="58FF37"/>
               </a:solidFill>
               <a:latin typeface="always  forever" pitchFamily="2" charset="0"/>
               <a:cs typeface="Libertinus Keyboard" pitchFamily="50" charset="-79"/>
@@ -5581,7 +5610,7 @@
     </p:spTree>
     <p:extLst>
       <p:ext uri="{BB962C8B-B14F-4D97-AF65-F5344CB8AC3E}">
-        <p14:creationId xmlns:p14="http://schemas.microsoft.com/office/powerpoint/2010/main" val="4070659874"/>
+        <p14:creationId xmlns:p14="http://schemas.microsoft.com/office/powerpoint/2010/main" val="1988947253"/>
       </p:ext>
     </p:extLst>
   </p:cSld>
@@ -5858,6 +5887,344 @@
           </a:p>
         </p:txBody>
       </p:sp>
+      <p:sp>
+        <p:nvSpPr>
+          <p:cNvPr id="2" name="TextBox 1">
+            <a:extLst>
+              <a:ext uri="{FF2B5EF4-FFF2-40B4-BE49-F238E27FC236}">
+                <a16:creationId xmlns:a16="http://schemas.microsoft.com/office/drawing/2014/main" id="{9435C635-2A61-E220-D6E5-32F47585513F}"/>
+              </a:ext>
+            </a:extLst>
+          </p:cNvPr>
+          <p:cNvSpPr txBox="1"/>
+          <p:nvPr/>
+        </p:nvSpPr>
+        <p:spPr>
+          <a:xfrm>
+            <a:off x="6825504" y="3987710"/>
+            <a:ext cx="2812272" cy="1323439"/>
+          </a:xfrm>
+          <a:prstGeom prst="rect">
+            <a:avLst/>
+          </a:prstGeom>
+          <a:noFill/>
+        </p:spPr>
+        <p:txBody>
+          <a:bodyPr wrap="square" rtlCol="0">
+            <a:spAutoFit/>
+            <a:scene3d>
+              <a:camera prst="isometricRightUp"/>
+              <a:lightRig rig="threePt" dir="t"/>
+            </a:scene3d>
+          </a:bodyPr>
+          <a:lstStyle/>
+          <a:p>
+            <a:r>
+              <a:rPr lang="en-US" sz="8000" b="1" dirty="0">
+                <a:ln w="19050">
+                  <a:noFill/>
+                </a:ln>
+                <a:solidFill>
+                  <a:srgbClr val="FE02EC"/>
+                </a:solidFill>
+                <a:latin typeface="always  forever" pitchFamily="2" charset="0"/>
+                <a:cs typeface="Libertinus Keyboard" pitchFamily="50" charset="-79"/>
+              </a:rPr>
+              <a:t>Python Lib</a:t>
+            </a:r>
+            <a:endParaRPr lang="en-150" sz="8000" b="1" dirty="0">
+              <a:ln w="19050">
+                <a:noFill/>
+              </a:ln>
+              <a:solidFill>
+                <a:srgbClr val="FE02EC"/>
+              </a:solidFill>
+              <a:latin typeface="always  forever" pitchFamily="2" charset="0"/>
+              <a:cs typeface="Libertinus Keyboard" pitchFamily="50" charset="-79"/>
+            </a:endParaRPr>
+          </a:p>
+        </p:txBody>
+      </p:sp>
+    </p:spTree>
+    <p:extLst>
+      <p:ext uri="{BB962C8B-B14F-4D97-AF65-F5344CB8AC3E}">
+        <p14:creationId xmlns:p14="http://schemas.microsoft.com/office/powerpoint/2010/main" val="4070659874"/>
+      </p:ext>
+    </p:extLst>
+  </p:cSld>
+  <p:clrMapOvr>
+    <a:masterClrMapping/>
+  </p:clrMapOvr>
+</p:sld>
+</file>
+
+<file path=ppt/slides/slide12.xml><?xml version="1.0" encoding="utf-8"?>
+<p:sld xmlns:a="http://schemas.openxmlformats.org/drawingml/2006/main" xmlns:r="http://schemas.openxmlformats.org/officeDocument/2006/relationships" xmlns:p="http://schemas.openxmlformats.org/presentationml/2006/main" show="0">
+  <p:cSld>
+    <p:spTree>
+      <p:nvGrpSpPr>
+        <p:cNvPr id="1" name=""/>
+        <p:cNvGrpSpPr/>
+        <p:nvPr/>
+      </p:nvGrpSpPr>
+      <p:grpSpPr>
+        <a:xfrm>
+          <a:off x="0" y="0"/>
+          <a:ext cx="0" cy="0"/>
+          <a:chOff x="0" y="0"/>
+          <a:chExt cx="0" cy="0"/>
+        </a:xfrm>
+      </p:grpSpPr>
+      <p:sp>
+        <p:nvSpPr>
+          <p:cNvPr id="4" name="Rectangle 3">
+            <a:extLst>
+              <a:ext uri="{FF2B5EF4-FFF2-40B4-BE49-F238E27FC236}">
+                <a16:creationId xmlns:a16="http://schemas.microsoft.com/office/drawing/2014/main" id="{0EA7F422-11B4-801C-3967-BC77A3C5E938}"/>
+              </a:ext>
+            </a:extLst>
+          </p:cNvPr>
+          <p:cNvSpPr/>
+          <p:nvPr/>
+        </p:nvSpPr>
+        <p:spPr>
+          <a:xfrm>
+            <a:off x="4148185" y="3422272"/>
+            <a:ext cx="1369714" cy="344274"/>
+          </a:xfrm>
+          <a:prstGeom prst="rect">
+            <a:avLst/>
+          </a:prstGeom>
+          <a:solidFill>
+            <a:srgbClr val="1A1F71"/>
+          </a:solidFill>
+          <a:ln w="3175">
+            <a:noFill/>
+          </a:ln>
+          <a:scene3d>
+            <a:camera prst="orthographicFront"/>
+            <a:lightRig rig="threePt" dir="t"/>
+          </a:scene3d>
+          <a:sp3d>
+            <a:bevelT w="38100" h="38100"/>
+          </a:sp3d>
+        </p:spPr>
+        <p:style>
+          <a:lnRef idx="2">
+            <a:schemeClr val="accent1">
+              <a:shade val="15000"/>
+            </a:schemeClr>
+          </a:lnRef>
+          <a:fillRef idx="1">
+            <a:schemeClr val="accent1"/>
+          </a:fillRef>
+          <a:effectRef idx="0">
+            <a:schemeClr val="accent1"/>
+          </a:effectRef>
+          <a:fontRef idx="minor">
+            <a:schemeClr val="lt1"/>
+          </a:fontRef>
+        </p:style>
+        <p:txBody>
+          <a:bodyPr rtlCol="0" anchor="ctr"/>
+          <a:lstStyle/>
+          <a:p>
+            <a:pPr algn="ctr"/>
+            <a:endParaRPr lang="en-150">
+              <a:solidFill>
+                <a:srgbClr val="1A1F71"/>
+              </a:solidFill>
+            </a:endParaRPr>
+          </a:p>
+        </p:txBody>
+      </p:sp>
+      <p:sp>
+        <p:nvSpPr>
+          <p:cNvPr id="5" name="Rectangle 4">
+            <a:extLst>
+              <a:ext uri="{FF2B5EF4-FFF2-40B4-BE49-F238E27FC236}">
+                <a16:creationId xmlns:a16="http://schemas.microsoft.com/office/drawing/2014/main" id="{C77BE717-C333-AA2E-AE01-211F68893DDE}"/>
+              </a:ext>
+            </a:extLst>
+          </p:cNvPr>
+          <p:cNvSpPr/>
+          <p:nvPr/>
+        </p:nvSpPr>
+        <p:spPr>
+          <a:xfrm>
+            <a:off x="5440432" y="2981377"/>
+            <a:ext cx="1369714" cy="344274"/>
+          </a:xfrm>
+          <a:prstGeom prst="rect">
+            <a:avLst/>
+          </a:prstGeom>
+          <a:solidFill>
+            <a:srgbClr val="1A1F71"/>
+          </a:solidFill>
+          <a:ln w="3175">
+            <a:noFill/>
+          </a:ln>
+          <a:scene3d>
+            <a:camera prst="orthographicFront"/>
+            <a:lightRig rig="threePt" dir="t"/>
+          </a:scene3d>
+          <a:sp3d>
+            <a:bevelT w="38100" h="38100"/>
+          </a:sp3d>
+        </p:spPr>
+        <p:style>
+          <a:lnRef idx="2">
+            <a:schemeClr val="accent1">
+              <a:shade val="15000"/>
+            </a:schemeClr>
+          </a:lnRef>
+          <a:fillRef idx="1">
+            <a:schemeClr val="accent1"/>
+          </a:fillRef>
+          <a:effectRef idx="0">
+            <a:schemeClr val="accent1"/>
+          </a:effectRef>
+          <a:fontRef idx="minor">
+            <a:schemeClr val="lt1"/>
+          </a:fontRef>
+        </p:style>
+        <p:txBody>
+          <a:bodyPr rtlCol="0" anchor="ctr"/>
+          <a:lstStyle/>
+          <a:p>
+            <a:pPr algn="ctr"/>
+            <a:endParaRPr lang="en-150">
+              <a:solidFill>
+                <a:srgbClr val="1A1F71"/>
+              </a:solidFill>
+            </a:endParaRPr>
+          </a:p>
+        </p:txBody>
+      </p:sp>
+      <p:sp>
+        <p:nvSpPr>
+          <p:cNvPr id="6" name="Rectangle 5">
+            <a:extLst>
+              <a:ext uri="{FF2B5EF4-FFF2-40B4-BE49-F238E27FC236}">
+                <a16:creationId xmlns:a16="http://schemas.microsoft.com/office/drawing/2014/main" id="{0F3EA294-0FAE-D6B7-F4F6-0E3492015699}"/>
+              </a:ext>
+            </a:extLst>
+          </p:cNvPr>
+          <p:cNvSpPr/>
+          <p:nvPr/>
+        </p:nvSpPr>
+        <p:spPr>
+          <a:xfrm>
+            <a:off x="6732679" y="2540482"/>
+            <a:ext cx="1369711" cy="344274"/>
+          </a:xfrm>
+          <a:prstGeom prst="rect">
+            <a:avLst/>
+          </a:prstGeom>
+          <a:solidFill>
+            <a:srgbClr val="FFD700"/>
+          </a:solidFill>
+          <a:ln w="3175">
+            <a:noFill/>
+          </a:ln>
+          <a:scene3d>
+            <a:camera prst="orthographicFront"/>
+            <a:lightRig rig="threePt" dir="t"/>
+          </a:scene3d>
+          <a:sp3d>
+            <a:bevelT w="38100" h="38100"/>
+          </a:sp3d>
+        </p:spPr>
+        <p:style>
+          <a:lnRef idx="2">
+            <a:schemeClr val="accent1">
+              <a:shade val="15000"/>
+            </a:schemeClr>
+          </a:lnRef>
+          <a:fillRef idx="1">
+            <a:schemeClr val="accent1"/>
+          </a:fillRef>
+          <a:effectRef idx="0">
+            <a:schemeClr val="accent1"/>
+          </a:effectRef>
+          <a:fontRef idx="minor">
+            <a:schemeClr val="lt1"/>
+          </a:fontRef>
+        </p:style>
+        <p:txBody>
+          <a:bodyPr rtlCol="0" anchor="ctr"/>
+          <a:lstStyle/>
+          <a:p>
+            <a:pPr algn="ctr"/>
+            <a:endParaRPr lang="en-150"/>
+          </a:p>
+        </p:txBody>
+      </p:sp>
+      <p:sp>
+        <p:nvSpPr>
+          <p:cNvPr id="9" name="TextBox 8">
+            <a:extLst>
+              <a:ext uri="{FF2B5EF4-FFF2-40B4-BE49-F238E27FC236}">
+                <a16:creationId xmlns:a16="http://schemas.microsoft.com/office/drawing/2014/main" id="{C4A505D0-0167-DE42-F11E-1D8999064CCB}"/>
+              </a:ext>
+            </a:extLst>
+          </p:cNvPr>
+          <p:cNvSpPr txBox="1"/>
+          <p:nvPr/>
+        </p:nvSpPr>
+        <p:spPr>
+          <a:xfrm>
+            <a:off x="4009489" y="3766546"/>
+            <a:ext cx="4253087" cy="1200329"/>
+          </a:xfrm>
+          <a:prstGeom prst="rect">
+            <a:avLst/>
+          </a:prstGeom>
+          <a:noFill/>
+          <a:ln>
+            <a:noFill/>
+          </a:ln>
+        </p:spPr>
+        <p:txBody>
+          <a:bodyPr wrap="none" rtlCol="0">
+            <a:spAutoFit/>
+            <a:scene3d>
+              <a:camera prst="orthographicFront"/>
+              <a:lightRig rig="threePt" dir="t"/>
+            </a:scene3d>
+            <a:sp3d extrusionH="38100">
+              <a:bevelT w="38100" h="38100"/>
+            </a:sp3d>
+          </a:bodyPr>
+          <a:lstStyle/>
+          <a:p>
+            <a:r>
+              <a:rPr lang="en-US" sz="7200" dirty="0">
+                <a:ln w="3175">
+                  <a:noFill/>
+                </a:ln>
+                <a:solidFill>
+                  <a:srgbClr val="1A1F71"/>
+                </a:solidFill>
+                <a:latin typeface="Aafia" pitchFamily="50" charset="0"/>
+              </a:rPr>
+              <a:t>LaDe</a:t>
+            </a:r>
+            <a:r>
+              <a:rPr lang="en-US" sz="7200" dirty="0">
+                <a:ln w="3175">
+                  <a:noFill/>
+                </a:ln>
+                <a:solidFill>
+                  <a:srgbClr val="FFD700"/>
+                </a:solidFill>
+                <a:latin typeface="Aafia" pitchFamily="50" charset="0"/>
+              </a:rPr>
+              <a:t>RR</a:t>
+            </a:r>
+          </a:p>
+        </p:txBody>
+      </p:sp>
     </p:spTree>
     <p:extLst>
       <p:ext uri="{BB962C8B-B14F-4D97-AF65-F5344CB8AC3E}">
@@ -5871,7 +6238,7 @@
 </p:sld>
 </file>
 
-<file path=ppt/slides/slide12.xml><?xml version="1.0" encoding="utf-8"?>
+<file path=ppt/slides/slide13.xml><?xml version="1.0" encoding="utf-8"?>
 <p:sld xmlns:a="http://schemas.openxmlformats.org/drawingml/2006/main" xmlns:r="http://schemas.openxmlformats.org/officeDocument/2006/relationships" xmlns:p="http://schemas.openxmlformats.org/presentationml/2006/main" show="0">
   <p:cSld>
     <p:spTree>
@@ -6143,7 +6510,7 @@
 </p:sld>
 </file>
 
-<file path=ppt/slides/slide13.xml><?xml version="1.0" encoding="utf-8"?>
+<file path=ppt/slides/slide14.xml><?xml version="1.0" encoding="utf-8"?>
 <p:sld xmlns:a="http://schemas.openxmlformats.org/drawingml/2006/main" xmlns:r="http://schemas.openxmlformats.org/officeDocument/2006/relationships" xmlns:p="http://schemas.openxmlformats.org/presentationml/2006/main" show="0">
   <p:cSld>
     <p:spTree>
@@ -6393,7 +6760,7 @@
 </p:sld>
 </file>
 
-<file path=ppt/slides/slide14.xml><?xml version="1.0" encoding="utf-8"?>
+<file path=ppt/slides/slide15.xml><?xml version="1.0" encoding="utf-8"?>
 <p:sld xmlns:a="http://schemas.openxmlformats.org/drawingml/2006/main" xmlns:r="http://schemas.openxmlformats.org/officeDocument/2006/relationships" xmlns:p="http://schemas.openxmlformats.org/presentationml/2006/main" show="0">
   <p:cSld>
     <p:spTree>
@@ -6827,7 +7194,7 @@
 </p:sld>
 </file>
 
-<file path=ppt/slides/slide15.xml><?xml version="1.0" encoding="utf-8"?>
+<file path=ppt/slides/slide16.xml><?xml version="1.0" encoding="utf-8"?>
 <p:sld xmlns:a="http://schemas.openxmlformats.org/drawingml/2006/main" xmlns:r="http://schemas.openxmlformats.org/officeDocument/2006/relationships" xmlns:p="http://schemas.openxmlformats.org/presentationml/2006/main" show="0">
   <p:cSld>
     <p:spTree>
@@ -7083,7 +7450,7 @@
 </p:sld>
 </file>
 
-<file path=ppt/slides/slide16.xml><?xml version="1.0" encoding="utf-8"?>
+<file path=ppt/slides/slide17.xml><?xml version="1.0" encoding="utf-8"?>
 <p:sld xmlns:a="http://schemas.openxmlformats.org/drawingml/2006/main" xmlns:r="http://schemas.openxmlformats.org/officeDocument/2006/relationships" xmlns:p="http://schemas.openxmlformats.org/presentationml/2006/main" show="0">
   <p:cSld>
     <p:spTree>
@@ -7339,7 +7706,7 @@
 </p:sld>
 </file>
 
-<file path=ppt/slides/slide17.xml><?xml version="1.0" encoding="utf-8"?>
+<file path=ppt/slides/slide18.xml><?xml version="1.0" encoding="utf-8"?>
 <p:sld xmlns:a="http://schemas.openxmlformats.org/drawingml/2006/main" xmlns:r="http://schemas.openxmlformats.org/officeDocument/2006/relationships" xmlns:p="http://schemas.openxmlformats.org/presentationml/2006/main" show="0">
   <p:cSld>
     <p:spTree>
@@ -7595,7 +7962,7 @@
 </p:sld>
 </file>
 
-<file path=ppt/slides/slide18.xml><?xml version="1.0" encoding="utf-8"?>
+<file path=ppt/slides/slide19.xml><?xml version="1.0" encoding="utf-8"?>
 <p:sld xmlns:a="http://schemas.openxmlformats.org/drawingml/2006/main" xmlns:r="http://schemas.openxmlformats.org/officeDocument/2006/relationships" xmlns:p="http://schemas.openxmlformats.org/presentationml/2006/main" show="0">
   <p:cSld>
     <p:spTree>
@@ -7857,7 +8224,13 @@
   <p:cSld>
     <p:spTree>
       <p:nvGrpSpPr>
-        <p:cNvPr id="1" name=""/>
+        <p:cNvPr id="1" name="">
+          <a:extLst>
+            <a:ext uri="{FF2B5EF4-FFF2-40B4-BE49-F238E27FC236}">
+              <a16:creationId xmlns:a16="http://schemas.microsoft.com/office/drawing/2014/main" id="{074A63D4-311A-8FCB-4551-5D6CD75C5105}"/>
+            </a:ext>
+          </a:extLst>
+        </p:cNvPr>
         <p:cNvGrpSpPr/>
         <p:nvPr/>
       </p:nvGrpSpPr>
@@ -7874,7 +8247,7 @@
           <p:cNvPr id="5" name="Picture 4" descr="A white card with black text and black text&#10;&#10;AI-generated content may be incorrect.">
             <a:extLst>
               <a:ext uri="{FF2B5EF4-FFF2-40B4-BE49-F238E27FC236}">
-                <a16:creationId xmlns:a16="http://schemas.microsoft.com/office/drawing/2014/main" id="{1E7BEED1-CF56-A13F-35EB-36FFC9A54899}"/>
+                <a16:creationId xmlns:a16="http://schemas.microsoft.com/office/drawing/2014/main" id="{76AD46C9-A154-250E-F0AD-149CD002132D}"/>
               </a:ext>
             </a:extLst>
           </p:cNvPr>
@@ -7932,7 +8305,7 @@
           <p:cNvPr id="6" name="Rectangle 5">
             <a:extLst>
               <a:ext uri="{FF2B5EF4-FFF2-40B4-BE49-F238E27FC236}">
-                <a16:creationId xmlns:a16="http://schemas.microsoft.com/office/drawing/2014/main" id="{DD03AB48-C6E9-BD43-4EEA-B2FD96D544E2}"/>
+                <a16:creationId xmlns:a16="http://schemas.microsoft.com/office/drawing/2014/main" id="{FC1F39CE-0DD6-2803-F707-7AD250D40F18}"/>
               </a:ext>
             </a:extLst>
           </p:cNvPr>
@@ -7981,7 +8354,7 @@
           <p:cNvPr id="9" name="Picture 8">
             <a:extLst>
               <a:ext uri="{FF2B5EF4-FFF2-40B4-BE49-F238E27FC236}">
-                <a16:creationId xmlns:a16="http://schemas.microsoft.com/office/drawing/2014/main" id="{8B571E79-CA3F-5BC9-E30D-F0218A06C6F2}"/>
+                <a16:creationId xmlns:a16="http://schemas.microsoft.com/office/drawing/2014/main" id="{C7ACE5D1-95F5-D17A-1BF9-5EC594640761}"/>
               </a:ext>
             </a:extLst>
           </p:cNvPr>
@@ -8008,7 +8381,7 @@
     </p:spTree>
     <p:extLst>
       <p:ext uri="{BB962C8B-B14F-4D97-AF65-F5344CB8AC3E}">
-        <p14:creationId xmlns:p14="http://schemas.microsoft.com/office/powerpoint/2010/main" val="2690937209"/>
+        <p14:creationId xmlns:p14="http://schemas.microsoft.com/office/powerpoint/2010/main" val="3071601383"/>
       </p:ext>
     </p:extLst>
   </p:cSld>
@@ -8191,6 +8564,337 @@
 </file>
 
 <file path=ppt/slides/slide4.xml><?xml version="1.0" encoding="utf-8"?>
+<p:sld xmlns:a="http://schemas.openxmlformats.org/drawingml/2006/main" xmlns:r="http://schemas.openxmlformats.org/officeDocument/2006/relationships" xmlns:p="http://schemas.openxmlformats.org/presentationml/2006/main">
+  <p:cSld>
+    <p:spTree>
+      <p:nvGrpSpPr>
+        <p:cNvPr id="1" name=""/>
+        <p:cNvGrpSpPr/>
+        <p:nvPr/>
+      </p:nvGrpSpPr>
+      <p:grpSpPr>
+        <a:xfrm>
+          <a:off x="0" y="0"/>
+          <a:ext cx="0" cy="0"/>
+          <a:chOff x="0" y="0"/>
+          <a:chExt cx="0" cy="0"/>
+        </a:xfrm>
+      </p:grpSpPr>
+      <p:pic>
+        <p:nvPicPr>
+          <p:cNvPr id="5" name="Picture 4" descr="A white card with black text and black text&#10;&#10;AI-generated content may be incorrect.">
+            <a:extLst>
+              <a:ext uri="{FF2B5EF4-FFF2-40B4-BE49-F238E27FC236}">
+                <a16:creationId xmlns:a16="http://schemas.microsoft.com/office/drawing/2014/main" id="{1E7BEED1-CF56-A13F-35EB-36FFC9A54899}"/>
+              </a:ext>
+            </a:extLst>
+          </p:cNvPr>
+          <p:cNvPicPr>
+            <a:picLocks noChangeAspect="1"/>
+          </p:cNvPicPr>
+          <p:nvPr/>
+        </p:nvPicPr>
+        <p:blipFill>
+          <a:blip r:embed="rId2">
+            <a:duotone>
+              <a:schemeClr val="bg2">
+                <a:shade val="45000"/>
+                <a:satMod val="135000"/>
+              </a:schemeClr>
+              <a:prstClr val="white"/>
+            </a:duotone>
+            <a:extLst>
+              <a:ext uri="{BEBA8EAE-BF5A-486C-A8C5-ECC9F3942E4B}">
+                <a14:imgProps xmlns:a14="http://schemas.microsoft.com/office/drawing/2010/main">
+                  <a14:imgLayer r:embed="rId3">
+                    <a14:imgEffect>
+                      <a14:artisticCutout/>
+                    </a14:imgEffect>
+                    <a14:imgEffect>
+                      <a14:saturation sat="0"/>
+                    </a14:imgEffect>
+                    <a14:imgEffect>
+                      <a14:brightnessContrast bright="40000" contrast="40000"/>
+                    </a14:imgEffect>
+                  </a14:imgLayer>
+                </a14:imgProps>
+              </a:ext>
+              <a:ext uri="{28A0092B-C50C-407E-A947-70E740481C1C}">
+                <a14:useLocalDpi xmlns:a14="http://schemas.microsoft.com/office/drawing/2010/main" val="0"/>
+              </a:ext>
+            </a:extLst>
+          </a:blip>
+          <a:stretch>
+            <a:fillRect/>
+          </a:stretch>
+        </p:blipFill>
+        <p:spPr>
+          <a:xfrm>
+            <a:off x="0" y="381000"/>
+            <a:ext cx="12192000" cy="6096000"/>
+          </a:xfrm>
+          <a:prstGeom prst="rect">
+            <a:avLst/>
+          </a:prstGeom>
+        </p:spPr>
+      </p:pic>
+      <p:sp>
+        <p:nvSpPr>
+          <p:cNvPr id="6" name="Rectangle 5">
+            <a:extLst>
+              <a:ext uri="{FF2B5EF4-FFF2-40B4-BE49-F238E27FC236}">
+                <a16:creationId xmlns:a16="http://schemas.microsoft.com/office/drawing/2014/main" id="{DD03AB48-C6E9-BD43-4EEA-B2FD96D544E2}"/>
+              </a:ext>
+            </a:extLst>
+          </p:cNvPr>
+          <p:cNvSpPr/>
+          <p:nvPr/>
+        </p:nvSpPr>
+        <p:spPr>
+          <a:xfrm>
+            <a:off x="914401" y="1333500"/>
+            <a:ext cx="10191750" cy="4219575"/>
+          </a:xfrm>
+          <a:prstGeom prst="rect">
+            <a:avLst/>
+          </a:prstGeom>
+          <a:ln>
+            <a:solidFill>
+              <a:schemeClr val="bg1"/>
+            </a:solidFill>
+          </a:ln>
+        </p:spPr>
+        <p:style>
+          <a:lnRef idx="2">
+            <a:schemeClr val="dk1"/>
+          </a:lnRef>
+          <a:fillRef idx="1">
+            <a:schemeClr val="lt1"/>
+          </a:fillRef>
+          <a:effectRef idx="0">
+            <a:schemeClr val="dk1"/>
+          </a:effectRef>
+          <a:fontRef idx="minor">
+            <a:schemeClr val="dk1"/>
+          </a:fontRef>
+        </p:style>
+        <p:txBody>
+          <a:bodyPr rtlCol="0" anchor="ctr"/>
+          <a:lstStyle/>
+          <a:p>
+            <a:pPr algn="ctr"/>
+            <a:endParaRPr lang="en-US"/>
+          </a:p>
+        </p:txBody>
+      </p:sp>
+      <p:pic>
+        <p:nvPicPr>
+          <p:cNvPr id="9" name="Picture 8">
+            <a:extLst>
+              <a:ext uri="{FF2B5EF4-FFF2-40B4-BE49-F238E27FC236}">
+                <a16:creationId xmlns:a16="http://schemas.microsoft.com/office/drawing/2014/main" id="{8B571E79-CA3F-5BC9-E30D-F0218A06C6F2}"/>
+              </a:ext>
+            </a:extLst>
+          </p:cNvPr>
+          <p:cNvPicPr>
+            <a:picLocks noChangeAspect="1"/>
+          </p:cNvPicPr>
+          <p:nvPr/>
+        </p:nvPicPr>
+        <p:blipFill>
+          <a:blip r:embed="rId4"/>
+          <a:srcRect b="25244"/>
+          <a:stretch/>
+        </p:blipFill>
+        <p:spPr>
+          <a:xfrm>
+            <a:off x="583196" y="715346"/>
+            <a:ext cx="10694403" cy="3032864"/>
+          </a:xfrm>
+          <a:prstGeom prst="rect">
+            <a:avLst/>
+          </a:prstGeom>
+        </p:spPr>
+      </p:pic>
+      <p:sp>
+        <p:nvSpPr>
+          <p:cNvPr id="7" name="TextBox 6">
+            <a:extLst>
+              <a:ext uri="{FF2B5EF4-FFF2-40B4-BE49-F238E27FC236}">
+                <a16:creationId xmlns:a16="http://schemas.microsoft.com/office/drawing/2014/main" id="{79F656F9-1831-A6AC-55A5-4042225F3790}"/>
+              </a:ext>
+            </a:extLst>
+          </p:cNvPr>
+          <p:cNvSpPr txBox="1"/>
+          <p:nvPr/>
+        </p:nvSpPr>
+        <p:spPr>
+          <a:xfrm>
+            <a:off x="631263" y="4082556"/>
+            <a:ext cx="10424649" cy="1754326"/>
+          </a:xfrm>
+          <a:prstGeom prst="rect">
+            <a:avLst/>
+          </a:prstGeom>
+          <a:noFill/>
+          <a:ln>
+            <a:noFill/>
+          </a:ln>
+          <a:effectLst>
+            <a:outerShdw blurRad="57785" dist="33020" dir="3180000" algn="ctr">
+              <a:srgbClr val="000000">
+                <a:alpha val="30000"/>
+              </a:srgbClr>
+            </a:outerShdw>
+          </a:effectLst>
+        </p:spPr>
+        <p:txBody>
+          <a:bodyPr wrap="none" rtlCol="0">
+            <a:spAutoFit/>
+            <a:sp3d extrusionH="38100">
+              <a:bevelT w="38100" h="38100"/>
+            </a:sp3d>
+          </a:bodyPr>
+          <a:lstStyle/>
+          <a:p>
+            <a:pPr algn="ctr"/>
+            <a:r>
+              <a:rPr lang="en-US" sz="5200" dirty="0">
+                <a:ln w="3175">
+                  <a:noFill/>
+                </a:ln>
+                <a:solidFill>
+                  <a:schemeClr val="tx2">
+                    <a:lumMod val="50000"/>
+                    <a:lumOff val="50000"/>
+                  </a:schemeClr>
+                </a:solidFill>
+                <a:latin typeface="Aafia" pitchFamily="50" charset="0"/>
+              </a:rPr>
+              <a:t>Language for Describing</a:t>
+            </a:r>
+          </a:p>
+          <a:p>
+            <a:pPr algn="ctr"/>
+            <a:r>
+              <a:rPr lang="en-US" sz="5200" dirty="0">
+                <a:ln w="3175">
+                  <a:noFill/>
+                </a:ln>
+                <a:solidFill>
+                  <a:srgbClr val="FFD700"/>
+                </a:solidFill>
+                <a:latin typeface="Aafia" pitchFamily="50" charset="0"/>
+              </a:rPr>
+              <a:t>Risk and Resilience</a:t>
+            </a:r>
+          </a:p>
+        </p:txBody>
+      </p:sp>
+      <p:cxnSp>
+        <p:nvCxnSpPr>
+          <p:cNvPr id="22" name="Straight Connector 21">
+            <a:extLst>
+              <a:ext uri="{FF2B5EF4-FFF2-40B4-BE49-F238E27FC236}">
+                <a16:creationId xmlns:a16="http://schemas.microsoft.com/office/drawing/2014/main" id="{2E65064B-C60E-E15B-9E56-820A567C7A9D}"/>
+              </a:ext>
+            </a:extLst>
+          </p:cNvPr>
+          <p:cNvCxnSpPr>
+            <a:cxnSpLocks/>
+          </p:cNvCxnSpPr>
+          <p:nvPr/>
+        </p:nvCxnSpPr>
+        <p:spPr>
+          <a:xfrm>
+            <a:off x="1287353" y="3956432"/>
+            <a:ext cx="9112469" cy="0"/>
+          </a:xfrm>
+          <a:prstGeom prst="line">
+            <a:avLst/>
+          </a:prstGeom>
+          <a:ln w="76200" cap="rnd" cmpd="dbl">
+            <a:solidFill>
+              <a:srgbClr val="2B79C7"/>
+            </a:solidFill>
+            <a:headEnd type="none"/>
+            <a:tailEnd type="none"/>
+          </a:ln>
+        </p:spPr>
+        <p:style>
+          <a:lnRef idx="2">
+            <a:schemeClr val="accent1"/>
+          </a:lnRef>
+          <a:fillRef idx="0">
+            <a:schemeClr val="accent1"/>
+          </a:fillRef>
+          <a:effectRef idx="1">
+            <a:schemeClr val="accent1"/>
+          </a:effectRef>
+          <a:fontRef idx="minor">
+            <a:schemeClr val="tx1"/>
+          </a:fontRef>
+        </p:style>
+      </p:cxnSp>
+      <p:cxnSp>
+        <p:nvCxnSpPr>
+          <p:cNvPr id="23" name="Straight Connector 22">
+            <a:extLst>
+              <a:ext uri="{FF2B5EF4-FFF2-40B4-BE49-F238E27FC236}">
+                <a16:creationId xmlns:a16="http://schemas.microsoft.com/office/drawing/2014/main" id="{52AD840B-110D-8217-EB18-65AA019F501C}"/>
+              </a:ext>
+            </a:extLst>
+          </p:cNvPr>
+          <p:cNvCxnSpPr>
+            <a:cxnSpLocks/>
+          </p:cNvCxnSpPr>
+          <p:nvPr/>
+        </p:nvCxnSpPr>
+        <p:spPr>
+          <a:xfrm>
+            <a:off x="1287353" y="5775077"/>
+            <a:ext cx="9112469" cy="0"/>
+          </a:xfrm>
+          <a:prstGeom prst="line">
+            <a:avLst/>
+          </a:prstGeom>
+          <a:ln w="76200" cap="rnd" cmpd="dbl">
+            <a:solidFill>
+              <a:srgbClr val="2B79C7"/>
+            </a:solidFill>
+            <a:headEnd type="none"/>
+            <a:tailEnd type="none"/>
+          </a:ln>
+        </p:spPr>
+        <p:style>
+          <a:lnRef idx="2">
+            <a:schemeClr val="accent1"/>
+          </a:lnRef>
+          <a:fillRef idx="0">
+            <a:schemeClr val="accent1"/>
+          </a:fillRef>
+          <a:effectRef idx="1">
+            <a:schemeClr val="accent1"/>
+          </a:effectRef>
+          <a:fontRef idx="minor">
+            <a:schemeClr val="tx1"/>
+          </a:fontRef>
+        </p:style>
+      </p:cxnSp>
+    </p:spTree>
+    <p:extLst>
+      <p:ext uri="{BB962C8B-B14F-4D97-AF65-F5344CB8AC3E}">
+        <p14:creationId xmlns:p14="http://schemas.microsoft.com/office/powerpoint/2010/main" val="2690937209"/>
+      </p:ext>
+    </p:extLst>
+  </p:cSld>
+  <p:clrMapOvr>
+    <a:masterClrMapping/>
+  </p:clrMapOvr>
+</p:sld>
+</file>
+
+<file path=ppt/slides/slide5.xml><?xml version="1.0" encoding="utf-8"?>
 <p:sld xmlns:a="http://schemas.openxmlformats.org/drawingml/2006/main" xmlns:r="http://schemas.openxmlformats.org/officeDocument/2006/relationships" xmlns:p="http://schemas.openxmlformats.org/presentationml/2006/main" show="0">
   <p:cSld>
     <p:spTree>
@@ -10618,7 +11322,7 @@
 </p:sld>
 </file>
 
-<file path=ppt/slides/slide5.xml><?xml version="1.0" encoding="utf-8"?>
+<file path=ppt/slides/slide6.xml><?xml version="1.0" encoding="utf-8"?>
 <p:sld xmlns:a="http://schemas.openxmlformats.org/drawingml/2006/main" xmlns:r="http://schemas.openxmlformats.org/officeDocument/2006/relationships" xmlns:p="http://schemas.openxmlformats.org/presentationml/2006/main" show="0">
   <p:cSld>
     <p:spTree>
@@ -13046,7 +13750,7 @@
 </p:sld>
 </file>
 
-<file path=ppt/slides/slide6.xml><?xml version="1.0" encoding="utf-8"?>
+<file path=ppt/slides/slide7.xml><?xml version="1.0" encoding="utf-8"?>
 <p:sld xmlns:a="http://schemas.openxmlformats.org/drawingml/2006/main" xmlns:r="http://schemas.openxmlformats.org/officeDocument/2006/relationships" xmlns:p="http://schemas.openxmlformats.org/presentationml/2006/main" show="0">
   <p:cSld>
     <p:spTree>
@@ -14031,7 +14735,7 @@
 </p:sld>
 </file>
 
-<file path=ppt/slides/slide7.xml><?xml version="1.0" encoding="utf-8"?>
+<file path=ppt/slides/slide8.xml><?xml version="1.0" encoding="utf-8"?>
 <p:sld xmlns:a="http://schemas.openxmlformats.org/drawingml/2006/main" xmlns:r="http://schemas.openxmlformats.org/officeDocument/2006/relationships" xmlns:p="http://schemas.openxmlformats.org/presentationml/2006/main" show="0">
   <p:cSld>
     <p:spTree>
@@ -14204,7 +14908,7 @@
 </p:sld>
 </file>
 
-<file path=ppt/slides/slide8.xml><?xml version="1.0" encoding="utf-8"?>
+<file path=ppt/slides/slide9.xml><?xml version="1.0" encoding="utf-8"?>
 <p:sld xmlns:a="http://schemas.openxmlformats.org/drawingml/2006/main" xmlns:r="http://schemas.openxmlformats.org/officeDocument/2006/relationships" xmlns:p="http://schemas.openxmlformats.org/presentationml/2006/main" show="0">
   <p:cSld>
     <p:spTree>
@@ -14853,342 +15557,6 @@
     <p:extLst>
       <p:ext uri="{BB962C8B-B14F-4D97-AF65-F5344CB8AC3E}">
         <p14:creationId xmlns:p14="http://schemas.microsoft.com/office/powerpoint/2010/main" val="2648620447"/>
-      </p:ext>
-    </p:extLst>
-  </p:cSld>
-  <p:clrMapOvr>
-    <a:masterClrMapping/>
-  </p:clrMapOvr>
-</p:sld>
-</file>
-
-<file path=ppt/slides/slide9.xml><?xml version="1.0" encoding="utf-8"?>
-<p:sld xmlns:a="http://schemas.openxmlformats.org/drawingml/2006/main" xmlns:r="http://schemas.openxmlformats.org/officeDocument/2006/relationships" xmlns:p="http://schemas.openxmlformats.org/presentationml/2006/main" show="0">
-  <p:cSld>
-    <p:spTree>
-      <p:nvGrpSpPr>
-        <p:cNvPr id="1" name=""/>
-        <p:cNvGrpSpPr/>
-        <p:nvPr/>
-      </p:nvGrpSpPr>
-      <p:grpSpPr>
-        <a:xfrm>
-          <a:off x="0" y="0"/>
-          <a:ext cx="0" cy="0"/>
-          <a:chOff x="0" y="0"/>
-          <a:chExt cx="0" cy="0"/>
-        </a:xfrm>
-      </p:grpSpPr>
-      <p:sp>
-        <p:nvSpPr>
-          <p:cNvPr id="4" name="Rectangle 3">
-            <a:extLst>
-              <a:ext uri="{FF2B5EF4-FFF2-40B4-BE49-F238E27FC236}">
-                <a16:creationId xmlns:a16="http://schemas.microsoft.com/office/drawing/2014/main" id="{0EA7F422-11B4-801C-3967-BC77A3C5E938}"/>
-              </a:ext>
-            </a:extLst>
-          </p:cNvPr>
-          <p:cNvSpPr/>
-          <p:nvPr/>
-        </p:nvSpPr>
-        <p:spPr>
-          <a:xfrm>
-            <a:off x="4148185" y="3422272"/>
-            <a:ext cx="1369714" cy="344274"/>
-          </a:xfrm>
-          <a:prstGeom prst="rect">
-            <a:avLst/>
-          </a:prstGeom>
-          <a:solidFill>
-            <a:srgbClr val="242A9C"/>
-          </a:solidFill>
-          <a:ln w="3175">
-            <a:noFill/>
-          </a:ln>
-          <a:scene3d>
-            <a:camera prst="orthographicFront"/>
-            <a:lightRig rig="threePt" dir="t"/>
-          </a:scene3d>
-          <a:sp3d>
-            <a:bevelT w="38100" h="38100"/>
-          </a:sp3d>
-        </p:spPr>
-        <p:style>
-          <a:lnRef idx="2">
-            <a:schemeClr val="accent1">
-              <a:shade val="15000"/>
-            </a:schemeClr>
-          </a:lnRef>
-          <a:fillRef idx="1">
-            <a:schemeClr val="accent1"/>
-          </a:fillRef>
-          <a:effectRef idx="0">
-            <a:schemeClr val="accent1"/>
-          </a:effectRef>
-          <a:fontRef idx="minor">
-            <a:schemeClr val="lt1"/>
-          </a:fontRef>
-        </p:style>
-        <p:txBody>
-          <a:bodyPr rtlCol="0" anchor="ctr"/>
-          <a:lstStyle/>
-          <a:p>
-            <a:pPr algn="ctr"/>
-            <a:endParaRPr lang="en-150"/>
-          </a:p>
-        </p:txBody>
-      </p:sp>
-      <p:sp>
-        <p:nvSpPr>
-          <p:cNvPr id="5" name="Rectangle 4">
-            <a:extLst>
-              <a:ext uri="{FF2B5EF4-FFF2-40B4-BE49-F238E27FC236}">
-                <a16:creationId xmlns:a16="http://schemas.microsoft.com/office/drawing/2014/main" id="{C77BE717-C333-AA2E-AE01-211F68893DDE}"/>
-              </a:ext>
-            </a:extLst>
-          </p:cNvPr>
-          <p:cNvSpPr/>
-          <p:nvPr/>
-        </p:nvSpPr>
-        <p:spPr>
-          <a:xfrm>
-            <a:off x="5440432" y="2981377"/>
-            <a:ext cx="1369714" cy="344274"/>
-          </a:xfrm>
-          <a:prstGeom prst="rect">
-            <a:avLst/>
-          </a:prstGeom>
-          <a:solidFill>
-            <a:srgbClr val="242A9C"/>
-          </a:solidFill>
-          <a:ln w="3175">
-            <a:noFill/>
-          </a:ln>
-          <a:scene3d>
-            <a:camera prst="orthographicFront"/>
-            <a:lightRig rig="threePt" dir="t"/>
-          </a:scene3d>
-          <a:sp3d>
-            <a:bevelT w="38100" h="38100"/>
-          </a:sp3d>
-        </p:spPr>
-        <p:style>
-          <a:lnRef idx="2">
-            <a:schemeClr val="accent1">
-              <a:shade val="15000"/>
-            </a:schemeClr>
-          </a:lnRef>
-          <a:fillRef idx="1">
-            <a:schemeClr val="accent1"/>
-          </a:fillRef>
-          <a:effectRef idx="0">
-            <a:schemeClr val="accent1"/>
-          </a:effectRef>
-          <a:fontRef idx="minor">
-            <a:schemeClr val="lt1"/>
-          </a:fontRef>
-        </p:style>
-        <p:txBody>
-          <a:bodyPr rtlCol="0" anchor="ctr"/>
-          <a:lstStyle/>
-          <a:p>
-            <a:pPr algn="ctr"/>
-            <a:endParaRPr lang="en-150"/>
-          </a:p>
-        </p:txBody>
-      </p:sp>
-      <p:sp>
-        <p:nvSpPr>
-          <p:cNvPr id="6" name="Rectangle 5">
-            <a:extLst>
-              <a:ext uri="{FF2B5EF4-FFF2-40B4-BE49-F238E27FC236}">
-                <a16:creationId xmlns:a16="http://schemas.microsoft.com/office/drawing/2014/main" id="{0F3EA294-0FAE-D6B7-F4F6-0E3492015699}"/>
-              </a:ext>
-            </a:extLst>
-          </p:cNvPr>
-          <p:cNvSpPr/>
-          <p:nvPr/>
-        </p:nvSpPr>
-        <p:spPr>
-          <a:xfrm>
-            <a:off x="6732679" y="2540482"/>
-            <a:ext cx="1369711" cy="344274"/>
-          </a:xfrm>
-          <a:prstGeom prst="rect">
-            <a:avLst/>
-          </a:prstGeom>
-          <a:solidFill>
-            <a:srgbClr val="E101D1"/>
-          </a:solidFill>
-          <a:ln w="3175">
-            <a:noFill/>
-          </a:ln>
-          <a:scene3d>
-            <a:camera prst="orthographicFront"/>
-            <a:lightRig rig="threePt" dir="t"/>
-          </a:scene3d>
-          <a:sp3d>
-            <a:bevelT w="38100" h="38100"/>
-          </a:sp3d>
-        </p:spPr>
-        <p:style>
-          <a:lnRef idx="2">
-            <a:schemeClr val="accent1">
-              <a:shade val="15000"/>
-            </a:schemeClr>
-          </a:lnRef>
-          <a:fillRef idx="1">
-            <a:schemeClr val="accent1"/>
-          </a:fillRef>
-          <a:effectRef idx="0">
-            <a:schemeClr val="accent1"/>
-          </a:effectRef>
-          <a:fontRef idx="minor">
-            <a:schemeClr val="lt1"/>
-          </a:fontRef>
-        </p:style>
-        <p:txBody>
-          <a:bodyPr rtlCol="0" anchor="ctr"/>
-          <a:lstStyle/>
-          <a:p>
-            <a:pPr algn="ctr"/>
-            <a:endParaRPr lang="en-150"/>
-          </a:p>
-        </p:txBody>
-      </p:sp>
-      <p:sp>
-        <p:nvSpPr>
-          <p:cNvPr id="9" name="TextBox 8">
-            <a:extLst>
-              <a:ext uri="{FF2B5EF4-FFF2-40B4-BE49-F238E27FC236}">
-                <a16:creationId xmlns:a16="http://schemas.microsoft.com/office/drawing/2014/main" id="{C4A505D0-0167-DE42-F11E-1D8999064CCB}"/>
-              </a:ext>
-            </a:extLst>
-          </p:cNvPr>
-          <p:cNvSpPr txBox="1"/>
-          <p:nvPr/>
-        </p:nvSpPr>
-        <p:spPr>
-          <a:xfrm>
-            <a:off x="4009489" y="3766546"/>
-            <a:ext cx="4253087" cy="1200329"/>
-          </a:xfrm>
-          <a:prstGeom prst="rect">
-            <a:avLst/>
-          </a:prstGeom>
-          <a:noFill/>
-          <a:ln>
-            <a:noFill/>
-          </a:ln>
-        </p:spPr>
-        <p:txBody>
-          <a:bodyPr wrap="none" rtlCol="0">
-            <a:spAutoFit/>
-            <a:scene3d>
-              <a:camera prst="orthographicFront"/>
-              <a:lightRig rig="threePt" dir="t"/>
-            </a:scene3d>
-            <a:sp3d extrusionH="38100">
-              <a:bevelT w="38100" h="38100"/>
-            </a:sp3d>
-          </a:bodyPr>
-          <a:lstStyle/>
-          <a:p>
-            <a:r>
-              <a:rPr lang="en-US" sz="7200" dirty="0">
-                <a:ln w="3175">
-                  <a:noFill/>
-                </a:ln>
-                <a:solidFill>
-                  <a:srgbClr val="242A9C"/>
-                </a:solidFill>
-                <a:latin typeface="Aafia" pitchFamily="50" charset="0"/>
-              </a:rPr>
-              <a:t>LaDe</a:t>
-            </a:r>
-            <a:r>
-              <a:rPr lang="en-US" sz="7200" dirty="0">
-                <a:ln w="3175">
-                  <a:noFill/>
-                </a:ln>
-                <a:solidFill>
-                  <a:srgbClr val="E101D1"/>
-                </a:solidFill>
-                <a:latin typeface="Aafia" pitchFamily="50" charset="0"/>
-              </a:rPr>
-              <a:t>RR</a:t>
-            </a:r>
-          </a:p>
-        </p:txBody>
-      </p:sp>
-      <p:sp>
-        <p:nvSpPr>
-          <p:cNvPr id="2" name="TextBox 1">
-            <a:extLst>
-              <a:ext uri="{FF2B5EF4-FFF2-40B4-BE49-F238E27FC236}">
-                <a16:creationId xmlns:a16="http://schemas.microsoft.com/office/drawing/2014/main" id="{9435C635-2A61-E220-D6E5-32F47585513F}"/>
-              </a:ext>
-            </a:extLst>
-          </p:cNvPr>
-          <p:cNvSpPr txBox="1"/>
-          <p:nvPr/>
-        </p:nvSpPr>
-        <p:spPr>
-          <a:xfrm>
-            <a:off x="4444234" y="4616450"/>
-            <a:ext cx="3303532" cy="1446550"/>
-          </a:xfrm>
-          <a:prstGeom prst="rect">
-            <a:avLst/>
-          </a:prstGeom>
-          <a:noFill/>
-        </p:spPr>
-        <p:txBody>
-          <a:bodyPr wrap="square" rtlCol="0">
-            <a:spAutoFit/>
-          </a:bodyPr>
-          <a:lstStyle/>
-          <a:p>
-            <a:r>
-              <a:rPr lang="en-US" sz="8800" b="1" dirty="0">
-                <a:ln w="19050">
-                  <a:solidFill>
-                    <a:schemeClr val="accent3">
-                      <a:lumMod val="60000"/>
-                      <a:lumOff val="40000"/>
-                    </a:schemeClr>
-                  </a:solidFill>
-                </a:ln>
-                <a:solidFill>
-                  <a:srgbClr val="58FF37"/>
-                </a:solidFill>
-                <a:latin typeface="always  forever" pitchFamily="2" charset="0"/>
-                <a:cs typeface="Libertinus Keyboard" pitchFamily="50" charset="-79"/>
-              </a:rPr>
-              <a:t>Python  Lib</a:t>
-            </a:r>
-            <a:endParaRPr lang="en-150" sz="8800" b="1" dirty="0">
-              <a:ln w="19050">
-                <a:solidFill>
-                  <a:schemeClr val="accent3">
-                    <a:lumMod val="60000"/>
-                    <a:lumOff val="40000"/>
-                  </a:schemeClr>
-                </a:solidFill>
-              </a:ln>
-              <a:solidFill>
-                <a:srgbClr val="58FF37"/>
-              </a:solidFill>
-              <a:latin typeface="always  forever" pitchFamily="2" charset="0"/>
-              <a:cs typeface="Libertinus Keyboard" pitchFamily="50" charset="-79"/>
-            </a:endParaRPr>
-          </a:p>
-        </p:txBody>
-      </p:sp>
-    </p:spTree>
-    <p:extLst>
-      <p:ext uri="{BB962C8B-B14F-4D97-AF65-F5344CB8AC3E}">
-        <p14:creationId xmlns:p14="http://schemas.microsoft.com/office/powerpoint/2010/main" val="1988947253"/>
       </p:ext>
     </p:extLst>
   </p:cSld>
